--- a/slides/02-sessions-worktrees-context.pptx
+++ b/slides/02-sessions-worktrees-context.pptx
@@ -2032,145 +2032,9 @@
           <a:chExt cx="0" cy="0"/>
         </a:xfrm>
       </p:grpSpPr>
-      <p:sp>
-        <p:nvSpPr>
-          <p:cNvPr id="2" name="Text 0"/>
-          <p:cNvSpPr/>
-          <p:nvPr/>
-        </p:nvSpPr>
-        <p:spPr>
-          <a:xfrm>
-            <a:off x="5968901" y="0"/>
-            <a:ext cx="3174950" cy="5143500"/>
-          </a:xfrm>
-          <a:prstGeom prst="rect">
-            <a:avLst/>
-          </a:prstGeom>
-          <a:solidFill>
-            <a:srgbClr val="1A7F37"/>
-          </a:solidFill>
-          <a:ln/>
-        </p:spPr>
-        <p:txBody>
-          <a:bodyPr wrap="square" rtlCol="0" anchor="ctr"/>
-          <a:lstStyle/>
-          <a:p>
-            <a:pPr indent="0" marL="0">
-              <a:buNone/>
-            </a:pPr>
-            <a:endParaRPr lang="en-US" dirty="0"/>
-          </a:p>
-        </p:txBody>
-      </p:sp>
-      <p:sp>
-        <p:nvSpPr>
-          <p:cNvPr id="3" name="Text 1"/>
-          <p:cNvSpPr/>
-          <p:nvPr/>
-        </p:nvSpPr>
-        <p:spPr>
-          <a:xfrm>
-            <a:off x="5939692" y="1269950"/>
-            <a:ext cx="2979319" cy="2159050"/>
-          </a:xfrm>
-          <a:prstGeom prst="rect">
-            <a:avLst/>
-          </a:prstGeom>
-          <a:noFill/>
-          <a:ln/>
-        </p:spPr>
-        <p:txBody>
-          <a:bodyPr wrap="square" lIns="0" tIns="0" rIns="0" bIns="0" rtlCol="0" anchor="t"/>
-          <a:lstStyle/>
-          <a:p>
-            <a:pPr algn="ctr" indent="0" marL="0">
-              <a:lnSpc>
-                <a:spcPts val="17000"/>
-              </a:lnSpc>
-              <a:buNone/>
-            </a:pPr>
-            <a:r>
-              <a:rPr lang="en-US" sz="15000" b="1" dirty="0">
-                <a:solidFill>
-                  <a:srgbClr val="2DA44E"/>
-                </a:solidFill>
-                <a:latin typeface="Arial" pitchFamily="34" charset="0"/>
-                <a:ea typeface="Arial" pitchFamily="34" charset="-122"/>
-                <a:cs typeface="Arial" pitchFamily="34" charset="-120"/>
-              </a:rPr>
-              <a:t>02</a:t>
-            </a:r>
-            <a:endParaRPr lang="en-US" sz="15000" dirty="0"/>
-          </a:p>
-        </p:txBody>
-      </p:sp>
-      <p:sp>
-        <p:nvSpPr>
-          <p:cNvPr id="4" name="Text 2"/>
-          <p:cNvSpPr/>
-          <p:nvPr/>
-        </p:nvSpPr>
-        <p:spPr>
-          <a:xfrm>
-            <a:off x="6069330" y="3682901"/>
-            <a:ext cx="2720340" cy="431899"/>
-          </a:xfrm>
-          <a:prstGeom prst="rect">
-            <a:avLst/>
-          </a:prstGeom>
-          <a:noFill/>
-          <a:ln/>
-        </p:spPr>
-        <p:txBody>
-          <a:bodyPr wrap="square" lIns="0" tIns="0" rIns="0" bIns="0" rtlCol="0" anchor="t"/>
-          <a:lstStyle/>
-          <a:p>
-            <a:pPr algn="ctr" indent="0" marL="0">
-              <a:lnSpc>
-                <a:spcPts val="1700"/>
-              </a:lnSpc>
-              <a:buNone/>
-            </a:pPr>
-            <a:r>
-              <a:rPr lang="en-US" sz="1350" dirty="0">
-                <a:solidFill>
-                  <a:srgbClr val="FFFFFF"/>
-                </a:solidFill>
-                <a:latin typeface="Arial" pitchFamily="34" charset="0"/>
-                <a:ea typeface="Arial" pitchFamily="34" charset="-122"/>
-                <a:cs typeface="Arial" pitchFamily="34" charset="-120"/>
-              </a:rPr>
-              <a:t>GITHUB COPILOT APP</a:t>
-            </a:r>
-            <a:endParaRPr lang="en-US" sz="1350" dirty="0"/>
-          </a:p>
-          <a:p>
-            <a:pPr algn="ctr" indent="0" marL="0">
-              <a:lnSpc>
-                <a:spcPts val="1700"/>
-              </a:lnSpc>
-              <a:buNone/>
-            </a:pPr>
-            <a:r>
-              <a:rPr lang="en-US" sz="1350" dirty="0">
-                <a:solidFill>
-                  <a:srgbClr val="FFFFFF"/>
-                </a:solidFill>
-                <a:latin typeface="Arial" pitchFamily="34" charset="0"/>
-                <a:ea typeface="Arial" pitchFamily="34" charset="-122"/>
-                <a:cs typeface="Arial" pitchFamily="34" charset="-120"/>
-              </a:rPr>
-              <a:t>FOR BEGINNERS</a:t>
-            </a:r>
-            <a:endParaRPr lang="en-US" sz="1350" dirty="0"/>
-          </a:p>
-        </p:txBody>
-      </p:sp>
       <p:pic>
         <p:nvPicPr>
-          <p:cNvPr id="5" name="Image 0" descr="/Users/danwahlin/.copilot/session-state/56a7a0da-def8-48d4-b5e8-0ac3878cb8dd/files/slides-build/icons/FaGithub-FFFFFF.png">
-            <a:hlinkClick r:id="rId2" tooltip="https://github.com/github/copilot-app-for-beginners/tree/main/02-sessions-worktrees-context"/>
-          </p:cNvPr>
+          <p:cNvPr id="2" name="Image 0" descr="/Users/danwahlin/.copilot/session-state/56a7a0da-def8-48d4-b5e8-0ac3878cb8dd/files/slides-build/img/grad-title.jpg">    </p:cNvPr>
           <p:cNvPicPr>
             <a:picLocks noChangeAspect="1"/>
           </p:cNvPicPr>
@@ -2184,6 +2048,32 @@
         </p:blipFill>
         <p:spPr>
           <a:xfrm>
+            <a:off x="0" y="0"/>
+            <a:ext cx="9144000" cy="5143500"/>
+          </a:xfrm>
+          <a:prstGeom prst="rect">
+            <a:avLst/>
+          </a:prstGeom>
+        </p:spPr>
+      </p:pic>
+      <p:pic>
+        <p:nvPicPr>
+          <p:cNvPr id="3" name="Image 1" descr="/Users/danwahlin/.copilot/session-state/56a7a0da-def8-48d4-b5e8-0ac3878cb8dd/files/slides-build/icons/FaGithub-1F2328.png">
+            <a:hlinkClick r:id="rId3" tooltip="https://github.com/github/copilot-app-for-beginners/tree/main/02-sessions-worktrees-context"/>
+          </p:cNvPr>
+          <p:cNvPicPr>
+            <a:picLocks noChangeAspect="1"/>
+          </p:cNvPicPr>
+          <p:nvPr/>
+        </p:nvPicPr>
+        <p:blipFill>
+          <a:blip r:embed="rId2"/>
+          <a:stretch>
+            <a:fillRect/>
+          </a:stretch>
+        </p:blipFill>
+        <p:spPr>
+          <a:xfrm>
             <a:off x="8635901" y="203150"/>
             <a:ext cx="304800" cy="304800"/>
           </a:xfrm>
@@ -2194,14 +2084,14 @@
       </p:pic>
       <p:sp>
         <p:nvSpPr>
-          <p:cNvPr id="6" name="Text 3"/>
-          <p:cNvSpPr/>
-          <p:nvPr/>
-        </p:nvSpPr>
-        <p:spPr>
-          <a:xfrm>
-            <a:off x="609600" y="949375"/>
-            <a:ext cx="5052060" cy="209550"/>
+          <p:cNvPr id="4" name="Text 0"/>
+          <p:cNvSpPr/>
+          <p:nvPr/>
+        </p:nvSpPr>
+        <p:spPr>
+          <a:xfrm>
+            <a:off x="1015901" y="989112"/>
+            <a:ext cx="6088279" cy="209550"/>
           </a:xfrm>
           <a:prstGeom prst="rect">
             <a:avLst/>
@@ -2233,14 +2123,14 @@
       </p:sp>
       <p:sp>
         <p:nvSpPr>
-          <p:cNvPr id="7" name="Text 4"/>
-          <p:cNvSpPr/>
-          <p:nvPr/>
-        </p:nvSpPr>
-        <p:spPr>
-          <a:xfrm>
-            <a:off x="609600" y="1260425"/>
-            <a:ext cx="5052060" cy="1752451"/>
+          <p:cNvPr id="5" name="Text 1"/>
+          <p:cNvSpPr/>
+          <p:nvPr/>
+        </p:nvSpPr>
+        <p:spPr>
+          <a:xfrm>
+            <a:off x="1015901" y="1300163"/>
+            <a:ext cx="6088279" cy="1219200"/>
           </a:xfrm>
           <a:prstGeom prst="rect">
             <a:avLst/>
@@ -2254,7 +2144,7 @@
           <a:p>
             <a:pPr algn="l" indent="0" marL="0">
               <a:lnSpc>
-                <a:spcPts val="4600"/>
+                <a:spcPts val="4800"/>
               </a:lnSpc>
               <a:spcBef>
                 <a:spcPts val="800"/>
@@ -2262,7 +2152,7 @@
               <a:buNone/>
             </a:pPr>
             <a:r>
-              <a:rPr lang="en-US" sz="4000" b="1" dirty="0">
+              <a:rPr lang="en-US" sz="4200" b="1" dirty="0">
                 <a:solidFill>
                   <a:srgbClr val="1F2328"/>
                 </a:solidFill>
@@ -2272,19 +2162,19 @@
               </a:rPr>
               <a:t>Sessions, Worktrees, and Context</a:t>
             </a:r>
-            <a:endParaRPr lang="en-US" sz="4000" dirty="0"/>
-          </a:p>
-        </p:txBody>
-      </p:sp>
-      <p:sp>
-        <p:nvSpPr>
-          <p:cNvPr id="8" name="Text 5"/>
-          <p:cNvSpPr/>
-          <p:nvPr/>
-        </p:nvSpPr>
-        <p:spPr>
-          <a:xfrm>
-            <a:off x="609600" y="3241477"/>
+            <a:endParaRPr lang="en-US" sz="4200" dirty="0"/>
+          </a:p>
+        </p:txBody>
+      </p:sp>
+      <p:sp>
+        <p:nvSpPr>
+          <p:cNvPr id="6" name="Text 2"/>
+          <p:cNvSpPr/>
+          <p:nvPr/>
+        </p:nvSpPr>
+        <p:spPr>
+          <a:xfrm>
+            <a:off x="1015901" y="2747963"/>
             <a:ext cx="609600" cy="63401"/>
           </a:xfrm>
           <a:prstGeom prst="roundRect">
@@ -2310,14 +2200,14 @@
       </p:sp>
       <p:sp>
         <p:nvSpPr>
-          <p:cNvPr id="9" name="Text 6"/>
-          <p:cNvSpPr/>
-          <p:nvPr/>
-        </p:nvSpPr>
-        <p:spPr>
-          <a:xfrm>
-            <a:off x="609600" y="3533477"/>
-            <a:ext cx="5052060" cy="660499"/>
+          <p:cNvPr id="7" name="Text 3"/>
+          <p:cNvSpPr/>
+          <p:nvPr/>
+        </p:nvSpPr>
+        <p:spPr>
+          <a:xfrm>
+            <a:off x="1015901" y="3039963"/>
+            <a:ext cx="6088279" cy="660499"/>
           </a:xfrm>
           <a:prstGeom prst="rect">
             <a:avLst/>
@@ -2352,21 +2242,21 @@
       </p:sp>
       <p:pic>
         <p:nvPicPr>
-          <p:cNvPr id="10" name="Image 1" descr="/Users/danwahlin/.copilot/session-state/56a7a0da-def8-48d4-b5e8-0ac3878cb8dd/files/slides-build/icons/FaGithub-0969DA.png">    </p:cNvPr>
+          <p:cNvPr id="8" name="Image 2" descr="/Users/danwahlin/.copilot/session-state/56a7a0da-def8-48d4-b5e8-0ac3878cb8dd/files/slides-build/icons/FaGithub-0969DA.png">    </p:cNvPr>
           <p:cNvPicPr>
             <a:picLocks noChangeAspect="1"/>
           </p:cNvPicPr>
           <p:nvPr/>
         </p:nvPicPr>
         <p:blipFill>
-          <a:blip r:embed="rId3"/>
+          <a:blip r:embed="rId4"/>
           <a:stretch>
             <a:fillRect/>
           </a:stretch>
         </p:blipFill>
         <p:spPr>
           <a:xfrm>
-            <a:off x="609600" y="4354562"/>
+            <a:off x="1015901" y="3965525"/>
             <a:ext cx="177701" cy="177701"/>
           </a:xfrm>
           <a:prstGeom prst="rect">
@@ -2376,13 +2266,13 @@
       </p:pic>
       <p:sp>
         <p:nvSpPr>
-          <p:cNvPr id="11" name="Text 7"/>
-          <p:cNvSpPr/>
-          <p:nvPr/>
-        </p:nvSpPr>
-        <p:spPr>
-          <a:xfrm>
-            <a:off x="876151" y="4343400"/>
+          <p:cNvPr id="9" name="Text 4"/>
+          <p:cNvSpPr/>
+          <p:nvPr/>
+        </p:nvSpPr>
+        <p:spPr>
+          <a:xfrm>
+            <a:off x="1282452" y="3954363"/>
             <a:ext cx="3373252" cy="200025"/>
           </a:xfrm>
           <a:prstGeom prst="rect">
@@ -2406,7 +2296,7 @@
                 <a:latin typeface="Arial" pitchFamily="34" charset="0"/>
                 <a:ea typeface="Arial" pitchFamily="34" charset="-122"/>
                 <a:cs typeface="Arial" pitchFamily="34" charset="-120"/>
-                <a:hlinkClick r:id="rId4" invalidUrl="" action="" tgtFrame="" tooltip="https://github.com/github/copilot-app-for-beginners/tree/main/02-sessions-worktrees-context" history="1" highlightClick="0" endSnd="0">
+                <a:hlinkClick r:id="rId5" invalidUrl="" action="" tgtFrame="" tooltip="https://github.com/github/copilot-app-for-beginners/tree/main/02-sessions-worktrees-context" history="1" highlightClick="0" endSnd="0">
                   <a:extLst>
                     <a:ext uri="{A12FA001-AC4F-418D-AE19-62706E023703}">
                       <ahyp:hlinkClr xmlns:ahyp="http://schemas.microsoft.com/office/drawing/2018/hyperlinkcolor" val="tx"/>
@@ -2452,112 +2342,9 @@
           <a:chExt cx="0" cy="0"/>
         </a:xfrm>
       </p:grpSpPr>
-      <p:sp>
-        <p:nvSpPr>
-          <p:cNvPr id="2" name="Text 0"/>
-          <p:cNvSpPr/>
-          <p:nvPr/>
-        </p:nvSpPr>
-        <p:spPr>
-          <a:xfrm>
-            <a:off x="0" y="0"/>
-            <a:ext cx="9144000" cy="76200"/>
-          </a:xfrm>
-          <a:prstGeom prst="rect">
-            <a:avLst/>
-          </a:prstGeom>
-          <a:solidFill>
-            <a:srgbClr val="1A7F37"/>
-          </a:solidFill>
-          <a:ln/>
-        </p:spPr>
-        <p:txBody>
-          <a:bodyPr wrap="square" rtlCol="0" anchor="ctr"/>
-          <a:lstStyle/>
-          <a:p>
-            <a:pPr indent="0" marL="0">
-              <a:buNone/>
-            </a:pPr>
-            <a:endParaRPr lang="en-US" dirty="0"/>
-          </a:p>
-        </p:txBody>
-      </p:sp>
-      <p:sp>
-        <p:nvSpPr>
-          <p:cNvPr id="3" name="Text 1"/>
-          <p:cNvSpPr/>
-          <p:nvPr/>
-        </p:nvSpPr>
-        <p:spPr>
-          <a:xfrm>
-            <a:off x="7340501" y="177701"/>
-            <a:ext cx="1168301" cy="279350"/>
-          </a:xfrm>
-          <a:prstGeom prst="roundRect">
-            <a:avLst>
-              <a:gd name="adj" fmla="val 22731"/>
-            </a:avLst>
-          </a:prstGeom>
-          <a:solidFill>
-            <a:srgbClr val="1A7F37"/>
-          </a:solidFill>
-          <a:ln/>
-        </p:spPr>
-        <p:txBody>
-          <a:bodyPr wrap="square" rtlCol="0" anchor="ctr"/>
-          <a:lstStyle/>
-          <a:p>
-            <a:pPr indent="0" marL="0">
-              <a:buNone/>
-            </a:pPr>
-            <a:endParaRPr lang="en-US" dirty="0"/>
-          </a:p>
-        </p:txBody>
-      </p:sp>
-      <p:sp>
-        <p:nvSpPr>
-          <p:cNvPr id="4" name="Text 2"/>
-          <p:cNvSpPr/>
-          <p:nvPr/>
-        </p:nvSpPr>
-        <p:spPr>
-          <a:xfrm>
-            <a:off x="7461041" y="231577"/>
-            <a:ext cx="927071" cy="171450"/>
-          </a:xfrm>
-          <a:prstGeom prst="rect">
-            <a:avLst/>
-          </a:prstGeom>
-          <a:noFill/>
-          <a:ln/>
-        </p:spPr>
-        <p:txBody>
-          <a:bodyPr wrap="square" lIns="0" tIns="0" rIns="0" bIns="0" rtlCol="0" anchor="t"/>
-          <a:lstStyle/>
-          <a:p>
-            <a:pPr algn="ctr" indent="0" marL="0">
-              <a:buNone/>
-            </a:pPr>
-            <a:r>
-              <a:rPr lang="en-US" sz="1150" b="1" dirty="0">
-                <a:solidFill>
-                  <a:srgbClr val="FFFFFF"/>
-                </a:solidFill>
-                <a:latin typeface="Arial" pitchFamily="34" charset="0"/>
-                <a:ea typeface="Arial" pitchFamily="34" charset="-122"/>
-                <a:cs typeface="Arial" pitchFamily="34" charset="-120"/>
-              </a:rPr>
-              <a:t>CHAPTER 02</a:t>
-            </a:r>
-            <a:endParaRPr lang="en-US" sz="1150" dirty="0"/>
-          </a:p>
-        </p:txBody>
-      </p:sp>
       <p:pic>
         <p:nvPicPr>
-          <p:cNvPr id="5" name="Image 0" descr="/Users/danwahlin/.copilot/session-state/56a7a0da-def8-48d4-b5e8-0ac3878cb8dd/files/slides-build/icons/FaGithub-1F2328.png">
-            <a:hlinkClick r:id="rId2" tooltip="https://github.com/github/copilot-app-for-beginners/tree/main/02-sessions-worktrees-context"/>
-          </p:cNvPr>
+          <p:cNvPr id="2" name="Image 0" descr="/Users/danwahlin/.copilot/session-state/56a7a0da-def8-48d4-b5e8-0ac3878cb8dd/files/slides-build/img/grad-corner.png">    </p:cNvPr>
           <p:cNvPicPr>
             <a:picLocks noChangeAspect="1"/>
           </p:cNvPicPr>
@@ -2571,6 +2358,103 @@
         </p:blipFill>
         <p:spPr>
           <a:xfrm>
+            <a:off x="6349901" y="0"/>
+            <a:ext cx="2793950" cy="1308050"/>
+          </a:xfrm>
+          <a:prstGeom prst="rect">
+            <a:avLst/>
+          </a:prstGeom>
+        </p:spPr>
+      </p:pic>
+      <p:sp>
+        <p:nvSpPr>
+          <p:cNvPr id="3" name="Text 0"/>
+          <p:cNvSpPr/>
+          <p:nvPr/>
+        </p:nvSpPr>
+        <p:spPr>
+          <a:xfrm>
+            <a:off x="7340501" y="177701"/>
+            <a:ext cx="1168301" cy="279350"/>
+          </a:xfrm>
+          <a:prstGeom prst="roundRect">
+            <a:avLst>
+              <a:gd name="adj" fmla="val 22731"/>
+            </a:avLst>
+          </a:prstGeom>
+          <a:solidFill>
+            <a:srgbClr val="1A7F37"/>
+          </a:solidFill>
+          <a:ln/>
+        </p:spPr>
+        <p:txBody>
+          <a:bodyPr wrap="square" rtlCol="0" anchor="ctr"/>
+          <a:lstStyle/>
+          <a:p>
+            <a:pPr indent="0" marL="0">
+              <a:buNone/>
+            </a:pPr>
+            <a:endParaRPr lang="en-US" dirty="0"/>
+          </a:p>
+        </p:txBody>
+      </p:sp>
+      <p:sp>
+        <p:nvSpPr>
+          <p:cNvPr id="4" name="Text 1"/>
+          <p:cNvSpPr/>
+          <p:nvPr/>
+        </p:nvSpPr>
+        <p:spPr>
+          <a:xfrm>
+            <a:off x="7461041" y="231577"/>
+            <a:ext cx="927071" cy="171450"/>
+          </a:xfrm>
+          <a:prstGeom prst="rect">
+            <a:avLst/>
+          </a:prstGeom>
+          <a:noFill/>
+          <a:ln/>
+        </p:spPr>
+        <p:txBody>
+          <a:bodyPr wrap="square" lIns="0" tIns="0" rIns="0" bIns="0" rtlCol="0" anchor="t"/>
+          <a:lstStyle/>
+          <a:p>
+            <a:pPr algn="ctr" indent="0" marL="0">
+              <a:buNone/>
+            </a:pPr>
+            <a:r>
+              <a:rPr lang="en-US" sz="1150" b="1" dirty="0">
+                <a:solidFill>
+                  <a:srgbClr val="FFFFFF"/>
+                </a:solidFill>
+                <a:latin typeface="Arial" pitchFamily="34" charset="0"/>
+                <a:ea typeface="Arial" pitchFamily="34" charset="-122"/>
+                <a:cs typeface="Arial" pitchFamily="34" charset="-120"/>
+              </a:rPr>
+              <a:t>CHAPTER 02</a:t>
+            </a:r>
+            <a:endParaRPr lang="en-US" sz="1150" dirty="0"/>
+          </a:p>
+        </p:txBody>
+      </p:sp>
+      <p:pic>
+        <p:nvPicPr>
+          <p:cNvPr id="5" name="Image 1" descr="/Users/danwahlin/.copilot/session-state/56a7a0da-def8-48d4-b5e8-0ac3878cb8dd/files/slides-build/icons/FaGithub-1F2328.png">
+            <a:hlinkClick r:id="rId3" tooltip="https://github.com/github/copilot-app-for-beginners/tree/main/02-sessions-worktrees-context"/>
+          </p:cNvPr>
+          <p:cNvPicPr>
+            <a:picLocks noChangeAspect="1"/>
+          </p:cNvPicPr>
+          <p:nvPr/>
+        </p:nvPicPr>
+        <p:blipFill>
+          <a:blip r:embed="rId2"/>
+          <a:stretch>
+            <a:fillRect/>
+          </a:stretch>
+        </p:blipFill>
+        <p:spPr>
+          <a:xfrm>
             <a:off x="8610600" y="165050"/>
             <a:ext cx="304800" cy="304800"/>
           </a:xfrm>
@@ -2581,7 +2465,7 @@
       </p:pic>
       <p:sp>
         <p:nvSpPr>
-          <p:cNvPr id="6" name="Text 3"/>
+          <p:cNvPr id="6" name="Text 2"/>
           <p:cNvSpPr/>
           <p:nvPr/>
         </p:nvSpPr>
@@ -2620,7 +2504,7 @@
       </p:sp>
       <p:sp>
         <p:nvSpPr>
-          <p:cNvPr id="7" name="Text 4"/>
+          <p:cNvPr id="7" name="Text 3"/>
           <p:cNvSpPr/>
           <p:nvPr/>
         </p:nvSpPr>
@@ -2665,7 +2549,7 @@
       </p:sp>
       <p:sp>
         <p:nvSpPr>
-          <p:cNvPr id="8" name="Text 5"/>
+          <p:cNvPr id="8" name="Text 4"/>
           <p:cNvSpPr/>
           <p:nvPr/>
         </p:nvSpPr>
@@ -2750,7 +2634,7 @@
       </p:sp>
       <p:sp>
         <p:nvSpPr>
-          <p:cNvPr id="9" name="Text 6"/>
+          <p:cNvPr id="9" name="Text 5"/>
           <p:cNvSpPr/>
           <p:nvPr/>
         </p:nvSpPr>
@@ -2782,7 +2666,7 @@
       </p:sp>
       <p:sp>
         <p:nvSpPr>
-          <p:cNvPr id="10" name="Text 7"/>
+          <p:cNvPr id="10" name="Text 6"/>
           <p:cNvSpPr/>
           <p:nvPr/>
         </p:nvSpPr>
@@ -2821,7 +2705,7 @@
       </p:sp>
       <p:sp>
         <p:nvSpPr>
-          <p:cNvPr id="11" name="Text 8"/>
+          <p:cNvPr id="11" name="Text 7"/>
           <p:cNvSpPr/>
           <p:nvPr/>
         </p:nvSpPr>
@@ -2863,7 +2747,7 @@
       </p:sp>
       <p:sp>
         <p:nvSpPr>
-          <p:cNvPr id="12" name="Text 9"/>
+          <p:cNvPr id="12" name="Text 8"/>
           <p:cNvSpPr/>
           <p:nvPr/>
         </p:nvSpPr>
@@ -2956,7 +2840,7 @@
       </p:sp>
       <p:sp>
         <p:nvSpPr>
-          <p:cNvPr id="13" name="Text 10"/>
+          <p:cNvPr id="13" name="Text 9"/>
           <p:cNvSpPr/>
           <p:nvPr/>
         </p:nvSpPr>
@@ -2988,7 +2872,7 @@
       </p:sp>
       <p:sp>
         <p:nvSpPr>
-          <p:cNvPr id="14" name="Text 11"/>
+          <p:cNvPr id="14" name="Text 10"/>
           <p:cNvSpPr/>
           <p:nvPr/>
         </p:nvSpPr>
@@ -3027,7 +2911,7 @@
       </p:sp>
       <p:sp>
         <p:nvSpPr>
-          <p:cNvPr id="15" name="Text 12"/>
+          <p:cNvPr id="15" name="Text 11"/>
           <p:cNvSpPr/>
           <p:nvPr/>
         </p:nvSpPr>
@@ -3069,7 +2953,7 @@
       </p:sp>
       <p:sp>
         <p:nvSpPr>
-          <p:cNvPr id="16" name="Text 13"/>
+          <p:cNvPr id="16" name="Text 12"/>
           <p:cNvSpPr/>
           <p:nvPr/>
         </p:nvSpPr>
@@ -3145,7 +3029,7 @@
       </p:sp>
       <p:sp>
         <p:nvSpPr>
-          <p:cNvPr id="17" name="Text 14"/>
+          <p:cNvPr id="17" name="Text 13"/>
           <p:cNvSpPr/>
           <p:nvPr/>
         </p:nvSpPr>
@@ -3177,7 +3061,7 @@
       </p:sp>
       <p:sp>
         <p:nvSpPr>
-          <p:cNvPr id="18" name="Text 15"/>
+          <p:cNvPr id="18" name="Text 14"/>
           <p:cNvSpPr/>
           <p:nvPr/>
         </p:nvSpPr>
@@ -3216,7 +3100,7 @@
       </p:sp>
       <p:sp>
         <p:nvSpPr>
-          <p:cNvPr id="19" name="Text 16"/>
+          <p:cNvPr id="19" name="Text 15"/>
           <p:cNvSpPr/>
           <p:nvPr/>
         </p:nvSpPr>
@@ -3258,7 +3142,7 @@
       </p:sp>
       <p:sp>
         <p:nvSpPr>
-          <p:cNvPr id="20" name="Text 17"/>
+          <p:cNvPr id="20" name="Text 16"/>
           <p:cNvSpPr/>
           <p:nvPr/>
         </p:nvSpPr>
@@ -3334,7 +3218,7 @@
       </p:sp>
       <p:sp>
         <p:nvSpPr>
-          <p:cNvPr id="21" name="Text 18"/>
+          <p:cNvPr id="21" name="Text 17"/>
           <p:cNvSpPr/>
           <p:nvPr/>
         </p:nvSpPr>
@@ -3377,14 +3261,14 @@
       </p:sp>
       <p:pic>
         <p:nvPicPr>
-          <p:cNvPr id="22" name="Image 1" descr="/Users/danwahlin/.copilot/session-state/56a7a0da-def8-48d4-b5e8-0ac3878cb8dd/files/slides-build/img/02-review-plan-crop.png">    </p:cNvPr>
+          <p:cNvPr id="22" name="Image 2" descr="/Users/danwahlin/.copilot/session-state/56a7a0da-def8-48d4-b5e8-0ac3878cb8dd/files/slides-build/img/02-review-plan-crop.png">    </p:cNvPr>
           <p:cNvPicPr>
             <a:picLocks noChangeAspect="1"/>
           </p:cNvPicPr>
           <p:nvPr/>
         </p:nvPicPr>
         <p:blipFill>
-          <a:blip r:embed="rId3"/>
+          <a:blip r:embed="rId4"/>
           <a:stretch>
             <a:fillRect/>
           </a:stretch>
@@ -3431,112 +3315,9 @@
           <a:chExt cx="0" cy="0"/>
         </a:xfrm>
       </p:grpSpPr>
-      <p:sp>
-        <p:nvSpPr>
-          <p:cNvPr id="2" name="Text 0"/>
-          <p:cNvSpPr/>
-          <p:nvPr/>
-        </p:nvSpPr>
-        <p:spPr>
-          <a:xfrm>
-            <a:off x="0" y="0"/>
-            <a:ext cx="9144000" cy="76200"/>
-          </a:xfrm>
-          <a:prstGeom prst="rect">
-            <a:avLst/>
-          </a:prstGeom>
-          <a:solidFill>
-            <a:srgbClr val="1A7F37"/>
-          </a:solidFill>
-          <a:ln/>
-        </p:spPr>
-        <p:txBody>
-          <a:bodyPr wrap="square" rtlCol="0" anchor="ctr"/>
-          <a:lstStyle/>
-          <a:p>
-            <a:pPr indent="0" marL="0">
-              <a:buNone/>
-            </a:pPr>
-            <a:endParaRPr lang="en-US" dirty="0"/>
-          </a:p>
-        </p:txBody>
-      </p:sp>
-      <p:sp>
-        <p:nvSpPr>
-          <p:cNvPr id="3" name="Text 1"/>
-          <p:cNvSpPr/>
-          <p:nvPr/>
-        </p:nvSpPr>
-        <p:spPr>
-          <a:xfrm>
-            <a:off x="7340501" y="177701"/>
-            <a:ext cx="1168301" cy="279350"/>
-          </a:xfrm>
-          <a:prstGeom prst="roundRect">
-            <a:avLst>
-              <a:gd name="adj" fmla="val 22731"/>
-            </a:avLst>
-          </a:prstGeom>
-          <a:solidFill>
-            <a:srgbClr val="1A7F37"/>
-          </a:solidFill>
-          <a:ln/>
-        </p:spPr>
-        <p:txBody>
-          <a:bodyPr wrap="square" rtlCol="0" anchor="ctr"/>
-          <a:lstStyle/>
-          <a:p>
-            <a:pPr indent="0" marL="0">
-              <a:buNone/>
-            </a:pPr>
-            <a:endParaRPr lang="en-US" dirty="0"/>
-          </a:p>
-        </p:txBody>
-      </p:sp>
-      <p:sp>
-        <p:nvSpPr>
-          <p:cNvPr id="4" name="Text 2"/>
-          <p:cNvSpPr/>
-          <p:nvPr/>
-        </p:nvSpPr>
-        <p:spPr>
-          <a:xfrm>
-            <a:off x="7461041" y="231577"/>
-            <a:ext cx="927071" cy="171450"/>
-          </a:xfrm>
-          <a:prstGeom prst="rect">
-            <a:avLst/>
-          </a:prstGeom>
-          <a:noFill/>
-          <a:ln/>
-        </p:spPr>
-        <p:txBody>
-          <a:bodyPr wrap="square" lIns="0" tIns="0" rIns="0" bIns="0" rtlCol="0" anchor="t"/>
-          <a:lstStyle/>
-          <a:p>
-            <a:pPr algn="ctr" indent="0" marL="0">
-              <a:buNone/>
-            </a:pPr>
-            <a:r>
-              <a:rPr lang="en-US" sz="1150" b="1" dirty="0">
-                <a:solidFill>
-                  <a:srgbClr val="FFFFFF"/>
-                </a:solidFill>
-                <a:latin typeface="Arial" pitchFamily="34" charset="0"/>
-                <a:ea typeface="Arial" pitchFamily="34" charset="-122"/>
-                <a:cs typeface="Arial" pitchFamily="34" charset="-120"/>
-              </a:rPr>
-              <a:t>CHAPTER 02</a:t>
-            </a:r>
-            <a:endParaRPr lang="en-US" sz="1150" dirty="0"/>
-          </a:p>
-        </p:txBody>
-      </p:sp>
       <p:pic>
         <p:nvPicPr>
-          <p:cNvPr id="5" name="Image 0" descr="/Users/danwahlin/.copilot/session-state/56a7a0da-def8-48d4-b5e8-0ac3878cb8dd/files/slides-build/icons/FaGithub-1F2328.png">
-            <a:hlinkClick r:id="rId2" tooltip="https://github.com/github/copilot-app-for-beginners/tree/main/02-sessions-worktrees-context"/>
-          </p:cNvPr>
+          <p:cNvPr id="2" name="Image 0" descr="/Users/danwahlin/.copilot/session-state/56a7a0da-def8-48d4-b5e8-0ac3878cb8dd/files/slides-build/img/grad-corner.png">    </p:cNvPr>
           <p:cNvPicPr>
             <a:picLocks noChangeAspect="1"/>
           </p:cNvPicPr>
@@ -3550,6 +3331,103 @@
         </p:blipFill>
         <p:spPr>
           <a:xfrm>
+            <a:off x="6349901" y="0"/>
+            <a:ext cx="2793950" cy="1308050"/>
+          </a:xfrm>
+          <a:prstGeom prst="rect">
+            <a:avLst/>
+          </a:prstGeom>
+        </p:spPr>
+      </p:pic>
+      <p:sp>
+        <p:nvSpPr>
+          <p:cNvPr id="3" name="Text 0"/>
+          <p:cNvSpPr/>
+          <p:nvPr/>
+        </p:nvSpPr>
+        <p:spPr>
+          <a:xfrm>
+            <a:off x="7340501" y="177701"/>
+            <a:ext cx="1168301" cy="279350"/>
+          </a:xfrm>
+          <a:prstGeom prst="roundRect">
+            <a:avLst>
+              <a:gd name="adj" fmla="val 22731"/>
+            </a:avLst>
+          </a:prstGeom>
+          <a:solidFill>
+            <a:srgbClr val="1A7F37"/>
+          </a:solidFill>
+          <a:ln/>
+        </p:spPr>
+        <p:txBody>
+          <a:bodyPr wrap="square" rtlCol="0" anchor="ctr"/>
+          <a:lstStyle/>
+          <a:p>
+            <a:pPr indent="0" marL="0">
+              <a:buNone/>
+            </a:pPr>
+            <a:endParaRPr lang="en-US" dirty="0"/>
+          </a:p>
+        </p:txBody>
+      </p:sp>
+      <p:sp>
+        <p:nvSpPr>
+          <p:cNvPr id="4" name="Text 1"/>
+          <p:cNvSpPr/>
+          <p:nvPr/>
+        </p:nvSpPr>
+        <p:spPr>
+          <a:xfrm>
+            <a:off x="7461041" y="231577"/>
+            <a:ext cx="927071" cy="171450"/>
+          </a:xfrm>
+          <a:prstGeom prst="rect">
+            <a:avLst/>
+          </a:prstGeom>
+          <a:noFill/>
+          <a:ln/>
+        </p:spPr>
+        <p:txBody>
+          <a:bodyPr wrap="square" lIns="0" tIns="0" rIns="0" bIns="0" rtlCol="0" anchor="t"/>
+          <a:lstStyle/>
+          <a:p>
+            <a:pPr algn="ctr" indent="0" marL="0">
+              <a:buNone/>
+            </a:pPr>
+            <a:r>
+              <a:rPr lang="en-US" sz="1150" b="1" dirty="0">
+                <a:solidFill>
+                  <a:srgbClr val="FFFFFF"/>
+                </a:solidFill>
+                <a:latin typeface="Arial" pitchFamily="34" charset="0"/>
+                <a:ea typeface="Arial" pitchFamily="34" charset="-122"/>
+                <a:cs typeface="Arial" pitchFamily="34" charset="-120"/>
+              </a:rPr>
+              <a:t>CHAPTER 02</a:t>
+            </a:r>
+            <a:endParaRPr lang="en-US" sz="1150" dirty="0"/>
+          </a:p>
+        </p:txBody>
+      </p:sp>
+      <p:pic>
+        <p:nvPicPr>
+          <p:cNvPr id="5" name="Image 1" descr="/Users/danwahlin/.copilot/session-state/56a7a0da-def8-48d4-b5e8-0ac3878cb8dd/files/slides-build/icons/FaGithub-1F2328.png">
+            <a:hlinkClick r:id="rId3" tooltip="https://github.com/github/copilot-app-for-beginners/tree/main/02-sessions-worktrees-context"/>
+          </p:cNvPr>
+          <p:cNvPicPr>
+            <a:picLocks noChangeAspect="1"/>
+          </p:cNvPicPr>
+          <p:nvPr/>
+        </p:nvPicPr>
+        <p:blipFill>
+          <a:blip r:embed="rId2"/>
+          <a:stretch>
+            <a:fillRect/>
+          </a:stretch>
+        </p:blipFill>
+        <p:spPr>
+          <a:xfrm>
             <a:off x="8610600" y="165050"/>
             <a:ext cx="304800" cy="304800"/>
           </a:xfrm>
@@ -3560,7 +3438,7 @@
       </p:pic>
       <p:sp>
         <p:nvSpPr>
-          <p:cNvPr id="6" name="Text 3"/>
+          <p:cNvPr id="6" name="Text 2"/>
           <p:cNvSpPr/>
           <p:nvPr/>
         </p:nvSpPr>
@@ -3599,7 +3477,7 @@
       </p:sp>
       <p:sp>
         <p:nvSpPr>
-          <p:cNvPr id="7" name="Text 4"/>
+          <p:cNvPr id="7" name="Text 3"/>
           <p:cNvSpPr/>
           <p:nvPr/>
         </p:nvSpPr>
@@ -3644,7 +3522,7 @@
       </p:sp>
       <p:sp>
         <p:nvSpPr>
-          <p:cNvPr id="8" name="Text 5"/>
+          <p:cNvPr id="8" name="Text 4"/>
           <p:cNvSpPr/>
           <p:nvPr/>
         </p:nvSpPr>
@@ -3689,7 +3567,7 @@
       </p:sp>
       <p:sp>
         <p:nvSpPr>
-          <p:cNvPr id="9" name="Text 6"/>
+          <p:cNvPr id="9" name="Text 5"/>
           <p:cNvSpPr/>
           <p:nvPr/>
         </p:nvSpPr>
@@ -3728,7 +3606,7 @@
       </p:sp>
       <p:sp>
         <p:nvSpPr>
-          <p:cNvPr id="10" name="Text 7"/>
+          <p:cNvPr id="10" name="Text 6"/>
           <p:cNvSpPr/>
           <p:nvPr/>
         </p:nvSpPr>
@@ -3771,14 +3649,14 @@
       </p:sp>
       <p:pic>
         <p:nvPicPr>
-          <p:cNvPr id="11" name="Image 1" descr="/Users/danwahlin/.copilot/session-state/56a7a0da-def8-48d4-b5e8-0ac3878cb8dd/files/slides-build/img/02-empty-state-crop.png">    </p:cNvPr>
+          <p:cNvPr id="11" name="Image 2" descr="/Users/danwahlin/.copilot/session-state/56a7a0da-def8-48d4-b5e8-0ac3878cb8dd/files/slides-build/img/02-empty-state-crop.png">    </p:cNvPr>
           <p:cNvPicPr>
             <a:picLocks noChangeAspect="1"/>
           </p:cNvPicPr>
           <p:nvPr/>
         </p:nvPicPr>
         <p:blipFill>
-          <a:blip r:embed="rId3"/>
+          <a:blip r:embed="rId4"/>
           <a:stretch>
             <a:fillRect/>
           </a:stretch>
@@ -3795,7 +3673,7 @@
       </p:pic>
       <p:sp>
         <p:nvSpPr>
-          <p:cNvPr id="12" name="Text 8"/>
+          <p:cNvPr id="12" name="Text 7"/>
           <p:cNvSpPr/>
           <p:nvPr/>
         </p:nvSpPr>
@@ -3827,7 +3705,7 @@
       </p:sp>
       <p:sp>
         <p:nvSpPr>
-          <p:cNvPr id="13" name="Text 9"/>
+          <p:cNvPr id="13" name="Text 8"/>
           <p:cNvSpPr/>
           <p:nvPr/>
         </p:nvSpPr>
@@ -3866,7 +3744,7 @@
       </p:sp>
       <p:sp>
         <p:nvSpPr>
-          <p:cNvPr id="14" name="Text 10"/>
+          <p:cNvPr id="14" name="Text 9"/>
           <p:cNvSpPr/>
           <p:nvPr/>
         </p:nvSpPr>
@@ -3908,7 +3786,7 @@
       </p:sp>
       <p:sp>
         <p:nvSpPr>
-          <p:cNvPr id="15" name="Text 11"/>
+          <p:cNvPr id="15" name="Text 10"/>
           <p:cNvSpPr/>
           <p:nvPr/>
         </p:nvSpPr>
@@ -3967,7 +3845,7 @@
       </p:sp>
       <p:sp>
         <p:nvSpPr>
-          <p:cNvPr id="16" name="Text 12"/>
+          <p:cNvPr id="16" name="Text 11"/>
           <p:cNvSpPr/>
           <p:nvPr/>
         </p:nvSpPr>
@@ -3999,7 +3877,7 @@
       </p:sp>
       <p:sp>
         <p:nvSpPr>
-          <p:cNvPr id="17" name="Text 13"/>
+          <p:cNvPr id="17" name="Text 12"/>
           <p:cNvSpPr/>
           <p:nvPr/>
         </p:nvSpPr>
@@ -4038,7 +3916,7 @@
       </p:sp>
       <p:sp>
         <p:nvSpPr>
-          <p:cNvPr id="18" name="Text 14"/>
+          <p:cNvPr id="18" name="Text 13"/>
           <p:cNvSpPr/>
           <p:nvPr/>
         </p:nvSpPr>
@@ -4097,7 +3975,7 @@
       </p:sp>
       <p:sp>
         <p:nvSpPr>
-          <p:cNvPr id="19" name="Text 15"/>
+          <p:cNvPr id="19" name="Text 14"/>
           <p:cNvSpPr/>
           <p:nvPr/>
         </p:nvSpPr>
@@ -4173,7 +4051,7 @@
       </p:sp>
       <p:sp>
         <p:nvSpPr>
-          <p:cNvPr id="20" name="Text 16"/>
+          <p:cNvPr id="20" name="Text 15"/>
           <p:cNvSpPr/>
           <p:nvPr/>
         </p:nvSpPr>
@@ -4205,7 +4083,7 @@
       </p:sp>
       <p:sp>
         <p:nvSpPr>
-          <p:cNvPr id="21" name="Text 17"/>
+          <p:cNvPr id="21" name="Text 16"/>
           <p:cNvSpPr/>
           <p:nvPr/>
         </p:nvSpPr>
@@ -4244,7 +4122,7 @@
       </p:sp>
       <p:sp>
         <p:nvSpPr>
-          <p:cNvPr id="22" name="Text 18"/>
+          <p:cNvPr id="22" name="Text 17"/>
           <p:cNvSpPr/>
           <p:nvPr/>
         </p:nvSpPr>
@@ -4286,7 +4164,7 @@
       </p:sp>
       <p:sp>
         <p:nvSpPr>
-          <p:cNvPr id="23" name="Text 19"/>
+          <p:cNvPr id="23" name="Text 18"/>
           <p:cNvSpPr/>
           <p:nvPr/>
         </p:nvSpPr>
@@ -4358,112 +4236,9 @@
           <a:chExt cx="0" cy="0"/>
         </a:xfrm>
       </p:grpSpPr>
-      <p:sp>
-        <p:nvSpPr>
-          <p:cNvPr id="2" name="Text 0"/>
-          <p:cNvSpPr/>
-          <p:nvPr/>
-        </p:nvSpPr>
-        <p:spPr>
-          <a:xfrm>
-            <a:off x="0" y="0"/>
-            <a:ext cx="9144000" cy="76200"/>
-          </a:xfrm>
-          <a:prstGeom prst="rect">
-            <a:avLst/>
-          </a:prstGeom>
-          <a:solidFill>
-            <a:srgbClr val="1A7F37"/>
-          </a:solidFill>
-          <a:ln/>
-        </p:spPr>
-        <p:txBody>
-          <a:bodyPr wrap="square" rtlCol="0" anchor="ctr"/>
-          <a:lstStyle/>
-          <a:p>
-            <a:pPr indent="0" marL="0">
-              <a:buNone/>
-            </a:pPr>
-            <a:endParaRPr lang="en-US" dirty="0"/>
-          </a:p>
-        </p:txBody>
-      </p:sp>
-      <p:sp>
-        <p:nvSpPr>
-          <p:cNvPr id="3" name="Text 1"/>
-          <p:cNvSpPr/>
-          <p:nvPr/>
-        </p:nvSpPr>
-        <p:spPr>
-          <a:xfrm>
-            <a:off x="7340501" y="177701"/>
-            <a:ext cx="1168301" cy="279350"/>
-          </a:xfrm>
-          <a:prstGeom prst="roundRect">
-            <a:avLst>
-              <a:gd name="adj" fmla="val 22731"/>
-            </a:avLst>
-          </a:prstGeom>
-          <a:solidFill>
-            <a:srgbClr val="1A7F37"/>
-          </a:solidFill>
-          <a:ln/>
-        </p:spPr>
-        <p:txBody>
-          <a:bodyPr wrap="square" rtlCol="0" anchor="ctr"/>
-          <a:lstStyle/>
-          <a:p>
-            <a:pPr indent="0" marL="0">
-              <a:buNone/>
-            </a:pPr>
-            <a:endParaRPr lang="en-US" dirty="0"/>
-          </a:p>
-        </p:txBody>
-      </p:sp>
-      <p:sp>
-        <p:nvSpPr>
-          <p:cNvPr id="4" name="Text 2"/>
-          <p:cNvSpPr/>
-          <p:nvPr/>
-        </p:nvSpPr>
-        <p:spPr>
-          <a:xfrm>
-            <a:off x="7461041" y="231577"/>
-            <a:ext cx="927071" cy="171450"/>
-          </a:xfrm>
-          <a:prstGeom prst="rect">
-            <a:avLst/>
-          </a:prstGeom>
-          <a:noFill/>
-          <a:ln/>
-        </p:spPr>
-        <p:txBody>
-          <a:bodyPr wrap="square" lIns="0" tIns="0" rIns="0" bIns="0" rtlCol="0" anchor="t"/>
-          <a:lstStyle/>
-          <a:p>
-            <a:pPr algn="ctr" indent="0" marL="0">
-              <a:buNone/>
-            </a:pPr>
-            <a:r>
-              <a:rPr lang="en-US" sz="1150" b="1" dirty="0">
-                <a:solidFill>
-                  <a:srgbClr val="FFFFFF"/>
-                </a:solidFill>
-                <a:latin typeface="Arial" pitchFamily="34" charset="0"/>
-                <a:ea typeface="Arial" pitchFamily="34" charset="-122"/>
-                <a:cs typeface="Arial" pitchFamily="34" charset="-120"/>
-              </a:rPr>
-              <a:t>CHAPTER 02</a:t>
-            </a:r>
-            <a:endParaRPr lang="en-US" sz="1150" dirty="0"/>
-          </a:p>
-        </p:txBody>
-      </p:sp>
       <p:pic>
         <p:nvPicPr>
-          <p:cNvPr id="5" name="Image 0" descr="/Users/danwahlin/.copilot/session-state/56a7a0da-def8-48d4-b5e8-0ac3878cb8dd/files/slides-build/icons/FaGithub-1F2328.png">
-            <a:hlinkClick r:id="rId2" tooltip="https://github.com/github/copilot-app-for-beginners/tree/main/02-sessions-worktrees-context"/>
-          </p:cNvPr>
+          <p:cNvPr id="2" name="Image 0" descr="/Users/danwahlin/.copilot/session-state/56a7a0da-def8-48d4-b5e8-0ac3878cb8dd/files/slides-build/img/grad-corner.png">    </p:cNvPr>
           <p:cNvPicPr>
             <a:picLocks noChangeAspect="1"/>
           </p:cNvPicPr>
@@ -4477,6 +4252,103 @@
         </p:blipFill>
         <p:spPr>
           <a:xfrm>
+            <a:off x="6349901" y="0"/>
+            <a:ext cx="2793950" cy="1308050"/>
+          </a:xfrm>
+          <a:prstGeom prst="rect">
+            <a:avLst/>
+          </a:prstGeom>
+        </p:spPr>
+      </p:pic>
+      <p:sp>
+        <p:nvSpPr>
+          <p:cNvPr id="3" name="Text 0"/>
+          <p:cNvSpPr/>
+          <p:nvPr/>
+        </p:nvSpPr>
+        <p:spPr>
+          <a:xfrm>
+            <a:off x="7340501" y="177701"/>
+            <a:ext cx="1168301" cy="279350"/>
+          </a:xfrm>
+          <a:prstGeom prst="roundRect">
+            <a:avLst>
+              <a:gd name="adj" fmla="val 22731"/>
+            </a:avLst>
+          </a:prstGeom>
+          <a:solidFill>
+            <a:srgbClr val="1A7F37"/>
+          </a:solidFill>
+          <a:ln/>
+        </p:spPr>
+        <p:txBody>
+          <a:bodyPr wrap="square" rtlCol="0" anchor="ctr"/>
+          <a:lstStyle/>
+          <a:p>
+            <a:pPr indent="0" marL="0">
+              <a:buNone/>
+            </a:pPr>
+            <a:endParaRPr lang="en-US" dirty="0"/>
+          </a:p>
+        </p:txBody>
+      </p:sp>
+      <p:sp>
+        <p:nvSpPr>
+          <p:cNvPr id="4" name="Text 1"/>
+          <p:cNvSpPr/>
+          <p:nvPr/>
+        </p:nvSpPr>
+        <p:spPr>
+          <a:xfrm>
+            <a:off x="7461041" y="231577"/>
+            <a:ext cx="927071" cy="171450"/>
+          </a:xfrm>
+          <a:prstGeom prst="rect">
+            <a:avLst/>
+          </a:prstGeom>
+          <a:noFill/>
+          <a:ln/>
+        </p:spPr>
+        <p:txBody>
+          <a:bodyPr wrap="square" lIns="0" tIns="0" rIns="0" bIns="0" rtlCol="0" anchor="t"/>
+          <a:lstStyle/>
+          <a:p>
+            <a:pPr algn="ctr" indent="0" marL="0">
+              <a:buNone/>
+            </a:pPr>
+            <a:r>
+              <a:rPr lang="en-US" sz="1150" b="1" dirty="0">
+                <a:solidFill>
+                  <a:srgbClr val="FFFFFF"/>
+                </a:solidFill>
+                <a:latin typeface="Arial" pitchFamily="34" charset="0"/>
+                <a:ea typeface="Arial" pitchFamily="34" charset="-122"/>
+                <a:cs typeface="Arial" pitchFamily="34" charset="-120"/>
+              </a:rPr>
+              <a:t>CHAPTER 02</a:t>
+            </a:r>
+            <a:endParaRPr lang="en-US" sz="1150" dirty="0"/>
+          </a:p>
+        </p:txBody>
+      </p:sp>
+      <p:pic>
+        <p:nvPicPr>
+          <p:cNvPr id="5" name="Image 1" descr="/Users/danwahlin/.copilot/session-state/56a7a0da-def8-48d4-b5e8-0ac3878cb8dd/files/slides-build/icons/FaGithub-1F2328.png">
+            <a:hlinkClick r:id="rId3" tooltip="https://github.com/github/copilot-app-for-beginners/tree/main/02-sessions-worktrees-context"/>
+          </p:cNvPr>
+          <p:cNvPicPr>
+            <a:picLocks noChangeAspect="1"/>
+          </p:cNvPicPr>
+          <p:nvPr/>
+        </p:nvPicPr>
+        <p:blipFill>
+          <a:blip r:embed="rId2"/>
+          <a:stretch>
+            <a:fillRect/>
+          </a:stretch>
+        </p:blipFill>
+        <p:spPr>
+          <a:xfrm>
             <a:off x="8610600" y="165050"/>
             <a:ext cx="304800" cy="304800"/>
           </a:xfrm>
@@ -4487,7 +4359,7 @@
       </p:pic>
       <p:sp>
         <p:nvSpPr>
-          <p:cNvPr id="6" name="Text 3"/>
+          <p:cNvPr id="6" name="Text 2"/>
           <p:cNvSpPr/>
           <p:nvPr/>
         </p:nvSpPr>
@@ -4526,7 +4398,7 @@
       </p:sp>
       <p:sp>
         <p:nvSpPr>
-          <p:cNvPr id="7" name="Text 4"/>
+          <p:cNvPr id="7" name="Text 3"/>
           <p:cNvSpPr/>
           <p:nvPr/>
         </p:nvSpPr>
@@ -4571,7 +4443,7 @@
       </p:sp>
       <p:sp>
         <p:nvSpPr>
-          <p:cNvPr id="8" name="Text 5"/>
+          <p:cNvPr id="8" name="Text 4"/>
           <p:cNvSpPr/>
           <p:nvPr/>
         </p:nvSpPr>
@@ -4614,14 +4486,14 @@
       </p:sp>
       <p:pic>
         <p:nvPicPr>
-          <p:cNvPr id="9" name="Image 1" descr="/Users/danwahlin/.copilot/session-state/56a7a0da-def8-48d4-b5e8-0ac3878cb8dd/files/slides-build/img/02-chronicle-crop.png">    </p:cNvPr>
+          <p:cNvPr id="9" name="Image 2" descr="/Users/danwahlin/.copilot/session-state/56a7a0da-def8-48d4-b5e8-0ac3878cb8dd/files/slides-build/img/02-chronicle-crop.png">    </p:cNvPr>
           <p:cNvPicPr>
             <a:picLocks noChangeAspect="1"/>
           </p:cNvPicPr>
           <p:nvPr/>
         </p:nvPicPr>
         <p:blipFill>
-          <a:blip r:embed="rId3"/>
+          <a:blip r:embed="rId4"/>
           <a:stretch>
             <a:fillRect/>
           </a:stretch>
@@ -4638,7 +4510,7 @@
       </p:pic>
       <p:sp>
         <p:nvSpPr>
-          <p:cNvPr id="10" name="Text 6"/>
+          <p:cNvPr id="10" name="Text 5"/>
           <p:cNvSpPr/>
           <p:nvPr/>
         </p:nvSpPr>
@@ -4697,7 +4569,7 @@
       </p:sp>
       <p:sp>
         <p:nvSpPr>
-          <p:cNvPr id="11" name="Text 7"/>
+          <p:cNvPr id="11" name="Text 6"/>
           <p:cNvSpPr/>
           <p:nvPr/>
         </p:nvSpPr>
@@ -4740,14 +4612,14 @@
       </p:sp>
       <p:pic>
         <p:nvPicPr>
-          <p:cNvPr id="12" name="Image 2" descr="/Users/danwahlin/.copilot/session-state/56a7a0da-def8-48d4-b5e8-0ac3878cb8dd/files/slides-build/img/02-context-crop.png">    </p:cNvPr>
+          <p:cNvPr id="12" name="Image 3" descr="/Users/danwahlin/.copilot/session-state/56a7a0da-def8-48d4-b5e8-0ac3878cb8dd/files/slides-build/img/02-context-crop.png">    </p:cNvPr>
           <p:cNvPicPr>
             <a:picLocks noChangeAspect="1"/>
           </p:cNvPicPr>
           <p:nvPr/>
         </p:nvPicPr>
         <p:blipFill>
-          <a:blip r:embed="rId4"/>
+          <a:blip r:embed="rId5"/>
           <a:stretch>
             <a:fillRect/>
           </a:stretch>
@@ -4764,7 +4636,7 @@
       </p:pic>
       <p:sp>
         <p:nvSpPr>
-          <p:cNvPr id="13" name="Text 8"/>
+          <p:cNvPr id="13" name="Text 7"/>
           <p:cNvSpPr/>
           <p:nvPr/>
         </p:nvSpPr>
@@ -4853,112 +4725,9 @@
           <a:chExt cx="0" cy="0"/>
         </a:xfrm>
       </p:grpSpPr>
-      <p:sp>
-        <p:nvSpPr>
-          <p:cNvPr id="2" name="Text 0"/>
-          <p:cNvSpPr/>
-          <p:nvPr/>
-        </p:nvSpPr>
-        <p:spPr>
-          <a:xfrm>
-            <a:off x="0" y="0"/>
-            <a:ext cx="9144000" cy="76200"/>
-          </a:xfrm>
-          <a:prstGeom prst="rect">
-            <a:avLst/>
-          </a:prstGeom>
-          <a:solidFill>
-            <a:srgbClr val="1A7F37"/>
-          </a:solidFill>
-          <a:ln/>
-        </p:spPr>
-        <p:txBody>
-          <a:bodyPr wrap="square" rtlCol="0" anchor="ctr"/>
-          <a:lstStyle/>
-          <a:p>
-            <a:pPr indent="0" marL="0">
-              <a:buNone/>
-            </a:pPr>
-            <a:endParaRPr lang="en-US" dirty="0"/>
-          </a:p>
-        </p:txBody>
-      </p:sp>
-      <p:sp>
-        <p:nvSpPr>
-          <p:cNvPr id="3" name="Text 1"/>
-          <p:cNvSpPr/>
-          <p:nvPr/>
-        </p:nvSpPr>
-        <p:spPr>
-          <a:xfrm>
-            <a:off x="7340501" y="177701"/>
-            <a:ext cx="1168301" cy="279350"/>
-          </a:xfrm>
-          <a:prstGeom prst="roundRect">
-            <a:avLst>
-              <a:gd name="adj" fmla="val 22731"/>
-            </a:avLst>
-          </a:prstGeom>
-          <a:solidFill>
-            <a:srgbClr val="1A7F37"/>
-          </a:solidFill>
-          <a:ln/>
-        </p:spPr>
-        <p:txBody>
-          <a:bodyPr wrap="square" rtlCol="0" anchor="ctr"/>
-          <a:lstStyle/>
-          <a:p>
-            <a:pPr indent="0" marL="0">
-              <a:buNone/>
-            </a:pPr>
-            <a:endParaRPr lang="en-US" dirty="0"/>
-          </a:p>
-        </p:txBody>
-      </p:sp>
-      <p:sp>
-        <p:nvSpPr>
-          <p:cNvPr id="4" name="Text 2"/>
-          <p:cNvSpPr/>
-          <p:nvPr/>
-        </p:nvSpPr>
-        <p:spPr>
-          <a:xfrm>
-            <a:off x="7461041" y="231577"/>
-            <a:ext cx="927071" cy="171450"/>
-          </a:xfrm>
-          <a:prstGeom prst="rect">
-            <a:avLst/>
-          </a:prstGeom>
-          <a:noFill/>
-          <a:ln/>
-        </p:spPr>
-        <p:txBody>
-          <a:bodyPr wrap="square" lIns="0" tIns="0" rIns="0" bIns="0" rtlCol="0" anchor="t"/>
-          <a:lstStyle/>
-          <a:p>
-            <a:pPr algn="ctr" indent="0" marL="0">
-              <a:buNone/>
-            </a:pPr>
-            <a:r>
-              <a:rPr lang="en-US" sz="1150" b="1" dirty="0">
-                <a:solidFill>
-                  <a:srgbClr val="FFFFFF"/>
-                </a:solidFill>
-                <a:latin typeface="Arial" pitchFamily="34" charset="0"/>
-                <a:ea typeface="Arial" pitchFamily="34" charset="-122"/>
-                <a:cs typeface="Arial" pitchFamily="34" charset="-120"/>
-              </a:rPr>
-              <a:t>CHAPTER 02</a:t>
-            </a:r>
-            <a:endParaRPr lang="en-US" sz="1150" dirty="0"/>
-          </a:p>
-        </p:txBody>
-      </p:sp>
       <p:pic>
         <p:nvPicPr>
-          <p:cNvPr id="5" name="Image 0" descr="/Users/danwahlin/.copilot/session-state/56a7a0da-def8-48d4-b5e8-0ac3878cb8dd/files/slides-build/icons/FaGithub-1F2328.png">
-            <a:hlinkClick r:id="rId2" tooltip="https://github.com/github/copilot-app-for-beginners/tree/main/02-sessions-worktrees-context"/>
-          </p:cNvPr>
+          <p:cNvPr id="2" name="Image 0" descr="/Users/danwahlin/.copilot/session-state/56a7a0da-def8-48d4-b5e8-0ac3878cb8dd/files/slides-build/img/grad-corner.png">    </p:cNvPr>
           <p:cNvPicPr>
             <a:picLocks noChangeAspect="1"/>
           </p:cNvPicPr>
@@ -4972,6 +4741,103 @@
         </p:blipFill>
         <p:spPr>
           <a:xfrm>
+            <a:off x="6349901" y="0"/>
+            <a:ext cx="2793950" cy="1308050"/>
+          </a:xfrm>
+          <a:prstGeom prst="rect">
+            <a:avLst/>
+          </a:prstGeom>
+        </p:spPr>
+      </p:pic>
+      <p:sp>
+        <p:nvSpPr>
+          <p:cNvPr id="3" name="Text 0"/>
+          <p:cNvSpPr/>
+          <p:nvPr/>
+        </p:nvSpPr>
+        <p:spPr>
+          <a:xfrm>
+            <a:off x="7340501" y="177701"/>
+            <a:ext cx="1168301" cy="279350"/>
+          </a:xfrm>
+          <a:prstGeom prst="roundRect">
+            <a:avLst>
+              <a:gd name="adj" fmla="val 22731"/>
+            </a:avLst>
+          </a:prstGeom>
+          <a:solidFill>
+            <a:srgbClr val="1A7F37"/>
+          </a:solidFill>
+          <a:ln/>
+        </p:spPr>
+        <p:txBody>
+          <a:bodyPr wrap="square" rtlCol="0" anchor="ctr"/>
+          <a:lstStyle/>
+          <a:p>
+            <a:pPr indent="0" marL="0">
+              <a:buNone/>
+            </a:pPr>
+            <a:endParaRPr lang="en-US" dirty="0"/>
+          </a:p>
+        </p:txBody>
+      </p:sp>
+      <p:sp>
+        <p:nvSpPr>
+          <p:cNvPr id="4" name="Text 1"/>
+          <p:cNvSpPr/>
+          <p:nvPr/>
+        </p:nvSpPr>
+        <p:spPr>
+          <a:xfrm>
+            <a:off x="7461041" y="231577"/>
+            <a:ext cx="927071" cy="171450"/>
+          </a:xfrm>
+          <a:prstGeom prst="rect">
+            <a:avLst/>
+          </a:prstGeom>
+          <a:noFill/>
+          <a:ln/>
+        </p:spPr>
+        <p:txBody>
+          <a:bodyPr wrap="square" lIns="0" tIns="0" rIns="0" bIns="0" rtlCol="0" anchor="t"/>
+          <a:lstStyle/>
+          <a:p>
+            <a:pPr algn="ctr" indent="0" marL="0">
+              <a:buNone/>
+            </a:pPr>
+            <a:r>
+              <a:rPr lang="en-US" sz="1150" b="1" dirty="0">
+                <a:solidFill>
+                  <a:srgbClr val="FFFFFF"/>
+                </a:solidFill>
+                <a:latin typeface="Arial" pitchFamily="34" charset="0"/>
+                <a:ea typeface="Arial" pitchFamily="34" charset="-122"/>
+                <a:cs typeface="Arial" pitchFamily="34" charset="-120"/>
+              </a:rPr>
+              <a:t>CHAPTER 02</a:t>
+            </a:r>
+            <a:endParaRPr lang="en-US" sz="1150" dirty="0"/>
+          </a:p>
+        </p:txBody>
+      </p:sp>
+      <p:pic>
+        <p:nvPicPr>
+          <p:cNvPr id="5" name="Image 1" descr="/Users/danwahlin/.copilot/session-state/56a7a0da-def8-48d4-b5e8-0ac3878cb8dd/files/slides-build/icons/FaGithub-1F2328.png">
+            <a:hlinkClick r:id="rId3" tooltip="https://github.com/github/copilot-app-for-beginners/tree/main/02-sessions-worktrees-context"/>
+          </p:cNvPr>
+          <p:cNvPicPr>
+            <a:picLocks noChangeAspect="1"/>
+          </p:cNvPicPr>
+          <p:nvPr/>
+        </p:nvPicPr>
+        <p:blipFill>
+          <a:blip r:embed="rId2"/>
+          <a:stretch>
+            <a:fillRect/>
+          </a:stretch>
+        </p:blipFill>
+        <p:spPr>
+          <a:xfrm>
             <a:off x="8610600" y="165050"/>
             <a:ext cx="304800" cy="304800"/>
           </a:xfrm>
@@ -4982,7 +4848,7 @@
       </p:pic>
       <p:sp>
         <p:nvSpPr>
-          <p:cNvPr id="6" name="Text 3"/>
+          <p:cNvPr id="6" name="Text 2"/>
           <p:cNvSpPr/>
           <p:nvPr/>
         </p:nvSpPr>
@@ -5021,7 +4887,7 @@
       </p:sp>
       <p:sp>
         <p:nvSpPr>
-          <p:cNvPr id="7" name="Text 4"/>
+          <p:cNvPr id="7" name="Text 3"/>
           <p:cNvSpPr/>
           <p:nvPr/>
         </p:nvSpPr>
@@ -5066,7 +4932,7 @@
       </p:sp>
       <p:sp>
         <p:nvSpPr>
-          <p:cNvPr id="8" name="Text 5"/>
+          <p:cNvPr id="8" name="Text 4"/>
           <p:cNvSpPr/>
           <p:nvPr/>
         </p:nvSpPr>
@@ -5151,7 +5017,7 @@
       </p:sp>
       <p:sp>
         <p:nvSpPr>
-          <p:cNvPr id="9" name="Text 6"/>
+          <p:cNvPr id="9" name="Text 5"/>
           <p:cNvSpPr/>
           <p:nvPr/>
         </p:nvSpPr>
@@ -5187,7 +5053,7 @@
       </p:sp>
       <p:sp>
         <p:nvSpPr>
-          <p:cNvPr id="10" name="Shape 7"/>
+          <p:cNvPr id="10" name="Shape 6"/>
           <p:cNvSpPr/>
           <p:nvPr/>
         </p:nvSpPr>
@@ -5210,7 +5076,7 @@
       </p:sp>
       <p:sp>
         <p:nvSpPr>
-          <p:cNvPr id="11" name="Text 8"/>
+          <p:cNvPr id="11" name="Text 7"/>
           <p:cNvSpPr/>
           <p:nvPr/>
         </p:nvSpPr>
@@ -5242,7 +5108,7 @@
       </p:sp>
       <p:sp>
         <p:nvSpPr>
-          <p:cNvPr id="12" name="Text 9"/>
+          <p:cNvPr id="12" name="Text 8"/>
           <p:cNvSpPr/>
           <p:nvPr/>
         </p:nvSpPr>
@@ -5281,7 +5147,7 @@
       </p:sp>
       <p:sp>
         <p:nvSpPr>
-          <p:cNvPr id="13" name="Text 10"/>
+          <p:cNvPr id="13" name="Text 9"/>
           <p:cNvSpPr/>
           <p:nvPr/>
         </p:nvSpPr>
@@ -5323,7 +5189,7 @@
       </p:sp>
       <p:sp>
         <p:nvSpPr>
-          <p:cNvPr id="14" name="Text 11"/>
+          <p:cNvPr id="14" name="Text 10"/>
           <p:cNvSpPr/>
           <p:nvPr/>
         </p:nvSpPr>
@@ -5450,7 +5316,7 @@
       </p:sp>
       <p:sp>
         <p:nvSpPr>
-          <p:cNvPr id="15" name="Shape 12"/>
+          <p:cNvPr id="15" name="Shape 11"/>
           <p:cNvSpPr/>
           <p:nvPr/>
         </p:nvSpPr>
@@ -5473,7 +5339,7 @@
       </p:sp>
       <p:sp>
         <p:nvSpPr>
-          <p:cNvPr id="16" name="Text 13"/>
+          <p:cNvPr id="16" name="Text 12"/>
           <p:cNvSpPr/>
           <p:nvPr/>
         </p:nvSpPr>
@@ -5505,7 +5371,7 @@
       </p:sp>
       <p:sp>
         <p:nvSpPr>
-          <p:cNvPr id="17" name="Text 14"/>
+          <p:cNvPr id="17" name="Text 13"/>
           <p:cNvSpPr/>
           <p:nvPr/>
         </p:nvSpPr>
@@ -5544,7 +5410,7 @@
       </p:sp>
       <p:sp>
         <p:nvSpPr>
-          <p:cNvPr id="18" name="Text 15"/>
+          <p:cNvPr id="18" name="Text 14"/>
           <p:cNvSpPr/>
           <p:nvPr/>
         </p:nvSpPr>
@@ -5586,7 +5452,7 @@
       </p:sp>
       <p:sp>
         <p:nvSpPr>
-          <p:cNvPr id="19" name="Text 16"/>
+          <p:cNvPr id="19" name="Text 15"/>
           <p:cNvSpPr/>
           <p:nvPr/>
         </p:nvSpPr>
@@ -5628,7 +5494,7 @@
       </p:sp>
       <p:sp>
         <p:nvSpPr>
-          <p:cNvPr id="20" name="Shape 17"/>
+          <p:cNvPr id="20" name="Shape 16"/>
           <p:cNvSpPr/>
           <p:nvPr/>
         </p:nvSpPr>
@@ -5651,7 +5517,7 @@
       </p:sp>
       <p:sp>
         <p:nvSpPr>
-          <p:cNvPr id="21" name="Text 18"/>
+          <p:cNvPr id="21" name="Text 17"/>
           <p:cNvSpPr/>
           <p:nvPr/>
         </p:nvSpPr>
@@ -5683,7 +5549,7 @@
       </p:sp>
       <p:sp>
         <p:nvSpPr>
-          <p:cNvPr id="22" name="Text 19"/>
+          <p:cNvPr id="22" name="Text 18"/>
           <p:cNvSpPr/>
           <p:nvPr/>
         </p:nvSpPr>
@@ -5722,7 +5588,7 @@
       </p:sp>
       <p:sp>
         <p:nvSpPr>
-          <p:cNvPr id="23" name="Text 20"/>
+          <p:cNvPr id="23" name="Text 19"/>
           <p:cNvSpPr/>
           <p:nvPr/>
         </p:nvSpPr>
@@ -5764,7 +5630,7 @@
       </p:sp>
       <p:sp>
         <p:nvSpPr>
-          <p:cNvPr id="24" name="Text 21"/>
+          <p:cNvPr id="24" name="Text 20"/>
           <p:cNvSpPr/>
           <p:nvPr/>
         </p:nvSpPr>
@@ -5806,7 +5672,7 @@
       </p:sp>
       <p:sp>
         <p:nvSpPr>
-          <p:cNvPr id="25" name="Text 22"/>
+          <p:cNvPr id="25" name="Text 21"/>
           <p:cNvSpPr/>
           <p:nvPr/>
         </p:nvSpPr>
@@ -5838,7 +5704,7 @@
       </p:sp>
       <p:sp>
         <p:nvSpPr>
-          <p:cNvPr id="26" name="Text 23"/>
+          <p:cNvPr id="26" name="Text 22"/>
           <p:cNvSpPr/>
           <p:nvPr/>
         </p:nvSpPr>
@@ -5877,7 +5743,7 @@
       </p:sp>
       <p:sp>
         <p:nvSpPr>
-          <p:cNvPr id="27" name="Text 24"/>
+          <p:cNvPr id="27" name="Text 23"/>
           <p:cNvSpPr/>
           <p:nvPr/>
         </p:nvSpPr>
@@ -5919,7 +5785,7 @@
       </p:sp>
       <p:sp>
         <p:nvSpPr>
-          <p:cNvPr id="28" name="Text 25"/>
+          <p:cNvPr id="28" name="Text 24"/>
           <p:cNvSpPr/>
           <p:nvPr/>
         </p:nvSpPr>
@@ -5995,7 +5861,7 @@
       </p:sp>
       <p:sp>
         <p:nvSpPr>
-          <p:cNvPr id="29" name="Text 26"/>
+          <p:cNvPr id="29" name="Text 25"/>
           <p:cNvSpPr/>
           <p:nvPr/>
         </p:nvSpPr>
@@ -6031,7 +5897,7 @@
       </p:sp>
       <p:sp>
         <p:nvSpPr>
-          <p:cNvPr id="30" name="Text 27"/>
+          <p:cNvPr id="30" name="Text 26"/>
           <p:cNvSpPr/>
           <p:nvPr/>
         </p:nvSpPr>
@@ -6063,14 +5929,14 @@
       </p:sp>
       <p:pic>
         <p:nvPicPr>
-          <p:cNvPr id="31" name="Image 1" descr="/Users/danwahlin/.copilot/session-state/56a7a0da-def8-48d4-b5e8-0ac3878cb8dd/files/slides-build/icons/GoGoal-BC4C00.png">    </p:cNvPr>
+          <p:cNvPr id="31" name="Image 2" descr="/Users/danwahlin/.copilot/session-state/56a7a0da-def8-48d4-b5e8-0ac3878cb8dd/files/slides-build/icons/GoGoal-BC4C00.png">    </p:cNvPr>
           <p:cNvPicPr>
             <a:picLocks noChangeAspect="1"/>
           </p:cNvPicPr>
           <p:nvPr/>
         </p:nvPicPr>
         <p:blipFill>
-          <a:blip r:embed="rId3"/>
+          <a:blip r:embed="rId4"/>
           <a:stretch>
             <a:fillRect/>
           </a:stretch>
@@ -6087,7 +5953,7 @@
       </p:pic>
       <p:sp>
         <p:nvSpPr>
-          <p:cNvPr id="32" name="Text 28"/>
+          <p:cNvPr id="32" name="Text 27"/>
           <p:cNvSpPr/>
           <p:nvPr/>
         </p:nvSpPr>
@@ -6129,7 +5995,7 @@
       </p:sp>
       <p:sp>
         <p:nvSpPr>
-          <p:cNvPr id="33" name="Text 29"/>
+          <p:cNvPr id="33" name="Text 28"/>
           <p:cNvSpPr/>
           <p:nvPr/>
         </p:nvSpPr>
@@ -6235,112 +6101,9 @@
           <a:chExt cx="0" cy="0"/>
         </a:xfrm>
       </p:grpSpPr>
-      <p:sp>
-        <p:nvSpPr>
-          <p:cNvPr id="2" name="Text 0"/>
-          <p:cNvSpPr/>
-          <p:nvPr/>
-        </p:nvSpPr>
-        <p:spPr>
-          <a:xfrm>
-            <a:off x="0" y="0"/>
-            <a:ext cx="9144000" cy="76200"/>
-          </a:xfrm>
-          <a:prstGeom prst="rect">
-            <a:avLst/>
-          </a:prstGeom>
-          <a:solidFill>
-            <a:srgbClr val="1A7F37"/>
-          </a:solidFill>
-          <a:ln/>
-        </p:spPr>
-        <p:txBody>
-          <a:bodyPr wrap="square" rtlCol="0" anchor="ctr"/>
-          <a:lstStyle/>
-          <a:p>
-            <a:pPr indent="0" marL="0">
-              <a:buNone/>
-            </a:pPr>
-            <a:endParaRPr lang="en-US" dirty="0"/>
-          </a:p>
-        </p:txBody>
-      </p:sp>
-      <p:sp>
-        <p:nvSpPr>
-          <p:cNvPr id="3" name="Text 1"/>
-          <p:cNvSpPr/>
-          <p:nvPr/>
-        </p:nvSpPr>
-        <p:spPr>
-          <a:xfrm>
-            <a:off x="7340501" y="177701"/>
-            <a:ext cx="1168301" cy="279350"/>
-          </a:xfrm>
-          <a:prstGeom prst="roundRect">
-            <a:avLst>
-              <a:gd name="adj" fmla="val 22731"/>
-            </a:avLst>
-          </a:prstGeom>
-          <a:solidFill>
-            <a:srgbClr val="1A7F37"/>
-          </a:solidFill>
-          <a:ln/>
-        </p:spPr>
-        <p:txBody>
-          <a:bodyPr wrap="square" rtlCol="0" anchor="ctr"/>
-          <a:lstStyle/>
-          <a:p>
-            <a:pPr indent="0" marL="0">
-              <a:buNone/>
-            </a:pPr>
-            <a:endParaRPr lang="en-US" dirty="0"/>
-          </a:p>
-        </p:txBody>
-      </p:sp>
-      <p:sp>
-        <p:nvSpPr>
-          <p:cNvPr id="4" name="Text 2"/>
-          <p:cNvSpPr/>
-          <p:nvPr/>
-        </p:nvSpPr>
-        <p:spPr>
-          <a:xfrm>
-            <a:off x="7461041" y="231577"/>
-            <a:ext cx="927071" cy="171450"/>
-          </a:xfrm>
-          <a:prstGeom prst="rect">
-            <a:avLst/>
-          </a:prstGeom>
-          <a:noFill/>
-          <a:ln/>
-        </p:spPr>
-        <p:txBody>
-          <a:bodyPr wrap="square" lIns="0" tIns="0" rIns="0" bIns="0" rtlCol="0" anchor="t"/>
-          <a:lstStyle/>
-          <a:p>
-            <a:pPr algn="ctr" indent="0" marL="0">
-              <a:buNone/>
-            </a:pPr>
-            <a:r>
-              <a:rPr lang="en-US" sz="1150" b="1" dirty="0">
-                <a:solidFill>
-                  <a:srgbClr val="FFFFFF"/>
-                </a:solidFill>
-                <a:latin typeface="Arial" pitchFamily="34" charset="0"/>
-                <a:ea typeface="Arial" pitchFamily="34" charset="-122"/>
-                <a:cs typeface="Arial" pitchFamily="34" charset="-120"/>
-              </a:rPr>
-              <a:t>CHAPTER 02</a:t>
-            </a:r>
-            <a:endParaRPr lang="en-US" sz="1150" dirty="0"/>
-          </a:p>
-        </p:txBody>
-      </p:sp>
       <p:pic>
         <p:nvPicPr>
-          <p:cNvPr id="5" name="Image 0" descr="/Users/danwahlin/.copilot/session-state/56a7a0da-def8-48d4-b5e8-0ac3878cb8dd/files/slides-build/icons/FaGithub-1F2328.png">
-            <a:hlinkClick r:id="rId2" tooltip="https://github.com/github/copilot-app-for-beginners/tree/main/02-sessions-worktrees-context"/>
-          </p:cNvPr>
+          <p:cNvPr id="2" name="Image 0" descr="/Users/danwahlin/.copilot/session-state/56a7a0da-def8-48d4-b5e8-0ac3878cb8dd/files/slides-build/img/grad-corner.png">    </p:cNvPr>
           <p:cNvPicPr>
             <a:picLocks noChangeAspect="1"/>
           </p:cNvPicPr>
@@ -6354,6 +6117,103 @@
         </p:blipFill>
         <p:spPr>
           <a:xfrm>
+            <a:off x="6349901" y="0"/>
+            <a:ext cx="2793950" cy="1308050"/>
+          </a:xfrm>
+          <a:prstGeom prst="rect">
+            <a:avLst/>
+          </a:prstGeom>
+        </p:spPr>
+      </p:pic>
+      <p:sp>
+        <p:nvSpPr>
+          <p:cNvPr id="3" name="Text 0"/>
+          <p:cNvSpPr/>
+          <p:nvPr/>
+        </p:nvSpPr>
+        <p:spPr>
+          <a:xfrm>
+            <a:off x="7340501" y="177701"/>
+            <a:ext cx="1168301" cy="279350"/>
+          </a:xfrm>
+          <a:prstGeom prst="roundRect">
+            <a:avLst>
+              <a:gd name="adj" fmla="val 22731"/>
+            </a:avLst>
+          </a:prstGeom>
+          <a:solidFill>
+            <a:srgbClr val="1A7F37"/>
+          </a:solidFill>
+          <a:ln/>
+        </p:spPr>
+        <p:txBody>
+          <a:bodyPr wrap="square" rtlCol="0" anchor="ctr"/>
+          <a:lstStyle/>
+          <a:p>
+            <a:pPr indent="0" marL="0">
+              <a:buNone/>
+            </a:pPr>
+            <a:endParaRPr lang="en-US" dirty="0"/>
+          </a:p>
+        </p:txBody>
+      </p:sp>
+      <p:sp>
+        <p:nvSpPr>
+          <p:cNvPr id="4" name="Text 1"/>
+          <p:cNvSpPr/>
+          <p:nvPr/>
+        </p:nvSpPr>
+        <p:spPr>
+          <a:xfrm>
+            <a:off x="7461041" y="231577"/>
+            <a:ext cx="927071" cy="171450"/>
+          </a:xfrm>
+          <a:prstGeom prst="rect">
+            <a:avLst/>
+          </a:prstGeom>
+          <a:noFill/>
+          <a:ln/>
+        </p:spPr>
+        <p:txBody>
+          <a:bodyPr wrap="square" lIns="0" tIns="0" rIns="0" bIns="0" rtlCol="0" anchor="t"/>
+          <a:lstStyle/>
+          <a:p>
+            <a:pPr algn="ctr" indent="0" marL="0">
+              <a:buNone/>
+            </a:pPr>
+            <a:r>
+              <a:rPr lang="en-US" sz="1150" b="1" dirty="0">
+                <a:solidFill>
+                  <a:srgbClr val="FFFFFF"/>
+                </a:solidFill>
+                <a:latin typeface="Arial" pitchFamily="34" charset="0"/>
+                <a:ea typeface="Arial" pitchFamily="34" charset="-122"/>
+                <a:cs typeface="Arial" pitchFamily="34" charset="-120"/>
+              </a:rPr>
+              <a:t>CHAPTER 02</a:t>
+            </a:r>
+            <a:endParaRPr lang="en-US" sz="1150" dirty="0"/>
+          </a:p>
+        </p:txBody>
+      </p:sp>
+      <p:pic>
+        <p:nvPicPr>
+          <p:cNvPr id="5" name="Image 1" descr="/Users/danwahlin/.copilot/session-state/56a7a0da-def8-48d4-b5e8-0ac3878cb8dd/files/slides-build/icons/FaGithub-1F2328.png">
+            <a:hlinkClick r:id="rId3" tooltip="https://github.com/github/copilot-app-for-beginners/tree/main/02-sessions-worktrees-context"/>
+          </p:cNvPr>
+          <p:cNvPicPr>
+            <a:picLocks noChangeAspect="1"/>
+          </p:cNvPicPr>
+          <p:nvPr/>
+        </p:nvPicPr>
+        <p:blipFill>
+          <a:blip r:embed="rId2"/>
+          <a:stretch>
+            <a:fillRect/>
+          </a:stretch>
+        </p:blipFill>
+        <p:spPr>
+          <a:xfrm>
             <a:off x="8610600" y="165050"/>
             <a:ext cx="304800" cy="304800"/>
           </a:xfrm>
@@ -6364,7 +6224,7 @@
       </p:pic>
       <p:sp>
         <p:nvSpPr>
-          <p:cNvPr id="6" name="Text 3"/>
+          <p:cNvPr id="6" name="Text 2"/>
           <p:cNvSpPr/>
           <p:nvPr/>
         </p:nvSpPr>
@@ -6403,7 +6263,7 @@
       </p:sp>
       <p:sp>
         <p:nvSpPr>
-          <p:cNvPr id="7" name="Text 4"/>
+          <p:cNvPr id="7" name="Text 3"/>
           <p:cNvSpPr/>
           <p:nvPr/>
         </p:nvSpPr>
@@ -6448,7 +6308,7 @@
       </p:sp>
       <p:sp>
         <p:nvSpPr>
-          <p:cNvPr id="8" name="Text 5"/>
+          <p:cNvPr id="8" name="Text 4"/>
           <p:cNvSpPr/>
           <p:nvPr/>
         </p:nvSpPr>
@@ -6484,7 +6344,7 @@
       </p:sp>
       <p:sp>
         <p:nvSpPr>
-          <p:cNvPr id="9" name="Text 6"/>
+          <p:cNvPr id="9" name="Text 5"/>
           <p:cNvSpPr/>
           <p:nvPr/>
         </p:nvSpPr>
@@ -6516,7 +6376,7 @@
       </p:sp>
       <p:sp>
         <p:nvSpPr>
-          <p:cNvPr id="10" name="Text 7"/>
+          <p:cNvPr id="10" name="Text 6"/>
           <p:cNvSpPr/>
           <p:nvPr/>
         </p:nvSpPr>
@@ -6555,7 +6415,7 @@
       </p:sp>
       <p:sp>
         <p:nvSpPr>
-          <p:cNvPr id="11" name="Text 8"/>
+          <p:cNvPr id="11" name="Text 7"/>
           <p:cNvSpPr/>
           <p:nvPr/>
         </p:nvSpPr>
@@ -6597,7 +6457,7 @@
       </p:sp>
       <p:sp>
         <p:nvSpPr>
-          <p:cNvPr id="12" name="Text 9"/>
+          <p:cNvPr id="12" name="Text 8"/>
           <p:cNvSpPr/>
           <p:nvPr/>
         </p:nvSpPr>
@@ -6633,7 +6493,7 @@
       </p:sp>
       <p:sp>
         <p:nvSpPr>
-          <p:cNvPr id="13" name="Text 10"/>
+          <p:cNvPr id="13" name="Text 9"/>
           <p:cNvSpPr/>
           <p:nvPr/>
         </p:nvSpPr>
@@ -6665,7 +6525,7 @@
       </p:sp>
       <p:sp>
         <p:nvSpPr>
-          <p:cNvPr id="14" name="Text 11"/>
+          <p:cNvPr id="14" name="Text 10"/>
           <p:cNvSpPr/>
           <p:nvPr/>
         </p:nvSpPr>
@@ -6704,7 +6564,7 @@
       </p:sp>
       <p:sp>
         <p:nvSpPr>
-          <p:cNvPr id="15" name="Text 12"/>
+          <p:cNvPr id="15" name="Text 11"/>
           <p:cNvSpPr/>
           <p:nvPr/>
         </p:nvSpPr>
@@ -6746,7 +6606,7 @@
       </p:sp>
       <p:sp>
         <p:nvSpPr>
-          <p:cNvPr id="16" name="Text 13"/>
+          <p:cNvPr id="16" name="Text 12"/>
           <p:cNvSpPr/>
           <p:nvPr/>
         </p:nvSpPr>
@@ -6782,7 +6642,7 @@
       </p:sp>
       <p:sp>
         <p:nvSpPr>
-          <p:cNvPr id="17" name="Text 14"/>
+          <p:cNvPr id="17" name="Text 13"/>
           <p:cNvSpPr/>
           <p:nvPr/>
         </p:nvSpPr>
@@ -6814,7 +6674,7 @@
       </p:sp>
       <p:sp>
         <p:nvSpPr>
-          <p:cNvPr id="18" name="Text 15"/>
+          <p:cNvPr id="18" name="Text 14"/>
           <p:cNvSpPr/>
           <p:nvPr/>
         </p:nvSpPr>
@@ -6853,7 +6713,7 @@
       </p:sp>
       <p:sp>
         <p:nvSpPr>
-          <p:cNvPr id="19" name="Text 16"/>
+          <p:cNvPr id="19" name="Text 15"/>
           <p:cNvSpPr/>
           <p:nvPr/>
         </p:nvSpPr>
@@ -6997,7 +6857,7 @@
       </p:sp>
       <p:sp>
         <p:nvSpPr>
-          <p:cNvPr id="20" name="Text 17"/>
+          <p:cNvPr id="20" name="Text 16"/>
           <p:cNvSpPr/>
           <p:nvPr/>
         </p:nvSpPr>
@@ -7033,7 +6893,7 @@
       </p:sp>
       <p:sp>
         <p:nvSpPr>
-          <p:cNvPr id="21" name="Text 18"/>
+          <p:cNvPr id="21" name="Text 17"/>
           <p:cNvSpPr/>
           <p:nvPr/>
         </p:nvSpPr>
@@ -7065,7 +6925,7 @@
       </p:sp>
       <p:sp>
         <p:nvSpPr>
-          <p:cNvPr id="22" name="Text 19"/>
+          <p:cNvPr id="22" name="Text 18"/>
           <p:cNvSpPr/>
           <p:nvPr/>
         </p:nvSpPr>
@@ -7104,7 +6964,7 @@
       </p:sp>
       <p:sp>
         <p:nvSpPr>
-          <p:cNvPr id="23" name="Text 20"/>
+          <p:cNvPr id="23" name="Text 19"/>
           <p:cNvSpPr/>
           <p:nvPr/>
         </p:nvSpPr>
@@ -7146,7 +7006,7 @@
       </p:sp>
       <p:sp>
         <p:nvSpPr>
-          <p:cNvPr id="24" name="Text 21"/>
+          <p:cNvPr id="24" name="Text 20"/>
           <p:cNvSpPr/>
           <p:nvPr/>
         </p:nvSpPr>
@@ -7182,7 +7042,7 @@
       </p:sp>
       <p:sp>
         <p:nvSpPr>
-          <p:cNvPr id="25" name="Text 22"/>
+          <p:cNvPr id="25" name="Text 21"/>
           <p:cNvSpPr/>
           <p:nvPr/>
         </p:nvSpPr>
@@ -7214,14 +7074,14 @@
       </p:sp>
       <p:pic>
         <p:nvPicPr>
-          <p:cNvPr id="26" name="Image 1" descr="/Users/danwahlin/.copilot/session-state/56a7a0da-def8-48d4-b5e8-0ac3878cb8dd/files/slides-build/icons/FaGithub-0969DA.png">    </p:cNvPr>
+          <p:cNvPr id="26" name="Image 2" descr="/Users/danwahlin/.copilot/session-state/56a7a0da-def8-48d4-b5e8-0ac3878cb8dd/files/slides-build/icons/FaGithub-0969DA.png">    </p:cNvPr>
           <p:cNvPicPr>
             <a:picLocks noChangeAspect="1"/>
           </p:cNvPicPr>
           <p:nvPr/>
         </p:nvPicPr>
         <p:blipFill>
-          <a:blip r:embed="rId3"/>
+          <a:blip r:embed="rId4"/>
           <a:stretch>
             <a:fillRect/>
           </a:stretch>
@@ -7238,7 +7098,7 @@
       </p:pic>
       <p:sp>
         <p:nvSpPr>
-          <p:cNvPr id="27" name="Text 23"/>
+          <p:cNvPr id="27" name="Text 22"/>
           <p:cNvSpPr/>
           <p:nvPr/>
         </p:nvSpPr>
@@ -7277,7 +7137,7 @@
       </p:sp>
       <p:sp>
         <p:nvSpPr>
-          <p:cNvPr id="28" name="Text 24"/>
+          <p:cNvPr id="28" name="Text 23"/>
           <p:cNvSpPr/>
           <p:nvPr/>
         </p:nvSpPr>
@@ -7307,7 +7167,7 @@
                 <a:latin typeface="Arial" pitchFamily="34" charset="0"/>
                 <a:ea typeface="Arial" pitchFamily="34" charset="-122"/>
                 <a:cs typeface="Arial" pitchFamily="34" charset="-120"/>
-                <a:hlinkClick r:id="rId4" invalidUrl="" action="" tgtFrame="" tooltip="https://github.com/github/copilot-app-for-beginners/tree/main/02-sessions-worktrees-context" history="1" highlightClick="0" endSnd="0">
+                <a:hlinkClick r:id="rId5" invalidUrl="" action="" tgtFrame="" tooltip="https://github.com/github/copilot-app-for-beginners/tree/main/02-sessions-worktrees-context" history="1" highlightClick="0" endSnd="0">
                   <a:extLst>
                     <a:ext uri="{A12FA001-AC4F-418D-AE19-62706E023703}">
                       <ahyp:hlinkClr xmlns:ahyp="http://schemas.microsoft.com/office/drawing/2018/hyperlinkcolor" val="tx"/>
@@ -7323,7 +7183,7 @@
       </p:sp>
       <p:sp>
         <p:nvSpPr>
-          <p:cNvPr id="29" name="Text 25"/>
+          <p:cNvPr id="29" name="Text 24"/>
           <p:cNvSpPr/>
           <p:nvPr/>
         </p:nvSpPr>
@@ -7362,7 +7222,7 @@
       </p:sp>
       <p:sp>
         <p:nvSpPr>
-          <p:cNvPr id="30" name="Text 26"/>
+          <p:cNvPr id="30" name="Text 25"/>
           <p:cNvSpPr/>
           <p:nvPr/>
         </p:nvSpPr>
@@ -7392,7 +7252,7 @@
                 <a:latin typeface="Arial" pitchFamily="34" charset="0"/>
                 <a:ea typeface="Arial" pitchFamily="34" charset="-122"/>
                 <a:cs typeface="Arial" pitchFamily="34" charset="-120"/>
-                <a:hlinkClick r:id="rId5" invalidUrl="" action="" tgtFrame="" tooltip="https://github.com/github/copilot-app-for-beginners/tree/main/03-development-workflows" history="1" highlightClick="0" endSnd="0">
+                <a:hlinkClick r:id="rId6" invalidUrl="" action="" tgtFrame="" tooltip="https://github.com/github/copilot-app-for-beginners/tree/main/03-development-workflows" history="1" highlightClick="0" endSnd="0">
                   <a:extLst>
                     <a:ext uri="{A12FA001-AC4F-418D-AE19-62706E023703}">
                       <ahyp:hlinkClr xmlns:ahyp="http://schemas.microsoft.com/office/drawing/2018/hyperlinkcolor" val="tx"/>
@@ -7438,112 +7298,9 @@
           <a:chExt cx="0" cy="0"/>
         </a:xfrm>
       </p:grpSpPr>
-      <p:sp>
-        <p:nvSpPr>
-          <p:cNvPr id="2" name="Text 0"/>
-          <p:cNvSpPr/>
-          <p:nvPr/>
-        </p:nvSpPr>
-        <p:spPr>
-          <a:xfrm>
-            <a:off x="0" y="0"/>
-            <a:ext cx="9144000" cy="76200"/>
-          </a:xfrm>
-          <a:prstGeom prst="rect">
-            <a:avLst/>
-          </a:prstGeom>
-          <a:solidFill>
-            <a:srgbClr val="1A7F37"/>
-          </a:solidFill>
-          <a:ln/>
-        </p:spPr>
-        <p:txBody>
-          <a:bodyPr wrap="square" rtlCol="0" anchor="ctr"/>
-          <a:lstStyle/>
-          <a:p>
-            <a:pPr indent="0" marL="0">
-              <a:buNone/>
-            </a:pPr>
-            <a:endParaRPr lang="en-US" dirty="0"/>
-          </a:p>
-        </p:txBody>
-      </p:sp>
-      <p:sp>
-        <p:nvSpPr>
-          <p:cNvPr id="3" name="Text 1"/>
-          <p:cNvSpPr/>
-          <p:nvPr/>
-        </p:nvSpPr>
-        <p:spPr>
-          <a:xfrm>
-            <a:off x="7340501" y="177701"/>
-            <a:ext cx="1168301" cy="279350"/>
-          </a:xfrm>
-          <a:prstGeom prst="roundRect">
-            <a:avLst>
-              <a:gd name="adj" fmla="val 22731"/>
-            </a:avLst>
-          </a:prstGeom>
-          <a:solidFill>
-            <a:srgbClr val="1A7F37"/>
-          </a:solidFill>
-          <a:ln/>
-        </p:spPr>
-        <p:txBody>
-          <a:bodyPr wrap="square" rtlCol="0" anchor="ctr"/>
-          <a:lstStyle/>
-          <a:p>
-            <a:pPr indent="0" marL="0">
-              <a:buNone/>
-            </a:pPr>
-            <a:endParaRPr lang="en-US" dirty="0"/>
-          </a:p>
-        </p:txBody>
-      </p:sp>
-      <p:sp>
-        <p:nvSpPr>
-          <p:cNvPr id="4" name="Text 2"/>
-          <p:cNvSpPr/>
-          <p:nvPr/>
-        </p:nvSpPr>
-        <p:spPr>
-          <a:xfrm>
-            <a:off x="7461041" y="231577"/>
-            <a:ext cx="927071" cy="171450"/>
-          </a:xfrm>
-          <a:prstGeom prst="rect">
-            <a:avLst/>
-          </a:prstGeom>
-          <a:noFill/>
-          <a:ln/>
-        </p:spPr>
-        <p:txBody>
-          <a:bodyPr wrap="square" lIns="0" tIns="0" rIns="0" bIns="0" rtlCol="0" anchor="t"/>
-          <a:lstStyle/>
-          <a:p>
-            <a:pPr algn="ctr" indent="0" marL="0">
-              <a:buNone/>
-            </a:pPr>
-            <a:r>
-              <a:rPr lang="en-US" sz="1150" b="1" dirty="0">
-                <a:solidFill>
-                  <a:srgbClr val="FFFFFF"/>
-                </a:solidFill>
-                <a:latin typeface="Arial" pitchFamily="34" charset="0"/>
-                <a:ea typeface="Arial" pitchFamily="34" charset="-122"/>
-                <a:cs typeface="Arial" pitchFamily="34" charset="-120"/>
-              </a:rPr>
-              <a:t>CHAPTER 02</a:t>
-            </a:r>
-            <a:endParaRPr lang="en-US" sz="1150" dirty="0"/>
-          </a:p>
-        </p:txBody>
-      </p:sp>
       <p:pic>
         <p:nvPicPr>
-          <p:cNvPr id="5" name="Image 0" descr="/Users/danwahlin/.copilot/session-state/56a7a0da-def8-48d4-b5e8-0ac3878cb8dd/files/slides-build/icons/FaGithub-1F2328.png">
-            <a:hlinkClick r:id="rId2" tooltip="https://github.com/github/copilot-app-for-beginners/tree/main/02-sessions-worktrees-context"/>
-          </p:cNvPr>
+          <p:cNvPr id="2" name="Image 0" descr="/Users/danwahlin/.copilot/session-state/56a7a0da-def8-48d4-b5e8-0ac3878cb8dd/files/slides-build/img/grad-corner.png">    </p:cNvPr>
           <p:cNvPicPr>
             <a:picLocks noChangeAspect="1"/>
           </p:cNvPicPr>
@@ -7557,6 +7314,103 @@
         </p:blipFill>
         <p:spPr>
           <a:xfrm>
+            <a:off x="6349901" y="0"/>
+            <a:ext cx="2793950" cy="1308050"/>
+          </a:xfrm>
+          <a:prstGeom prst="rect">
+            <a:avLst/>
+          </a:prstGeom>
+        </p:spPr>
+      </p:pic>
+      <p:sp>
+        <p:nvSpPr>
+          <p:cNvPr id="3" name="Text 0"/>
+          <p:cNvSpPr/>
+          <p:nvPr/>
+        </p:nvSpPr>
+        <p:spPr>
+          <a:xfrm>
+            <a:off x="7340501" y="177701"/>
+            <a:ext cx="1168301" cy="279350"/>
+          </a:xfrm>
+          <a:prstGeom prst="roundRect">
+            <a:avLst>
+              <a:gd name="adj" fmla="val 22731"/>
+            </a:avLst>
+          </a:prstGeom>
+          <a:solidFill>
+            <a:srgbClr val="1A7F37"/>
+          </a:solidFill>
+          <a:ln/>
+        </p:spPr>
+        <p:txBody>
+          <a:bodyPr wrap="square" rtlCol="0" anchor="ctr"/>
+          <a:lstStyle/>
+          <a:p>
+            <a:pPr indent="0" marL="0">
+              <a:buNone/>
+            </a:pPr>
+            <a:endParaRPr lang="en-US" dirty="0"/>
+          </a:p>
+        </p:txBody>
+      </p:sp>
+      <p:sp>
+        <p:nvSpPr>
+          <p:cNvPr id="4" name="Text 1"/>
+          <p:cNvSpPr/>
+          <p:nvPr/>
+        </p:nvSpPr>
+        <p:spPr>
+          <a:xfrm>
+            <a:off x="7461041" y="231577"/>
+            <a:ext cx="927071" cy="171450"/>
+          </a:xfrm>
+          <a:prstGeom prst="rect">
+            <a:avLst/>
+          </a:prstGeom>
+          <a:noFill/>
+          <a:ln/>
+        </p:spPr>
+        <p:txBody>
+          <a:bodyPr wrap="square" lIns="0" tIns="0" rIns="0" bIns="0" rtlCol="0" anchor="t"/>
+          <a:lstStyle/>
+          <a:p>
+            <a:pPr algn="ctr" indent="0" marL="0">
+              <a:buNone/>
+            </a:pPr>
+            <a:r>
+              <a:rPr lang="en-US" sz="1150" b="1" dirty="0">
+                <a:solidFill>
+                  <a:srgbClr val="FFFFFF"/>
+                </a:solidFill>
+                <a:latin typeface="Arial" pitchFamily="34" charset="0"/>
+                <a:ea typeface="Arial" pitchFamily="34" charset="-122"/>
+                <a:cs typeface="Arial" pitchFamily="34" charset="-120"/>
+              </a:rPr>
+              <a:t>CHAPTER 02</a:t>
+            </a:r>
+            <a:endParaRPr lang="en-US" sz="1150" dirty="0"/>
+          </a:p>
+        </p:txBody>
+      </p:sp>
+      <p:pic>
+        <p:nvPicPr>
+          <p:cNvPr id="5" name="Image 1" descr="/Users/danwahlin/.copilot/session-state/56a7a0da-def8-48d4-b5e8-0ac3878cb8dd/files/slides-build/icons/FaGithub-1F2328.png">
+            <a:hlinkClick r:id="rId3" tooltip="https://github.com/github/copilot-app-for-beginners/tree/main/02-sessions-worktrees-context"/>
+          </p:cNvPr>
+          <p:cNvPicPr>
+            <a:picLocks noChangeAspect="1"/>
+          </p:cNvPicPr>
+          <p:nvPr/>
+        </p:nvPicPr>
+        <p:blipFill>
+          <a:blip r:embed="rId2"/>
+          <a:stretch>
+            <a:fillRect/>
+          </a:stretch>
+        </p:blipFill>
+        <p:spPr>
+          <a:xfrm>
             <a:off x="8610600" y="165050"/>
             <a:ext cx="304800" cy="304800"/>
           </a:xfrm>
@@ -7567,7 +7421,7 @@
       </p:pic>
       <p:sp>
         <p:nvSpPr>
-          <p:cNvPr id="6" name="Text 3"/>
+          <p:cNvPr id="6" name="Text 2"/>
           <p:cNvSpPr/>
           <p:nvPr/>
         </p:nvSpPr>
@@ -7606,7 +7460,7 @@
       </p:sp>
       <p:sp>
         <p:nvSpPr>
-          <p:cNvPr id="7" name="Text 4"/>
+          <p:cNvPr id="7" name="Text 3"/>
           <p:cNvSpPr/>
           <p:nvPr/>
         </p:nvSpPr>
@@ -7651,7 +7505,7 @@
       </p:sp>
       <p:sp>
         <p:nvSpPr>
-          <p:cNvPr id="8" name="Text 5"/>
+          <p:cNvPr id="8" name="Text 4"/>
           <p:cNvSpPr/>
           <p:nvPr/>
         </p:nvSpPr>
@@ -7683,7 +7537,7 @@
       </p:sp>
       <p:sp>
         <p:nvSpPr>
-          <p:cNvPr id="9" name="Shape 6"/>
+          <p:cNvPr id="9" name="Shape 5"/>
           <p:cNvSpPr/>
           <p:nvPr/>
         </p:nvSpPr>
@@ -7706,7 +7560,7 @@
       </p:sp>
       <p:sp>
         <p:nvSpPr>
-          <p:cNvPr id="10" name="Shape 7"/>
+          <p:cNvPr id="10" name="Shape 6"/>
           <p:cNvSpPr/>
           <p:nvPr/>
         </p:nvSpPr>
@@ -7729,7 +7583,7 @@
       </p:sp>
       <p:sp>
         <p:nvSpPr>
-          <p:cNvPr id="11" name="Shape 8"/>
+          <p:cNvPr id="11" name="Shape 7"/>
           <p:cNvSpPr/>
           <p:nvPr/>
         </p:nvSpPr>
@@ -7752,7 +7606,7 @@
       </p:sp>
       <p:sp>
         <p:nvSpPr>
-          <p:cNvPr id="12" name="Shape 9"/>
+          <p:cNvPr id="12" name="Shape 8"/>
           <p:cNvSpPr/>
           <p:nvPr/>
         </p:nvSpPr>
@@ -7775,7 +7629,7 @@
       </p:sp>
       <p:sp>
         <p:nvSpPr>
-          <p:cNvPr id="13" name="Text 10"/>
+          <p:cNvPr id="13" name="Text 9"/>
           <p:cNvSpPr/>
           <p:nvPr/>
         </p:nvSpPr>
@@ -7814,7 +7668,7 @@
       </p:sp>
       <p:sp>
         <p:nvSpPr>
-          <p:cNvPr id="14" name="Text 11"/>
+          <p:cNvPr id="14" name="Text 10"/>
           <p:cNvSpPr/>
           <p:nvPr/>
         </p:nvSpPr>
@@ -7853,7 +7707,7 @@
       </p:sp>
       <p:sp>
         <p:nvSpPr>
-          <p:cNvPr id="15" name="Text 12"/>
+          <p:cNvPr id="15" name="Text 11"/>
           <p:cNvSpPr/>
           <p:nvPr/>
         </p:nvSpPr>
@@ -7895,7 +7749,7 @@
       </p:sp>
       <p:sp>
         <p:nvSpPr>
-          <p:cNvPr id="16" name="Text 13"/>
+          <p:cNvPr id="16" name="Text 12"/>
           <p:cNvSpPr/>
           <p:nvPr/>
         </p:nvSpPr>
@@ -7927,7 +7781,7 @@
       </p:sp>
       <p:sp>
         <p:nvSpPr>
-          <p:cNvPr id="17" name="Shape 14"/>
+          <p:cNvPr id="17" name="Shape 13"/>
           <p:cNvSpPr/>
           <p:nvPr/>
         </p:nvSpPr>
@@ -7950,7 +7804,7 @@
       </p:sp>
       <p:sp>
         <p:nvSpPr>
-          <p:cNvPr id="18" name="Shape 15"/>
+          <p:cNvPr id="18" name="Shape 14"/>
           <p:cNvSpPr/>
           <p:nvPr/>
         </p:nvSpPr>
@@ -7973,7 +7827,7 @@
       </p:sp>
       <p:sp>
         <p:nvSpPr>
-          <p:cNvPr id="19" name="Shape 16"/>
+          <p:cNvPr id="19" name="Shape 15"/>
           <p:cNvSpPr/>
           <p:nvPr/>
         </p:nvSpPr>
@@ -7996,7 +7850,7 @@
       </p:sp>
       <p:sp>
         <p:nvSpPr>
-          <p:cNvPr id="20" name="Shape 17"/>
+          <p:cNvPr id="20" name="Shape 16"/>
           <p:cNvSpPr/>
           <p:nvPr/>
         </p:nvSpPr>
@@ -8019,7 +7873,7 @@
       </p:sp>
       <p:sp>
         <p:nvSpPr>
-          <p:cNvPr id="21" name="Text 18"/>
+          <p:cNvPr id="21" name="Text 17"/>
           <p:cNvSpPr/>
           <p:nvPr/>
         </p:nvSpPr>
@@ -8058,7 +7912,7 @@
       </p:sp>
       <p:sp>
         <p:nvSpPr>
-          <p:cNvPr id="22" name="Text 19"/>
+          <p:cNvPr id="22" name="Text 18"/>
           <p:cNvSpPr/>
           <p:nvPr/>
         </p:nvSpPr>
@@ -8097,7 +7951,7 @@
       </p:sp>
       <p:sp>
         <p:nvSpPr>
-          <p:cNvPr id="23" name="Text 20"/>
+          <p:cNvPr id="23" name="Text 19"/>
           <p:cNvSpPr/>
           <p:nvPr/>
         </p:nvSpPr>
@@ -8139,7 +7993,7 @@
       </p:sp>
       <p:sp>
         <p:nvSpPr>
-          <p:cNvPr id="24" name="Text 21"/>
+          <p:cNvPr id="24" name="Text 20"/>
           <p:cNvSpPr/>
           <p:nvPr/>
         </p:nvSpPr>
@@ -8171,7 +8025,7 @@
       </p:sp>
       <p:sp>
         <p:nvSpPr>
-          <p:cNvPr id="25" name="Shape 22"/>
+          <p:cNvPr id="25" name="Shape 21"/>
           <p:cNvSpPr/>
           <p:nvPr/>
         </p:nvSpPr>
@@ -8194,7 +8048,7 @@
       </p:sp>
       <p:sp>
         <p:nvSpPr>
-          <p:cNvPr id="26" name="Shape 23"/>
+          <p:cNvPr id="26" name="Shape 22"/>
           <p:cNvSpPr/>
           <p:nvPr/>
         </p:nvSpPr>
@@ -8217,7 +8071,7 @@
       </p:sp>
       <p:sp>
         <p:nvSpPr>
-          <p:cNvPr id="27" name="Shape 24"/>
+          <p:cNvPr id="27" name="Shape 23"/>
           <p:cNvSpPr/>
           <p:nvPr/>
         </p:nvSpPr>
@@ -8240,7 +8094,7 @@
       </p:sp>
       <p:sp>
         <p:nvSpPr>
-          <p:cNvPr id="28" name="Shape 25"/>
+          <p:cNvPr id="28" name="Shape 24"/>
           <p:cNvSpPr/>
           <p:nvPr/>
         </p:nvSpPr>
@@ -8263,7 +8117,7 @@
       </p:sp>
       <p:sp>
         <p:nvSpPr>
-          <p:cNvPr id="29" name="Text 26"/>
+          <p:cNvPr id="29" name="Text 25"/>
           <p:cNvSpPr/>
           <p:nvPr/>
         </p:nvSpPr>
@@ -8302,7 +8156,7 @@
       </p:sp>
       <p:sp>
         <p:nvSpPr>
-          <p:cNvPr id="30" name="Text 27"/>
+          <p:cNvPr id="30" name="Text 26"/>
           <p:cNvSpPr/>
           <p:nvPr/>
         </p:nvSpPr>
@@ -8341,7 +8195,7 @@
       </p:sp>
       <p:sp>
         <p:nvSpPr>
-          <p:cNvPr id="31" name="Text 28"/>
+          <p:cNvPr id="31" name="Text 27"/>
           <p:cNvSpPr/>
           <p:nvPr/>
         </p:nvSpPr>
@@ -8515,82 +8369,9 @@
           </a:p>
         </p:txBody>
       </p:sp>
-      <p:sp>
-        <p:nvSpPr>
-          <p:cNvPr id="5" name="Text 3"/>
-          <p:cNvSpPr/>
-          <p:nvPr/>
-        </p:nvSpPr>
-        <p:spPr>
-          <a:xfrm>
-            <a:off x="7340501" y="177701"/>
-            <a:ext cx="1168301" cy="279350"/>
-          </a:xfrm>
-          <a:prstGeom prst="roundRect">
-            <a:avLst>
-              <a:gd name="adj" fmla="val 22731"/>
-            </a:avLst>
-          </a:prstGeom>
-          <a:solidFill>
-            <a:srgbClr val="1A7F37"/>
-          </a:solidFill>
-          <a:ln/>
-        </p:spPr>
-        <p:txBody>
-          <a:bodyPr wrap="square" rtlCol="0" anchor="ctr"/>
-          <a:lstStyle/>
-          <a:p>
-            <a:pPr indent="0" marL="0">
-              <a:buNone/>
-            </a:pPr>
-            <a:endParaRPr lang="en-US" dirty="0"/>
-          </a:p>
-        </p:txBody>
-      </p:sp>
-      <p:sp>
-        <p:nvSpPr>
-          <p:cNvPr id="6" name="Text 4"/>
-          <p:cNvSpPr/>
-          <p:nvPr/>
-        </p:nvSpPr>
-        <p:spPr>
-          <a:xfrm>
-            <a:off x="7461041" y="231577"/>
-            <a:ext cx="927071" cy="171450"/>
-          </a:xfrm>
-          <a:prstGeom prst="rect">
-            <a:avLst/>
-          </a:prstGeom>
-          <a:noFill/>
-          <a:ln/>
-        </p:spPr>
-        <p:txBody>
-          <a:bodyPr wrap="square" lIns="0" tIns="0" rIns="0" bIns="0" rtlCol="0" anchor="t"/>
-          <a:lstStyle/>
-          <a:p>
-            <a:pPr algn="ctr" indent="0" marL="0">
-              <a:buNone/>
-            </a:pPr>
-            <a:r>
-              <a:rPr lang="en-US" sz="1150" b="1" dirty="0">
-                <a:solidFill>
-                  <a:srgbClr val="FFFFFF"/>
-                </a:solidFill>
-                <a:latin typeface="Arial" pitchFamily="34" charset="0"/>
-                <a:ea typeface="Arial" pitchFamily="34" charset="-122"/>
-                <a:cs typeface="Arial" pitchFamily="34" charset="-120"/>
-              </a:rPr>
-              <a:t>CHAPTER 02</a:t>
-            </a:r>
-            <a:endParaRPr lang="en-US" sz="1150" dirty="0"/>
-          </a:p>
-        </p:txBody>
-      </p:sp>
       <p:pic>
         <p:nvPicPr>
-          <p:cNvPr id="7" name="Image 0" descr="/Users/danwahlin/.copilot/session-state/56a7a0da-def8-48d4-b5e8-0ac3878cb8dd/files/slides-build/icons/FaGithub-1F2328.png">
-            <a:hlinkClick r:id="rId2" tooltip="https://github.com/github/copilot-app-for-beginners/tree/main/02-sessions-worktrees-context"/>
-          </p:cNvPr>
+          <p:cNvPr id="5" name="Image 0" descr="/Users/danwahlin/.copilot/session-state/56a7a0da-def8-48d4-b5e8-0ac3878cb8dd/files/slides-build/img/grad-corner.png">    </p:cNvPr>
           <p:cNvPicPr>
             <a:picLocks noChangeAspect="1"/>
           </p:cNvPicPr>
@@ -8604,6 +8385,103 @@
         </p:blipFill>
         <p:spPr>
           <a:xfrm>
+            <a:off x="6349901" y="0"/>
+            <a:ext cx="2793950" cy="1308050"/>
+          </a:xfrm>
+          <a:prstGeom prst="rect">
+            <a:avLst/>
+          </a:prstGeom>
+        </p:spPr>
+      </p:pic>
+      <p:sp>
+        <p:nvSpPr>
+          <p:cNvPr id="6" name="Text 3"/>
+          <p:cNvSpPr/>
+          <p:nvPr/>
+        </p:nvSpPr>
+        <p:spPr>
+          <a:xfrm>
+            <a:off x="7340501" y="177701"/>
+            <a:ext cx="1168301" cy="279350"/>
+          </a:xfrm>
+          <a:prstGeom prst="roundRect">
+            <a:avLst>
+              <a:gd name="adj" fmla="val 22731"/>
+            </a:avLst>
+          </a:prstGeom>
+          <a:solidFill>
+            <a:srgbClr val="1A7F37"/>
+          </a:solidFill>
+          <a:ln/>
+        </p:spPr>
+        <p:txBody>
+          <a:bodyPr wrap="square" rtlCol="0" anchor="ctr"/>
+          <a:lstStyle/>
+          <a:p>
+            <a:pPr indent="0" marL="0">
+              <a:buNone/>
+            </a:pPr>
+            <a:endParaRPr lang="en-US" dirty="0"/>
+          </a:p>
+        </p:txBody>
+      </p:sp>
+      <p:sp>
+        <p:nvSpPr>
+          <p:cNvPr id="7" name="Text 4"/>
+          <p:cNvSpPr/>
+          <p:nvPr/>
+        </p:nvSpPr>
+        <p:spPr>
+          <a:xfrm>
+            <a:off x="7461041" y="231577"/>
+            <a:ext cx="927071" cy="171450"/>
+          </a:xfrm>
+          <a:prstGeom prst="rect">
+            <a:avLst/>
+          </a:prstGeom>
+          <a:noFill/>
+          <a:ln/>
+        </p:spPr>
+        <p:txBody>
+          <a:bodyPr wrap="square" lIns="0" tIns="0" rIns="0" bIns="0" rtlCol="0" anchor="t"/>
+          <a:lstStyle/>
+          <a:p>
+            <a:pPr algn="ctr" indent="0" marL="0">
+              <a:buNone/>
+            </a:pPr>
+            <a:r>
+              <a:rPr lang="en-US" sz="1150" b="1" dirty="0">
+                <a:solidFill>
+                  <a:srgbClr val="FFFFFF"/>
+                </a:solidFill>
+                <a:latin typeface="Arial" pitchFamily="34" charset="0"/>
+                <a:ea typeface="Arial" pitchFamily="34" charset="-122"/>
+                <a:cs typeface="Arial" pitchFamily="34" charset="-120"/>
+              </a:rPr>
+              <a:t>CHAPTER 02</a:t>
+            </a:r>
+            <a:endParaRPr lang="en-US" sz="1150" dirty="0"/>
+          </a:p>
+        </p:txBody>
+      </p:sp>
+      <p:pic>
+        <p:nvPicPr>
+          <p:cNvPr id="8" name="Image 1" descr="/Users/danwahlin/.copilot/session-state/56a7a0da-def8-48d4-b5e8-0ac3878cb8dd/files/slides-build/icons/FaGithub-1F2328.png">
+            <a:hlinkClick r:id="rId3" tooltip="https://github.com/github/copilot-app-for-beginners/tree/main/02-sessions-worktrees-context"/>
+          </p:cNvPr>
+          <p:cNvPicPr>
+            <a:picLocks noChangeAspect="1"/>
+          </p:cNvPicPr>
+          <p:nvPr/>
+        </p:nvPicPr>
+        <p:blipFill>
+          <a:blip r:embed="rId2"/>
+          <a:stretch>
+            <a:fillRect/>
+          </a:stretch>
+        </p:blipFill>
+        <p:spPr>
+          <a:xfrm>
             <a:off x="8610600" y="165050"/>
             <a:ext cx="304800" cy="304800"/>
           </a:xfrm>
@@ -8614,7 +8492,7 @@
       </p:pic>
       <p:sp>
         <p:nvSpPr>
-          <p:cNvPr id="8" name="Text 5"/>
+          <p:cNvPr id="9" name="Text 5"/>
           <p:cNvSpPr/>
           <p:nvPr/>
         </p:nvSpPr>
@@ -8653,7 +8531,7 @@
       </p:sp>
       <p:sp>
         <p:nvSpPr>
-          <p:cNvPr id="9" name="Text 6"/>
+          <p:cNvPr id="10" name="Text 6"/>
           <p:cNvSpPr/>
           <p:nvPr/>
         </p:nvSpPr>
@@ -8698,7 +8576,7 @@
       </p:sp>
       <p:sp>
         <p:nvSpPr>
-          <p:cNvPr id="10" name="Text 7"/>
+          <p:cNvPr id="11" name="Text 7"/>
           <p:cNvSpPr/>
           <p:nvPr/>
         </p:nvSpPr>
@@ -8730,7 +8608,7 @@
       </p:sp>
       <p:sp>
         <p:nvSpPr>
-          <p:cNvPr id="11" name="Text 8"/>
+          <p:cNvPr id="12" name="Text 8"/>
           <p:cNvSpPr/>
           <p:nvPr/>
         </p:nvSpPr>
@@ -8802,112 +8680,9 @@
           <a:chExt cx="0" cy="0"/>
         </a:xfrm>
       </p:grpSpPr>
-      <p:sp>
-        <p:nvSpPr>
-          <p:cNvPr id="2" name="Text 0"/>
-          <p:cNvSpPr/>
-          <p:nvPr/>
-        </p:nvSpPr>
-        <p:spPr>
-          <a:xfrm>
-            <a:off x="0" y="0"/>
-            <a:ext cx="9144000" cy="76200"/>
-          </a:xfrm>
-          <a:prstGeom prst="rect">
-            <a:avLst/>
-          </a:prstGeom>
-          <a:solidFill>
-            <a:srgbClr val="9A6700"/>
-          </a:solidFill>
-          <a:ln/>
-        </p:spPr>
-        <p:txBody>
-          <a:bodyPr wrap="square" rtlCol="0" anchor="ctr"/>
-          <a:lstStyle/>
-          <a:p>
-            <a:pPr indent="0" marL="0">
-              <a:buNone/>
-            </a:pPr>
-            <a:endParaRPr lang="en-US" dirty="0"/>
-          </a:p>
-        </p:txBody>
-      </p:sp>
-      <p:sp>
-        <p:nvSpPr>
-          <p:cNvPr id="3" name="Text 1"/>
-          <p:cNvSpPr/>
-          <p:nvPr/>
-        </p:nvSpPr>
-        <p:spPr>
-          <a:xfrm>
-            <a:off x="7340501" y="177701"/>
-            <a:ext cx="1168301" cy="279350"/>
-          </a:xfrm>
-          <a:prstGeom prst="roundRect">
-            <a:avLst>
-              <a:gd name="adj" fmla="val 22731"/>
-            </a:avLst>
-          </a:prstGeom>
-          <a:solidFill>
-            <a:srgbClr val="1A7F37"/>
-          </a:solidFill>
-          <a:ln/>
-        </p:spPr>
-        <p:txBody>
-          <a:bodyPr wrap="square" rtlCol="0" anchor="ctr"/>
-          <a:lstStyle/>
-          <a:p>
-            <a:pPr indent="0" marL="0">
-              <a:buNone/>
-            </a:pPr>
-            <a:endParaRPr lang="en-US" dirty="0"/>
-          </a:p>
-        </p:txBody>
-      </p:sp>
-      <p:sp>
-        <p:nvSpPr>
-          <p:cNvPr id="4" name="Text 2"/>
-          <p:cNvSpPr/>
-          <p:nvPr/>
-        </p:nvSpPr>
-        <p:spPr>
-          <a:xfrm>
-            <a:off x="7461041" y="231577"/>
-            <a:ext cx="927071" cy="171450"/>
-          </a:xfrm>
-          <a:prstGeom prst="rect">
-            <a:avLst/>
-          </a:prstGeom>
-          <a:noFill/>
-          <a:ln/>
-        </p:spPr>
-        <p:txBody>
-          <a:bodyPr wrap="square" lIns="0" tIns="0" rIns="0" bIns="0" rtlCol="0" anchor="t"/>
-          <a:lstStyle/>
-          <a:p>
-            <a:pPr algn="ctr" indent="0" marL="0">
-              <a:buNone/>
-            </a:pPr>
-            <a:r>
-              <a:rPr lang="en-US" sz="1150" b="1" dirty="0">
-                <a:solidFill>
-                  <a:srgbClr val="FFFFFF"/>
-                </a:solidFill>
-                <a:latin typeface="Arial" pitchFamily="34" charset="0"/>
-                <a:ea typeface="Arial" pitchFamily="34" charset="-122"/>
-                <a:cs typeface="Arial" pitchFamily="34" charset="-120"/>
-              </a:rPr>
-              <a:t>CHAPTER 02</a:t>
-            </a:r>
-            <a:endParaRPr lang="en-US" sz="1150" dirty="0"/>
-          </a:p>
-        </p:txBody>
-      </p:sp>
       <p:pic>
         <p:nvPicPr>
-          <p:cNvPr id="5" name="Image 0" descr="/Users/danwahlin/.copilot/session-state/56a7a0da-def8-48d4-b5e8-0ac3878cb8dd/files/slides-build/icons/FaGithub-1F2328.png">
-            <a:hlinkClick r:id="rId2" tooltip="https://github.com/github/copilot-app-for-beginners/tree/main/02-sessions-worktrees-context"/>
-          </p:cNvPr>
+          <p:cNvPr id="2" name="Image 0" descr="/Users/danwahlin/.copilot/session-state/56a7a0da-def8-48d4-b5e8-0ac3878cb8dd/files/slides-build/img/grad-corner.png">    </p:cNvPr>
           <p:cNvPicPr>
             <a:picLocks noChangeAspect="1"/>
           </p:cNvPicPr>
@@ -8921,6 +8696,103 @@
         </p:blipFill>
         <p:spPr>
           <a:xfrm>
+            <a:off x="6349901" y="0"/>
+            <a:ext cx="2793950" cy="1308050"/>
+          </a:xfrm>
+          <a:prstGeom prst="rect">
+            <a:avLst/>
+          </a:prstGeom>
+        </p:spPr>
+      </p:pic>
+      <p:sp>
+        <p:nvSpPr>
+          <p:cNvPr id="3" name="Text 0"/>
+          <p:cNvSpPr/>
+          <p:nvPr/>
+        </p:nvSpPr>
+        <p:spPr>
+          <a:xfrm>
+            <a:off x="7340501" y="177701"/>
+            <a:ext cx="1168301" cy="279350"/>
+          </a:xfrm>
+          <a:prstGeom prst="roundRect">
+            <a:avLst>
+              <a:gd name="adj" fmla="val 22731"/>
+            </a:avLst>
+          </a:prstGeom>
+          <a:solidFill>
+            <a:srgbClr val="1A7F37"/>
+          </a:solidFill>
+          <a:ln/>
+        </p:spPr>
+        <p:txBody>
+          <a:bodyPr wrap="square" rtlCol="0" anchor="ctr"/>
+          <a:lstStyle/>
+          <a:p>
+            <a:pPr indent="0" marL="0">
+              <a:buNone/>
+            </a:pPr>
+            <a:endParaRPr lang="en-US" dirty="0"/>
+          </a:p>
+        </p:txBody>
+      </p:sp>
+      <p:sp>
+        <p:nvSpPr>
+          <p:cNvPr id="4" name="Text 1"/>
+          <p:cNvSpPr/>
+          <p:nvPr/>
+        </p:nvSpPr>
+        <p:spPr>
+          <a:xfrm>
+            <a:off x="7461041" y="231577"/>
+            <a:ext cx="927071" cy="171450"/>
+          </a:xfrm>
+          <a:prstGeom prst="rect">
+            <a:avLst/>
+          </a:prstGeom>
+          <a:noFill/>
+          <a:ln/>
+        </p:spPr>
+        <p:txBody>
+          <a:bodyPr wrap="square" lIns="0" tIns="0" rIns="0" bIns="0" rtlCol="0" anchor="t"/>
+          <a:lstStyle/>
+          <a:p>
+            <a:pPr algn="ctr" indent="0" marL="0">
+              <a:buNone/>
+            </a:pPr>
+            <a:r>
+              <a:rPr lang="en-US" sz="1150" b="1" dirty="0">
+                <a:solidFill>
+                  <a:srgbClr val="FFFFFF"/>
+                </a:solidFill>
+                <a:latin typeface="Arial" pitchFamily="34" charset="0"/>
+                <a:ea typeface="Arial" pitchFamily="34" charset="-122"/>
+                <a:cs typeface="Arial" pitchFamily="34" charset="-120"/>
+              </a:rPr>
+              <a:t>CHAPTER 02</a:t>
+            </a:r>
+            <a:endParaRPr lang="en-US" sz="1150" dirty="0"/>
+          </a:p>
+        </p:txBody>
+      </p:sp>
+      <p:pic>
+        <p:nvPicPr>
+          <p:cNvPr id="5" name="Image 1" descr="/Users/danwahlin/.copilot/session-state/56a7a0da-def8-48d4-b5e8-0ac3878cb8dd/files/slides-build/icons/FaGithub-1F2328.png">
+            <a:hlinkClick r:id="rId3" tooltip="https://github.com/github/copilot-app-for-beginners/tree/main/02-sessions-worktrees-context"/>
+          </p:cNvPr>
+          <p:cNvPicPr>
+            <a:picLocks noChangeAspect="1"/>
+          </p:cNvPicPr>
+          <p:nvPr/>
+        </p:nvPicPr>
+        <p:blipFill>
+          <a:blip r:embed="rId2"/>
+          <a:stretch>
+            <a:fillRect/>
+          </a:stretch>
+        </p:blipFill>
+        <p:spPr>
+          <a:xfrm>
             <a:off x="8610600" y="165050"/>
             <a:ext cx="304800" cy="304800"/>
           </a:xfrm>
@@ -8931,7 +8803,7 @@
       </p:pic>
       <p:sp>
         <p:nvSpPr>
-          <p:cNvPr id="6" name="Text 3"/>
+          <p:cNvPr id="6" name="Text 2"/>
           <p:cNvSpPr/>
           <p:nvPr/>
         </p:nvSpPr>
@@ -8970,7 +8842,7 @@
       </p:sp>
       <p:sp>
         <p:nvSpPr>
-          <p:cNvPr id="7" name="Text 4"/>
+          <p:cNvPr id="7" name="Text 3"/>
           <p:cNvSpPr/>
           <p:nvPr/>
         </p:nvSpPr>
@@ -9015,7 +8887,7 @@
       </p:sp>
       <p:sp>
         <p:nvSpPr>
-          <p:cNvPr id="8" name="Text 5"/>
+          <p:cNvPr id="8" name="Text 4"/>
           <p:cNvSpPr/>
           <p:nvPr/>
         </p:nvSpPr>
@@ -9060,7 +8932,7 @@
       </p:sp>
       <p:sp>
         <p:nvSpPr>
-          <p:cNvPr id="9" name="Text 6"/>
+          <p:cNvPr id="9" name="Text 5"/>
           <p:cNvSpPr/>
           <p:nvPr/>
         </p:nvSpPr>
@@ -9103,63 +8975,7 @@
       </p:sp>
       <p:pic>
         <p:nvPicPr>
-          <p:cNvPr id="10" name="Image 1" descr="/Users/danwahlin/.copilot/session-state/56a7a0da-def8-48d4-b5e8-0ac3878cb8dd/files/slides-build/img/02-recording-booths-worktrees.jpg">    </p:cNvPr>
-          <p:cNvPicPr>
-            <a:picLocks noChangeAspect="1"/>
-          </p:cNvPicPr>
-          <p:nvPr/>
-        </p:nvPicPr>
-        <p:blipFill>
-          <a:blip r:embed="rId3"/>
-          <a:stretch>
-            <a:fillRect/>
-          </a:stretch>
-        </p:blipFill>
-        <p:spPr>
-          <a:xfrm>
-            <a:off x="558701" y="1747986"/>
-            <a:ext cx="4089350" cy="2726680"/>
-          </a:xfrm>
-          <a:prstGeom prst="rect">
-            <a:avLst/>
-          </a:prstGeom>
-        </p:spPr>
-      </p:pic>
-      <p:sp>
-        <p:nvSpPr>
-          <p:cNvPr id="11" name="Text 7"/>
-          <p:cNvSpPr/>
-          <p:nvPr/>
-        </p:nvSpPr>
-        <p:spPr>
-          <a:xfrm>
-            <a:off x="5003750" y="2166640"/>
-            <a:ext cx="381000" cy="381000"/>
-          </a:xfrm>
-          <a:prstGeom prst="roundRect">
-            <a:avLst>
-              <a:gd name="adj" fmla="val 23333"/>
-            </a:avLst>
-          </a:prstGeom>
-          <a:solidFill>
-            <a:srgbClr val="DDF4FF"/>
-          </a:solidFill>
-          <a:ln/>
-        </p:spPr>
-        <p:txBody>
-          <a:bodyPr wrap="square" rtlCol="0" anchor="ctr"/>
-          <a:lstStyle/>
-          <a:p>
-            <a:pPr indent="0" marL="0">
-              <a:buNone/>
-            </a:pPr>
-            <a:endParaRPr lang="en-US" dirty="0"/>
-          </a:p>
-        </p:txBody>
-      </p:sp>
-      <p:pic>
-        <p:nvPicPr>
-          <p:cNvPr id="12" name="Image 2" descr="/Users/danwahlin/.copilot/session-state/56a7a0da-def8-48d4-b5e8-0ac3878cb8dd/files/slides-build/icons/GoRepo-0969DA.png">    </p:cNvPr>
+          <p:cNvPr id="10" name="Image 2" descr="/Users/danwahlin/.copilot/session-state/56a7a0da-def8-48d4-b5e8-0ac3878cb8dd/files/slides-build/img/02-recording-booths-worktrees.jpg">    </p:cNvPr>
           <p:cNvPicPr>
             <a:picLocks noChangeAspect="1"/>
           </p:cNvPicPr>
@@ -9173,8 +8989,8 @@
         </p:blipFill>
         <p:spPr>
           <a:xfrm>
-            <a:off x="5086350" y="2249239"/>
-            <a:ext cx="215801" cy="215801"/>
+            <a:off x="558701" y="1747986"/>
+            <a:ext cx="4089350" cy="2726680"/>
           </a:xfrm>
           <a:prstGeom prst="rect">
             <a:avLst/>
@@ -9183,94 +8999,13 @@
       </p:pic>
       <p:sp>
         <p:nvSpPr>
-          <p:cNvPr id="13" name="Text 8"/>
-          <p:cNvSpPr/>
-          <p:nvPr/>
-        </p:nvSpPr>
-        <p:spPr>
-          <a:xfrm>
-            <a:off x="5537150" y="2131219"/>
-            <a:ext cx="3010135" cy="228600"/>
-          </a:xfrm>
-          <a:prstGeom prst="rect">
-            <a:avLst/>
-          </a:prstGeom>
-          <a:noFill/>
-          <a:ln/>
-        </p:spPr>
-        <p:txBody>
-          <a:bodyPr wrap="square" lIns="0" tIns="0" rIns="0" bIns="0" rtlCol="0" anchor="t"/>
-          <a:lstStyle/>
-          <a:p>
-            <a:pPr algn="l" indent="0" marL="0">
-              <a:buNone/>
-            </a:pPr>
-            <a:r>
-              <a:rPr lang="en-US" sz="1550" b="1" dirty="0">
-                <a:solidFill>
-                  <a:srgbClr val="1F2328"/>
-                </a:solidFill>
-                <a:latin typeface="Arial" pitchFamily="34" charset="0"/>
-                <a:ea typeface="Arial" pitchFamily="34" charset="-122"/>
-                <a:cs typeface="Arial" pitchFamily="34" charset="-120"/>
-              </a:rPr>
-              <a:t>Same song</a:t>
-            </a:r>
-            <a:endParaRPr lang="en-US" sz="1550" dirty="0"/>
-          </a:p>
-        </p:txBody>
-      </p:sp>
-      <p:sp>
-        <p:nvSpPr>
-          <p:cNvPr id="14" name="Text 9"/>
-          <p:cNvSpPr/>
-          <p:nvPr/>
-        </p:nvSpPr>
-        <p:spPr>
-          <a:xfrm>
-            <a:off x="5537150" y="2385120"/>
-            <a:ext cx="3010135" cy="198090"/>
-          </a:xfrm>
-          <a:prstGeom prst="rect">
-            <a:avLst/>
-          </a:prstGeom>
-          <a:noFill/>
-          <a:ln/>
-        </p:spPr>
-        <p:txBody>
-          <a:bodyPr wrap="square" lIns="0" tIns="0" rIns="0" bIns="0" rtlCol="0" anchor="t"/>
-          <a:lstStyle/>
-          <a:p>
-            <a:pPr algn="l" indent="0" marL="0">
-              <a:lnSpc>
-                <a:spcPts val="1560"/>
-              </a:lnSpc>
-              <a:buNone/>
-            </a:pPr>
-            <a:r>
-              <a:rPr lang="en-US" sz="1350" dirty="0">
-                <a:solidFill>
-                  <a:srgbClr val="59636E"/>
-                </a:solidFill>
-                <a:latin typeface="Arial" pitchFamily="34" charset="0"/>
-                <a:ea typeface="Arial" pitchFamily="34" charset="-122"/>
-                <a:cs typeface="Arial" pitchFamily="34" charset="-120"/>
-              </a:rPr>
-              <a:t>Every booth records for one repository.</a:t>
-            </a:r>
-            <a:endParaRPr lang="en-US" sz="1350" dirty="0"/>
-          </a:p>
-        </p:txBody>
-      </p:sp>
-      <p:sp>
-        <p:nvSpPr>
-          <p:cNvPr id="15" name="Text 10"/>
-          <p:cNvSpPr/>
-          <p:nvPr/>
-        </p:nvSpPr>
-        <p:spPr>
-          <a:xfrm>
-            <a:off x="5003750" y="2920901"/>
+          <p:cNvPr id="11" name="Text 6"/>
+          <p:cNvSpPr/>
+          <p:nvPr/>
+        </p:nvSpPr>
+        <p:spPr>
+          <a:xfrm>
+            <a:off x="5003750" y="2166640"/>
             <a:ext cx="381000" cy="381000"/>
           </a:xfrm>
           <a:prstGeom prst="roundRect">
@@ -9279,7 +9014,7 @@
             </a:avLst>
           </a:prstGeom>
           <a:solidFill>
-            <a:srgbClr val="FBEFFF"/>
+            <a:srgbClr val="DDF4FF"/>
           </a:solidFill>
           <a:ln/>
         </p:spPr>
@@ -9296,7 +9031,7 @@
       </p:sp>
       <p:pic>
         <p:nvPicPr>
-          <p:cNvPr id="16" name="Image 3" descr="/Users/danwahlin/.copilot/session-state/56a7a0da-def8-48d4-b5e8-0ac3878cb8dd/files/slides-build/icons/GoGitBranch-8250DF.png">    </p:cNvPr>
+          <p:cNvPr id="12" name="Image 3" descr="/Users/danwahlin/.copilot/session-state/56a7a0da-def8-48d4-b5e8-0ac3878cb8dd/files/slides-build/icons/GoRepo-0969DA.png">    </p:cNvPr>
           <p:cNvPicPr>
             <a:picLocks noChangeAspect="1"/>
           </p:cNvPicPr>
@@ -9310,7 +9045,7 @@
         </p:blipFill>
         <p:spPr>
           <a:xfrm>
-            <a:off x="5086350" y="3003500"/>
+            <a:off x="5086350" y="2249239"/>
             <a:ext cx="215801" cy="215801"/>
           </a:xfrm>
           <a:prstGeom prst="rect">
@@ -9320,14 +9055,14 @@
       </p:pic>
       <p:sp>
         <p:nvSpPr>
-          <p:cNvPr id="17" name="Text 11"/>
-          <p:cNvSpPr/>
-          <p:nvPr/>
-        </p:nvSpPr>
-        <p:spPr>
-          <a:xfrm>
-            <a:off x="5537150" y="2786360"/>
-            <a:ext cx="3160725" cy="228600"/>
+          <p:cNvPr id="13" name="Text 7"/>
+          <p:cNvSpPr/>
+          <p:nvPr/>
+        </p:nvSpPr>
+        <p:spPr>
+          <a:xfrm>
+            <a:off x="5537150" y="2131219"/>
+            <a:ext cx="3010135" cy="228600"/>
           </a:xfrm>
           <a:prstGeom prst="rect">
             <a:avLst/>
@@ -9351,7 +9086,7 @@
                 <a:ea typeface="Arial" pitchFamily="34" charset="-122"/>
                 <a:cs typeface="Arial" pitchFamily="34" charset="-120"/>
               </a:rPr>
-              <a:t>Own booth</a:t>
+              <a:t>Same song</a:t>
             </a:r>
             <a:endParaRPr lang="en-US" sz="1550" dirty="0"/>
           </a:p>
@@ -9359,14 +9094,14 @@
       </p:sp>
       <p:sp>
         <p:nvSpPr>
-          <p:cNvPr id="18" name="Text 12"/>
-          <p:cNvSpPr/>
-          <p:nvPr/>
-        </p:nvSpPr>
-        <p:spPr>
-          <a:xfrm>
-            <a:off x="5537150" y="3040261"/>
-            <a:ext cx="3160725" cy="396180"/>
+          <p:cNvPr id="14" name="Text 8"/>
+          <p:cNvSpPr/>
+          <p:nvPr/>
+        </p:nvSpPr>
+        <p:spPr>
+          <a:xfrm>
+            <a:off x="5537150" y="2385120"/>
+            <a:ext cx="3010135" cy="198090"/>
           </a:xfrm>
           <a:prstGeom prst="rect">
             <a:avLst/>
@@ -9393,7 +9128,7 @@
                 <a:ea typeface="Arial" pitchFamily="34" charset="-122"/>
                 <a:cs typeface="Arial" pitchFamily="34" charset="-120"/>
               </a:rPr>
-              <a:t>Each worktree has its own folder and branch.</a:t>
+              <a:t>Every booth records for one repository.</a:t>
             </a:r>
             <a:endParaRPr lang="en-US" sz="1350" dirty="0"/>
           </a:p>
@@ -9401,13 +9136,13 @@
       </p:sp>
       <p:sp>
         <p:nvSpPr>
-          <p:cNvPr id="19" name="Text 13"/>
-          <p:cNvSpPr/>
-          <p:nvPr/>
-        </p:nvSpPr>
-        <p:spPr>
-          <a:xfrm>
-            <a:off x="5003750" y="3675013"/>
+          <p:cNvPr id="15" name="Text 9"/>
+          <p:cNvSpPr/>
+          <p:nvPr/>
+        </p:nvSpPr>
+        <p:spPr>
+          <a:xfrm>
+            <a:off x="5003750" y="2920901"/>
             <a:ext cx="381000" cy="381000"/>
           </a:xfrm>
           <a:prstGeom prst="roundRect">
@@ -9416,7 +9151,7 @@
             </a:avLst>
           </a:prstGeom>
           <a:solidFill>
-            <a:srgbClr val="DAFBE1"/>
+            <a:srgbClr val="FBEFFF"/>
           </a:solidFill>
           <a:ln/>
         </p:spPr>
@@ -9433,7 +9168,7 @@
       </p:sp>
       <p:pic>
         <p:nvPicPr>
-          <p:cNvPr id="20" name="Image 4" descr="/Users/danwahlin/.copilot/session-state/56a7a0da-def8-48d4-b5e8-0ac3878cb8dd/files/slides-build/icons/GoGitMerge-1A7F37.png">    </p:cNvPr>
+          <p:cNvPr id="16" name="Image 4" descr="/Users/danwahlin/.copilot/session-state/56a7a0da-def8-48d4-b5e8-0ac3878cb8dd/files/slides-build/icons/GoGitBranch-8250DF.png">    </p:cNvPr>
           <p:cNvPicPr>
             <a:picLocks noChangeAspect="1"/>
           </p:cNvPicPr>
@@ -9447,6 +9182,143 @@
         </p:blipFill>
         <p:spPr>
           <a:xfrm>
+            <a:off x="5086350" y="3003500"/>
+            <a:ext cx="215801" cy="215801"/>
+          </a:xfrm>
+          <a:prstGeom prst="rect">
+            <a:avLst/>
+          </a:prstGeom>
+        </p:spPr>
+      </p:pic>
+      <p:sp>
+        <p:nvSpPr>
+          <p:cNvPr id="17" name="Text 10"/>
+          <p:cNvSpPr/>
+          <p:nvPr/>
+        </p:nvSpPr>
+        <p:spPr>
+          <a:xfrm>
+            <a:off x="5537150" y="2786360"/>
+            <a:ext cx="3160725" cy="228600"/>
+          </a:xfrm>
+          <a:prstGeom prst="rect">
+            <a:avLst/>
+          </a:prstGeom>
+          <a:noFill/>
+          <a:ln/>
+        </p:spPr>
+        <p:txBody>
+          <a:bodyPr wrap="square" lIns="0" tIns="0" rIns="0" bIns="0" rtlCol="0" anchor="t"/>
+          <a:lstStyle/>
+          <a:p>
+            <a:pPr algn="l" indent="0" marL="0">
+              <a:buNone/>
+            </a:pPr>
+            <a:r>
+              <a:rPr lang="en-US" sz="1550" b="1" dirty="0">
+                <a:solidFill>
+                  <a:srgbClr val="1F2328"/>
+                </a:solidFill>
+                <a:latin typeface="Arial" pitchFamily="34" charset="0"/>
+                <a:ea typeface="Arial" pitchFamily="34" charset="-122"/>
+                <a:cs typeface="Arial" pitchFamily="34" charset="-120"/>
+              </a:rPr>
+              <a:t>Own booth</a:t>
+            </a:r>
+            <a:endParaRPr lang="en-US" sz="1550" dirty="0"/>
+          </a:p>
+        </p:txBody>
+      </p:sp>
+      <p:sp>
+        <p:nvSpPr>
+          <p:cNvPr id="18" name="Text 11"/>
+          <p:cNvSpPr/>
+          <p:nvPr/>
+        </p:nvSpPr>
+        <p:spPr>
+          <a:xfrm>
+            <a:off x="5537150" y="3040261"/>
+            <a:ext cx="3160725" cy="396180"/>
+          </a:xfrm>
+          <a:prstGeom prst="rect">
+            <a:avLst/>
+          </a:prstGeom>
+          <a:noFill/>
+          <a:ln/>
+        </p:spPr>
+        <p:txBody>
+          <a:bodyPr wrap="square" lIns="0" tIns="0" rIns="0" bIns="0" rtlCol="0" anchor="t"/>
+          <a:lstStyle/>
+          <a:p>
+            <a:pPr algn="l" indent="0" marL="0">
+              <a:lnSpc>
+                <a:spcPts val="1560"/>
+              </a:lnSpc>
+              <a:buNone/>
+            </a:pPr>
+            <a:r>
+              <a:rPr lang="en-US" sz="1350" dirty="0">
+                <a:solidFill>
+                  <a:srgbClr val="59636E"/>
+                </a:solidFill>
+                <a:latin typeface="Arial" pitchFamily="34" charset="0"/>
+                <a:ea typeface="Arial" pitchFamily="34" charset="-122"/>
+                <a:cs typeface="Arial" pitchFamily="34" charset="-120"/>
+              </a:rPr>
+              <a:t>Each worktree has its own folder and branch.</a:t>
+            </a:r>
+            <a:endParaRPr lang="en-US" sz="1350" dirty="0"/>
+          </a:p>
+        </p:txBody>
+      </p:sp>
+      <p:sp>
+        <p:nvSpPr>
+          <p:cNvPr id="19" name="Text 12"/>
+          <p:cNvSpPr/>
+          <p:nvPr/>
+        </p:nvSpPr>
+        <p:spPr>
+          <a:xfrm>
+            <a:off x="5003750" y="3675013"/>
+            <a:ext cx="381000" cy="381000"/>
+          </a:xfrm>
+          <a:prstGeom prst="roundRect">
+            <a:avLst>
+              <a:gd name="adj" fmla="val 23333"/>
+            </a:avLst>
+          </a:prstGeom>
+          <a:solidFill>
+            <a:srgbClr val="DAFBE1"/>
+          </a:solidFill>
+          <a:ln/>
+        </p:spPr>
+        <p:txBody>
+          <a:bodyPr wrap="square" rtlCol="0" anchor="ctr"/>
+          <a:lstStyle/>
+          <a:p>
+            <a:pPr indent="0" marL="0">
+              <a:buNone/>
+            </a:pPr>
+            <a:endParaRPr lang="en-US" dirty="0"/>
+          </a:p>
+        </p:txBody>
+      </p:sp>
+      <p:pic>
+        <p:nvPicPr>
+          <p:cNvPr id="20" name="Image 5" descr="/Users/danwahlin/.copilot/session-state/56a7a0da-def8-48d4-b5e8-0ac3878cb8dd/files/slides-build/icons/GoGitMerge-1A7F37.png">    </p:cNvPr>
+          <p:cNvPicPr>
+            <a:picLocks noChangeAspect="1"/>
+          </p:cNvPicPr>
+          <p:nvPr/>
+        </p:nvPicPr>
+        <p:blipFill>
+          <a:blip r:embed="rId7"/>
+          <a:stretch>
+            <a:fillRect/>
+          </a:stretch>
+        </p:blipFill>
+        <p:spPr>
+          <a:xfrm>
             <a:off x="5086350" y="3757613"/>
             <a:ext cx="215801" cy="215801"/>
           </a:xfrm>
@@ -9457,7 +9329,7 @@
       </p:pic>
       <p:sp>
         <p:nvSpPr>
-          <p:cNvPr id="21" name="Text 14"/>
+          <p:cNvPr id="21" name="Text 13"/>
           <p:cNvSpPr/>
           <p:nvPr/>
         </p:nvSpPr>
@@ -9496,7 +9368,7 @@
       </p:sp>
       <p:sp>
         <p:nvSpPr>
-          <p:cNvPr id="22" name="Text 15"/>
+          <p:cNvPr id="22" name="Text 14"/>
           <p:cNvSpPr/>
           <p:nvPr/>
         </p:nvSpPr>
@@ -9568,112 +9440,9 @@
           <a:chExt cx="0" cy="0"/>
         </a:xfrm>
       </p:grpSpPr>
-      <p:sp>
-        <p:nvSpPr>
-          <p:cNvPr id="2" name="Text 0"/>
-          <p:cNvSpPr/>
-          <p:nvPr/>
-        </p:nvSpPr>
-        <p:spPr>
-          <a:xfrm>
-            <a:off x="0" y="0"/>
-            <a:ext cx="9144000" cy="76200"/>
-          </a:xfrm>
-          <a:prstGeom prst="rect">
-            <a:avLst/>
-          </a:prstGeom>
-          <a:solidFill>
-            <a:srgbClr val="0969DA"/>
-          </a:solidFill>
-          <a:ln/>
-        </p:spPr>
-        <p:txBody>
-          <a:bodyPr wrap="square" rtlCol="0" anchor="ctr"/>
-          <a:lstStyle/>
-          <a:p>
-            <a:pPr indent="0" marL="0">
-              <a:buNone/>
-            </a:pPr>
-            <a:endParaRPr lang="en-US" dirty="0"/>
-          </a:p>
-        </p:txBody>
-      </p:sp>
-      <p:sp>
-        <p:nvSpPr>
-          <p:cNvPr id="3" name="Text 1"/>
-          <p:cNvSpPr/>
-          <p:nvPr/>
-        </p:nvSpPr>
-        <p:spPr>
-          <a:xfrm>
-            <a:off x="7340501" y="177701"/>
-            <a:ext cx="1168301" cy="279350"/>
-          </a:xfrm>
-          <a:prstGeom prst="roundRect">
-            <a:avLst>
-              <a:gd name="adj" fmla="val 22731"/>
-            </a:avLst>
-          </a:prstGeom>
-          <a:solidFill>
-            <a:srgbClr val="1A7F37"/>
-          </a:solidFill>
-          <a:ln/>
-        </p:spPr>
-        <p:txBody>
-          <a:bodyPr wrap="square" rtlCol="0" anchor="ctr"/>
-          <a:lstStyle/>
-          <a:p>
-            <a:pPr indent="0" marL="0">
-              <a:buNone/>
-            </a:pPr>
-            <a:endParaRPr lang="en-US" dirty="0"/>
-          </a:p>
-        </p:txBody>
-      </p:sp>
-      <p:sp>
-        <p:nvSpPr>
-          <p:cNvPr id="4" name="Text 2"/>
-          <p:cNvSpPr/>
-          <p:nvPr/>
-        </p:nvSpPr>
-        <p:spPr>
-          <a:xfrm>
-            <a:off x="7461041" y="231577"/>
-            <a:ext cx="927071" cy="171450"/>
-          </a:xfrm>
-          <a:prstGeom prst="rect">
-            <a:avLst/>
-          </a:prstGeom>
-          <a:noFill/>
-          <a:ln/>
-        </p:spPr>
-        <p:txBody>
-          <a:bodyPr wrap="square" lIns="0" tIns="0" rIns="0" bIns="0" rtlCol="0" anchor="t"/>
-          <a:lstStyle/>
-          <a:p>
-            <a:pPr algn="ctr" indent="0" marL="0">
-              <a:buNone/>
-            </a:pPr>
-            <a:r>
-              <a:rPr lang="en-US" sz="1150" b="1" dirty="0">
-                <a:solidFill>
-                  <a:srgbClr val="FFFFFF"/>
-                </a:solidFill>
-                <a:latin typeface="Arial" pitchFamily="34" charset="0"/>
-                <a:ea typeface="Arial" pitchFamily="34" charset="-122"/>
-                <a:cs typeface="Arial" pitchFamily="34" charset="-120"/>
-              </a:rPr>
-              <a:t>CHAPTER 02</a:t>
-            </a:r>
-            <a:endParaRPr lang="en-US" sz="1150" dirty="0"/>
-          </a:p>
-        </p:txBody>
-      </p:sp>
       <p:pic>
         <p:nvPicPr>
-          <p:cNvPr id="5" name="Image 0" descr="/Users/danwahlin/.copilot/session-state/56a7a0da-def8-48d4-b5e8-0ac3878cb8dd/files/slides-build/icons/FaGithub-1F2328.png">
-            <a:hlinkClick r:id="rId2" tooltip="https://github.com/github/copilot-app-for-beginners/tree/main/02-sessions-worktrees-context"/>
-          </p:cNvPr>
+          <p:cNvPr id="2" name="Image 0" descr="/Users/danwahlin/.copilot/session-state/56a7a0da-def8-48d4-b5e8-0ac3878cb8dd/files/slides-build/img/grad-corner.png">    </p:cNvPr>
           <p:cNvPicPr>
             <a:picLocks noChangeAspect="1"/>
           </p:cNvPicPr>
@@ -9687,6 +9456,103 @@
         </p:blipFill>
         <p:spPr>
           <a:xfrm>
+            <a:off x="6349901" y="0"/>
+            <a:ext cx="2793950" cy="1308050"/>
+          </a:xfrm>
+          <a:prstGeom prst="rect">
+            <a:avLst/>
+          </a:prstGeom>
+        </p:spPr>
+      </p:pic>
+      <p:sp>
+        <p:nvSpPr>
+          <p:cNvPr id="3" name="Text 0"/>
+          <p:cNvSpPr/>
+          <p:nvPr/>
+        </p:nvSpPr>
+        <p:spPr>
+          <a:xfrm>
+            <a:off x="7340501" y="177701"/>
+            <a:ext cx="1168301" cy="279350"/>
+          </a:xfrm>
+          <a:prstGeom prst="roundRect">
+            <a:avLst>
+              <a:gd name="adj" fmla="val 22731"/>
+            </a:avLst>
+          </a:prstGeom>
+          <a:solidFill>
+            <a:srgbClr val="1A7F37"/>
+          </a:solidFill>
+          <a:ln/>
+        </p:spPr>
+        <p:txBody>
+          <a:bodyPr wrap="square" rtlCol="0" anchor="ctr"/>
+          <a:lstStyle/>
+          <a:p>
+            <a:pPr indent="0" marL="0">
+              <a:buNone/>
+            </a:pPr>
+            <a:endParaRPr lang="en-US" dirty="0"/>
+          </a:p>
+        </p:txBody>
+      </p:sp>
+      <p:sp>
+        <p:nvSpPr>
+          <p:cNvPr id="4" name="Text 1"/>
+          <p:cNvSpPr/>
+          <p:nvPr/>
+        </p:nvSpPr>
+        <p:spPr>
+          <a:xfrm>
+            <a:off x="7461041" y="231577"/>
+            <a:ext cx="927071" cy="171450"/>
+          </a:xfrm>
+          <a:prstGeom prst="rect">
+            <a:avLst/>
+          </a:prstGeom>
+          <a:noFill/>
+          <a:ln/>
+        </p:spPr>
+        <p:txBody>
+          <a:bodyPr wrap="square" lIns="0" tIns="0" rIns="0" bIns="0" rtlCol="0" anchor="t"/>
+          <a:lstStyle/>
+          <a:p>
+            <a:pPr algn="ctr" indent="0" marL="0">
+              <a:buNone/>
+            </a:pPr>
+            <a:r>
+              <a:rPr lang="en-US" sz="1150" b="1" dirty="0">
+                <a:solidFill>
+                  <a:srgbClr val="FFFFFF"/>
+                </a:solidFill>
+                <a:latin typeface="Arial" pitchFamily="34" charset="0"/>
+                <a:ea typeface="Arial" pitchFamily="34" charset="-122"/>
+                <a:cs typeface="Arial" pitchFamily="34" charset="-120"/>
+              </a:rPr>
+              <a:t>CHAPTER 02</a:t>
+            </a:r>
+            <a:endParaRPr lang="en-US" sz="1150" dirty="0"/>
+          </a:p>
+        </p:txBody>
+      </p:sp>
+      <p:pic>
+        <p:nvPicPr>
+          <p:cNvPr id="5" name="Image 1" descr="/Users/danwahlin/.copilot/session-state/56a7a0da-def8-48d4-b5e8-0ac3878cb8dd/files/slides-build/icons/FaGithub-1F2328.png">
+            <a:hlinkClick r:id="rId3" tooltip="https://github.com/github/copilot-app-for-beginners/tree/main/02-sessions-worktrees-context"/>
+          </p:cNvPr>
+          <p:cNvPicPr>
+            <a:picLocks noChangeAspect="1"/>
+          </p:cNvPicPr>
+          <p:nvPr/>
+        </p:nvPicPr>
+        <p:blipFill>
+          <a:blip r:embed="rId2"/>
+          <a:stretch>
+            <a:fillRect/>
+          </a:stretch>
+        </p:blipFill>
+        <p:spPr>
+          <a:xfrm>
             <a:off x="8610600" y="165050"/>
             <a:ext cx="304800" cy="304800"/>
           </a:xfrm>
@@ -9697,7 +9563,7 @@
       </p:pic>
       <p:sp>
         <p:nvSpPr>
-          <p:cNvPr id="6" name="Text 3"/>
+          <p:cNvPr id="6" name="Text 2"/>
           <p:cNvSpPr/>
           <p:nvPr/>
         </p:nvSpPr>
@@ -9736,7 +9602,7 @@
       </p:sp>
       <p:sp>
         <p:nvSpPr>
-          <p:cNvPr id="7" name="Text 4"/>
+          <p:cNvPr id="7" name="Text 3"/>
           <p:cNvSpPr/>
           <p:nvPr/>
         </p:nvSpPr>
@@ -9781,7 +9647,7 @@
       </p:sp>
       <p:sp>
         <p:nvSpPr>
-          <p:cNvPr id="8" name="Text 5"/>
+          <p:cNvPr id="8" name="Text 4"/>
           <p:cNvSpPr/>
           <p:nvPr/>
         </p:nvSpPr>
@@ -9826,7 +9692,7 @@
       </p:sp>
       <p:sp>
         <p:nvSpPr>
-          <p:cNvPr id="9" name="Text 6"/>
+          <p:cNvPr id="9" name="Text 5"/>
           <p:cNvSpPr/>
           <p:nvPr/>
         </p:nvSpPr>
@@ -9869,14 +9735,14 @@
       </p:sp>
       <p:pic>
         <p:nvPicPr>
-          <p:cNvPr id="10" name="Image 1" descr="/Users/danwahlin/.copilot/session-state/56a7a0da-def8-48d4-b5e8-0ac3878cb8dd/files/slides-build/img/02-one-repo-many-worktrees.jpg">    </p:cNvPr>
+          <p:cNvPr id="10" name="Image 2" descr="/Users/danwahlin/.copilot/session-state/56a7a0da-def8-48d4-b5e8-0ac3878cb8dd/files/slides-build/img/02-one-repo-many-worktrees.jpg">    </p:cNvPr>
           <p:cNvPicPr>
             <a:picLocks noChangeAspect="1"/>
           </p:cNvPicPr>
           <p:nvPr/>
         </p:nvPicPr>
         <p:blipFill>
-          <a:blip r:embed="rId3"/>
+          <a:blip r:embed="rId4"/>
           <a:stretch>
             <a:fillRect/>
           </a:stretch>
@@ -9893,7 +9759,7 @@
       </p:pic>
       <p:sp>
         <p:nvSpPr>
-          <p:cNvPr id="11" name="Text 7"/>
+          <p:cNvPr id="11" name="Text 6"/>
           <p:cNvSpPr/>
           <p:nvPr/>
         </p:nvSpPr>
@@ -9929,7 +9795,7 @@
       </p:sp>
       <p:sp>
         <p:nvSpPr>
-          <p:cNvPr id="12" name="Text 8"/>
+          <p:cNvPr id="12" name="Text 7"/>
           <p:cNvSpPr/>
           <p:nvPr/>
         </p:nvSpPr>
@@ -9959,7 +9825,7 @@
       </p:sp>
       <p:sp>
         <p:nvSpPr>
-          <p:cNvPr id="13" name="Shape 9"/>
+          <p:cNvPr id="13" name="Shape 8"/>
           <p:cNvSpPr/>
           <p:nvPr/>
         </p:nvSpPr>
@@ -9982,7 +9848,7 @@
       </p:sp>
       <p:sp>
         <p:nvSpPr>
-          <p:cNvPr id="14" name="Text 10"/>
+          <p:cNvPr id="14" name="Text 9"/>
           <p:cNvSpPr/>
           <p:nvPr/>
         </p:nvSpPr>
@@ -10024,7 +9890,7 @@
       </p:sp>
       <p:sp>
         <p:nvSpPr>
-          <p:cNvPr id="15" name="Text 11"/>
+          <p:cNvPr id="15" name="Text 10"/>
           <p:cNvSpPr/>
           <p:nvPr/>
         </p:nvSpPr>
@@ -10066,7 +9932,7 @@
       </p:sp>
       <p:sp>
         <p:nvSpPr>
-          <p:cNvPr id="16" name="Shape 12"/>
+          <p:cNvPr id="16" name="Shape 11"/>
           <p:cNvSpPr/>
           <p:nvPr/>
         </p:nvSpPr>
@@ -10089,7 +9955,7 @@
       </p:sp>
       <p:sp>
         <p:nvSpPr>
-          <p:cNvPr id="17" name="Text 13"/>
+          <p:cNvPr id="17" name="Text 12"/>
           <p:cNvSpPr/>
           <p:nvPr/>
         </p:nvSpPr>
@@ -10131,7 +9997,7 @@
       </p:sp>
       <p:sp>
         <p:nvSpPr>
-          <p:cNvPr id="18" name="Text 14"/>
+          <p:cNvPr id="18" name="Text 13"/>
           <p:cNvSpPr/>
           <p:nvPr/>
         </p:nvSpPr>
@@ -10173,7 +10039,7 @@
       </p:sp>
       <p:sp>
         <p:nvSpPr>
-          <p:cNvPr id="19" name="Shape 15"/>
+          <p:cNvPr id="19" name="Shape 14"/>
           <p:cNvSpPr/>
           <p:nvPr/>
         </p:nvSpPr>
@@ -10196,7 +10062,7 @@
       </p:sp>
       <p:sp>
         <p:nvSpPr>
-          <p:cNvPr id="20" name="Text 16"/>
+          <p:cNvPr id="20" name="Text 15"/>
           <p:cNvSpPr/>
           <p:nvPr/>
         </p:nvSpPr>
@@ -10238,7 +10104,7 @@
       </p:sp>
       <p:sp>
         <p:nvSpPr>
-          <p:cNvPr id="21" name="Text 17"/>
+          <p:cNvPr id="21" name="Text 16"/>
           <p:cNvSpPr/>
           <p:nvPr/>
         </p:nvSpPr>
@@ -10280,7 +10146,7 @@
       </p:sp>
       <p:sp>
         <p:nvSpPr>
-          <p:cNvPr id="22" name="Text 18"/>
+          <p:cNvPr id="22" name="Text 17"/>
           <p:cNvSpPr/>
           <p:nvPr/>
         </p:nvSpPr>
@@ -10322,7 +10188,7 @@
       </p:sp>
       <p:sp>
         <p:nvSpPr>
-          <p:cNvPr id="23" name="Text 19"/>
+          <p:cNvPr id="23" name="Text 18"/>
           <p:cNvSpPr/>
           <p:nvPr/>
         </p:nvSpPr>
@@ -10394,112 +10260,9 @@
           <a:chExt cx="0" cy="0"/>
         </a:xfrm>
       </p:grpSpPr>
-      <p:sp>
-        <p:nvSpPr>
-          <p:cNvPr id="2" name="Text 0"/>
-          <p:cNvSpPr/>
-          <p:nvPr/>
-        </p:nvSpPr>
-        <p:spPr>
-          <a:xfrm>
-            <a:off x="0" y="0"/>
-            <a:ext cx="9144000" cy="76200"/>
-          </a:xfrm>
-          <a:prstGeom prst="rect">
-            <a:avLst/>
-          </a:prstGeom>
-          <a:solidFill>
-            <a:srgbClr val="0969DA"/>
-          </a:solidFill>
-          <a:ln/>
-        </p:spPr>
-        <p:txBody>
-          <a:bodyPr wrap="square" rtlCol="0" anchor="ctr"/>
-          <a:lstStyle/>
-          <a:p>
-            <a:pPr indent="0" marL="0">
-              <a:buNone/>
-            </a:pPr>
-            <a:endParaRPr lang="en-US" dirty="0"/>
-          </a:p>
-        </p:txBody>
-      </p:sp>
-      <p:sp>
-        <p:nvSpPr>
-          <p:cNvPr id="3" name="Text 1"/>
-          <p:cNvSpPr/>
-          <p:nvPr/>
-        </p:nvSpPr>
-        <p:spPr>
-          <a:xfrm>
-            <a:off x="7340501" y="177701"/>
-            <a:ext cx="1168301" cy="279350"/>
-          </a:xfrm>
-          <a:prstGeom prst="roundRect">
-            <a:avLst>
-              <a:gd name="adj" fmla="val 22731"/>
-            </a:avLst>
-          </a:prstGeom>
-          <a:solidFill>
-            <a:srgbClr val="1A7F37"/>
-          </a:solidFill>
-          <a:ln/>
-        </p:spPr>
-        <p:txBody>
-          <a:bodyPr wrap="square" rtlCol="0" anchor="ctr"/>
-          <a:lstStyle/>
-          <a:p>
-            <a:pPr indent="0" marL="0">
-              <a:buNone/>
-            </a:pPr>
-            <a:endParaRPr lang="en-US" dirty="0"/>
-          </a:p>
-        </p:txBody>
-      </p:sp>
-      <p:sp>
-        <p:nvSpPr>
-          <p:cNvPr id="4" name="Text 2"/>
-          <p:cNvSpPr/>
-          <p:nvPr/>
-        </p:nvSpPr>
-        <p:spPr>
-          <a:xfrm>
-            <a:off x="7461041" y="231577"/>
-            <a:ext cx="927071" cy="171450"/>
-          </a:xfrm>
-          <a:prstGeom prst="rect">
-            <a:avLst/>
-          </a:prstGeom>
-          <a:noFill/>
-          <a:ln/>
-        </p:spPr>
-        <p:txBody>
-          <a:bodyPr wrap="square" lIns="0" tIns="0" rIns="0" bIns="0" rtlCol="0" anchor="t"/>
-          <a:lstStyle/>
-          <a:p>
-            <a:pPr algn="ctr" indent="0" marL="0">
-              <a:buNone/>
-            </a:pPr>
-            <a:r>
-              <a:rPr lang="en-US" sz="1150" b="1" dirty="0">
-                <a:solidFill>
-                  <a:srgbClr val="FFFFFF"/>
-                </a:solidFill>
-                <a:latin typeface="Arial" pitchFamily="34" charset="0"/>
-                <a:ea typeface="Arial" pitchFamily="34" charset="-122"/>
-                <a:cs typeface="Arial" pitchFamily="34" charset="-120"/>
-              </a:rPr>
-              <a:t>CHAPTER 02</a:t>
-            </a:r>
-            <a:endParaRPr lang="en-US" sz="1150" dirty="0"/>
-          </a:p>
-        </p:txBody>
-      </p:sp>
       <p:pic>
         <p:nvPicPr>
-          <p:cNvPr id="5" name="Image 0" descr="/Users/danwahlin/.copilot/session-state/56a7a0da-def8-48d4-b5e8-0ac3878cb8dd/files/slides-build/icons/FaGithub-1F2328.png">
-            <a:hlinkClick r:id="rId2" tooltip="https://github.com/github/copilot-app-for-beginners/tree/main/02-sessions-worktrees-context"/>
-          </p:cNvPr>
+          <p:cNvPr id="2" name="Image 0" descr="/Users/danwahlin/.copilot/session-state/56a7a0da-def8-48d4-b5e8-0ac3878cb8dd/files/slides-build/img/grad-corner.png">    </p:cNvPr>
           <p:cNvPicPr>
             <a:picLocks noChangeAspect="1"/>
           </p:cNvPicPr>
@@ -10513,6 +10276,103 @@
         </p:blipFill>
         <p:spPr>
           <a:xfrm>
+            <a:off x="6349901" y="0"/>
+            <a:ext cx="2793950" cy="1308050"/>
+          </a:xfrm>
+          <a:prstGeom prst="rect">
+            <a:avLst/>
+          </a:prstGeom>
+        </p:spPr>
+      </p:pic>
+      <p:sp>
+        <p:nvSpPr>
+          <p:cNvPr id="3" name="Text 0"/>
+          <p:cNvSpPr/>
+          <p:nvPr/>
+        </p:nvSpPr>
+        <p:spPr>
+          <a:xfrm>
+            <a:off x="7340501" y="177701"/>
+            <a:ext cx="1168301" cy="279350"/>
+          </a:xfrm>
+          <a:prstGeom prst="roundRect">
+            <a:avLst>
+              <a:gd name="adj" fmla="val 22731"/>
+            </a:avLst>
+          </a:prstGeom>
+          <a:solidFill>
+            <a:srgbClr val="1A7F37"/>
+          </a:solidFill>
+          <a:ln/>
+        </p:spPr>
+        <p:txBody>
+          <a:bodyPr wrap="square" rtlCol="0" anchor="ctr"/>
+          <a:lstStyle/>
+          <a:p>
+            <a:pPr indent="0" marL="0">
+              <a:buNone/>
+            </a:pPr>
+            <a:endParaRPr lang="en-US" dirty="0"/>
+          </a:p>
+        </p:txBody>
+      </p:sp>
+      <p:sp>
+        <p:nvSpPr>
+          <p:cNvPr id="4" name="Text 1"/>
+          <p:cNvSpPr/>
+          <p:nvPr/>
+        </p:nvSpPr>
+        <p:spPr>
+          <a:xfrm>
+            <a:off x="7461041" y="231577"/>
+            <a:ext cx="927071" cy="171450"/>
+          </a:xfrm>
+          <a:prstGeom prst="rect">
+            <a:avLst/>
+          </a:prstGeom>
+          <a:noFill/>
+          <a:ln/>
+        </p:spPr>
+        <p:txBody>
+          <a:bodyPr wrap="square" lIns="0" tIns="0" rIns="0" bIns="0" rtlCol="0" anchor="t"/>
+          <a:lstStyle/>
+          <a:p>
+            <a:pPr algn="ctr" indent="0" marL="0">
+              <a:buNone/>
+            </a:pPr>
+            <a:r>
+              <a:rPr lang="en-US" sz="1150" b="1" dirty="0">
+                <a:solidFill>
+                  <a:srgbClr val="FFFFFF"/>
+                </a:solidFill>
+                <a:latin typeface="Arial" pitchFamily="34" charset="0"/>
+                <a:ea typeface="Arial" pitchFamily="34" charset="-122"/>
+                <a:cs typeface="Arial" pitchFamily="34" charset="-120"/>
+              </a:rPr>
+              <a:t>CHAPTER 02</a:t>
+            </a:r>
+            <a:endParaRPr lang="en-US" sz="1150" dirty="0"/>
+          </a:p>
+        </p:txBody>
+      </p:sp>
+      <p:pic>
+        <p:nvPicPr>
+          <p:cNvPr id="5" name="Image 1" descr="/Users/danwahlin/.copilot/session-state/56a7a0da-def8-48d4-b5e8-0ac3878cb8dd/files/slides-build/icons/FaGithub-1F2328.png">
+            <a:hlinkClick r:id="rId3" tooltip="https://github.com/github/copilot-app-for-beginners/tree/main/02-sessions-worktrees-context"/>
+          </p:cNvPr>
+          <p:cNvPicPr>
+            <a:picLocks noChangeAspect="1"/>
+          </p:cNvPicPr>
+          <p:nvPr/>
+        </p:nvPicPr>
+        <p:blipFill>
+          <a:blip r:embed="rId2"/>
+          <a:stretch>
+            <a:fillRect/>
+          </a:stretch>
+        </p:blipFill>
+        <p:spPr>
+          <a:xfrm>
             <a:off x="8610600" y="165050"/>
             <a:ext cx="304800" cy="304800"/>
           </a:xfrm>
@@ -10523,7 +10383,7 @@
       </p:pic>
       <p:sp>
         <p:nvSpPr>
-          <p:cNvPr id="6" name="Text 3"/>
+          <p:cNvPr id="6" name="Text 2"/>
           <p:cNvSpPr/>
           <p:nvPr/>
         </p:nvSpPr>
@@ -10562,7 +10422,7 @@
       </p:sp>
       <p:sp>
         <p:nvSpPr>
-          <p:cNvPr id="7" name="Text 4"/>
+          <p:cNvPr id="7" name="Text 3"/>
           <p:cNvSpPr/>
           <p:nvPr/>
         </p:nvSpPr>
@@ -10607,7 +10467,7 @@
       </p:sp>
       <p:sp>
         <p:nvSpPr>
-          <p:cNvPr id="8" name="Text 5"/>
+          <p:cNvPr id="8" name="Text 4"/>
           <p:cNvSpPr/>
           <p:nvPr/>
         </p:nvSpPr>
@@ -10652,7 +10512,7 @@
       </p:sp>
       <p:sp>
         <p:nvSpPr>
-          <p:cNvPr id="9" name="Text 6"/>
+          <p:cNvPr id="9" name="Text 5"/>
           <p:cNvSpPr/>
           <p:nvPr/>
         </p:nvSpPr>
@@ -10695,63 +10555,7 @@
       </p:sp>
       <p:pic>
         <p:nvPicPr>
-          <p:cNvPr id="10" name="Image 1" descr="/Users/danwahlin/.copilot/session-state/56a7a0da-def8-48d4-b5e8-0ac3878cb8dd/files/slides-build/img/02-where-crop.png">    </p:cNvPr>
-          <p:cNvPicPr>
-            <a:picLocks noChangeAspect="1"/>
-          </p:cNvPicPr>
-          <p:nvPr/>
-        </p:nvPicPr>
-        <p:blipFill>
-          <a:blip r:embed="rId3"/>
-          <a:stretch>
-            <a:fillRect/>
-          </a:stretch>
-        </p:blipFill>
-        <p:spPr>
-          <a:xfrm>
-            <a:off x="750540" y="1625501"/>
-            <a:ext cx="3324820" cy="2895600"/>
-          </a:xfrm>
-          <a:prstGeom prst="rect">
-            <a:avLst/>
-          </a:prstGeom>
-        </p:spPr>
-      </p:pic>
-      <p:sp>
-        <p:nvSpPr>
-          <p:cNvPr id="11" name="Text 7"/>
-          <p:cNvSpPr/>
-          <p:nvPr/>
-        </p:nvSpPr>
-        <p:spPr>
-          <a:xfrm>
-            <a:off x="4597301" y="1958280"/>
-            <a:ext cx="381000" cy="381000"/>
-          </a:xfrm>
-          <a:prstGeom prst="roundRect">
-            <a:avLst>
-              <a:gd name="adj" fmla="val 23333"/>
-            </a:avLst>
-          </a:prstGeom>
-          <a:solidFill>
-            <a:srgbClr val="DAFBE1"/>
-          </a:solidFill>
-          <a:ln/>
-        </p:spPr>
-        <p:txBody>
-          <a:bodyPr wrap="square" rtlCol="0" anchor="ctr"/>
-          <a:lstStyle/>
-          <a:p>
-            <a:pPr indent="0" marL="0">
-              <a:buNone/>
-            </a:pPr>
-            <a:endParaRPr lang="en-US" dirty="0"/>
-          </a:p>
-        </p:txBody>
-      </p:sp>
-      <p:pic>
-        <p:nvPicPr>
-          <p:cNvPr id="12" name="Image 2" descr="/Users/danwahlin/.copilot/session-state/56a7a0da-def8-48d4-b5e8-0ac3878cb8dd/files/slides-build/icons/GoGitBranch-1A7F37.png">    </p:cNvPr>
+          <p:cNvPr id="10" name="Image 2" descr="/Users/danwahlin/.copilot/session-state/56a7a0da-def8-48d4-b5e8-0ac3878cb8dd/files/slides-build/img/02-where-crop.png">    </p:cNvPr>
           <p:cNvPicPr>
             <a:picLocks noChangeAspect="1"/>
           </p:cNvPicPr>
@@ -10765,8 +10569,8 @@
         </p:blipFill>
         <p:spPr>
           <a:xfrm>
-            <a:off x="4679900" y="2040880"/>
-            <a:ext cx="215801" cy="215801"/>
+            <a:off x="750540" y="1625501"/>
+            <a:ext cx="3324820" cy="2895600"/>
           </a:xfrm>
           <a:prstGeom prst="rect">
             <a:avLst/>
@@ -10775,94 +10579,13 @@
       </p:pic>
       <p:sp>
         <p:nvSpPr>
-          <p:cNvPr id="13" name="Text 8"/>
-          <p:cNvSpPr/>
-          <p:nvPr/>
-        </p:nvSpPr>
-        <p:spPr>
-          <a:xfrm>
-            <a:off x="5130701" y="1922859"/>
-            <a:ext cx="3052489" cy="228600"/>
-          </a:xfrm>
-          <a:prstGeom prst="rect">
-            <a:avLst/>
-          </a:prstGeom>
-          <a:noFill/>
-          <a:ln/>
-        </p:spPr>
-        <p:txBody>
-          <a:bodyPr wrap="square" lIns="0" tIns="0" rIns="0" bIns="0" rtlCol="0" anchor="t"/>
-          <a:lstStyle/>
-          <a:p>
-            <a:pPr algn="l" indent="0" marL="0">
-              <a:buNone/>
-            </a:pPr>
-            <a:r>
-              <a:rPr lang="en-US" sz="1550" b="1" dirty="0">
-                <a:solidFill>
-                  <a:srgbClr val="1F2328"/>
-                </a:solidFill>
-                <a:latin typeface="Arial" pitchFamily="34" charset="0"/>
-                <a:ea typeface="Arial" pitchFamily="34" charset="-122"/>
-                <a:cs typeface="Arial" pitchFamily="34" charset="-120"/>
-              </a:rPr>
-              <a:t>New worktree</a:t>
-            </a:r>
-            <a:endParaRPr lang="en-US" sz="1550" dirty="0"/>
-          </a:p>
-        </p:txBody>
-      </p:sp>
-      <p:sp>
-        <p:nvSpPr>
-          <p:cNvPr id="14" name="Text 9"/>
-          <p:cNvSpPr/>
-          <p:nvPr/>
-        </p:nvSpPr>
-        <p:spPr>
-          <a:xfrm>
-            <a:off x="5130701" y="2176760"/>
-            <a:ext cx="3052489" cy="198090"/>
-          </a:xfrm>
-          <a:prstGeom prst="rect">
-            <a:avLst/>
-          </a:prstGeom>
-          <a:noFill/>
-          <a:ln/>
-        </p:spPr>
-        <p:txBody>
-          <a:bodyPr wrap="square" lIns="0" tIns="0" rIns="0" bIns="0" rtlCol="0" anchor="t"/>
-          <a:lstStyle/>
-          <a:p>
-            <a:pPr algn="l" indent="0" marL="0">
-              <a:lnSpc>
-                <a:spcPts val="1560"/>
-              </a:lnSpc>
-              <a:buNone/>
-            </a:pPr>
-            <a:r>
-              <a:rPr lang="en-US" sz="1350" dirty="0">
-                <a:solidFill>
-                  <a:srgbClr val="59636E"/>
-                </a:solidFill>
-                <a:latin typeface="Arial" pitchFamily="34" charset="0"/>
-                <a:ea typeface="Arial" pitchFamily="34" charset="-122"/>
-                <a:cs typeface="Arial" pitchFamily="34" charset="-120"/>
-              </a:rPr>
-              <a:t>Own folder and branch. Course default.</a:t>
-            </a:r>
-            <a:endParaRPr lang="en-US" sz="1350" dirty="0"/>
-          </a:p>
-        </p:txBody>
-      </p:sp>
-      <p:sp>
-        <p:nvSpPr>
-          <p:cNvPr id="15" name="Text 10"/>
-          <p:cNvSpPr/>
-          <p:nvPr/>
-        </p:nvSpPr>
-        <p:spPr>
-          <a:xfrm>
-            <a:off x="4597301" y="2562671"/>
+          <p:cNvPr id="11" name="Text 6"/>
+          <p:cNvSpPr/>
+          <p:nvPr/>
+        </p:nvSpPr>
+        <p:spPr>
+          <a:xfrm>
+            <a:off x="4597301" y="1958280"/>
             <a:ext cx="381000" cy="381000"/>
           </a:xfrm>
           <a:prstGeom prst="roundRect">
@@ -10871,7 +10594,7 @@
             </a:avLst>
           </a:prstGeom>
           <a:solidFill>
-            <a:srgbClr val="FFF1E5"/>
+            <a:srgbClr val="DAFBE1"/>
           </a:solidFill>
           <a:ln/>
         </p:spPr>
@@ -10888,7 +10611,7 @@
       </p:sp>
       <p:pic>
         <p:nvPicPr>
-          <p:cNvPr id="16" name="Image 3" descr="/Users/danwahlin/.copilot/session-state/56a7a0da-def8-48d4-b5e8-0ac3878cb8dd/files/slides-build/icons/GoFileDirectory-BC4C00.png">    </p:cNvPr>
+          <p:cNvPr id="12" name="Image 3" descr="/Users/danwahlin/.copilot/session-state/56a7a0da-def8-48d4-b5e8-0ac3878cb8dd/files/slides-build/icons/GoGitBranch-1A7F37.png">    </p:cNvPr>
           <p:cNvPicPr>
             <a:picLocks noChangeAspect="1"/>
           </p:cNvPicPr>
@@ -10902,7 +10625,7 @@
         </p:blipFill>
         <p:spPr>
           <a:xfrm>
-            <a:off x="4679900" y="2645271"/>
+            <a:off x="4679900" y="2040880"/>
             <a:ext cx="215801" cy="215801"/>
           </a:xfrm>
           <a:prstGeom prst="rect">
@@ -10912,14 +10635,14 @@
       </p:pic>
       <p:sp>
         <p:nvSpPr>
-          <p:cNvPr id="17" name="Text 11"/>
-          <p:cNvSpPr/>
-          <p:nvPr/>
-        </p:nvSpPr>
-        <p:spPr>
-          <a:xfrm>
-            <a:off x="5130701" y="2527250"/>
-            <a:ext cx="2297564" cy="228600"/>
+          <p:cNvPr id="13" name="Text 7"/>
+          <p:cNvSpPr/>
+          <p:nvPr/>
+        </p:nvSpPr>
+        <p:spPr>
+          <a:xfrm>
+            <a:off x="5130701" y="1922859"/>
+            <a:ext cx="3052489" cy="228600"/>
           </a:xfrm>
           <a:prstGeom prst="rect">
             <a:avLst/>
@@ -10943,7 +10666,7 @@
                 <a:ea typeface="Arial" pitchFamily="34" charset="-122"/>
                 <a:cs typeface="Arial" pitchFamily="34" charset="-120"/>
               </a:rPr>
-              <a:t>Current checkout</a:t>
+              <a:t>New worktree</a:t>
             </a:r>
             <a:endParaRPr lang="en-US" sz="1550" dirty="0"/>
           </a:p>
@@ -10951,14 +10674,14 @@
       </p:sp>
       <p:sp>
         <p:nvSpPr>
-          <p:cNvPr id="18" name="Text 12"/>
-          <p:cNvSpPr/>
-          <p:nvPr/>
-        </p:nvSpPr>
-        <p:spPr>
-          <a:xfrm>
-            <a:off x="5130701" y="2781151"/>
-            <a:ext cx="2297564" cy="198090"/>
+          <p:cNvPr id="14" name="Text 8"/>
+          <p:cNvSpPr/>
+          <p:nvPr/>
+        </p:nvSpPr>
+        <p:spPr>
+          <a:xfrm>
+            <a:off x="5130701" y="2176760"/>
+            <a:ext cx="3052489" cy="198090"/>
           </a:xfrm>
           <a:prstGeom prst="rect">
             <a:avLst/>
@@ -10985,7 +10708,7 @@
                 <a:ea typeface="Arial" pitchFamily="34" charset="-122"/>
                 <a:cs typeface="Arial" pitchFamily="34" charset="-120"/>
               </a:rPr>
-              <a:t>Your clone. Fast, not isolated.</a:t>
+              <a:t>Own folder and branch. Course default.</a:t>
             </a:r>
             <a:endParaRPr lang="en-US" sz="1350" dirty="0"/>
           </a:p>
@@ -10993,13 +10716,13 @@
       </p:sp>
       <p:sp>
         <p:nvSpPr>
-          <p:cNvPr id="19" name="Text 13"/>
-          <p:cNvSpPr/>
-          <p:nvPr/>
-        </p:nvSpPr>
-        <p:spPr>
-          <a:xfrm>
-            <a:off x="4597301" y="3167063"/>
+          <p:cNvPr id="15" name="Text 9"/>
+          <p:cNvSpPr/>
+          <p:nvPr/>
+        </p:nvSpPr>
+        <p:spPr>
+          <a:xfrm>
+            <a:off x="4597301" y="2562671"/>
             <a:ext cx="381000" cy="381000"/>
           </a:xfrm>
           <a:prstGeom prst="roundRect">
@@ -11008,7 +10731,7 @@
             </a:avLst>
           </a:prstGeom>
           <a:solidFill>
-            <a:srgbClr val="DDF4FF"/>
+            <a:srgbClr val="FFF1E5"/>
           </a:solidFill>
           <a:ln/>
         </p:spPr>
@@ -11025,7 +10748,7 @@
       </p:sp>
       <p:pic>
         <p:nvPicPr>
-          <p:cNvPr id="20" name="Image 4" descr="/Users/danwahlin/.copilot/session-state/56a7a0da-def8-48d4-b5e8-0ac3878cb8dd/files/slides-build/icons/GoCloud-0969DA.png">    </p:cNvPr>
+          <p:cNvPr id="16" name="Image 4" descr="/Users/danwahlin/.copilot/session-state/56a7a0da-def8-48d4-b5e8-0ac3878cb8dd/files/slides-build/icons/GoFileDirectory-BC4C00.png">    </p:cNvPr>
           <p:cNvPicPr>
             <a:picLocks noChangeAspect="1"/>
           </p:cNvPicPr>
@@ -11039,7 +10762,7 @@
         </p:blipFill>
         <p:spPr>
           <a:xfrm>
-            <a:off x="4679900" y="3249662"/>
+            <a:off x="4679900" y="2645271"/>
             <a:ext cx="215801" cy="215801"/>
           </a:xfrm>
           <a:prstGeom prst="rect">
@@ -11049,14 +10772,14 @@
       </p:pic>
       <p:sp>
         <p:nvSpPr>
-          <p:cNvPr id="21" name="Text 14"/>
-          <p:cNvSpPr/>
-          <p:nvPr/>
-        </p:nvSpPr>
-        <p:spPr>
-          <a:xfrm>
-            <a:off x="5130701" y="3131641"/>
-            <a:ext cx="2041621" cy="228600"/>
+          <p:cNvPr id="17" name="Text 10"/>
+          <p:cNvSpPr/>
+          <p:nvPr/>
+        </p:nvSpPr>
+        <p:spPr>
+          <a:xfrm>
+            <a:off x="5130701" y="2527250"/>
+            <a:ext cx="2297564" cy="228600"/>
           </a:xfrm>
           <a:prstGeom prst="rect">
             <a:avLst/>
@@ -11080,7 +10803,7 @@
                 <a:ea typeface="Arial" pitchFamily="34" charset="-122"/>
                 <a:cs typeface="Arial" pitchFamily="34" charset="-120"/>
               </a:rPr>
-              <a:t>Cloud</a:t>
+              <a:t>Current checkout</a:t>
             </a:r>
             <a:endParaRPr lang="en-US" sz="1550" dirty="0"/>
           </a:p>
@@ -11088,14 +10811,14 @@
       </p:sp>
       <p:sp>
         <p:nvSpPr>
-          <p:cNvPr id="22" name="Text 15"/>
-          <p:cNvSpPr/>
-          <p:nvPr/>
-        </p:nvSpPr>
-        <p:spPr>
-          <a:xfrm>
-            <a:off x="5130701" y="3385542"/>
-            <a:ext cx="2041621" cy="198090"/>
+          <p:cNvPr id="18" name="Text 11"/>
+          <p:cNvSpPr/>
+          <p:nvPr/>
+        </p:nvSpPr>
+        <p:spPr>
+          <a:xfrm>
+            <a:off x="5130701" y="2781151"/>
+            <a:ext cx="2297564" cy="198090"/>
           </a:xfrm>
           <a:prstGeom prst="rect">
             <a:avLst/>
@@ -11122,6 +10845,143 @@
                 <a:ea typeface="Arial" pitchFamily="34" charset="-122"/>
                 <a:cs typeface="Arial" pitchFamily="34" charset="-120"/>
               </a:rPr>
+              <a:t>Your clone. Fast, not isolated.</a:t>
+            </a:r>
+            <a:endParaRPr lang="en-US" sz="1350" dirty="0"/>
+          </a:p>
+        </p:txBody>
+      </p:sp>
+      <p:sp>
+        <p:nvSpPr>
+          <p:cNvPr id="19" name="Text 12"/>
+          <p:cNvSpPr/>
+          <p:nvPr/>
+        </p:nvSpPr>
+        <p:spPr>
+          <a:xfrm>
+            <a:off x="4597301" y="3167063"/>
+            <a:ext cx="381000" cy="381000"/>
+          </a:xfrm>
+          <a:prstGeom prst="roundRect">
+            <a:avLst>
+              <a:gd name="adj" fmla="val 23333"/>
+            </a:avLst>
+          </a:prstGeom>
+          <a:solidFill>
+            <a:srgbClr val="DDF4FF"/>
+          </a:solidFill>
+          <a:ln/>
+        </p:spPr>
+        <p:txBody>
+          <a:bodyPr wrap="square" rtlCol="0" anchor="ctr"/>
+          <a:lstStyle/>
+          <a:p>
+            <a:pPr indent="0" marL="0">
+              <a:buNone/>
+            </a:pPr>
+            <a:endParaRPr lang="en-US" dirty="0"/>
+          </a:p>
+        </p:txBody>
+      </p:sp>
+      <p:pic>
+        <p:nvPicPr>
+          <p:cNvPr id="20" name="Image 5" descr="/Users/danwahlin/.copilot/session-state/56a7a0da-def8-48d4-b5e8-0ac3878cb8dd/files/slides-build/icons/GoCloud-0969DA.png">    </p:cNvPr>
+          <p:cNvPicPr>
+            <a:picLocks noChangeAspect="1"/>
+          </p:cNvPicPr>
+          <p:nvPr/>
+        </p:nvPicPr>
+        <p:blipFill>
+          <a:blip r:embed="rId7"/>
+          <a:stretch>
+            <a:fillRect/>
+          </a:stretch>
+        </p:blipFill>
+        <p:spPr>
+          <a:xfrm>
+            <a:off x="4679900" y="3249662"/>
+            <a:ext cx="215801" cy="215801"/>
+          </a:xfrm>
+          <a:prstGeom prst="rect">
+            <a:avLst/>
+          </a:prstGeom>
+        </p:spPr>
+      </p:pic>
+      <p:sp>
+        <p:nvSpPr>
+          <p:cNvPr id="21" name="Text 13"/>
+          <p:cNvSpPr/>
+          <p:nvPr/>
+        </p:nvSpPr>
+        <p:spPr>
+          <a:xfrm>
+            <a:off x="5130701" y="3131641"/>
+            <a:ext cx="2041621" cy="228600"/>
+          </a:xfrm>
+          <a:prstGeom prst="rect">
+            <a:avLst/>
+          </a:prstGeom>
+          <a:noFill/>
+          <a:ln/>
+        </p:spPr>
+        <p:txBody>
+          <a:bodyPr wrap="square" lIns="0" tIns="0" rIns="0" bIns="0" rtlCol="0" anchor="t"/>
+          <a:lstStyle/>
+          <a:p>
+            <a:pPr algn="l" indent="0" marL="0">
+              <a:buNone/>
+            </a:pPr>
+            <a:r>
+              <a:rPr lang="en-US" sz="1550" b="1" dirty="0">
+                <a:solidFill>
+                  <a:srgbClr val="1F2328"/>
+                </a:solidFill>
+                <a:latin typeface="Arial" pitchFamily="34" charset="0"/>
+                <a:ea typeface="Arial" pitchFamily="34" charset="-122"/>
+                <a:cs typeface="Arial" pitchFamily="34" charset="-120"/>
+              </a:rPr>
+              <a:t>Cloud</a:t>
+            </a:r>
+            <a:endParaRPr lang="en-US" sz="1550" dirty="0"/>
+          </a:p>
+        </p:txBody>
+      </p:sp>
+      <p:sp>
+        <p:nvSpPr>
+          <p:cNvPr id="22" name="Text 14"/>
+          <p:cNvSpPr/>
+          <p:nvPr/>
+        </p:nvSpPr>
+        <p:spPr>
+          <a:xfrm>
+            <a:off x="5130701" y="3385542"/>
+            <a:ext cx="2041621" cy="198090"/>
+          </a:xfrm>
+          <a:prstGeom prst="rect">
+            <a:avLst/>
+          </a:prstGeom>
+          <a:noFill/>
+          <a:ln/>
+        </p:spPr>
+        <p:txBody>
+          <a:bodyPr wrap="square" lIns="0" tIns="0" rIns="0" bIns="0" rtlCol="0" anchor="t"/>
+          <a:lstStyle/>
+          <a:p>
+            <a:pPr algn="l" indent="0" marL="0">
+              <a:lnSpc>
+                <a:spcPts val="1560"/>
+              </a:lnSpc>
+              <a:buNone/>
+            </a:pPr>
+            <a:r>
+              <a:rPr lang="en-US" sz="1350" dirty="0">
+                <a:solidFill>
+                  <a:srgbClr val="59636E"/>
+                </a:solidFill>
+                <a:latin typeface="Arial" pitchFamily="34" charset="0"/>
+                <a:ea typeface="Arial" pitchFamily="34" charset="-122"/>
+                <a:cs typeface="Arial" pitchFamily="34" charset="-120"/>
+              </a:rPr>
               <a:t>A GitHub-hosted sandbox.</a:t>
             </a:r>
             <a:endParaRPr lang="en-US" sz="1350" dirty="0"/>
@@ -11130,7 +10990,7 @@
       </p:sp>
       <p:sp>
         <p:nvSpPr>
-          <p:cNvPr id="23" name="Text 16"/>
+          <p:cNvPr id="23" name="Text 15"/>
           <p:cNvSpPr/>
           <p:nvPr/>
         </p:nvSpPr>
@@ -11166,14 +11026,14 @@
       </p:sp>
       <p:pic>
         <p:nvPicPr>
-          <p:cNvPr id="24" name="Image 5" descr="/Users/danwahlin/.copilot/session-state/56a7a0da-def8-48d4-b5e8-0ac3878cb8dd/files/slides-build/icons/GoAlert-9A6700.png">    </p:cNvPr>
+          <p:cNvPr id="24" name="Image 6" descr="/Users/danwahlin/.copilot/session-state/56a7a0da-def8-48d4-b5e8-0ac3878cb8dd/files/slides-build/icons/GoAlert-9A6700.png">    </p:cNvPr>
           <p:cNvPicPr>
             <a:picLocks noChangeAspect="1"/>
           </p:cNvPicPr>
           <p:nvPr/>
         </p:nvPicPr>
         <p:blipFill>
-          <a:blip r:embed="rId7"/>
+          <a:blip r:embed="rId8"/>
           <a:stretch>
             <a:fillRect/>
           </a:stretch>
@@ -11190,7 +11050,7 @@
       </p:pic>
       <p:sp>
         <p:nvSpPr>
-          <p:cNvPr id="25" name="Text 17"/>
+          <p:cNvPr id="25" name="Text 16"/>
           <p:cNvSpPr/>
           <p:nvPr/>
         </p:nvSpPr>
@@ -11398,82 +11258,9 @@
           </a:p>
         </p:txBody>
       </p:sp>
-      <p:sp>
-        <p:nvSpPr>
-          <p:cNvPr id="5" name="Text 3"/>
-          <p:cNvSpPr/>
-          <p:nvPr/>
-        </p:nvSpPr>
-        <p:spPr>
-          <a:xfrm>
-            <a:off x="7340501" y="177701"/>
-            <a:ext cx="1168301" cy="279350"/>
-          </a:xfrm>
-          <a:prstGeom prst="roundRect">
-            <a:avLst>
-              <a:gd name="adj" fmla="val 22731"/>
-            </a:avLst>
-          </a:prstGeom>
-          <a:solidFill>
-            <a:srgbClr val="1A7F37"/>
-          </a:solidFill>
-          <a:ln/>
-        </p:spPr>
-        <p:txBody>
-          <a:bodyPr wrap="square" rtlCol="0" anchor="ctr"/>
-          <a:lstStyle/>
-          <a:p>
-            <a:pPr indent="0" marL="0">
-              <a:buNone/>
-            </a:pPr>
-            <a:endParaRPr lang="en-US" dirty="0"/>
-          </a:p>
-        </p:txBody>
-      </p:sp>
-      <p:sp>
-        <p:nvSpPr>
-          <p:cNvPr id="6" name="Text 4"/>
-          <p:cNvSpPr/>
-          <p:nvPr/>
-        </p:nvSpPr>
-        <p:spPr>
-          <a:xfrm>
-            <a:off x="7461041" y="231577"/>
-            <a:ext cx="927071" cy="171450"/>
-          </a:xfrm>
-          <a:prstGeom prst="rect">
-            <a:avLst/>
-          </a:prstGeom>
-          <a:noFill/>
-          <a:ln/>
-        </p:spPr>
-        <p:txBody>
-          <a:bodyPr wrap="square" lIns="0" tIns="0" rIns="0" bIns="0" rtlCol="0" anchor="t"/>
-          <a:lstStyle/>
-          <a:p>
-            <a:pPr algn="ctr" indent="0" marL="0">
-              <a:buNone/>
-            </a:pPr>
-            <a:r>
-              <a:rPr lang="en-US" sz="1150" b="1" dirty="0">
-                <a:solidFill>
-                  <a:srgbClr val="FFFFFF"/>
-                </a:solidFill>
-                <a:latin typeface="Arial" pitchFamily="34" charset="0"/>
-                <a:ea typeface="Arial" pitchFamily="34" charset="-122"/>
-                <a:cs typeface="Arial" pitchFamily="34" charset="-120"/>
-              </a:rPr>
-              <a:t>CHAPTER 02</a:t>
-            </a:r>
-            <a:endParaRPr lang="en-US" sz="1150" dirty="0"/>
-          </a:p>
-        </p:txBody>
-      </p:sp>
       <p:pic>
         <p:nvPicPr>
-          <p:cNvPr id="7" name="Image 0" descr="/Users/danwahlin/.copilot/session-state/56a7a0da-def8-48d4-b5e8-0ac3878cb8dd/files/slides-build/icons/FaGithub-1F2328.png">
-            <a:hlinkClick r:id="rId2" tooltip="https://github.com/github/copilot-app-for-beginners/tree/main/02-sessions-worktrees-context"/>
-          </p:cNvPr>
+          <p:cNvPr id="5" name="Image 0" descr="/Users/danwahlin/.copilot/session-state/56a7a0da-def8-48d4-b5e8-0ac3878cb8dd/files/slides-build/img/grad-corner.png">    </p:cNvPr>
           <p:cNvPicPr>
             <a:picLocks noChangeAspect="1"/>
           </p:cNvPicPr>
@@ -11487,6 +11274,103 @@
         </p:blipFill>
         <p:spPr>
           <a:xfrm>
+            <a:off x="6349901" y="0"/>
+            <a:ext cx="2793950" cy="1308050"/>
+          </a:xfrm>
+          <a:prstGeom prst="rect">
+            <a:avLst/>
+          </a:prstGeom>
+        </p:spPr>
+      </p:pic>
+      <p:sp>
+        <p:nvSpPr>
+          <p:cNvPr id="6" name="Text 3"/>
+          <p:cNvSpPr/>
+          <p:nvPr/>
+        </p:nvSpPr>
+        <p:spPr>
+          <a:xfrm>
+            <a:off x="7340501" y="177701"/>
+            <a:ext cx="1168301" cy="279350"/>
+          </a:xfrm>
+          <a:prstGeom prst="roundRect">
+            <a:avLst>
+              <a:gd name="adj" fmla="val 22731"/>
+            </a:avLst>
+          </a:prstGeom>
+          <a:solidFill>
+            <a:srgbClr val="1A7F37"/>
+          </a:solidFill>
+          <a:ln/>
+        </p:spPr>
+        <p:txBody>
+          <a:bodyPr wrap="square" rtlCol="0" anchor="ctr"/>
+          <a:lstStyle/>
+          <a:p>
+            <a:pPr indent="0" marL="0">
+              <a:buNone/>
+            </a:pPr>
+            <a:endParaRPr lang="en-US" dirty="0"/>
+          </a:p>
+        </p:txBody>
+      </p:sp>
+      <p:sp>
+        <p:nvSpPr>
+          <p:cNvPr id="7" name="Text 4"/>
+          <p:cNvSpPr/>
+          <p:nvPr/>
+        </p:nvSpPr>
+        <p:spPr>
+          <a:xfrm>
+            <a:off x="7461041" y="231577"/>
+            <a:ext cx="927071" cy="171450"/>
+          </a:xfrm>
+          <a:prstGeom prst="rect">
+            <a:avLst/>
+          </a:prstGeom>
+          <a:noFill/>
+          <a:ln/>
+        </p:spPr>
+        <p:txBody>
+          <a:bodyPr wrap="square" lIns="0" tIns="0" rIns="0" bIns="0" rtlCol="0" anchor="t"/>
+          <a:lstStyle/>
+          <a:p>
+            <a:pPr algn="ctr" indent="0" marL="0">
+              <a:buNone/>
+            </a:pPr>
+            <a:r>
+              <a:rPr lang="en-US" sz="1150" b="1" dirty="0">
+                <a:solidFill>
+                  <a:srgbClr val="FFFFFF"/>
+                </a:solidFill>
+                <a:latin typeface="Arial" pitchFamily="34" charset="0"/>
+                <a:ea typeface="Arial" pitchFamily="34" charset="-122"/>
+                <a:cs typeface="Arial" pitchFamily="34" charset="-120"/>
+              </a:rPr>
+              <a:t>CHAPTER 02</a:t>
+            </a:r>
+            <a:endParaRPr lang="en-US" sz="1150" dirty="0"/>
+          </a:p>
+        </p:txBody>
+      </p:sp>
+      <p:pic>
+        <p:nvPicPr>
+          <p:cNvPr id="8" name="Image 1" descr="/Users/danwahlin/.copilot/session-state/56a7a0da-def8-48d4-b5e8-0ac3878cb8dd/files/slides-build/icons/FaGithub-1F2328.png">
+            <a:hlinkClick r:id="rId3" tooltip="https://github.com/github/copilot-app-for-beginners/tree/main/02-sessions-worktrees-context"/>
+          </p:cNvPr>
+          <p:cNvPicPr>
+            <a:picLocks noChangeAspect="1"/>
+          </p:cNvPicPr>
+          <p:nvPr/>
+        </p:nvPicPr>
+        <p:blipFill>
+          <a:blip r:embed="rId2"/>
+          <a:stretch>
+            <a:fillRect/>
+          </a:stretch>
+        </p:blipFill>
+        <p:spPr>
+          <a:xfrm>
             <a:off x="8610600" y="165050"/>
             <a:ext cx="304800" cy="304800"/>
           </a:xfrm>
@@ -11497,7 +11381,7 @@
       </p:pic>
       <p:sp>
         <p:nvSpPr>
-          <p:cNvPr id="8" name="Text 5"/>
+          <p:cNvPr id="9" name="Text 5"/>
           <p:cNvSpPr/>
           <p:nvPr/>
         </p:nvSpPr>
@@ -11536,7 +11420,7 @@
       </p:sp>
       <p:sp>
         <p:nvSpPr>
-          <p:cNvPr id="9" name="Text 6"/>
+          <p:cNvPr id="10" name="Text 6"/>
           <p:cNvSpPr/>
           <p:nvPr/>
         </p:nvSpPr>
@@ -11581,7 +11465,7 @@
       </p:sp>
       <p:sp>
         <p:nvSpPr>
-          <p:cNvPr id="10" name="Text 7"/>
+          <p:cNvPr id="11" name="Text 7"/>
           <p:cNvSpPr/>
           <p:nvPr/>
         </p:nvSpPr>
@@ -11613,7 +11497,7 @@
       </p:sp>
       <p:sp>
         <p:nvSpPr>
-          <p:cNvPr id="11" name="Text 8"/>
+          <p:cNvPr id="12" name="Text 8"/>
           <p:cNvSpPr/>
           <p:nvPr/>
         </p:nvSpPr>
@@ -11685,112 +11569,9 @@
           <a:chExt cx="0" cy="0"/>
         </a:xfrm>
       </p:grpSpPr>
-      <p:sp>
-        <p:nvSpPr>
-          <p:cNvPr id="2" name="Text 0"/>
-          <p:cNvSpPr/>
-          <p:nvPr/>
-        </p:nvSpPr>
-        <p:spPr>
-          <a:xfrm>
-            <a:off x="0" y="0"/>
-            <a:ext cx="9144000" cy="76200"/>
-          </a:xfrm>
-          <a:prstGeom prst="rect">
-            <a:avLst/>
-          </a:prstGeom>
-          <a:solidFill>
-            <a:srgbClr val="8250DF"/>
-          </a:solidFill>
-          <a:ln/>
-        </p:spPr>
-        <p:txBody>
-          <a:bodyPr wrap="square" rtlCol="0" anchor="ctr"/>
-          <a:lstStyle/>
-          <a:p>
-            <a:pPr indent="0" marL="0">
-              <a:buNone/>
-            </a:pPr>
-            <a:endParaRPr lang="en-US" dirty="0"/>
-          </a:p>
-        </p:txBody>
-      </p:sp>
-      <p:sp>
-        <p:nvSpPr>
-          <p:cNvPr id="3" name="Text 1"/>
-          <p:cNvSpPr/>
-          <p:nvPr/>
-        </p:nvSpPr>
-        <p:spPr>
-          <a:xfrm>
-            <a:off x="7340501" y="177701"/>
-            <a:ext cx="1168301" cy="279350"/>
-          </a:xfrm>
-          <a:prstGeom prst="roundRect">
-            <a:avLst>
-              <a:gd name="adj" fmla="val 22731"/>
-            </a:avLst>
-          </a:prstGeom>
-          <a:solidFill>
-            <a:srgbClr val="1A7F37"/>
-          </a:solidFill>
-          <a:ln/>
-        </p:spPr>
-        <p:txBody>
-          <a:bodyPr wrap="square" rtlCol="0" anchor="ctr"/>
-          <a:lstStyle/>
-          <a:p>
-            <a:pPr indent="0" marL="0">
-              <a:buNone/>
-            </a:pPr>
-            <a:endParaRPr lang="en-US" dirty="0"/>
-          </a:p>
-        </p:txBody>
-      </p:sp>
-      <p:sp>
-        <p:nvSpPr>
-          <p:cNvPr id="4" name="Text 2"/>
-          <p:cNvSpPr/>
-          <p:nvPr/>
-        </p:nvSpPr>
-        <p:spPr>
-          <a:xfrm>
-            <a:off x="7461041" y="231577"/>
-            <a:ext cx="927071" cy="171450"/>
-          </a:xfrm>
-          <a:prstGeom prst="rect">
-            <a:avLst/>
-          </a:prstGeom>
-          <a:noFill/>
-          <a:ln/>
-        </p:spPr>
-        <p:txBody>
-          <a:bodyPr wrap="square" lIns="0" tIns="0" rIns="0" bIns="0" rtlCol="0" anchor="t"/>
-          <a:lstStyle/>
-          <a:p>
-            <a:pPr algn="ctr" indent="0" marL="0">
-              <a:buNone/>
-            </a:pPr>
-            <a:r>
-              <a:rPr lang="en-US" sz="1150" b="1" dirty="0">
-                <a:solidFill>
-                  <a:srgbClr val="FFFFFF"/>
-                </a:solidFill>
-                <a:latin typeface="Arial" pitchFamily="34" charset="0"/>
-                <a:ea typeface="Arial" pitchFamily="34" charset="-122"/>
-                <a:cs typeface="Arial" pitchFamily="34" charset="-120"/>
-              </a:rPr>
-              <a:t>CHAPTER 02</a:t>
-            </a:r>
-            <a:endParaRPr lang="en-US" sz="1150" dirty="0"/>
-          </a:p>
-        </p:txBody>
-      </p:sp>
       <p:pic>
         <p:nvPicPr>
-          <p:cNvPr id="5" name="Image 0" descr="/Users/danwahlin/.copilot/session-state/56a7a0da-def8-48d4-b5e8-0ac3878cb8dd/files/slides-build/icons/FaGithub-1F2328.png">
-            <a:hlinkClick r:id="rId2" tooltip="https://github.com/github/copilot-app-for-beginners/tree/main/02-sessions-worktrees-context"/>
-          </p:cNvPr>
+          <p:cNvPr id="2" name="Image 0" descr="/Users/danwahlin/.copilot/session-state/56a7a0da-def8-48d4-b5e8-0ac3878cb8dd/files/slides-build/img/grad-corner.png">    </p:cNvPr>
           <p:cNvPicPr>
             <a:picLocks noChangeAspect="1"/>
           </p:cNvPicPr>
@@ -11804,6 +11585,103 @@
         </p:blipFill>
         <p:spPr>
           <a:xfrm>
+            <a:off x="6349901" y="0"/>
+            <a:ext cx="2793950" cy="1308050"/>
+          </a:xfrm>
+          <a:prstGeom prst="rect">
+            <a:avLst/>
+          </a:prstGeom>
+        </p:spPr>
+      </p:pic>
+      <p:sp>
+        <p:nvSpPr>
+          <p:cNvPr id="3" name="Text 0"/>
+          <p:cNvSpPr/>
+          <p:nvPr/>
+        </p:nvSpPr>
+        <p:spPr>
+          <a:xfrm>
+            <a:off x="7340501" y="177701"/>
+            <a:ext cx="1168301" cy="279350"/>
+          </a:xfrm>
+          <a:prstGeom prst="roundRect">
+            <a:avLst>
+              <a:gd name="adj" fmla="val 22731"/>
+            </a:avLst>
+          </a:prstGeom>
+          <a:solidFill>
+            <a:srgbClr val="1A7F37"/>
+          </a:solidFill>
+          <a:ln/>
+        </p:spPr>
+        <p:txBody>
+          <a:bodyPr wrap="square" rtlCol="0" anchor="ctr"/>
+          <a:lstStyle/>
+          <a:p>
+            <a:pPr indent="0" marL="0">
+              <a:buNone/>
+            </a:pPr>
+            <a:endParaRPr lang="en-US" dirty="0"/>
+          </a:p>
+        </p:txBody>
+      </p:sp>
+      <p:sp>
+        <p:nvSpPr>
+          <p:cNvPr id="4" name="Text 1"/>
+          <p:cNvSpPr/>
+          <p:nvPr/>
+        </p:nvSpPr>
+        <p:spPr>
+          <a:xfrm>
+            <a:off x="7461041" y="231577"/>
+            <a:ext cx="927071" cy="171450"/>
+          </a:xfrm>
+          <a:prstGeom prst="rect">
+            <a:avLst/>
+          </a:prstGeom>
+          <a:noFill/>
+          <a:ln/>
+        </p:spPr>
+        <p:txBody>
+          <a:bodyPr wrap="square" lIns="0" tIns="0" rIns="0" bIns="0" rtlCol="0" anchor="t"/>
+          <a:lstStyle/>
+          <a:p>
+            <a:pPr algn="ctr" indent="0" marL="0">
+              <a:buNone/>
+            </a:pPr>
+            <a:r>
+              <a:rPr lang="en-US" sz="1150" b="1" dirty="0">
+                <a:solidFill>
+                  <a:srgbClr val="FFFFFF"/>
+                </a:solidFill>
+                <a:latin typeface="Arial" pitchFamily="34" charset="0"/>
+                <a:ea typeface="Arial" pitchFamily="34" charset="-122"/>
+                <a:cs typeface="Arial" pitchFamily="34" charset="-120"/>
+              </a:rPr>
+              <a:t>CHAPTER 02</a:t>
+            </a:r>
+            <a:endParaRPr lang="en-US" sz="1150" dirty="0"/>
+          </a:p>
+        </p:txBody>
+      </p:sp>
+      <p:pic>
+        <p:nvPicPr>
+          <p:cNvPr id="5" name="Image 1" descr="/Users/danwahlin/.copilot/session-state/56a7a0da-def8-48d4-b5e8-0ac3878cb8dd/files/slides-build/icons/FaGithub-1F2328.png">
+            <a:hlinkClick r:id="rId3" tooltip="https://github.com/github/copilot-app-for-beginners/tree/main/02-sessions-worktrees-context"/>
+          </p:cNvPr>
+          <p:cNvPicPr>
+            <a:picLocks noChangeAspect="1"/>
+          </p:cNvPicPr>
+          <p:nvPr/>
+        </p:nvPicPr>
+        <p:blipFill>
+          <a:blip r:embed="rId2"/>
+          <a:stretch>
+            <a:fillRect/>
+          </a:stretch>
+        </p:blipFill>
+        <p:spPr>
+          <a:xfrm>
             <a:off x="8610600" y="165050"/>
             <a:ext cx="304800" cy="304800"/>
           </a:xfrm>
@@ -11814,7 +11692,7 @@
       </p:pic>
       <p:sp>
         <p:nvSpPr>
-          <p:cNvPr id="6" name="Text 3"/>
+          <p:cNvPr id="6" name="Text 2"/>
           <p:cNvSpPr/>
           <p:nvPr/>
         </p:nvSpPr>
@@ -11853,7 +11731,7 @@
       </p:sp>
       <p:sp>
         <p:nvSpPr>
-          <p:cNvPr id="7" name="Text 4"/>
+          <p:cNvPr id="7" name="Text 3"/>
           <p:cNvSpPr/>
           <p:nvPr/>
         </p:nvSpPr>
@@ -11898,7 +11776,7 @@
       </p:sp>
       <p:sp>
         <p:nvSpPr>
-          <p:cNvPr id="8" name="Text 5"/>
+          <p:cNvPr id="8" name="Text 4"/>
           <p:cNvSpPr/>
           <p:nvPr/>
         </p:nvSpPr>
@@ -11943,7 +11821,7 @@
       </p:sp>
       <p:sp>
         <p:nvSpPr>
-          <p:cNvPr id="9" name="Text 6"/>
+          <p:cNvPr id="9" name="Text 5"/>
           <p:cNvSpPr/>
           <p:nvPr/>
         </p:nvSpPr>
@@ -11979,7 +11857,7 @@
       </p:sp>
       <p:sp>
         <p:nvSpPr>
-          <p:cNvPr id="10" name="Text 7"/>
+          <p:cNvPr id="10" name="Text 6"/>
           <p:cNvSpPr/>
           <p:nvPr/>
         </p:nvSpPr>
@@ -12011,7 +11889,7 @@
       </p:sp>
       <p:sp>
         <p:nvSpPr>
-          <p:cNvPr id="11" name="Text 8"/>
+          <p:cNvPr id="11" name="Text 7"/>
           <p:cNvSpPr/>
           <p:nvPr/>
         </p:nvSpPr>
@@ -12050,7 +11928,7 @@
       </p:sp>
       <p:sp>
         <p:nvSpPr>
-          <p:cNvPr id="12" name="Text 9"/>
+          <p:cNvPr id="12" name="Text 8"/>
           <p:cNvSpPr/>
           <p:nvPr/>
         </p:nvSpPr>
@@ -12089,7 +11967,7 @@
       </p:sp>
       <p:sp>
         <p:nvSpPr>
-          <p:cNvPr id="13" name="Text 10"/>
+          <p:cNvPr id="13" name="Text 9"/>
           <p:cNvSpPr/>
           <p:nvPr/>
         </p:nvSpPr>
@@ -12121,7 +11999,7 @@
       </p:sp>
       <p:sp>
         <p:nvSpPr>
-          <p:cNvPr id="14" name="Text 11"/>
+          <p:cNvPr id="14" name="Text 10"/>
           <p:cNvSpPr/>
           <p:nvPr/>
         </p:nvSpPr>
@@ -12160,7 +12038,7 @@
       </p:sp>
       <p:sp>
         <p:nvSpPr>
-          <p:cNvPr id="15" name="Text 12"/>
+          <p:cNvPr id="15" name="Text 11"/>
           <p:cNvSpPr/>
           <p:nvPr/>
         </p:nvSpPr>
@@ -12196,7 +12074,7 @@
       </p:sp>
       <p:sp>
         <p:nvSpPr>
-          <p:cNvPr id="16" name="Text 13"/>
+          <p:cNvPr id="16" name="Text 12"/>
           <p:cNvSpPr/>
           <p:nvPr/>
         </p:nvSpPr>
@@ -12228,7 +12106,7 @@
       </p:sp>
       <p:sp>
         <p:nvSpPr>
-          <p:cNvPr id="17" name="Text 14"/>
+          <p:cNvPr id="17" name="Text 13"/>
           <p:cNvSpPr/>
           <p:nvPr/>
         </p:nvSpPr>
@@ -12267,7 +12145,7 @@
       </p:sp>
       <p:sp>
         <p:nvSpPr>
-          <p:cNvPr id="18" name="Text 15"/>
+          <p:cNvPr id="18" name="Text 14"/>
           <p:cNvSpPr/>
           <p:nvPr/>
         </p:nvSpPr>
@@ -12306,7 +12184,7 @@
       </p:sp>
       <p:sp>
         <p:nvSpPr>
-          <p:cNvPr id="19" name="Text 16"/>
+          <p:cNvPr id="19" name="Text 15"/>
           <p:cNvSpPr/>
           <p:nvPr/>
         </p:nvSpPr>
@@ -12338,7 +12216,7 @@
       </p:sp>
       <p:sp>
         <p:nvSpPr>
-          <p:cNvPr id="20" name="Text 17"/>
+          <p:cNvPr id="20" name="Text 16"/>
           <p:cNvSpPr/>
           <p:nvPr/>
         </p:nvSpPr>
@@ -12377,7 +12255,7 @@
       </p:sp>
       <p:sp>
         <p:nvSpPr>
-          <p:cNvPr id="21" name="Text 18"/>
+          <p:cNvPr id="21" name="Text 17"/>
           <p:cNvSpPr/>
           <p:nvPr/>
         </p:nvSpPr>
@@ -12413,7 +12291,7 @@
       </p:sp>
       <p:sp>
         <p:nvSpPr>
-          <p:cNvPr id="22" name="Text 19"/>
+          <p:cNvPr id="22" name="Text 18"/>
           <p:cNvSpPr/>
           <p:nvPr/>
         </p:nvSpPr>
@@ -12445,7 +12323,7 @@
       </p:sp>
       <p:sp>
         <p:nvSpPr>
-          <p:cNvPr id="23" name="Text 20"/>
+          <p:cNvPr id="23" name="Text 19"/>
           <p:cNvSpPr/>
           <p:nvPr/>
         </p:nvSpPr>
@@ -12484,7 +12362,7 @@
       </p:sp>
       <p:sp>
         <p:nvSpPr>
-          <p:cNvPr id="24" name="Text 21"/>
+          <p:cNvPr id="24" name="Text 20"/>
           <p:cNvSpPr/>
           <p:nvPr/>
         </p:nvSpPr>
@@ -12523,7 +12401,7 @@
       </p:sp>
       <p:sp>
         <p:nvSpPr>
-          <p:cNvPr id="25" name="Text 22"/>
+          <p:cNvPr id="25" name="Text 21"/>
           <p:cNvSpPr/>
           <p:nvPr/>
         </p:nvSpPr>
@@ -12555,7 +12433,7 @@
       </p:sp>
       <p:sp>
         <p:nvSpPr>
-          <p:cNvPr id="26" name="Text 23"/>
+          <p:cNvPr id="26" name="Text 22"/>
           <p:cNvSpPr/>
           <p:nvPr/>
         </p:nvSpPr>
@@ -12594,7 +12472,7 @@
       </p:sp>
       <p:sp>
         <p:nvSpPr>
-          <p:cNvPr id="27" name="Text 24"/>
+          <p:cNvPr id="27" name="Text 23"/>
           <p:cNvSpPr/>
           <p:nvPr/>
         </p:nvSpPr>
@@ -12630,7 +12508,7 @@
       </p:sp>
       <p:sp>
         <p:nvSpPr>
-          <p:cNvPr id="28" name="Text 25"/>
+          <p:cNvPr id="28" name="Text 24"/>
           <p:cNvSpPr/>
           <p:nvPr/>
         </p:nvSpPr>
@@ -12662,7 +12540,7 @@
       </p:sp>
       <p:sp>
         <p:nvSpPr>
-          <p:cNvPr id="29" name="Text 26"/>
+          <p:cNvPr id="29" name="Text 25"/>
           <p:cNvSpPr/>
           <p:nvPr/>
         </p:nvSpPr>
@@ -12701,7 +12579,7 @@
       </p:sp>
       <p:sp>
         <p:nvSpPr>
-          <p:cNvPr id="30" name="Text 27"/>
+          <p:cNvPr id="30" name="Text 26"/>
           <p:cNvSpPr/>
           <p:nvPr/>
         </p:nvSpPr>
@@ -12740,7 +12618,7 @@
       </p:sp>
       <p:sp>
         <p:nvSpPr>
-          <p:cNvPr id="31" name="Text 28"/>
+          <p:cNvPr id="31" name="Text 27"/>
           <p:cNvSpPr/>
           <p:nvPr/>
         </p:nvSpPr>
@@ -12772,7 +12650,7 @@
       </p:sp>
       <p:sp>
         <p:nvSpPr>
-          <p:cNvPr id="32" name="Text 29"/>
+          <p:cNvPr id="32" name="Text 28"/>
           <p:cNvSpPr/>
           <p:nvPr/>
         </p:nvSpPr>
@@ -12943,82 +12821,9 @@
           </a:p>
         </p:txBody>
       </p:sp>
-      <p:sp>
-        <p:nvSpPr>
-          <p:cNvPr id="5" name="Text 3"/>
-          <p:cNvSpPr/>
-          <p:nvPr/>
-        </p:nvSpPr>
-        <p:spPr>
-          <a:xfrm>
-            <a:off x="7340501" y="177701"/>
-            <a:ext cx="1168301" cy="279350"/>
-          </a:xfrm>
-          <a:prstGeom prst="roundRect">
-            <a:avLst>
-              <a:gd name="adj" fmla="val 22731"/>
-            </a:avLst>
-          </a:prstGeom>
-          <a:solidFill>
-            <a:srgbClr val="1A7F37"/>
-          </a:solidFill>
-          <a:ln/>
-        </p:spPr>
-        <p:txBody>
-          <a:bodyPr wrap="square" rtlCol="0" anchor="ctr"/>
-          <a:lstStyle/>
-          <a:p>
-            <a:pPr indent="0" marL="0">
-              <a:buNone/>
-            </a:pPr>
-            <a:endParaRPr lang="en-US" dirty="0"/>
-          </a:p>
-        </p:txBody>
-      </p:sp>
-      <p:sp>
-        <p:nvSpPr>
-          <p:cNvPr id="6" name="Text 4"/>
-          <p:cNvSpPr/>
-          <p:nvPr/>
-        </p:nvSpPr>
-        <p:spPr>
-          <a:xfrm>
-            <a:off x="7461041" y="231577"/>
-            <a:ext cx="927071" cy="171450"/>
-          </a:xfrm>
-          <a:prstGeom prst="rect">
-            <a:avLst/>
-          </a:prstGeom>
-          <a:noFill/>
-          <a:ln/>
-        </p:spPr>
-        <p:txBody>
-          <a:bodyPr wrap="square" lIns="0" tIns="0" rIns="0" bIns="0" rtlCol="0" anchor="t"/>
-          <a:lstStyle/>
-          <a:p>
-            <a:pPr algn="ctr" indent="0" marL="0">
-              <a:buNone/>
-            </a:pPr>
-            <a:r>
-              <a:rPr lang="en-US" sz="1150" b="1" dirty="0">
-                <a:solidFill>
-                  <a:srgbClr val="FFFFFF"/>
-                </a:solidFill>
-                <a:latin typeface="Arial" pitchFamily="34" charset="0"/>
-                <a:ea typeface="Arial" pitchFamily="34" charset="-122"/>
-                <a:cs typeface="Arial" pitchFamily="34" charset="-120"/>
-              </a:rPr>
-              <a:t>CHAPTER 02</a:t>
-            </a:r>
-            <a:endParaRPr lang="en-US" sz="1150" dirty="0"/>
-          </a:p>
-        </p:txBody>
-      </p:sp>
       <p:pic>
         <p:nvPicPr>
-          <p:cNvPr id="7" name="Image 0" descr="/Users/danwahlin/.copilot/session-state/56a7a0da-def8-48d4-b5e8-0ac3878cb8dd/files/slides-build/icons/FaGithub-1F2328.png">
-            <a:hlinkClick r:id="rId2" tooltip="https://github.com/github/copilot-app-for-beginners/tree/main/02-sessions-worktrees-context"/>
-          </p:cNvPr>
+          <p:cNvPr id="5" name="Image 0" descr="/Users/danwahlin/.copilot/session-state/56a7a0da-def8-48d4-b5e8-0ac3878cb8dd/files/slides-build/img/grad-corner.png">    </p:cNvPr>
           <p:cNvPicPr>
             <a:picLocks noChangeAspect="1"/>
           </p:cNvPicPr>
@@ -13032,6 +12837,103 @@
         </p:blipFill>
         <p:spPr>
           <a:xfrm>
+            <a:off x="6349901" y="0"/>
+            <a:ext cx="2793950" cy="1308050"/>
+          </a:xfrm>
+          <a:prstGeom prst="rect">
+            <a:avLst/>
+          </a:prstGeom>
+        </p:spPr>
+      </p:pic>
+      <p:sp>
+        <p:nvSpPr>
+          <p:cNvPr id="6" name="Text 3"/>
+          <p:cNvSpPr/>
+          <p:nvPr/>
+        </p:nvSpPr>
+        <p:spPr>
+          <a:xfrm>
+            <a:off x="7340501" y="177701"/>
+            <a:ext cx="1168301" cy="279350"/>
+          </a:xfrm>
+          <a:prstGeom prst="roundRect">
+            <a:avLst>
+              <a:gd name="adj" fmla="val 22731"/>
+            </a:avLst>
+          </a:prstGeom>
+          <a:solidFill>
+            <a:srgbClr val="1A7F37"/>
+          </a:solidFill>
+          <a:ln/>
+        </p:spPr>
+        <p:txBody>
+          <a:bodyPr wrap="square" rtlCol="0" anchor="ctr"/>
+          <a:lstStyle/>
+          <a:p>
+            <a:pPr indent="0" marL="0">
+              <a:buNone/>
+            </a:pPr>
+            <a:endParaRPr lang="en-US" dirty="0"/>
+          </a:p>
+        </p:txBody>
+      </p:sp>
+      <p:sp>
+        <p:nvSpPr>
+          <p:cNvPr id="7" name="Text 4"/>
+          <p:cNvSpPr/>
+          <p:nvPr/>
+        </p:nvSpPr>
+        <p:spPr>
+          <a:xfrm>
+            <a:off x="7461041" y="231577"/>
+            <a:ext cx="927071" cy="171450"/>
+          </a:xfrm>
+          <a:prstGeom prst="rect">
+            <a:avLst/>
+          </a:prstGeom>
+          <a:noFill/>
+          <a:ln/>
+        </p:spPr>
+        <p:txBody>
+          <a:bodyPr wrap="square" lIns="0" tIns="0" rIns="0" bIns="0" rtlCol="0" anchor="t"/>
+          <a:lstStyle/>
+          <a:p>
+            <a:pPr algn="ctr" indent="0" marL="0">
+              <a:buNone/>
+            </a:pPr>
+            <a:r>
+              <a:rPr lang="en-US" sz="1150" b="1" dirty="0">
+                <a:solidFill>
+                  <a:srgbClr val="FFFFFF"/>
+                </a:solidFill>
+                <a:latin typeface="Arial" pitchFamily="34" charset="0"/>
+                <a:ea typeface="Arial" pitchFamily="34" charset="-122"/>
+                <a:cs typeface="Arial" pitchFamily="34" charset="-120"/>
+              </a:rPr>
+              <a:t>CHAPTER 02</a:t>
+            </a:r>
+            <a:endParaRPr lang="en-US" sz="1150" dirty="0"/>
+          </a:p>
+        </p:txBody>
+      </p:sp>
+      <p:pic>
+        <p:nvPicPr>
+          <p:cNvPr id="8" name="Image 1" descr="/Users/danwahlin/.copilot/session-state/56a7a0da-def8-48d4-b5e8-0ac3878cb8dd/files/slides-build/icons/FaGithub-1F2328.png">
+            <a:hlinkClick r:id="rId3" tooltip="https://github.com/github/copilot-app-for-beginners/tree/main/02-sessions-worktrees-context"/>
+          </p:cNvPr>
+          <p:cNvPicPr>
+            <a:picLocks noChangeAspect="1"/>
+          </p:cNvPicPr>
+          <p:nvPr/>
+        </p:nvPicPr>
+        <p:blipFill>
+          <a:blip r:embed="rId2"/>
+          <a:stretch>
+            <a:fillRect/>
+          </a:stretch>
+        </p:blipFill>
+        <p:spPr>
+          <a:xfrm>
             <a:off x="8610600" y="165050"/>
             <a:ext cx="304800" cy="304800"/>
           </a:xfrm>
@@ -13042,7 +12944,7 @@
       </p:pic>
       <p:sp>
         <p:nvSpPr>
-          <p:cNvPr id="8" name="Text 5"/>
+          <p:cNvPr id="9" name="Text 5"/>
           <p:cNvSpPr/>
           <p:nvPr/>
         </p:nvSpPr>
@@ -13081,7 +12983,7 @@
       </p:sp>
       <p:sp>
         <p:nvSpPr>
-          <p:cNvPr id="9" name="Text 6"/>
+          <p:cNvPr id="10" name="Text 6"/>
           <p:cNvSpPr/>
           <p:nvPr/>
         </p:nvSpPr>
@@ -13126,7 +13028,7 @@
       </p:sp>
       <p:sp>
         <p:nvSpPr>
-          <p:cNvPr id="10" name="Text 7"/>
+          <p:cNvPr id="11" name="Text 7"/>
           <p:cNvSpPr/>
           <p:nvPr/>
         </p:nvSpPr>
@@ -13158,7 +13060,7 @@
       </p:sp>
       <p:sp>
         <p:nvSpPr>
-          <p:cNvPr id="11" name="Text 8"/>
+          <p:cNvPr id="12" name="Text 8"/>
           <p:cNvSpPr/>
           <p:nvPr/>
         </p:nvSpPr>

--- a/slides/02-sessions-worktrees-context.pptx
+++ b/slides/02-sessions-worktrees-context.pptx
@@ -4449,12 +4449,12 @@
         </p:nvSpPr>
         <p:spPr>
           <a:xfrm>
-            <a:off x="511076" y="1954262"/>
-            <a:ext cx="3956000" cy="1588740"/>
+            <a:off x="511076" y="1937742"/>
+            <a:ext cx="3956000" cy="1621780"/>
           </a:xfrm>
           <a:prstGeom prst="roundRect">
             <a:avLst>
-              <a:gd name="adj" fmla="val 4796"/>
+              <a:gd name="adj" fmla="val 4699"/>
             </a:avLst>
           </a:prstGeom>
           <a:solidFill>
@@ -4500,8 +4500,8 @@
         </p:blipFill>
         <p:spPr>
           <a:xfrm>
-            <a:off x="558701" y="2001887"/>
-            <a:ext cx="3860750" cy="1493490"/>
+            <a:off x="558701" y="1985367"/>
+            <a:ext cx="3860750" cy="1526530"/>
           </a:xfrm>
           <a:prstGeom prst="rect">
             <a:avLst/>

--- a/slides/02-sessions-worktrees-context.pptx
+++ b/slides/02-sessions-worktrees-context.pptx
@@ -2034,7 +2034,7 @@
       </p:grpSpPr>
       <p:pic>
         <p:nvPicPr>
-          <p:cNvPr id="2" name="Image 0" descr="/Users/danwahlin/.copilot/session-state/56a7a0da-def8-48d4-b5e8-0ac3878cb8dd/files/slides-build/img/grad-title.jpg">    </p:cNvPr>
+          <p:cNvPr id="2" name="Image 0" descr="/Users/danwahlin/.copilot/session-state/56a7a0da-def8-48d4-b5e8-0ac3878cb8dd/files/slides-build/img/grad-title-pattern.jpg">    </p:cNvPr>
           <p:cNvPicPr>
             <a:picLocks noChangeAspect="1"/>
           </p:cNvPicPr>
@@ -2344,7 +2344,7 @@
       </p:grpSpPr>
       <p:pic>
         <p:nvPicPr>
-          <p:cNvPr id="2" name="Image 0" descr="/Users/danwahlin/.copilot/session-state/56a7a0da-def8-48d4-b5e8-0ac3878cb8dd/files/slides-build/img/grad-corner.png">    </p:cNvPr>
+          <p:cNvPr id="2" name="Image 0" descr="/Users/danwahlin/.copilot/session-state/56a7a0da-def8-48d4-b5e8-0ac3878cb8dd/files/slides-build/img/grad-corner-pattern.png">    </p:cNvPr>
           <p:cNvPicPr>
             <a:picLocks noChangeAspect="1"/>
           </p:cNvPicPr>
@@ -3317,7 +3317,7 @@
       </p:grpSpPr>
       <p:pic>
         <p:nvPicPr>
-          <p:cNvPr id="2" name="Image 0" descr="/Users/danwahlin/.copilot/session-state/56a7a0da-def8-48d4-b5e8-0ac3878cb8dd/files/slides-build/img/grad-corner.png">    </p:cNvPr>
+          <p:cNvPr id="2" name="Image 0" descr="/Users/danwahlin/.copilot/session-state/56a7a0da-def8-48d4-b5e8-0ac3878cb8dd/files/slides-build/img/grad-corner-pattern.png">    </p:cNvPr>
           <p:cNvPicPr>
             <a:picLocks noChangeAspect="1"/>
           </p:cNvPicPr>
@@ -4238,7 +4238,7 @@
       </p:grpSpPr>
       <p:pic>
         <p:nvPicPr>
-          <p:cNvPr id="2" name="Image 0" descr="/Users/danwahlin/.copilot/session-state/56a7a0da-def8-48d4-b5e8-0ac3878cb8dd/files/slides-build/img/grad-corner.png">    </p:cNvPr>
+          <p:cNvPr id="2" name="Image 0" descr="/Users/danwahlin/.copilot/session-state/56a7a0da-def8-48d4-b5e8-0ac3878cb8dd/files/slides-build/img/grad-corner-pattern.png">    </p:cNvPr>
           <p:cNvPicPr>
             <a:picLocks noChangeAspect="1"/>
           </p:cNvPicPr>
@@ -4727,7 +4727,7 @@
       </p:grpSpPr>
       <p:pic>
         <p:nvPicPr>
-          <p:cNvPr id="2" name="Image 0" descr="/Users/danwahlin/.copilot/session-state/56a7a0da-def8-48d4-b5e8-0ac3878cb8dd/files/slides-build/img/grad-corner.png">    </p:cNvPr>
+          <p:cNvPr id="2" name="Image 0" descr="/Users/danwahlin/.copilot/session-state/56a7a0da-def8-48d4-b5e8-0ac3878cb8dd/files/slides-build/img/grad-corner-pattern.png">    </p:cNvPr>
           <p:cNvPicPr>
             <a:picLocks noChangeAspect="1"/>
           </p:cNvPicPr>
@@ -6103,7 +6103,7 @@
       </p:grpSpPr>
       <p:pic>
         <p:nvPicPr>
-          <p:cNvPr id="2" name="Image 0" descr="/Users/danwahlin/.copilot/session-state/56a7a0da-def8-48d4-b5e8-0ac3878cb8dd/files/slides-build/img/grad-corner.png">    </p:cNvPr>
+          <p:cNvPr id="2" name="Image 0" descr="/Users/danwahlin/.copilot/session-state/56a7a0da-def8-48d4-b5e8-0ac3878cb8dd/files/slides-build/img/grad-corner-pattern.png">    </p:cNvPr>
           <p:cNvPicPr>
             <a:picLocks noChangeAspect="1"/>
           </p:cNvPicPr>
@@ -7300,7 +7300,7 @@
       </p:grpSpPr>
       <p:pic>
         <p:nvPicPr>
-          <p:cNvPr id="2" name="Image 0" descr="/Users/danwahlin/.copilot/session-state/56a7a0da-def8-48d4-b5e8-0ac3878cb8dd/files/slides-build/img/grad-corner.png">    </p:cNvPr>
+          <p:cNvPr id="2" name="Image 0" descr="/Users/danwahlin/.copilot/session-state/56a7a0da-def8-48d4-b5e8-0ac3878cb8dd/files/slides-build/img/grad-corner-pattern.png">    </p:cNvPr>
           <p:cNvPicPr>
             <a:picLocks noChangeAspect="1"/>
           </p:cNvPicPr>
@@ -8371,7 +8371,7 @@
       </p:sp>
       <p:pic>
         <p:nvPicPr>
-          <p:cNvPr id="5" name="Image 0" descr="/Users/danwahlin/.copilot/session-state/56a7a0da-def8-48d4-b5e8-0ac3878cb8dd/files/slides-build/img/grad-corner.png">    </p:cNvPr>
+          <p:cNvPr id="5" name="Image 0" descr="/Users/danwahlin/.copilot/session-state/56a7a0da-def8-48d4-b5e8-0ac3878cb8dd/files/slides-build/img/grad-corner-pattern.png">    </p:cNvPr>
           <p:cNvPicPr>
             <a:picLocks noChangeAspect="1"/>
           </p:cNvPicPr>
@@ -8682,7 +8682,7 @@
       </p:grpSpPr>
       <p:pic>
         <p:nvPicPr>
-          <p:cNvPr id="2" name="Image 0" descr="/Users/danwahlin/.copilot/session-state/56a7a0da-def8-48d4-b5e8-0ac3878cb8dd/files/slides-build/img/grad-corner.png">    </p:cNvPr>
+          <p:cNvPr id="2" name="Image 0" descr="/Users/danwahlin/.copilot/session-state/56a7a0da-def8-48d4-b5e8-0ac3878cb8dd/files/slides-build/img/grad-corner-pattern.png">    </p:cNvPr>
           <p:cNvPicPr>
             <a:picLocks noChangeAspect="1"/>
           </p:cNvPicPr>
@@ -9442,7 +9442,7 @@
       </p:grpSpPr>
       <p:pic>
         <p:nvPicPr>
-          <p:cNvPr id="2" name="Image 0" descr="/Users/danwahlin/.copilot/session-state/56a7a0da-def8-48d4-b5e8-0ac3878cb8dd/files/slides-build/img/grad-corner.png">    </p:cNvPr>
+          <p:cNvPr id="2" name="Image 0" descr="/Users/danwahlin/.copilot/session-state/56a7a0da-def8-48d4-b5e8-0ac3878cb8dd/files/slides-build/img/grad-corner-pattern.png">    </p:cNvPr>
           <p:cNvPicPr>
             <a:picLocks noChangeAspect="1"/>
           </p:cNvPicPr>
@@ -10262,7 +10262,7 @@
       </p:grpSpPr>
       <p:pic>
         <p:nvPicPr>
-          <p:cNvPr id="2" name="Image 0" descr="/Users/danwahlin/.copilot/session-state/56a7a0da-def8-48d4-b5e8-0ac3878cb8dd/files/slides-build/img/grad-corner.png">    </p:cNvPr>
+          <p:cNvPr id="2" name="Image 0" descr="/Users/danwahlin/.copilot/session-state/56a7a0da-def8-48d4-b5e8-0ac3878cb8dd/files/slides-build/img/grad-corner-pattern.png">    </p:cNvPr>
           <p:cNvPicPr>
             <a:picLocks noChangeAspect="1"/>
           </p:cNvPicPr>
@@ -11260,7 +11260,7 @@
       </p:sp>
       <p:pic>
         <p:nvPicPr>
-          <p:cNvPr id="5" name="Image 0" descr="/Users/danwahlin/.copilot/session-state/56a7a0da-def8-48d4-b5e8-0ac3878cb8dd/files/slides-build/img/grad-corner.png">    </p:cNvPr>
+          <p:cNvPr id="5" name="Image 0" descr="/Users/danwahlin/.copilot/session-state/56a7a0da-def8-48d4-b5e8-0ac3878cb8dd/files/slides-build/img/grad-corner-pattern.png">    </p:cNvPr>
           <p:cNvPicPr>
             <a:picLocks noChangeAspect="1"/>
           </p:cNvPicPr>
@@ -11571,7 +11571,7 @@
       </p:grpSpPr>
       <p:pic>
         <p:nvPicPr>
-          <p:cNvPr id="2" name="Image 0" descr="/Users/danwahlin/.copilot/session-state/56a7a0da-def8-48d4-b5e8-0ac3878cb8dd/files/slides-build/img/grad-corner.png">    </p:cNvPr>
+          <p:cNvPr id="2" name="Image 0" descr="/Users/danwahlin/.copilot/session-state/56a7a0da-def8-48d4-b5e8-0ac3878cb8dd/files/slides-build/img/grad-corner-pattern.png">    </p:cNvPr>
           <p:cNvPicPr>
             <a:picLocks noChangeAspect="1"/>
           </p:cNvPicPr>
@@ -12823,7 +12823,7 @@
       </p:sp>
       <p:pic>
         <p:nvPicPr>
-          <p:cNvPr id="5" name="Image 0" descr="/Users/danwahlin/.copilot/session-state/56a7a0da-def8-48d4-b5e8-0ac3878cb8dd/files/slides-build/img/grad-corner.png">    </p:cNvPr>
+          <p:cNvPr id="5" name="Image 0" descr="/Users/danwahlin/.copilot/session-state/56a7a0da-def8-48d4-b5e8-0ac3878cb8dd/files/slides-build/img/grad-corner-pattern.png">    </p:cNvPr>
           <p:cNvPicPr>
             <a:picLocks noChangeAspect="1"/>
           </p:cNvPicPr>

--- a/slides/02-sessions-worktrees-context.pptx
+++ b/slides/02-sessions-worktrees-context.pptx
@@ -19,9 +19,10 @@
     <p:sldId id="267" r:id="rId13"/>
     <p:sldId id="268" r:id="rId14"/>
     <p:sldId id="269" r:id="rId15"/>
+    <p:sldId id="270" r:id="rId16"/>
   </p:sldIdLst>
   <p:notesMasterIdLst>
-    <p:notesMasterId r:id="rId16"/>
+    <p:notesMasterId r:id="rId17"/>
   </p:notesMasterIdLst>
   <p:sldSz cx="9144000" cy="5143500"/>
   <p:notesSz cx="5143500" cy="9144000"/>
@@ -603,7 +604,7 @@
           <a:p>
             <a:r>
               <a:rPr lang="en-US" dirty="0"/>
-              <a:t>Point to the project in the sidebar and select the Create from icon that appears. On the Branches tab, pick practice-empty-state-copy; the app starts a new worktree session. Set Plan mode, type hash 3 and pick Improve the empty state copy, then add: Investigate the issue and create a plan to address it. Copilot may ask a short scope question first; pick the recommended answer. The plan opens in the Plan tab, and a Review plan box replaces the prompt box. Choose Exit plan mode and I will prompt myself. The session returns to Interactive so you can capture a baseline before any change.</a:t>
+              <a:t>Section 3: put isolation and context together. The practice branch has a less helpful empty-state message on purpose.</a:t>
             </a:r>
             <a:endParaRPr lang="en-US" dirty="0"/>
           </a:p>
@@ -691,7 +692,7 @@
           <a:p>
             <a:r>
               <a:rPr lang="en-US" dirty="0"/>
-              <a:t>Ask Copilot to run the Book App and open the preview. Search for hobbit and confirm The Hobbit appears. Then search for zzzz-no-match. The baseline says No results and Try again, which does not tell anyone what to do. Send Implement the plan; the plan checklist updates as Copilot works. Inspect the diff in the Changes tab. Reload and search again: the message should suggest changing the search term, genre, or reading status.</a:t>
+              <a:t>Point to the project in the sidebar and select the Create from icon that appears. On the Branches tab, pick practice-empty-state-copy; the app starts a new worktree session. Set Plan mode, type hash 3 and pick Improve the empty state copy, then add: Investigate the issue and create a plan to address it. Copilot may ask a short scope question first; pick the recommended answer. The plan opens in the Plan tab, and a Review plan box replaces the prompt box. Choose Exit plan mode and I will prompt myself. The session returns to Interactive so you can capture a baseline before any change.</a:t>
             </a:r>
             <a:endParaRPr lang="en-US" dirty="0"/>
           </a:p>
@@ -779,7 +780,7 @@
           <a:p>
             <a:r>
               <a:rPr lang="en-US" dirty="0"/>
-              <a:t>Run chronicle standup. It reports your work from the last day, including this session and its changes. Then run context and expand the Context bar. You see the working and base branch, Remote control, path, project, session name and ID, and changes. Tokens shows how much the session sent and received. Context shows how the window divides among the system prompt, system tools, MCP tools, messages, free space, and buffer. Session spend shows AI credits. Context works only after at least one prompt. Check context before you add more to a busy session. This practice branch has an intentional regression and main is already correct, so there is no pull request. Ask Copilot to stop the dev server.</a:t>
+              <a:t>Ask Copilot to run the Book App and open the preview. Search for hobbit and confirm The Hobbit appears. Then search for zzzz-no-match. The baseline says No results and Try again, which does not tell anyone what to do. Send Implement the plan; the plan checklist updates as Copilot works. Inspect the diff in the Changes tab. Reload and search again: the message should suggest changing the search term, genre, or reading status.</a:t>
             </a:r>
             <a:endParaRPr lang="en-US" dirty="0"/>
           </a:p>
@@ -867,7 +868,7 @@
           <a:p>
             <a:r>
               <a:rPr lang="en-US" dirty="0"/>
-              <a:t>The assignment repeats the workflow with a new feature: a light and dark theme toggle. Start a new worktree session from main and check its details with context. Preview the app and confirm it only has a light theme. In Plan mode, attach samples/book-app-web/src with the at sign and ask for a small plan. Implement, inspect the diff, and try hobbit and zzzz-no-match in both themes. Run the tests and build, compare the chronicle standup with what you saw, and stop the dev server.</a:t>
+              <a:t>Run chronicle standup. It reports your work from the last day, including this session and its changes. Then run context and expand the Context bar. You see the working and base branch, Remote control, path, project, session name and ID, and changes. Tokens shows how much the session sent and received. Context shows how the window divides among the system prompt, system tools, MCP tools, messages, free space, and buffer. Session spend shows AI credits. Context works only after at least one prompt. Check context before you add more to a busy session. This practice branch has an intentional regression and main is already correct, so there is no pull request. Ask Copilot to stop the dev server.</a:t>
             </a:r>
             <a:endParaRPr lang="en-US" dirty="0"/>
           </a:p>
@@ -955,7 +956,7 @@
           <a:p>
             <a:r>
               <a:rPr lang="en-US" dirty="0"/>
-              <a:t>Recap. Sessions are focused agent workspaces, and chronicle and context show what a session did and what it holds. Next, Chapter 03 uses isolated sessions for real development: the inner loop of review, test, and preview, and the outer loop of issues, pull requests, review comments, and checks.</a:t>
+              <a:t>The assignment repeats the workflow with a new feature: a light and dark theme toggle. Start a new worktree session from main and check its details with context. Preview the app and confirm it only has a light theme. In Plan mode, attach samples/book-app-web/src with the at sign and ask for a small plan. Implement, inspect the diff, and try hobbit and zzzz-no-match in both themes. Run the tests and build, compare the chronicle standup with what you saw, and stop the dev server.</a:t>
             </a:r>
             <a:endParaRPr lang="en-US" dirty="0"/>
           </a:p>
@@ -979,6 +980,94 @@
             <a:fld id="{F7021451-1387-4CA6-816F-3879F97B5CBC}" type="slidenum">
               <a:rPr lang="en-US"/>
               <a:t>14</a:t>
+            </a:fld>
+            <a:endParaRPr lang="en-US"/>
+          </a:p>
+        </p:txBody>
+      </p:sp>
+    </p:spTree>
+    <p:extLst>
+      <p:ext uri="{BB962C8B-B14F-4D97-AF65-F5344CB8AC3E}">
+        <p14:creationId xmlns:p14="http://schemas.microsoft.com/office/powerpoint/2010/main" val="1024086991"/>
+      </p:ext>
+    </p:extLst>
+  </p:cSld>
+  <p:clrMapOvr>
+    <a:masterClrMapping/>
+  </p:clrMapOvr>
+</p:notes>
+</file>
+
+<file path=ppt/notesSlides/notesSlide15.xml><?xml version="1.0" encoding="utf-8"?>
+<p:notes xmlns:a="http://schemas.openxmlformats.org/drawingml/2006/main" xmlns:r="http://schemas.openxmlformats.org/officeDocument/2006/relationships" xmlns:p="http://schemas.openxmlformats.org/presentationml/2006/main">
+  <p:cSld>
+    <p:spTree>
+      <p:nvGrpSpPr>
+        <p:cNvPr id="1" name=""/>
+        <p:cNvGrpSpPr/>
+        <p:nvPr/>
+      </p:nvGrpSpPr>
+      <p:grpSpPr>
+        <a:xfrm>
+          <a:off x="0" y="0"/>
+          <a:ext cx="0" cy="0"/>
+          <a:chOff x="0" y="0"/>
+          <a:chExt cx="0" cy="0"/>
+        </a:xfrm>
+      </p:grpSpPr>
+      <p:sp>
+        <p:nvSpPr>
+          <p:cNvPr id="2" name="Slide Image Placeholder 1"/>
+          <p:cNvSpPr>
+            <a:spLocks noGrp="1" noRot="1" noChangeAspect="1"/>
+          </p:cNvSpPr>
+          <p:nvPr>
+            <p:ph type="sldImg"/>
+          </p:nvPr>
+        </p:nvSpPr>
+        <p:spPr/>
+      </p:sp>
+      <p:sp>
+        <p:nvSpPr>
+          <p:cNvPr id="3" name="Notes Placeholder 2"/>
+          <p:cNvSpPr>
+            <a:spLocks noGrp="1"/>
+          </p:cNvSpPr>
+          <p:nvPr>
+            <p:ph type="body" idx="1"/>
+          </p:nvPr>
+        </p:nvSpPr>
+        <p:spPr/>
+        <p:txBody>
+          <a:bodyPr/>
+          <a:lstStyle/>
+          <a:p>
+            <a:r>
+              <a:rPr lang="en-US" dirty="0"/>
+              <a:t>Recap. Sessions are focused agent workspaces, and chronicle and context show what a session did and what it holds. Next, Chapter 03 uses isolated sessions for real development: the inner loop of review, test, and preview, and the outer loop of issues, pull requests, review comments, and checks.</a:t>
+            </a:r>
+            <a:endParaRPr lang="en-US" dirty="0"/>
+          </a:p>
+        </p:txBody>
+      </p:sp>
+      <p:sp>
+        <p:nvSpPr>
+          <p:cNvPr id="4" name="Slide Number Placeholder 3"/>
+          <p:cNvSpPr>
+            <a:spLocks noGrp="1"/>
+          </p:cNvSpPr>
+          <p:nvPr>
+            <p:ph type="sldNum" sz="quarter" idx="10"/>
+          </p:nvPr>
+        </p:nvSpPr>
+        <p:spPr/>
+        <p:txBody>
+          <a:bodyPr/>
+          <a:lstStyle/>
+          <a:p>
+            <a:fld id="{F7021451-1387-4CA6-816F-3879F97B5CBC}" type="slidenum">
+              <a:rPr lang="en-US"/>
+              <a:t>15</a:t>
             </a:fld>
             <a:endParaRPr lang="en-US"/>
           </a:p>
@@ -1571,7 +1660,7 @@
           <a:p>
             <a:r>
               <a:rPr lang="en-US" dirty="0"/>
-              <a:t>The at sign attaches files or folders. The hash attaches issues or pull requests. The slash runs commands and skills. The ampersand references another session when the prompt box offers it. Give the smallest amount of useful context. Type slash to see what your app supports; commands vary by version, plugins, skills, and policy. You will use rubber-duck in Chapter 03, agent and skills in Chapter 04, and create-canvas in Chapter 06.</a:t>
+              <a:t>The at sign attaches files or folders. The hash attaches issues or pull requests. The slash runs commands and skills. The ampersand references another session when the prompt box offers it. You can also drag files from your computer and drop them onto a session or agent in the sidebar; this is useful for files that are not in the repository. Give the smallest amount of useful context. Type slash to see what your app supports; commands vary by version, plugins, skills, and policy. You will use rubber-duck in Chapter 03, agent and skills in Chapter 04, and create-canvas in Chapter 06.</a:t>
             </a:r>
             <a:endParaRPr lang="en-US" dirty="0"/>
           </a:p>
@@ -1659,7 +1748,7 @@
           <a:p>
             <a:r>
               <a:rPr lang="en-US" dirty="0"/>
-              <a:t>Section 3: put isolation and context together. The practice branch has a less helpful empty-state message on purpose.</a:t>
+              <a:t>Slash commands are shortcuts in the prompt box. This chapter uses chronicle and context. Others appear later in the course: rubber-duck in Chapter 03, agent and skills in Chapter 04, and create-canvas in Chapter 06. Review reviews the changes in the current session. Research produces a cited report. Orchestrate coordinates work across several sessions or repositories by delegating to child sessions. Usage shows usage and rate limits. An installed skill can also run as its own command, such as book-app-reviewer. Type a slash to see what your app supports.</a:t>
             </a:r>
             <a:endParaRPr lang="en-US" dirty="0"/>
           </a:p>
@@ -2342,9 +2431,111 @@
           <a:chExt cx="0" cy="0"/>
         </a:xfrm>
       </p:grpSpPr>
+      <p:sp>
+        <p:nvSpPr>
+          <p:cNvPr id="2" name="Text 0"/>
+          <p:cNvSpPr/>
+          <p:nvPr/>
+        </p:nvSpPr>
+        <p:spPr>
+          <a:xfrm>
+            <a:off x="0" y="0"/>
+            <a:ext cx="9144000" cy="5143500"/>
+          </a:xfrm>
+          <a:prstGeom prst="rect">
+            <a:avLst/>
+          </a:prstGeom>
+          <a:solidFill>
+            <a:srgbClr val="F0FBF3"/>
+          </a:solidFill>
+          <a:ln/>
+        </p:spPr>
+        <p:txBody>
+          <a:bodyPr wrap="square" rtlCol="0" anchor="ctr"/>
+          <a:lstStyle/>
+          <a:p>
+            <a:pPr indent="0" marL="0">
+              <a:buNone/>
+            </a:pPr>
+            <a:endParaRPr lang="en-US" dirty="0"/>
+          </a:p>
+        </p:txBody>
+      </p:sp>
+      <p:sp>
+        <p:nvSpPr>
+          <p:cNvPr id="3" name="Text 1"/>
+          <p:cNvSpPr/>
+          <p:nvPr/>
+        </p:nvSpPr>
+        <p:spPr>
+          <a:xfrm>
+            <a:off x="0" y="0"/>
+            <a:ext cx="152400" cy="5143500"/>
+          </a:xfrm>
+          <a:prstGeom prst="rect">
+            <a:avLst/>
+          </a:prstGeom>
+          <a:solidFill>
+            <a:srgbClr val="1A7F37"/>
+          </a:solidFill>
+          <a:ln/>
+        </p:spPr>
+        <p:txBody>
+          <a:bodyPr wrap="square" rtlCol="0" anchor="ctr"/>
+          <a:lstStyle/>
+          <a:p>
+            <a:pPr indent="0" marL="0">
+              <a:buNone/>
+            </a:pPr>
+            <a:endParaRPr lang="en-US" dirty="0"/>
+          </a:p>
+        </p:txBody>
+      </p:sp>
+      <p:sp>
+        <p:nvSpPr>
+          <p:cNvPr id="4" name="Text 2"/>
+          <p:cNvSpPr/>
+          <p:nvPr/>
+        </p:nvSpPr>
+        <p:spPr>
+          <a:xfrm>
+            <a:off x="6040121" y="2412950"/>
+            <a:ext cx="2849829" cy="2159050"/>
+          </a:xfrm>
+          <a:prstGeom prst="rect">
+            <a:avLst/>
+          </a:prstGeom>
+          <a:noFill/>
+          <a:ln/>
+        </p:spPr>
+        <p:txBody>
+          <a:bodyPr wrap="square" lIns="0" tIns="0" rIns="0" bIns="0" rtlCol="0" anchor="t"/>
+          <a:lstStyle/>
+          <a:p>
+            <a:pPr algn="r" indent="0" marL="0">
+              <a:lnSpc>
+                <a:spcPts val="17000"/>
+              </a:lnSpc>
+              <a:buNone/>
+            </a:pPr>
+            <a:r>
+              <a:rPr lang="en-US" sz="15000" b="1" dirty="0">
+                <a:solidFill>
+                  <a:srgbClr val="8CE7A5"/>
+                </a:solidFill>
+                <a:latin typeface="Arial" pitchFamily="34" charset="0"/>
+                <a:ea typeface="Arial" pitchFamily="34" charset="-122"/>
+                <a:cs typeface="Arial" pitchFamily="34" charset="-120"/>
+              </a:rPr>
+              <a:t>03</a:t>
+            </a:r>
+            <a:endParaRPr lang="en-US" sz="15000" dirty="0"/>
+          </a:p>
+        </p:txBody>
+      </p:sp>
       <p:pic>
         <p:nvPicPr>
-          <p:cNvPr id="2" name="Image 0" descr="/Users/danwahlin/.copilot/session-state/56a7a0da-def8-48d4-b5e8-0ac3878cb8dd/files/slides-build/img/grad-corner-pattern.png">    </p:cNvPr>
+          <p:cNvPr id="5" name="Image 0" descr="/Users/danwahlin/.copilot/session-state/56a7a0da-def8-48d4-b5e8-0ac3878cb8dd/files/slides-build/img/grad-corner-pattern.png">    </p:cNvPr>
           <p:cNvPicPr>
             <a:picLocks noChangeAspect="1"/>
           </p:cNvPicPr>
@@ -2368,7 +2559,7 @@
       </p:pic>
       <p:sp>
         <p:nvSpPr>
-          <p:cNvPr id="3" name="Text 0"/>
+          <p:cNvPr id="6" name="Text 3"/>
           <p:cNvSpPr/>
           <p:nvPr/>
         </p:nvSpPr>
@@ -2400,7 +2591,7 @@
       </p:sp>
       <p:sp>
         <p:nvSpPr>
-          <p:cNvPr id="4" name="Text 1"/>
+          <p:cNvPr id="7" name="Text 4"/>
           <p:cNvSpPr/>
           <p:nvPr/>
         </p:nvSpPr>
@@ -2439,7 +2630,7 @@
       </p:sp>
       <p:pic>
         <p:nvPicPr>
-          <p:cNvPr id="5" name="Image 1" descr="/Users/danwahlin/.copilot/session-state/56a7a0da-def8-48d4-b5e8-0ac3878cb8dd/files/slides-build/icons/FaGithub-1F2328.png">
+          <p:cNvPr id="8" name="Image 1" descr="/Users/danwahlin/.copilot/session-state/56a7a0da-def8-48d4-b5e8-0ac3878cb8dd/files/slides-build/icons/FaGithub-1F2328.png">
             <a:hlinkClick r:id="rId3" tooltip="https://github.com/github/copilot-app-for-beginners/tree/main/02-sessions-worktrees-context"/>
           </p:cNvPr>
           <p:cNvPicPr>
@@ -2465,30 +2656,30 @@
       </p:pic>
       <p:sp>
         <p:nvSpPr>
-          <p:cNvPr id="6" name="Text 2"/>
-          <p:cNvSpPr/>
-          <p:nvPr/>
-        </p:nvSpPr>
-        <p:spPr>
-          <a:xfrm>
-            <a:off x="507950" y="381000"/>
-            <a:ext cx="8161020" cy="190500"/>
-          </a:xfrm>
-          <a:prstGeom prst="rect">
-            <a:avLst/>
-          </a:prstGeom>
-          <a:noFill/>
-          <a:ln/>
-        </p:spPr>
-        <p:txBody>
-          <a:bodyPr wrap="square" lIns="0" tIns="0" rIns="0" bIns="0" rtlCol="0" anchor="t"/>
-          <a:lstStyle/>
-          <a:p>
-            <a:pPr algn="l" indent="0" marL="0">
-              <a:buNone/>
-            </a:pPr>
-            <a:r>
-              <a:rPr lang="en-US" sz="1250" b="1" dirty="0">
+          <p:cNvPr id="9" name="Text 5"/>
+          <p:cNvSpPr/>
+          <p:nvPr/>
+        </p:nvSpPr>
+        <p:spPr>
+          <a:xfrm>
+            <a:off x="711101" y="1279773"/>
+            <a:ext cx="5570169" cy="209550"/>
+          </a:xfrm>
+          <a:prstGeom prst="rect">
+            <a:avLst/>
+          </a:prstGeom>
+          <a:noFill/>
+          <a:ln/>
+        </p:spPr>
+        <p:txBody>
+          <a:bodyPr wrap="square" lIns="0" tIns="0" rIns="0" bIns="0" rtlCol="0" anchor="t"/>
+          <a:lstStyle/>
+          <a:p>
+            <a:pPr algn="l" indent="0" marL="0">
+              <a:buNone/>
+            </a:pPr>
+            <a:r>
+              <a:rPr lang="en-US" sz="1450" b="1" dirty="0">
                 <a:solidFill>
                   <a:srgbClr val="1A7F37"/>
                 </a:solidFill>
@@ -2496,22 +2687,22 @@
                 <a:ea typeface="Arial" pitchFamily="34" charset="-122"/>
                 <a:cs typeface="Arial" pitchFamily="34" charset="-120"/>
               </a:rPr>
-              <a:t>EXERCISE</a:t>
-            </a:r>
-            <a:endParaRPr lang="en-US" sz="1250" dirty="0"/>
-          </a:p>
-        </p:txBody>
-      </p:sp>
-      <p:sp>
-        <p:nvSpPr>
-          <p:cNvPr id="7" name="Text 3"/>
-          <p:cNvSpPr/>
-          <p:nvPr/>
-        </p:nvSpPr>
-        <p:spPr>
-          <a:xfrm>
-            <a:off x="507950" y="622250"/>
-            <a:ext cx="8161020" cy="419100"/>
+              <a:t>SECTION 3 OF 3</a:t>
+            </a:r>
+            <a:endParaRPr lang="en-US" sz="1450" dirty="0"/>
+          </a:p>
+        </p:txBody>
+      </p:sp>
+      <p:sp>
+        <p:nvSpPr>
+          <p:cNvPr id="10" name="Text 6"/>
+          <p:cNvSpPr/>
+          <p:nvPr/>
+        </p:nvSpPr>
+        <p:spPr>
+          <a:xfrm>
+            <a:off x="711101" y="1590824"/>
+            <a:ext cx="5570169" cy="1168301"/>
           </a:xfrm>
           <a:prstGeom prst="rect">
             <a:avLst/>
@@ -2525,15 +2716,15 @@
           <a:p>
             <a:pPr algn="l" indent="0" marL="0">
               <a:lnSpc>
-                <a:spcPts val="3300"/>
+                <a:spcPts val="4600"/>
               </a:lnSpc>
               <a:spcBef>
-                <a:spcPts val="400"/>
+                <a:spcPts val="800"/>
               </a:spcBef>
               <a:buNone/>
             </a:pPr>
             <a:r>
-              <a:rPr lang="en-US" sz="2800" b="1" dirty="0">
+              <a:rPr lang="en-US" sz="4000" b="1" dirty="0">
                 <a:solidFill>
                   <a:srgbClr val="1F2328"/>
                 </a:solidFill>
@@ -2541,111 +2732,26 @@
                 <a:ea typeface="Arial" pitchFamily="34" charset="-122"/>
                 <a:cs typeface="Arial" pitchFamily="34" charset="-120"/>
               </a:rPr>
-              <a:t>Plan a fix from issue #3</a:t>
-            </a:r>
-            <a:endParaRPr lang="en-US" sz="2800" dirty="0"/>
-          </a:p>
-        </p:txBody>
-      </p:sp>
-      <p:sp>
-        <p:nvSpPr>
-          <p:cNvPr id="8" name="Text 4"/>
-          <p:cNvSpPr/>
-          <p:nvPr/>
-        </p:nvSpPr>
-        <p:spPr>
-          <a:xfrm>
-            <a:off x="507950" y="1104751"/>
-            <a:ext cx="8161020" cy="273100"/>
-          </a:xfrm>
-          <a:prstGeom prst="rect">
-            <a:avLst/>
-          </a:prstGeom>
-          <a:noFill/>
-          <a:ln/>
-        </p:spPr>
-        <p:txBody>
-          <a:bodyPr wrap="square" lIns="0" tIns="0" rIns="0" bIns="0" rtlCol="0" anchor="t"/>
-          <a:lstStyle/>
-          <a:p>
-            <a:pPr algn="l" indent="0" marL="0">
-              <a:lnSpc>
-                <a:spcPts val="2000"/>
-              </a:lnSpc>
-              <a:spcBef>
-                <a:spcPts val="500"/>
-              </a:spcBef>
-              <a:buNone/>
-            </a:pPr>
-            <a:r>
-              <a:rPr lang="en-US" sz="1650" dirty="0">
-                <a:solidFill>
-                  <a:srgbClr val="59636E"/>
-                </a:solidFill>
-                <a:latin typeface="Arial" pitchFamily="34" charset="0"/>
-                <a:ea typeface="Arial" pitchFamily="34" charset="-122"/>
-                <a:cs typeface="Arial" pitchFamily="34" charset="-120"/>
-              </a:rPr>
-              <a:t>Start from the </a:t>
-            </a:r>
-            <a:pPr algn="l" indent="0" marL="0">
-              <a:lnSpc>
-                <a:spcPts val="2000"/>
-              </a:lnSpc>
-              <a:spcBef>
-                <a:spcPts val="500"/>
-              </a:spcBef>
-              <a:buNone/>
-            </a:pPr>
-            <a:r>
-              <a:rPr lang="en-US" sz="1650" b="1" dirty="0">
-                <a:solidFill>
-                  <a:srgbClr val="0550AE"/>
-                </a:solidFill>
-                <a:latin typeface="Courier New" pitchFamily="34" charset="0"/>
-                <a:ea typeface="Courier New" pitchFamily="34" charset="-122"/>
-                <a:cs typeface="Courier New" pitchFamily="34" charset="-120"/>
-              </a:rPr>
-              <a:t>practice-empty-state-copy</a:t>
-            </a:r>
-            <a:pPr algn="l" indent="0" marL="0">
-              <a:lnSpc>
-                <a:spcPts val="2000"/>
-              </a:lnSpc>
-              <a:spcBef>
-                <a:spcPts val="500"/>
-              </a:spcBef>
-              <a:buNone/>
-            </a:pPr>
-            <a:r>
-              <a:rPr lang="en-US" sz="1650" dirty="0">
-                <a:solidFill>
-                  <a:srgbClr val="59636E"/>
-                </a:solidFill>
-                <a:latin typeface="Arial" pitchFamily="34" charset="0"/>
-                <a:ea typeface="Arial" pitchFamily="34" charset="-122"/>
-                <a:cs typeface="Arial" pitchFamily="34" charset="-120"/>
-              </a:rPr>
-              <a:t> branch.</a:t>
-            </a:r>
-            <a:endParaRPr lang="en-US" sz="1650" dirty="0"/>
-          </a:p>
-        </p:txBody>
-      </p:sp>
-      <p:sp>
-        <p:nvSpPr>
-          <p:cNvPr id="9" name="Text 5"/>
-          <p:cNvSpPr/>
-          <p:nvPr/>
-        </p:nvSpPr>
-        <p:spPr>
-          <a:xfrm>
-            <a:off x="507950" y="2171700"/>
-            <a:ext cx="279350" cy="279350"/>
+              <a:t>From issue to verified fix</a:t>
+            </a:r>
+            <a:endParaRPr lang="en-US" sz="4000" dirty="0"/>
+          </a:p>
+        </p:txBody>
+      </p:sp>
+      <p:sp>
+        <p:nvSpPr>
+          <p:cNvPr id="11" name="Text 7"/>
+          <p:cNvSpPr/>
+          <p:nvPr/>
+        </p:nvSpPr>
+        <p:spPr>
+          <a:xfrm>
+            <a:off x="711101" y="2962275"/>
+            <a:ext cx="609600" cy="63401"/>
           </a:xfrm>
           <a:prstGeom prst="roundRect">
             <a:avLst>
-              <a:gd name="adj" fmla="val 327331"/>
+              <a:gd name="adj" fmla="val 40063"/>
             </a:avLst>
           </a:prstGeom>
           <a:solidFill>
@@ -2666,53 +2772,14 @@
       </p:sp>
       <p:sp>
         <p:nvSpPr>
-          <p:cNvPr id="10" name="Text 6"/>
-          <p:cNvSpPr/>
-          <p:nvPr/>
-        </p:nvSpPr>
-        <p:spPr>
-          <a:xfrm>
-            <a:off x="602615" y="2216051"/>
-            <a:ext cx="90020" cy="190500"/>
-          </a:xfrm>
-          <a:prstGeom prst="rect">
-            <a:avLst/>
-          </a:prstGeom>
-          <a:noFill/>
-          <a:ln/>
-        </p:spPr>
-        <p:txBody>
-          <a:bodyPr wrap="square" lIns="0" tIns="0" rIns="0" bIns="0" rtlCol="0" anchor="t"/>
-          <a:lstStyle/>
-          <a:p>
-            <a:pPr algn="ctr" indent="0" marL="0">
-              <a:buNone/>
-            </a:pPr>
-            <a:r>
-              <a:rPr lang="en-US" sz="1250" b="1" dirty="0">
-                <a:solidFill>
-                  <a:srgbClr val="FFFFFF"/>
-                </a:solidFill>
-                <a:latin typeface="Arial" pitchFamily="34" charset="0"/>
-                <a:ea typeface="Arial" pitchFamily="34" charset="-122"/>
-                <a:cs typeface="Arial" pitchFamily="34" charset="-120"/>
-              </a:rPr>
-              <a:t>1</a:t>
-            </a:r>
-            <a:endParaRPr lang="en-US" sz="1250" dirty="0"/>
-          </a:p>
-        </p:txBody>
-      </p:sp>
-      <p:sp>
-        <p:nvSpPr>
-          <p:cNvPr id="11" name="Text 7"/>
-          <p:cNvSpPr/>
-          <p:nvPr/>
-        </p:nvSpPr>
-        <p:spPr>
-          <a:xfrm>
-            <a:off x="939701" y="2171700"/>
-            <a:ext cx="2208455" cy="222200"/>
+          <p:cNvPr id="12" name="Text 8"/>
+          <p:cNvSpPr/>
+          <p:nvPr/>
+        </p:nvSpPr>
+        <p:spPr>
+          <a:xfrm>
+            <a:off x="711101" y="3228826"/>
+            <a:ext cx="5570169" cy="634901"/>
           </a:xfrm>
           <a:prstGeom prst="rect">
             <a:avLst/>
@@ -2726,54 +2793,12 @@
           <a:p>
             <a:pPr algn="l" indent="0" marL="0">
               <a:lnSpc>
-                <a:spcPts val="1750"/>
+                <a:spcPts val="2500"/>
               </a:lnSpc>
               <a:buNone/>
             </a:pPr>
             <a:r>
-              <a:rPr lang="en-US" sz="1550" b="1" dirty="0">
-                <a:solidFill>
-                  <a:srgbClr val="1F2328"/>
-                </a:solidFill>
-                <a:latin typeface="Arial" pitchFamily="34" charset="0"/>
-                <a:ea typeface="Arial" pitchFamily="34" charset="-122"/>
-                <a:cs typeface="Arial" pitchFamily="34" charset="-120"/>
-              </a:rPr>
-              <a:t>Create from the branch</a:t>
-            </a:r>
-            <a:endParaRPr lang="en-US" sz="1550" dirty="0"/>
-          </a:p>
-        </p:txBody>
-      </p:sp>
-      <p:sp>
-        <p:nvSpPr>
-          <p:cNvPr id="12" name="Text 8"/>
-          <p:cNvSpPr/>
-          <p:nvPr/>
-        </p:nvSpPr>
-        <p:spPr>
-          <a:xfrm>
-            <a:off x="939701" y="2419201"/>
-            <a:ext cx="2208455" cy="198090"/>
-          </a:xfrm>
-          <a:prstGeom prst="rect">
-            <a:avLst/>
-          </a:prstGeom>
-          <a:noFill/>
-          <a:ln/>
-        </p:spPr>
-        <p:txBody>
-          <a:bodyPr wrap="square" lIns="0" tIns="0" rIns="0" bIns="0" rtlCol="0" anchor="t"/>
-          <a:lstStyle/>
-          <a:p>
-            <a:pPr algn="l" indent="0" marL="0">
-              <a:lnSpc>
-                <a:spcPts val="1560"/>
-              </a:lnSpc>
-              <a:buNone/>
-            </a:pPr>
-            <a:r>
-              <a:rPr lang="en-US" sz="1350" b="1" dirty="0">
+              <a:rPr lang="en-US" sz="1900" dirty="0">
                 <a:solidFill>
                   <a:srgbClr val="59636E"/>
                 </a:solidFill>
@@ -2781,508 +2806,12 @@
                 <a:ea typeface="Arial" pitchFamily="34" charset="-122"/>
                 <a:cs typeface="Arial" pitchFamily="34" charset="-120"/>
               </a:rPr>
-              <a:t>Create from</a:t>
-            </a:r>
-            <a:pPr algn="l" indent="0" marL="0">
-              <a:lnSpc>
-                <a:spcPts val="1560"/>
-              </a:lnSpc>
-              <a:buNone/>
-            </a:pPr>
-            <a:r>
-              <a:rPr lang="en-US" sz="1350" dirty="0">
-                <a:solidFill>
-                  <a:srgbClr val="59636E"/>
-                </a:solidFill>
-                <a:latin typeface="Arial" pitchFamily="34" charset="0"/>
-                <a:ea typeface="Arial" pitchFamily="34" charset="-122"/>
-                <a:cs typeface="Arial" pitchFamily="34" charset="-120"/>
-              </a:rPr>
-              <a:t> &gt; </a:t>
-            </a:r>
-            <a:pPr algn="l" indent="0" marL="0">
-              <a:lnSpc>
-                <a:spcPts val="1560"/>
-              </a:lnSpc>
-              <a:buNone/>
-            </a:pPr>
-            <a:r>
-              <a:rPr lang="en-US" sz="1350" b="1" dirty="0">
-                <a:solidFill>
-                  <a:srgbClr val="59636E"/>
-                </a:solidFill>
-                <a:latin typeface="Arial" pitchFamily="34" charset="0"/>
-                <a:ea typeface="Arial" pitchFamily="34" charset="-122"/>
-                <a:cs typeface="Arial" pitchFamily="34" charset="-120"/>
-              </a:rPr>
-              <a:t>Branches</a:t>
-            </a:r>
-            <a:pPr algn="l" indent="0" marL="0">
-              <a:lnSpc>
-                <a:spcPts val="1560"/>
-              </a:lnSpc>
-              <a:buNone/>
-            </a:pPr>
-            <a:r>
-              <a:rPr lang="en-US" sz="1350" dirty="0">
-                <a:solidFill>
-                  <a:srgbClr val="59636E"/>
-                </a:solidFill>
-                <a:latin typeface="Arial" pitchFamily="34" charset="0"/>
-                <a:ea typeface="Arial" pitchFamily="34" charset="-122"/>
-                <a:cs typeface="Arial" pitchFamily="34" charset="-120"/>
-              </a:rPr>
-              <a:t>.</a:t>
-            </a:r>
-            <a:endParaRPr lang="en-US" sz="1350" dirty="0"/>
-          </a:p>
-        </p:txBody>
-      </p:sp>
-      <p:sp>
-        <p:nvSpPr>
-          <p:cNvPr id="13" name="Text 9"/>
-          <p:cNvSpPr/>
-          <p:nvPr/>
-        </p:nvSpPr>
-        <p:spPr>
-          <a:xfrm>
-            <a:off x="507950" y="2871192"/>
-            <a:ext cx="279350" cy="279350"/>
-          </a:xfrm>
-          <a:prstGeom prst="roundRect">
-            <a:avLst>
-              <a:gd name="adj" fmla="val 327331"/>
-            </a:avLst>
-          </a:prstGeom>
-          <a:solidFill>
-            <a:srgbClr val="1A7F37"/>
-          </a:solidFill>
-          <a:ln/>
-        </p:spPr>
-        <p:txBody>
-          <a:bodyPr wrap="square" rtlCol="0" anchor="ctr"/>
-          <a:lstStyle/>
-          <a:p>
-            <a:pPr indent="0" marL="0">
-              <a:buNone/>
-            </a:pPr>
-            <a:endParaRPr lang="en-US" dirty="0"/>
-          </a:p>
-        </p:txBody>
-      </p:sp>
-      <p:sp>
-        <p:nvSpPr>
-          <p:cNvPr id="14" name="Text 10"/>
-          <p:cNvSpPr/>
-          <p:nvPr/>
-        </p:nvSpPr>
-        <p:spPr>
-          <a:xfrm>
-            <a:off x="602615" y="2915543"/>
-            <a:ext cx="90020" cy="190500"/>
-          </a:xfrm>
-          <a:prstGeom prst="rect">
-            <a:avLst/>
-          </a:prstGeom>
-          <a:noFill/>
-          <a:ln/>
-        </p:spPr>
-        <p:txBody>
-          <a:bodyPr wrap="square" lIns="0" tIns="0" rIns="0" bIns="0" rtlCol="0" anchor="t"/>
-          <a:lstStyle/>
-          <a:p>
-            <a:pPr algn="ctr" indent="0" marL="0">
-              <a:buNone/>
-            </a:pPr>
-            <a:r>
-              <a:rPr lang="en-US" sz="1250" b="1" dirty="0">
-                <a:solidFill>
-                  <a:srgbClr val="FFFFFF"/>
-                </a:solidFill>
-                <a:latin typeface="Arial" pitchFamily="34" charset="0"/>
-                <a:ea typeface="Arial" pitchFamily="34" charset="-122"/>
-                <a:cs typeface="Arial" pitchFamily="34" charset="-120"/>
-              </a:rPr>
-              <a:t>2</a:t>
-            </a:r>
-            <a:endParaRPr lang="en-US" sz="1250" dirty="0"/>
-          </a:p>
-        </p:txBody>
-      </p:sp>
-      <p:sp>
-        <p:nvSpPr>
-          <p:cNvPr id="15" name="Text 11"/>
-          <p:cNvSpPr/>
-          <p:nvPr/>
-        </p:nvSpPr>
-        <p:spPr>
-          <a:xfrm>
-            <a:off x="939701" y="2871192"/>
-            <a:ext cx="2222421" cy="222200"/>
-          </a:xfrm>
-          <a:prstGeom prst="rect">
-            <a:avLst/>
-          </a:prstGeom>
-          <a:noFill/>
-          <a:ln/>
-        </p:spPr>
-        <p:txBody>
-          <a:bodyPr wrap="square" lIns="0" tIns="0" rIns="0" bIns="0" rtlCol="0" anchor="t"/>
-          <a:lstStyle/>
-          <a:p>
-            <a:pPr algn="l" indent="0" marL="0">
-              <a:lnSpc>
-                <a:spcPts val="1750"/>
-              </a:lnSpc>
-              <a:buNone/>
-            </a:pPr>
-            <a:r>
-              <a:rPr lang="en-US" sz="1550" b="1" dirty="0">
-                <a:solidFill>
-                  <a:srgbClr val="1F2328"/>
-                </a:solidFill>
-                <a:latin typeface="Arial" pitchFamily="34" charset="0"/>
-                <a:ea typeface="Arial" pitchFamily="34" charset="-122"/>
-                <a:cs typeface="Arial" pitchFamily="34" charset="-120"/>
-              </a:rPr>
-              <a:t>Attach it in Plan mode</a:t>
-            </a:r>
-            <a:endParaRPr lang="en-US" sz="1550" dirty="0"/>
-          </a:p>
-        </p:txBody>
-      </p:sp>
-      <p:sp>
-        <p:nvSpPr>
-          <p:cNvPr id="16" name="Text 12"/>
-          <p:cNvSpPr/>
-          <p:nvPr/>
-        </p:nvSpPr>
-        <p:spPr>
-          <a:xfrm>
-            <a:off x="939701" y="3118693"/>
-            <a:ext cx="2222421" cy="207615"/>
-          </a:xfrm>
-          <a:prstGeom prst="rect">
-            <a:avLst/>
-          </a:prstGeom>
-          <a:noFill/>
-          <a:ln/>
-        </p:spPr>
-        <p:txBody>
-          <a:bodyPr wrap="square" lIns="0" tIns="0" rIns="0" bIns="0" rtlCol="0" anchor="t"/>
-          <a:lstStyle/>
-          <a:p>
-            <a:pPr algn="l" indent="0" marL="0">
-              <a:lnSpc>
-                <a:spcPts val="1560"/>
-              </a:lnSpc>
-              <a:buNone/>
-            </a:pPr>
-            <a:r>
-              <a:rPr lang="en-US" sz="1350" dirty="0">
-                <a:solidFill>
-                  <a:srgbClr val="59636E"/>
-                </a:solidFill>
-                <a:latin typeface="Arial" pitchFamily="34" charset="0"/>
-                <a:ea typeface="Arial" pitchFamily="34" charset="-122"/>
-                <a:cs typeface="Arial" pitchFamily="34" charset="-120"/>
-              </a:rPr>
-              <a:t>Type </a:t>
-            </a:r>
-            <a:pPr algn="l" indent="0" marL="0">
-              <a:lnSpc>
-                <a:spcPts val="1560"/>
-              </a:lnSpc>
-              <a:buNone/>
-            </a:pPr>
-            <a:r>
-              <a:rPr lang="en-US" sz="1350" b="1" dirty="0">
-                <a:solidFill>
-                  <a:srgbClr val="0550AE"/>
-                </a:solidFill>
-                <a:latin typeface="Courier New" pitchFamily="34" charset="0"/>
-                <a:ea typeface="Courier New" pitchFamily="34" charset="-122"/>
-                <a:cs typeface="Courier New" pitchFamily="34" charset="-120"/>
-              </a:rPr>
-              <a:t>#3</a:t>
-            </a:r>
-            <a:pPr algn="l" indent="0" marL="0">
-              <a:lnSpc>
-                <a:spcPts val="1560"/>
-              </a:lnSpc>
-              <a:buNone/>
-            </a:pPr>
-            <a:r>
-              <a:rPr lang="en-US" sz="1350" dirty="0">
-                <a:solidFill>
-                  <a:srgbClr val="59636E"/>
-                </a:solidFill>
-                <a:latin typeface="Arial" pitchFamily="34" charset="0"/>
-                <a:ea typeface="Arial" pitchFamily="34" charset="-122"/>
-                <a:cs typeface="Arial" pitchFamily="34" charset="-120"/>
-              </a:rPr>
-              <a:t>, then ask for a plan.</a:t>
-            </a:r>
-            <a:endParaRPr lang="en-US" sz="1350" dirty="0"/>
-          </a:p>
-        </p:txBody>
-      </p:sp>
-      <p:sp>
-        <p:nvSpPr>
-          <p:cNvPr id="17" name="Text 13"/>
-          <p:cNvSpPr/>
-          <p:nvPr/>
-        </p:nvSpPr>
-        <p:spPr>
-          <a:xfrm>
-            <a:off x="507950" y="3580209"/>
-            <a:ext cx="279350" cy="279350"/>
-          </a:xfrm>
-          <a:prstGeom prst="roundRect">
-            <a:avLst>
-              <a:gd name="adj" fmla="val 327331"/>
-            </a:avLst>
-          </a:prstGeom>
-          <a:solidFill>
-            <a:srgbClr val="1A7F37"/>
-          </a:solidFill>
-          <a:ln/>
-        </p:spPr>
-        <p:txBody>
-          <a:bodyPr wrap="square" rtlCol="0" anchor="ctr"/>
-          <a:lstStyle/>
-          <a:p>
-            <a:pPr indent="0" marL="0">
-              <a:buNone/>
-            </a:pPr>
-            <a:endParaRPr lang="en-US" dirty="0"/>
-          </a:p>
-        </p:txBody>
-      </p:sp>
-      <p:sp>
-        <p:nvSpPr>
-          <p:cNvPr id="18" name="Text 14"/>
-          <p:cNvSpPr/>
-          <p:nvPr/>
-        </p:nvSpPr>
-        <p:spPr>
-          <a:xfrm>
-            <a:off x="602615" y="3624560"/>
-            <a:ext cx="90020" cy="190500"/>
-          </a:xfrm>
-          <a:prstGeom prst="rect">
-            <a:avLst/>
-          </a:prstGeom>
-          <a:noFill/>
-          <a:ln/>
-        </p:spPr>
-        <p:txBody>
-          <a:bodyPr wrap="square" lIns="0" tIns="0" rIns="0" bIns="0" rtlCol="0" anchor="t"/>
-          <a:lstStyle/>
-          <a:p>
-            <a:pPr algn="ctr" indent="0" marL="0">
-              <a:buNone/>
-            </a:pPr>
-            <a:r>
-              <a:rPr lang="en-US" sz="1250" b="1" dirty="0">
-                <a:solidFill>
-                  <a:srgbClr val="FFFFFF"/>
-                </a:solidFill>
-                <a:latin typeface="Arial" pitchFamily="34" charset="0"/>
-                <a:ea typeface="Arial" pitchFamily="34" charset="-122"/>
-                <a:cs typeface="Arial" pitchFamily="34" charset="-120"/>
-              </a:rPr>
-              <a:t>3</a:t>
-            </a:r>
-            <a:endParaRPr lang="en-US" sz="1250" dirty="0"/>
-          </a:p>
-        </p:txBody>
-      </p:sp>
-      <p:sp>
-        <p:nvSpPr>
-          <p:cNvPr id="19" name="Text 15"/>
-          <p:cNvSpPr/>
-          <p:nvPr/>
-        </p:nvSpPr>
-        <p:spPr>
-          <a:xfrm>
-            <a:off x="939701" y="3580209"/>
-            <a:ext cx="1944011" cy="222200"/>
-          </a:xfrm>
-          <a:prstGeom prst="rect">
-            <a:avLst/>
-          </a:prstGeom>
-          <a:noFill/>
-          <a:ln/>
-        </p:spPr>
-        <p:txBody>
-          <a:bodyPr wrap="square" lIns="0" tIns="0" rIns="0" bIns="0" rtlCol="0" anchor="t"/>
-          <a:lstStyle/>
-          <a:p>
-            <a:pPr algn="l" indent="0" marL="0">
-              <a:lnSpc>
-                <a:spcPts val="1750"/>
-              </a:lnSpc>
-              <a:buNone/>
-            </a:pPr>
-            <a:r>
-              <a:rPr lang="en-US" sz="1550" b="1" dirty="0">
-                <a:solidFill>
-                  <a:srgbClr val="1F2328"/>
-                </a:solidFill>
-                <a:latin typeface="Arial" pitchFamily="34" charset="0"/>
-                <a:ea typeface="Arial" pitchFamily="34" charset="-122"/>
-                <a:cs typeface="Arial" pitchFamily="34" charset="-120"/>
-              </a:rPr>
-              <a:t>Review the plan</a:t>
-            </a:r>
-            <a:endParaRPr lang="en-US" sz="1550" dirty="0"/>
-          </a:p>
-        </p:txBody>
-      </p:sp>
-      <p:sp>
-        <p:nvSpPr>
-          <p:cNvPr id="20" name="Text 16"/>
-          <p:cNvSpPr/>
-          <p:nvPr/>
-        </p:nvSpPr>
-        <p:spPr>
-          <a:xfrm>
-            <a:off x="939701" y="3827711"/>
-            <a:ext cx="1944011" cy="198090"/>
-          </a:xfrm>
-          <a:prstGeom prst="rect">
-            <a:avLst/>
-          </a:prstGeom>
-          <a:noFill/>
-          <a:ln/>
-        </p:spPr>
-        <p:txBody>
-          <a:bodyPr wrap="square" lIns="0" tIns="0" rIns="0" bIns="0" rtlCol="0" anchor="t"/>
-          <a:lstStyle/>
-          <a:p>
-            <a:pPr algn="l" indent="0" marL="0">
-              <a:lnSpc>
-                <a:spcPts val="1560"/>
-              </a:lnSpc>
-              <a:buNone/>
-            </a:pPr>
-            <a:r>
-              <a:rPr lang="en-US" sz="1350" dirty="0">
-                <a:solidFill>
-                  <a:srgbClr val="59636E"/>
-                </a:solidFill>
-                <a:latin typeface="Arial" pitchFamily="34" charset="0"/>
-                <a:ea typeface="Arial" pitchFamily="34" charset="-122"/>
-                <a:cs typeface="Arial" pitchFamily="34" charset="-120"/>
-              </a:rPr>
-              <a:t>Choose </a:t>
-            </a:r>
-            <a:pPr algn="l" indent="0" marL="0">
-              <a:lnSpc>
-                <a:spcPts val="1560"/>
-              </a:lnSpc>
-              <a:buNone/>
-            </a:pPr>
-            <a:r>
-              <a:rPr lang="en-US" sz="1350" b="1" dirty="0">
-                <a:solidFill>
-                  <a:srgbClr val="59636E"/>
-                </a:solidFill>
-                <a:latin typeface="Arial" pitchFamily="34" charset="0"/>
-                <a:ea typeface="Arial" pitchFamily="34" charset="-122"/>
-                <a:cs typeface="Arial" pitchFamily="34" charset="-120"/>
-              </a:rPr>
-              <a:t>Exit plan mode</a:t>
-            </a:r>
-            <a:pPr algn="l" indent="0" marL="0">
-              <a:lnSpc>
-                <a:spcPts val="1560"/>
-              </a:lnSpc>
-              <a:buNone/>
-            </a:pPr>
-            <a:r>
-              <a:rPr lang="en-US" sz="1350" dirty="0">
-                <a:solidFill>
-                  <a:srgbClr val="59636E"/>
-                </a:solidFill>
-                <a:latin typeface="Arial" pitchFamily="34" charset="0"/>
-                <a:ea typeface="Arial" pitchFamily="34" charset="-122"/>
-                <a:cs typeface="Arial" pitchFamily="34" charset="-120"/>
-              </a:rPr>
-              <a:t>.</a:t>
-            </a:r>
-            <a:endParaRPr lang="en-US" sz="1350" dirty="0"/>
-          </a:p>
-        </p:txBody>
-      </p:sp>
-      <p:sp>
-        <p:nvSpPr>
-          <p:cNvPr id="21" name="Text 17"/>
-          <p:cNvSpPr/>
-          <p:nvPr/>
-        </p:nvSpPr>
-        <p:spPr>
-          <a:xfrm>
-            <a:off x="3762077" y="2087761"/>
-            <a:ext cx="4870400" cy="1767780"/>
-          </a:xfrm>
-          <a:prstGeom prst="roundRect">
-            <a:avLst>
-              <a:gd name="adj" fmla="val 4310"/>
-            </a:avLst>
-          </a:prstGeom>
-          <a:solidFill>
-            <a:srgbClr val="FFFFFF"/>
-          </a:solidFill>
-          <a:ln w="9525">
-            <a:solidFill>
-              <a:srgbClr val="D1D9E0"/>
-            </a:solidFill>
-          </a:ln>
-          <a:effectLst>
-            <a:outerShdw sx="100000" sy="100000" kx="0" ky="0" algn="bl" rotWithShape="0" blurRad="38100" dist="9525" dir="5400000">
-              <a:srgbClr val="1f2328">
-                <a:alpha val="12000"/>
-              </a:srgbClr>
-            </a:outerShdw>
-          </a:effectLst>
-        </p:spPr>
-        <p:txBody>
-          <a:bodyPr wrap="square" rtlCol="0" anchor="ctr"/>
-          <a:lstStyle/>
-          <a:p>
-            <a:pPr indent="0" marL="0">
-              <a:buNone/>
-            </a:pPr>
-            <a:endParaRPr lang="en-US" dirty="0"/>
-          </a:p>
-        </p:txBody>
-      </p:sp>
-      <p:pic>
-        <p:nvPicPr>
-          <p:cNvPr id="22" name="Image 2" descr="/Users/danwahlin/.copilot/session-state/56a7a0da-def8-48d4-b5e8-0ac3878cb8dd/files/slides-build/img/02-review-plan-crop.png">    </p:cNvPr>
-          <p:cNvPicPr>
-            <a:picLocks noChangeAspect="1"/>
-          </p:cNvPicPr>
-          <p:nvPr/>
-        </p:nvPicPr>
-        <p:blipFill>
-          <a:blip r:embed="rId4"/>
-          <a:stretch>
-            <a:fillRect/>
-          </a:stretch>
-        </p:blipFill>
-        <p:spPr>
-          <a:xfrm>
-            <a:off x="3809702" y="2135386"/>
-            <a:ext cx="4775150" cy="1672530"/>
-          </a:xfrm>
-          <a:prstGeom prst="rect">
-            <a:avLst/>
-          </a:prstGeom>
-        </p:spPr>
-      </p:pic>
+              <a:t>Start from a practice branch, attach the issue, plan, then verify the fix.</a:t>
+            </a:r>
+            <a:endParaRPr lang="en-US" sz="1900" dirty="0"/>
+          </a:p>
+        </p:txBody>
+      </p:sp>
     </p:spTree>
   </p:cSld>
   <p:clrMapOvr>
@@ -3514,7 +3043,7 @@
                 <a:ea typeface="Arial" pitchFamily="34" charset="-122"/>
                 <a:cs typeface="Arial" pitchFamily="34" charset="-120"/>
               </a:rPr>
-              <a:t>Capture a baseline, then compare</a:t>
+              <a:t>Plan a fix from issue #3</a:t>
             </a:r>
             <a:endParaRPr lang="en-US" sz="2800" dirty="0"/>
           </a:p>
@@ -3529,7 +3058,7 @@
         <p:spPr>
           <a:xfrm>
             <a:off x="507950" y="1104751"/>
-            <a:ext cx="8161020" cy="254050"/>
+            <a:ext cx="8161020" cy="273100"/>
           </a:xfrm>
           <a:prstGeom prst="rect">
             <a:avLst/>
@@ -3559,7 +3088,47 @@
                 <a:ea typeface="Arial" pitchFamily="34" charset="-122"/>
                 <a:cs typeface="Arial" pitchFamily="34" charset="-120"/>
               </a:rPr>
-              <a:t>Know the current behavior before you change it.</a:t>
+              <a:t>Start from the </a:t>
+            </a:r>
+            <a:pPr algn="l" indent="0" marL="0">
+              <a:lnSpc>
+                <a:spcPts val="2000"/>
+              </a:lnSpc>
+              <a:spcBef>
+                <a:spcPts val="500"/>
+              </a:spcBef>
+              <a:buNone/>
+            </a:pPr>
+            <a:r>
+              <a:rPr lang="en-US" sz="1650" b="1" dirty="0">
+                <a:solidFill>
+                  <a:srgbClr val="0550AE"/>
+                </a:solidFill>
+                <a:latin typeface="Courier New" pitchFamily="34" charset="0"/>
+                <a:ea typeface="Courier New" pitchFamily="34" charset="-122"/>
+                <a:cs typeface="Courier New" pitchFamily="34" charset="-120"/>
+              </a:rPr>
+              <a:t>practice-empty-state-copy</a:t>
+            </a:r>
+            <a:pPr algn="l" indent="0" marL="0">
+              <a:lnSpc>
+                <a:spcPts val="2000"/>
+              </a:lnSpc>
+              <a:spcBef>
+                <a:spcPts val="500"/>
+              </a:spcBef>
+              <a:buNone/>
+            </a:pPr>
+            <a:r>
+              <a:rPr lang="en-US" sz="1650" dirty="0">
+                <a:solidFill>
+                  <a:srgbClr val="59636E"/>
+                </a:solidFill>
+                <a:latin typeface="Arial" pitchFamily="34" charset="0"/>
+                <a:ea typeface="Arial" pitchFamily="34" charset="-122"/>
+                <a:cs typeface="Arial" pitchFamily="34" charset="-120"/>
+              </a:rPr>
+              <a:t> branch.</a:t>
             </a:r>
             <a:endParaRPr lang="en-US" sz="1650" dirty="0"/>
           </a:p>
@@ -3573,51 +3142,596 @@
         </p:nvSpPr>
         <p:spPr>
           <a:xfrm>
-            <a:off x="507950" y="1603325"/>
-            <a:ext cx="3886200" cy="171450"/>
-          </a:xfrm>
-          <a:prstGeom prst="rect">
-            <a:avLst/>
-          </a:prstGeom>
-          <a:noFill/>
-          <a:ln/>
-        </p:spPr>
-        <p:txBody>
-          <a:bodyPr wrap="square" lIns="0" tIns="0" rIns="0" bIns="0" rtlCol="0" anchor="t"/>
-          <a:lstStyle/>
-          <a:p>
-            <a:pPr algn="l" indent="0" marL="0">
-              <a:buNone/>
-            </a:pPr>
-            <a:r>
-              <a:rPr lang="en-US" sz="1150" b="1" dirty="0">
-                <a:solidFill>
-                  <a:srgbClr val="CF222E"/>
-                </a:solidFill>
-                <a:latin typeface="Arial" pitchFamily="34" charset="0"/>
-                <a:ea typeface="Arial" pitchFamily="34" charset="-122"/>
-                <a:cs typeface="Arial" pitchFamily="34" charset="-120"/>
-              </a:rPr>
-              <a:t>BEFORE: ZZZZ-NO-MATCH</a:t>
-            </a:r>
-            <a:endParaRPr lang="en-US" sz="1150" dirty="0"/>
-          </a:p>
-        </p:txBody>
-      </p:sp>
-      <p:sp>
-        <p:nvSpPr>
-          <p:cNvPr id="10" name="Text 6"/>
-          <p:cNvSpPr/>
-          <p:nvPr/>
-        </p:nvSpPr>
-        <p:spPr>
-          <a:xfrm>
-            <a:off x="511076" y="1885206"/>
-            <a:ext cx="3803600" cy="2649141"/>
+            <a:off x="507950" y="2171700"/>
+            <a:ext cx="279350" cy="279350"/>
           </a:xfrm>
           <a:prstGeom prst="roundRect">
             <a:avLst>
-              <a:gd name="adj" fmla="val 2876"/>
+              <a:gd name="adj" fmla="val 327331"/>
+            </a:avLst>
+          </a:prstGeom>
+          <a:solidFill>
+            <a:srgbClr val="1A7F37"/>
+          </a:solidFill>
+          <a:ln/>
+        </p:spPr>
+        <p:txBody>
+          <a:bodyPr wrap="square" rtlCol="0" anchor="ctr"/>
+          <a:lstStyle/>
+          <a:p>
+            <a:pPr indent="0" marL="0">
+              <a:buNone/>
+            </a:pPr>
+            <a:endParaRPr lang="en-US" dirty="0"/>
+          </a:p>
+        </p:txBody>
+      </p:sp>
+      <p:sp>
+        <p:nvSpPr>
+          <p:cNvPr id="10" name="Text 6"/>
+          <p:cNvSpPr/>
+          <p:nvPr/>
+        </p:nvSpPr>
+        <p:spPr>
+          <a:xfrm>
+            <a:off x="602615" y="2216051"/>
+            <a:ext cx="90020" cy="190500"/>
+          </a:xfrm>
+          <a:prstGeom prst="rect">
+            <a:avLst/>
+          </a:prstGeom>
+          <a:noFill/>
+          <a:ln/>
+        </p:spPr>
+        <p:txBody>
+          <a:bodyPr wrap="square" lIns="0" tIns="0" rIns="0" bIns="0" rtlCol="0" anchor="t"/>
+          <a:lstStyle/>
+          <a:p>
+            <a:pPr algn="ctr" indent="0" marL="0">
+              <a:buNone/>
+            </a:pPr>
+            <a:r>
+              <a:rPr lang="en-US" sz="1250" b="1" dirty="0">
+                <a:solidFill>
+                  <a:srgbClr val="FFFFFF"/>
+                </a:solidFill>
+                <a:latin typeface="Arial" pitchFamily="34" charset="0"/>
+                <a:ea typeface="Arial" pitchFamily="34" charset="-122"/>
+                <a:cs typeface="Arial" pitchFamily="34" charset="-120"/>
+              </a:rPr>
+              <a:t>1</a:t>
+            </a:r>
+            <a:endParaRPr lang="en-US" sz="1250" dirty="0"/>
+          </a:p>
+        </p:txBody>
+      </p:sp>
+      <p:sp>
+        <p:nvSpPr>
+          <p:cNvPr id="11" name="Text 7"/>
+          <p:cNvSpPr/>
+          <p:nvPr/>
+        </p:nvSpPr>
+        <p:spPr>
+          <a:xfrm>
+            <a:off x="939701" y="2171700"/>
+            <a:ext cx="2208455" cy="222200"/>
+          </a:xfrm>
+          <a:prstGeom prst="rect">
+            <a:avLst/>
+          </a:prstGeom>
+          <a:noFill/>
+          <a:ln/>
+        </p:spPr>
+        <p:txBody>
+          <a:bodyPr wrap="square" lIns="0" tIns="0" rIns="0" bIns="0" rtlCol="0" anchor="t"/>
+          <a:lstStyle/>
+          <a:p>
+            <a:pPr algn="l" indent="0" marL="0">
+              <a:lnSpc>
+                <a:spcPts val="1750"/>
+              </a:lnSpc>
+              <a:buNone/>
+            </a:pPr>
+            <a:r>
+              <a:rPr lang="en-US" sz="1550" b="1" dirty="0">
+                <a:solidFill>
+                  <a:srgbClr val="1F2328"/>
+                </a:solidFill>
+                <a:latin typeface="Arial" pitchFamily="34" charset="0"/>
+                <a:ea typeface="Arial" pitchFamily="34" charset="-122"/>
+                <a:cs typeface="Arial" pitchFamily="34" charset="-120"/>
+              </a:rPr>
+              <a:t>Create from the branch</a:t>
+            </a:r>
+            <a:endParaRPr lang="en-US" sz="1550" dirty="0"/>
+          </a:p>
+        </p:txBody>
+      </p:sp>
+      <p:sp>
+        <p:nvSpPr>
+          <p:cNvPr id="12" name="Text 8"/>
+          <p:cNvSpPr/>
+          <p:nvPr/>
+        </p:nvSpPr>
+        <p:spPr>
+          <a:xfrm>
+            <a:off x="939701" y="2419201"/>
+            <a:ext cx="2208455" cy="198090"/>
+          </a:xfrm>
+          <a:prstGeom prst="rect">
+            <a:avLst/>
+          </a:prstGeom>
+          <a:noFill/>
+          <a:ln/>
+        </p:spPr>
+        <p:txBody>
+          <a:bodyPr wrap="square" lIns="0" tIns="0" rIns="0" bIns="0" rtlCol="0" anchor="t"/>
+          <a:lstStyle/>
+          <a:p>
+            <a:pPr algn="l" indent="0" marL="0">
+              <a:lnSpc>
+                <a:spcPts val="1560"/>
+              </a:lnSpc>
+              <a:buNone/>
+            </a:pPr>
+            <a:r>
+              <a:rPr lang="en-US" sz="1350" b="1" dirty="0">
+                <a:solidFill>
+                  <a:srgbClr val="59636E"/>
+                </a:solidFill>
+                <a:latin typeface="Arial" pitchFamily="34" charset="0"/>
+                <a:ea typeface="Arial" pitchFamily="34" charset="-122"/>
+                <a:cs typeface="Arial" pitchFamily="34" charset="-120"/>
+              </a:rPr>
+              <a:t>Create from</a:t>
+            </a:r>
+            <a:pPr algn="l" indent="0" marL="0">
+              <a:lnSpc>
+                <a:spcPts val="1560"/>
+              </a:lnSpc>
+              <a:buNone/>
+            </a:pPr>
+            <a:r>
+              <a:rPr lang="en-US" sz="1350" dirty="0">
+                <a:solidFill>
+                  <a:srgbClr val="59636E"/>
+                </a:solidFill>
+                <a:latin typeface="Arial" pitchFamily="34" charset="0"/>
+                <a:ea typeface="Arial" pitchFamily="34" charset="-122"/>
+                <a:cs typeface="Arial" pitchFamily="34" charset="-120"/>
+              </a:rPr>
+              <a:t> &gt; </a:t>
+            </a:r>
+            <a:pPr algn="l" indent="0" marL="0">
+              <a:lnSpc>
+                <a:spcPts val="1560"/>
+              </a:lnSpc>
+              <a:buNone/>
+            </a:pPr>
+            <a:r>
+              <a:rPr lang="en-US" sz="1350" b="1" dirty="0">
+                <a:solidFill>
+                  <a:srgbClr val="59636E"/>
+                </a:solidFill>
+                <a:latin typeface="Arial" pitchFamily="34" charset="0"/>
+                <a:ea typeface="Arial" pitchFamily="34" charset="-122"/>
+                <a:cs typeface="Arial" pitchFamily="34" charset="-120"/>
+              </a:rPr>
+              <a:t>Branches</a:t>
+            </a:r>
+            <a:pPr algn="l" indent="0" marL="0">
+              <a:lnSpc>
+                <a:spcPts val="1560"/>
+              </a:lnSpc>
+              <a:buNone/>
+            </a:pPr>
+            <a:r>
+              <a:rPr lang="en-US" sz="1350" dirty="0">
+                <a:solidFill>
+                  <a:srgbClr val="59636E"/>
+                </a:solidFill>
+                <a:latin typeface="Arial" pitchFamily="34" charset="0"/>
+                <a:ea typeface="Arial" pitchFamily="34" charset="-122"/>
+                <a:cs typeface="Arial" pitchFamily="34" charset="-120"/>
+              </a:rPr>
+              <a:t>.</a:t>
+            </a:r>
+            <a:endParaRPr lang="en-US" sz="1350" dirty="0"/>
+          </a:p>
+        </p:txBody>
+      </p:sp>
+      <p:sp>
+        <p:nvSpPr>
+          <p:cNvPr id="13" name="Text 9"/>
+          <p:cNvSpPr/>
+          <p:nvPr/>
+        </p:nvSpPr>
+        <p:spPr>
+          <a:xfrm>
+            <a:off x="507950" y="2871192"/>
+            <a:ext cx="279350" cy="279350"/>
+          </a:xfrm>
+          <a:prstGeom prst="roundRect">
+            <a:avLst>
+              <a:gd name="adj" fmla="val 327331"/>
+            </a:avLst>
+          </a:prstGeom>
+          <a:solidFill>
+            <a:srgbClr val="1A7F37"/>
+          </a:solidFill>
+          <a:ln/>
+        </p:spPr>
+        <p:txBody>
+          <a:bodyPr wrap="square" rtlCol="0" anchor="ctr"/>
+          <a:lstStyle/>
+          <a:p>
+            <a:pPr indent="0" marL="0">
+              <a:buNone/>
+            </a:pPr>
+            <a:endParaRPr lang="en-US" dirty="0"/>
+          </a:p>
+        </p:txBody>
+      </p:sp>
+      <p:sp>
+        <p:nvSpPr>
+          <p:cNvPr id="14" name="Text 10"/>
+          <p:cNvSpPr/>
+          <p:nvPr/>
+        </p:nvSpPr>
+        <p:spPr>
+          <a:xfrm>
+            <a:off x="602615" y="2915543"/>
+            <a:ext cx="90020" cy="190500"/>
+          </a:xfrm>
+          <a:prstGeom prst="rect">
+            <a:avLst/>
+          </a:prstGeom>
+          <a:noFill/>
+          <a:ln/>
+        </p:spPr>
+        <p:txBody>
+          <a:bodyPr wrap="square" lIns="0" tIns="0" rIns="0" bIns="0" rtlCol="0" anchor="t"/>
+          <a:lstStyle/>
+          <a:p>
+            <a:pPr algn="ctr" indent="0" marL="0">
+              <a:buNone/>
+            </a:pPr>
+            <a:r>
+              <a:rPr lang="en-US" sz="1250" b="1" dirty="0">
+                <a:solidFill>
+                  <a:srgbClr val="FFFFFF"/>
+                </a:solidFill>
+                <a:latin typeface="Arial" pitchFamily="34" charset="0"/>
+                <a:ea typeface="Arial" pitchFamily="34" charset="-122"/>
+                <a:cs typeface="Arial" pitchFamily="34" charset="-120"/>
+              </a:rPr>
+              <a:t>2</a:t>
+            </a:r>
+            <a:endParaRPr lang="en-US" sz="1250" dirty="0"/>
+          </a:p>
+        </p:txBody>
+      </p:sp>
+      <p:sp>
+        <p:nvSpPr>
+          <p:cNvPr id="15" name="Text 11"/>
+          <p:cNvSpPr/>
+          <p:nvPr/>
+        </p:nvSpPr>
+        <p:spPr>
+          <a:xfrm>
+            <a:off x="939701" y="2871192"/>
+            <a:ext cx="2222421" cy="222200"/>
+          </a:xfrm>
+          <a:prstGeom prst="rect">
+            <a:avLst/>
+          </a:prstGeom>
+          <a:noFill/>
+          <a:ln/>
+        </p:spPr>
+        <p:txBody>
+          <a:bodyPr wrap="square" lIns="0" tIns="0" rIns="0" bIns="0" rtlCol="0" anchor="t"/>
+          <a:lstStyle/>
+          <a:p>
+            <a:pPr algn="l" indent="0" marL="0">
+              <a:lnSpc>
+                <a:spcPts val="1750"/>
+              </a:lnSpc>
+              <a:buNone/>
+            </a:pPr>
+            <a:r>
+              <a:rPr lang="en-US" sz="1550" b="1" dirty="0">
+                <a:solidFill>
+                  <a:srgbClr val="1F2328"/>
+                </a:solidFill>
+                <a:latin typeface="Arial" pitchFamily="34" charset="0"/>
+                <a:ea typeface="Arial" pitchFamily="34" charset="-122"/>
+                <a:cs typeface="Arial" pitchFamily="34" charset="-120"/>
+              </a:rPr>
+              <a:t>Attach it in Plan mode</a:t>
+            </a:r>
+            <a:endParaRPr lang="en-US" sz="1550" dirty="0"/>
+          </a:p>
+        </p:txBody>
+      </p:sp>
+      <p:sp>
+        <p:nvSpPr>
+          <p:cNvPr id="16" name="Text 12"/>
+          <p:cNvSpPr/>
+          <p:nvPr/>
+        </p:nvSpPr>
+        <p:spPr>
+          <a:xfrm>
+            <a:off x="939701" y="3118693"/>
+            <a:ext cx="2222421" cy="207615"/>
+          </a:xfrm>
+          <a:prstGeom prst="rect">
+            <a:avLst/>
+          </a:prstGeom>
+          <a:noFill/>
+          <a:ln/>
+        </p:spPr>
+        <p:txBody>
+          <a:bodyPr wrap="square" lIns="0" tIns="0" rIns="0" bIns="0" rtlCol="0" anchor="t"/>
+          <a:lstStyle/>
+          <a:p>
+            <a:pPr algn="l" indent="0" marL="0">
+              <a:lnSpc>
+                <a:spcPts val="1560"/>
+              </a:lnSpc>
+              <a:buNone/>
+            </a:pPr>
+            <a:r>
+              <a:rPr lang="en-US" sz="1350" dirty="0">
+                <a:solidFill>
+                  <a:srgbClr val="59636E"/>
+                </a:solidFill>
+                <a:latin typeface="Arial" pitchFamily="34" charset="0"/>
+                <a:ea typeface="Arial" pitchFamily="34" charset="-122"/>
+                <a:cs typeface="Arial" pitchFamily="34" charset="-120"/>
+              </a:rPr>
+              <a:t>Type </a:t>
+            </a:r>
+            <a:pPr algn="l" indent="0" marL="0">
+              <a:lnSpc>
+                <a:spcPts val="1560"/>
+              </a:lnSpc>
+              <a:buNone/>
+            </a:pPr>
+            <a:r>
+              <a:rPr lang="en-US" sz="1350" b="1" dirty="0">
+                <a:solidFill>
+                  <a:srgbClr val="0550AE"/>
+                </a:solidFill>
+                <a:latin typeface="Courier New" pitchFamily="34" charset="0"/>
+                <a:ea typeface="Courier New" pitchFamily="34" charset="-122"/>
+                <a:cs typeface="Courier New" pitchFamily="34" charset="-120"/>
+              </a:rPr>
+              <a:t>#3</a:t>
+            </a:r>
+            <a:pPr algn="l" indent="0" marL="0">
+              <a:lnSpc>
+                <a:spcPts val="1560"/>
+              </a:lnSpc>
+              <a:buNone/>
+            </a:pPr>
+            <a:r>
+              <a:rPr lang="en-US" sz="1350" dirty="0">
+                <a:solidFill>
+                  <a:srgbClr val="59636E"/>
+                </a:solidFill>
+                <a:latin typeface="Arial" pitchFamily="34" charset="0"/>
+                <a:ea typeface="Arial" pitchFamily="34" charset="-122"/>
+                <a:cs typeface="Arial" pitchFamily="34" charset="-120"/>
+              </a:rPr>
+              <a:t>, then ask for a plan.</a:t>
+            </a:r>
+            <a:endParaRPr lang="en-US" sz="1350" dirty="0"/>
+          </a:p>
+        </p:txBody>
+      </p:sp>
+      <p:sp>
+        <p:nvSpPr>
+          <p:cNvPr id="17" name="Text 13"/>
+          <p:cNvSpPr/>
+          <p:nvPr/>
+        </p:nvSpPr>
+        <p:spPr>
+          <a:xfrm>
+            <a:off x="507950" y="3580209"/>
+            <a:ext cx="279350" cy="279350"/>
+          </a:xfrm>
+          <a:prstGeom prst="roundRect">
+            <a:avLst>
+              <a:gd name="adj" fmla="val 327331"/>
+            </a:avLst>
+          </a:prstGeom>
+          <a:solidFill>
+            <a:srgbClr val="1A7F37"/>
+          </a:solidFill>
+          <a:ln/>
+        </p:spPr>
+        <p:txBody>
+          <a:bodyPr wrap="square" rtlCol="0" anchor="ctr"/>
+          <a:lstStyle/>
+          <a:p>
+            <a:pPr indent="0" marL="0">
+              <a:buNone/>
+            </a:pPr>
+            <a:endParaRPr lang="en-US" dirty="0"/>
+          </a:p>
+        </p:txBody>
+      </p:sp>
+      <p:sp>
+        <p:nvSpPr>
+          <p:cNvPr id="18" name="Text 14"/>
+          <p:cNvSpPr/>
+          <p:nvPr/>
+        </p:nvSpPr>
+        <p:spPr>
+          <a:xfrm>
+            <a:off x="602615" y="3624560"/>
+            <a:ext cx="90020" cy="190500"/>
+          </a:xfrm>
+          <a:prstGeom prst="rect">
+            <a:avLst/>
+          </a:prstGeom>
+          <a:noFill/>
+          <a:ln/>
+        </p:spPr>
+        <p:txBody>
+          <a:bodyPr wrap="square" lIns="0" tIns="0" rIns="0" bIns="0" rtlCol="0" anchor="t"/>
+          <a:lstStyle/>
+          <a:p>
+            <a:pPr algn="ctr" indent="0" marL="0">
+              <a:buNone/>
+            </a:pPr>
+            <a:r>
+              <a:rPr lang="en-US" sz="1250" b="1" dirty="0">
+                <a:solidFill>
+                  <a:srgbClr val="FFFFFF"/>
+                </a:solidFill>
+                <a:latin typeface="Arial" pitchFamily="34" charset="0"/>
+                <a:ea typeface="Arial" pitchFamily="34" charset="-122"/>
+                <a:cs typeface="Arial" pitchFamily="34" charset="-120"/>
+              </a:rPr>
+              <a:t>3</a:t>
+            </a:r>
+            <a:endParaRPr lang="en-US" sz="1250" dirty="0"/>
+          </a:p>
+        </p:txBody>
+      </p:sp>
+      <p:sp>
+        <p:nvSpPr>
+          <p:cNvPr id="19" name="Text 15"/>
+          <p:cNvSpPr/>
+          <p:nvPr/>
+        </p:nvSpPr>
+        <p:spPr>
+          <a:xfrm>
+            <a:off x="939701" y="3580209"/>
+            <a:ext cx="1944011" cy="222200"/>
+          </a:xfrm>
+          <a:prstGeom prst="rect">
+            <a:avLst/>
+          </a:prstGeom>
+          <a:noFill/>
+          <a:ln/>
+        </p:spPr>
+        <p:txBody>
+          <a:bodyPr wrap="square" lIns="0" tIns="0" rIns="0" bIns="0" rtlCol="0" anchor="t"/>
+          <a:lstStyle/>
+          <a:p>
+            <a:pPr algn="l" indent="0" marL="0">
+              <a:lnSpc>
+                <a:spcPts val="1750"/>
+              </a:lnSpc>
+              <a:buNone/>
+            </a:pPr>
+            <a:r>
+              <a:rPr lang="en-US" sz="1550" b="1" dirty="0">
+                <a:solidFill>
+                  <a:srgbClr val="1F2328"/>
+                </a:solidFill>
+                <a:latin typeface="Arial" pitchFamily="34" charset="0"/>
+                <a:ea typeface="Arial" pitchFamily="34" charset="-122"/>
+                <a:cs typeface="Arial" pitchFamily="34" charset="-120"/>
+              </a:rPr>
+              <a:t>Review the plan</a:t>
+            </a:r>
+            <a:endParaRPr lang="en-US" sz="1550" dirty="0"/>
+          </a:p>
+        </p:txBody>
+      </p:sp>
+      <p:sp>
+        <p:nvSpPr>
+          <p:cNvPr id="20" name="Text 16"/>
+          <p:cNvSpPr/>
+          <p:nvPr/>
+        </p:nvSpPr>
+        <p:spPr>
+          <a:xfrm>
+            <a:off x="939701" y="3827711"/>
+            <a:ext cx="1944011" cy="198090"/>
+          </a:xfrm>
+          <a:prstGeom prst="rect">
+            <a:avLst/>
+          </a:prstGeom>
+          <a:noFill/>
+          <a:ln/>
+        </p:spPr>
+        <p:txBody>
+          <a:bodyPr wrap="square" lIns="0" tIns="0" rIns="0" bIns="0" rtlCol="0" anchor="t"/>
+          <a:lstStyle/>
+          <a:p>
+            <a:pPr algn="l" indent="0" marL="0">
+              <a:lnSpc>
+                <a:spcPts val="1560"/>
+              </a:lnSpc>
+              <a:buNone/>
+            </a:pPr>
+            <a:r>
+              <a:rPr lang="en-US" sz="1350" dirty="0">
+                <a:solidFill>
+                  <a:srgbClr val="59636E"/>
+                </a:solidFill>
+                <a:latin typeface="Arial" pitchFamily="34" charset="0"/>
+                <a:ea typeface="Arial" pitchFamily="34" charset="-122"/>
+                <a:cs typeface="Arial" pitchFamily="34" charset="-120"/>
+              </a:rPr>
+              <a:t>Choose </a:t>
+            </a:r>
+            <a:pPr algn="l" indent="0" marL="0">
+              <a:lnSpc>
+                <a:spcPts val="1560"/>
+              </a:lnSpc>
+              <a:buNone/>
+            </a:pPr>
+            <a:r>
+              <a:rPr lang="en-US" sz="1350" b="1" dirty="0">
+                <a:solidFill>
+                  <a:srgbClr val="59636E"/>
+                </a:solidFill>
+                <a:latin typeface="Arial" pitchFamily="34" charset="0"/>
+                <a:ea typeface="Arial" pitchFamily="34" charset="-122"/>
+                <a:cs typeface="Arial" pitchFamily="34" charset="-120"/>
+              </a:rPr>
+              <a:t>Exit plan mode</a:t>
+            </a:r>
+            <a:pPr algn="l" indent="0" marL="0">
+              <a:lnSpc>
+                <a:spcPts val="1560"/>
+              </a:lnSpc>
+              <a:buNone/>
+            </a:pPr>
+            <a:r>
+              <a:rPr lang="en-US" sz="1350" dirty="0">
+                <a:solidFill>
+                  <a:srgbClr val="59636E"/>
+                </a:solidFill>
+                <a:latin typeface="Arial" pitchFamily="34" charset="0"/>
+                <a:ea typeface="Arial" pitchFamily="34" charset="-122"/>
+                <a:cs typeface="Arial" pitchFamily="34" charset="-120"/>
+              </a:rPr>
+              <a:t>.</a:t>
+            </a:r>
+            <a:endParaRPr lang="en-US" sz="1350" dirty="0"/>
+          </a:p>
+        </p:txBody>
+      </p:sp>
+      <p:sp>
+        <p:nvSpPr>
+          <p:cNvPr id="21" name="Text 17"/>
+          <p:cNvSpPr/>
+          <p:nvPr/>
+        </p:nvSpPr>
+        <p:spPr>
+          <a:xfrm>
+            <a:off x="3762077" y="2087761"/>
+            <a:ext cx="4870400" cy="1767780"/>
+          </a:xfrm>
+          <a:prstGeom prst="roundRect">
+            <a:avLst>
+              <a:gd name="adj" fmla="val 4310"/>
             </a:avLst>
           </a:prstGeom>
           <a:solidFill>
@@ -3649,7 +3763,7 @@
       </p:sp>
       <p:pic>
         <p:nvPicPr>
-          <p:cNvPr id="11" name="Image 2" descr="/Users/danwahlin/.copilot/session-state/56a7a0da-def8-48d4-b5e8-0ac3878cb8dd/files/slides-build/img/02-empty-state-crop.png">    </p:cNvPr>
+          <p:cNvPr id="22" name="Image 2" descr="/Users/danwahlin/.copilot/session-state/56a7a0da-def8-48d4-b5e8-0ac3878cb8dd/files/slides-build/img/02-review-plan-crop.png">    </p:cNvPr>
           <p:cNvPicPr>
             <a:picLocks noChangeAspect="1"/>
           </p:cNvPicPr>
@@ -3663,547 +3777,14 @@
         </p:blipFill>
         <p:spPr>
           <a:xfrm>
-            <a:off x="558701" y="1932831"/>
-            <a:ext cx="3708350" cy="2553891"/>
+            <a:off x="3809702" y="2135386"/>
+            <a:ext cx="4775150" cy="1672530"/>
           </a:xfrm>
           <a:prstGeom prst="rect">
             <a:avLst/>
           </a:prstGeom>
         </p:spPr>
       </p:pic>
-      <p:sp>
-        <p:nvSpPr>
-          <p:cNvPr id="12" name="Text 7"/>
-          <p:cNvSpPr/>
-          <p:nvPr/>
-        </p:nvSpPr>
-        <p:spPr>
-          <a:xfrm>
-            <a:off x="4673501" y="2042368"/>
-            <a:ext cx="279350" cy="279350"/>
-          </a:xfrm>
-          <a:prstGeom prst="roundRect">
-            <a:avLst>
-              <a:gd name="adj" fmla="val 327331"/>
-            </a:avLst>
-          </a:prstGeom>
-          <a:solidFill>
-            <a:srgbClr val="1A7F37"/>
-          </a:solidFill>
-          <a:ln/>
-        </p:spPr>
-        <p:txBody>
-          <a:bodyPr wrap="square" rtlCol="0" anchor="ctr"/>
-          <a:lstStyle/>
-          <a:p>
-            <a:pPr indent="0" marL="0">
-              <a:buNone/>
-            </a:pPr>
-            <a:endParaRPr lang="en-US" dirty="0"/>
-          </a:p>
-        </p:txBody>
-      </p:sp>
-      <p:sp>
-        <p:nvSpPr>
-          <p:cNvPr id="13" name="Text 8"/>
-          <p:cNvSpPr/>
-          <p:nvPr/>
-        </p:nvSpPr>
-        <p:spPr>
-          <a:xfrm>
-            <a:off x="4768166" y="2086719"/>
-            <a:ext cx="90020" cy="190500"/>
-          </a:xfrm>
-          <a:prstGeom prst="rect">
-            <a:avLst/>
-          </a:prstGeom>
-          <a:noFill/>
-          <a:ln/>
-        </p:spPr>
-        <p:txBody>
-          <a:bodyPr wrap="square" lIns="0" tIns="0" rIns="0" bIns="0" rtlCol="0" anchor="t"/>
-          <a:lstStyle/>
-          <a:p>
-            <a:pPr algn="ctr" indent="0" marL="0">
-              <a:buNone/>
-            </a:pPr>
-            <a:r>
-              <a:rPr lang="en-US" sz="1250" b="1" dirty="0">
-                <a:solidFill>
-                  <a:srgbClr val="FFFFFF"/>
-                </a:solidFill>
-                <a:latin typeface="Arial" pitchFamily="34" charset="0"/>
-                <a:ea typeface="Arial" pitchFamily="34" charset="-122"/>
-                <a:cs typeface="Arial" pitchFamily="34" charset="-120"/>
-              </a:rPr>
-              <a:t>1</a:t>
-            </a:r>
-            <a:endParaRPr lang="en-US" sz="1250" dirty="0"/>
-          </a:p>
-        </p:txBody>
-      </p:sp>
-      <p:sp>
-        <p:nvSpPr>
-          <p:cNvPr id="14" name="Text 9"/>
-          <p:cNvSpPr/>
-          <p:nvPr/>
-        </p:nvSpPr>
-        <p:spPr>
-          <a:xfrm>
-            <a:off x="5105251" y="2042368"/>
-            <a:ext cx="2275400" cy="222200"/>
-          </a:xfrm>
-          <a:prstGeom prst="rect">
-            <a:avLst/>
-          </a:prstGeom>
-          <a:noFill/>
-          <a:ln/>
-        </p:spPr>
-        <p:txBody>
-          <a:bodyPr wrap="square" lIns="0" tIns="0" rIns="0" bIns="0" rtlCol="0" anchor="t"/>
-          <a:lstStyle/>
-          <a:p>
-            <a:pPr algn="l" indent="0" marL="0">
-              <a:lnSpc>
-                <a:spcPts val="1750"/>
-              </a:lnSpc>
-              <a:buNone/>
-            </a:pPr>
-            <a:r>
-              <a:rPr lang="en-US" sz="1550" b="1" dirty="0">
-                <a:solidFill>
-                  <a:srgbClr val="1F2328"/>
-                </a:solidFill>
-                <a:latin typeface="Arial" pitchFamily="34" charset="0"/>
-                <a:ea typeface="Arial" pitchFamily="34" charset="-122"/>
-                <a:cs typeface="Arial" pitchFamily="34" charset="-120"/>
-              </a:rPr>
-              <a:t>Run the app and search</a:t>
-            </a:r>
-            <a:endParaRPr lang="en-US" sz="1550" dirty="0"/>
-          </a:p>
-        </p:txBody>
-      </p:sp>
-      <p:sp>
-        <p:nvSpPr>
-          <p:cNvPr id="15" name="Text 10"/>
-          <p:cNvSpPr/>
-          <p:nvPr/>
-        </p:nvSpPr>
-        <p:spPr>
-          <a:xfrm>
-            <a:off x="5105251" y="2289870"/>
-            <a:ext cx="2275400" cy="198090"/>
-          </a:xfrm>
-          <a:prstGeom prst="rect">
-            <a:avLst/>
-          </a:prstGeom>
-          <a:noFill/>
-          <a:ln/>
-        </p:spPr>
-        <p:txBody>
-          <a:bodyPr wrap="square" lIns="0" tIns="0" rIns="0" bIns="0" rtlCol="0" anchor="t"/>
-          <a:lstStyle/>
-          <a:p>
-            <a:pPr algn="l" indent="0" marL="0">
-              <a:lnSpc>
-                <a:spcPts val="1560"/>
-              </a:lnSpc>
-              <a:buNone/>
-            </a:pPr>
-            <a:r>
-              <a:rPr lang="en-US" sz="1350" dirty="0">
-                <a:solidFill>
-                  <a:srgbClr val="59636E"/>
-                </a:solidFill>
-                <a:latin typeface="Arial" pitchFamily="34" charset="0"/>
-                <a:ea typeface="Arial" pitchFamily="34" charset="-122"/>
-                <a:cs typeface="Arial" pitchFamily="34" charset="-120"/>
-              </a:rPr>
-              <a:t>Only </a:t>
-            </a:r>
-            <a:pPr algn="l" indent="0" marL="0">
-              <a:lnSpc>
-                <a:spcPts val="1560"/>
-              </a:lnSpc>
-              <a:buNone/>
-            </a:pPr>
-            <a:r>
-              <a:rPr lang="en-US" sz="1350" b="1" dirty="0">
-                <a:solidFill>
-                  <a:srgbClr val="59636E"/>
-                </a:solidFill>
-                <a:latin typeface="Arial" pitchFamily="34" charset="0"/>
-                <a:ea typeface="Arial" pitchFamily="34" charset="-122"/>
-                <a:cs typeface="Arial" pitchFamily="34" charset="-120"/>
-              </a:rPr>
-              <a:t>No results. Try again.</a:t>
-            </a:r>
-            <a:endParaRPr lang="en-US" sz="1350" dirty="0"/>
-          </a:p>
-        </p:txBody>
-      </p:sp>
-      <p:sp>
-        <p:nvSpPr>
-          <p:cNvPr id="16" name="Text 11"/>
-          <p:cNvSpPr/>
-          <p:nvPr/>
-        </p:nvSpPr>
-        <p:spPr>
-          <a:xfrm>
-            <a:off x="4673501" y="2741861"/>
-            <a:ext cx="279350" cy="279350"/>
-          </a:xfrm>
-          <a:prstGeom prst="roundRect">
-            <a:avLst>
-              <a:gd name="adj" fmla="val 327331"/>
-            </a:avLst>
-          </a:prstGeom>
-          <a:solidFill>
-            <a:srgbClr val="1A7F37"/>
-          </a:solidFill>
-          <a:ln/>
-        </p:spPr>
-        <p:txBody>
-          <a:bodyPr wrap="square" rtlCol="0" anchor="ctr"/>
-          <a:lstStyle/>
-          <a:p>
-            <a:pPr indent="0" marL="0">
-              <a:buNone/>
-            </a:pPr>
-            <a:endParaRPr lang="en-US" dirty="0"/>
-          </a:p>
-        </p:txBody>
-      </p:sp>
-      <p:sp>
-        <p:nvSpPr>
-          <p:cNvPr id="17" name="Text 12"/>
-          <p:cNvSpPr/>
-          <p:nvPr/>
-        </p:nvSpPr>
-        <p:spPr>
-          <a:xfrm>
-            <a:off x="4768166" y="2786211"/>
-            <a:ext cx="90020" cy="190500"/>
-          </a:xfrm>
-          <a:prstGeom prst="rect">
-            <a:avLst/>
-          </a:prstGeom>
-          <a:noFill/>
-          <a:ln/>
-        </p:spPr>
-        <p:txBody>
-          <a:bodyPr wrap="square" lIns="0" tIns="0" rIns="0" bIns="0" rtlCol="0" anchor="t"/>
-          <a:lstStyle/>
-          <a:p>
-            <a:pPr algn="ctr" indent="0" marL="0">
-              <a:buNone/>
-            </a:pPr>
-            <a:r>
-              <a:rPr lang="en-US" sz="1250" b="1" dirty="0">
-                <a:solidFill>
-                  <a:srgbClr val="FFFFFF"/>
-                </a:solidFill>
-                <a:latin typeface="Arial" pitchFamily="34" charset="0"/>
-                <a:ea typeface="Arial" pitchFamily="34" charset="-122"/>
-                <a:cs typeface="Arial" pitchFamily="34" charset="-120"/>
-              </a:rPr>
-              <a:t>2</a:t>
-            </a:r>
-            <a:endParaRPr lang="en-US" sz="1250" dirty="0"/>
-          </a:p>
-        </p:txBody>
-      </p:sp>
-      <p:sp>
-        <p:nvSpPr>
-          <p:cNvPr id="18" name="Text 13"/>
-          <p:cNvSpPr/>
-          <p:nvPr/>
-        </p:nvSpPr>
-        <p:spPr>
-          <a:xfrm>
-            <a:off x="5105251" y="2741861"/>
-            <a:ext cx="2714875" cy="241250"/>
-          </a:xfrm>
-          <a:prstGeom prst="rect">
-            <a:avLst/>
-          </a:prstGeom>
-          <a:noFill/>
-          <a:ln/>
-        </p:spPr>
-        <p:txBody>
-          <a:bodyPr wrap="square" lIns="0" tIns="0" rIns="0" bIns="0" rtlCol="0" anchor="t"/>
-          <a:lstStyle/>
-          <a:p>
-            <a:pPr algn="l" indent="0" marL="0">
-              <a:lnSpc>
-                <a:spcPts val="1750"/>
-              </a:lnSpc>
-              <a:buNone/>
-            </a:pPr>
-            <a:r>
-              <a:rPr lang="en-US" sz="1550" dirty="0">
-                <a:solidFill>
-                  <a:srgbClr val="1F2328"/>
-                </a:solidFill>
-                <a:latin typeface="Arial" pitchFamily="34" charset="0"/>
-                <a:ea typeface="Arial" pitchFamily="34" charset="-122"/>
-                <a:cs typeface="Arial" pitchFamily="34" charset="-120"/>
-              </a:rPr>
-              <a:t>Send </a:t>
-            </a:r>
-            <a:pPr algn="l" indent="0" marL="0">
-              <a:lnSpc>
-                <a:spcPts val="1750"/>
-              </a:lnSpc>
-              <a:buNone/>
-            </a:pPr>
-            <a:r>
-              <a:rPr lang="en-US" sz="1550" b="1" dirty="0">
-                <a:solidFill>
-                  <a:srgbClr val="0550AE"/>
-                </a:solidFill>
-                <a:latin typeface="Courier New" pitchFamily="34" charset="0"/>
-                <a:ea typeface="Courier New" pitchFamily="34" charset="-122"/>
-                <a:cs typeface="Courier New" pitchFamily="34" charset="-120"/>
-              </a:rPr>
-              <a:t>Implement the plan</a:t>
-            </a:r>
-            <a:endParaRPr lang="en-US" sz="1550" dirty="0"/>
-          </a:p>
-        </p:txBody>
-      </p:sp>
-      <p:sp>
-        <p:nvSpPr>
-          <p:cNvPr id="19" name="Text 14"/>
-          <p:cNvSpPr/>
-          <p:nvPr/>
-        </p:nvSpPr>
-        <p:spPr>
-          <a:xfrm>
-            <a:off x="5105251" y="3008412"/>
-            <a:ext cx="2714875" cy="198090"/>
-          </a:xfrm>
-          <a:prstGeom prst="rect">
-            <a:avLst/>
-          </a:prstGeom>
-          <a:noFill/>
-          <a:ln/>
-        </p:spPr>
-        <p:txBody>
-          <a:bodyPr wrap="square" lIns="0" tIns="0" rIns="0" bIns="0" rtlCol="0" anchor="t"/>
-          <a:lstStyle/>
-          <a:p>
-            <a:pPr algn="l" indent="0" marL="0">
-              <a:lnSpc>
-                <a:spcPts val="1560"/>
-              </a:lnSpc>
-              <a:buNone/>
-            </a:pPr>
-            <a:r>
-              <a:rPr lang="en-US" sz="1350" dirty="0">
-                <a:solidFill>
-                  <a:srgbClr val="59636E"/>
-                </a:solidFill>
-                <a:latin typeface="Arial" pitchFamily="34" charset="0"/>
-                <a:ea typeface="Arial" pitchFamily="34" charset="-122"/>
-                <a:cs typeface="Arial" pitchFamily="34" charset="-120"/>
-              </a:rPr>
-              <a:t>Inspect the </a:t>
-            </a:r>
-            <a:pPr algn="l" indent="0" marL="0">
-              <a:lnSpc>
-                <a:spcPts val="1560"/>
-              </a:lnSpc>
-              <a:buNone/>
-            </a:pPr>
-            <a:r>
-              <a:rPr lang="en-US" sz="1350" b="1" dirty="0">
-                <a:solidFill>
-                  <a:srgbClr val="59636E"/>
-                </a:solidFill>
-                <a:latin typeface="Arial" pitchFamily="34" charset="0"/>
-                <a:ea typeface="Arial" pitchFamily="34" charset="-122"/>
-                <a:cs typeface="Arial" pitchFamily="34" charset="-120"/>
-              </a:rPr>
-              <a:t>Changes</a:t>
-            </a:r>
-            <a:pPr algn="l" indent="0" marL="0">
-              <a:lnSpc>
-                <a:spcPts val="1560"/>
-              </a:lnSpc>
-              <a:buNone/>
-            </a:pPr>
-            <a:r>
-              <a:rPr lang="en-US" sz="1350" dirty="0">
-                <a:solidFill>
-                  <a:srgbClr val="59636E"/>
-                </a:solidFill>
-                <a:latin typeface="Arial" pitchFamily="34" charset="0"/>
-                <a:ea typeface="Arial" pitchFamily="34" charset="-122"/>
-                <a:cs typeface="Arial" pitchFamily="34" charset="-120"/>
-              </a:rPr>
-              <a:t> tab.</a:t>
-            </a:r>
-            <a:endParaRPr lang="en-US" sz="1350" dirty="0"/>
-          </a:p>
-        </p:txBody>
-      </p:sp>
-      <p:sp>
-        <p:nvSpPr>
-          <p:cNvPr id="20" name="Text 15"/>
-          <p:cNvSpPr/>
-          <p:nvPr/>
-        </p:nvSpPr>
-        <p:spPr>
-          <a:xfrm>
-            <a:off x="4673501" y="3460403"/>
-            <a:ext cx="279350" cy="279350"/>
-          </a:xfrm>
-          <a:prstGeom prst="roundRect">
-            <a:avLst>
-              <a:gd name="adj" fmla="val 327331"/>
-            </a:avLst>
-          </a:prstGeom>
-          <a:solidFill>
-            <a:srgbClr val="1A7F37"/>
-          </a:solidFill>
-          <a:ln/>
-        </p:spPr>
-        <p:txBody>
-          <a:bodyPr wrap="square" rtlCol="0" anchor="ctr"/>
-          <a:lstStyle/>
-          <a:p>
-            <a:pPr indent="0" marL="0">
-              <a:buNone/>
-            </a:pPr>
-            <a:endParaRPr lang="en-US" dirty="0"/>
-          </a:p>
-        </p:txBody>
-      </p:sp>
-      <p:sp>
-        <p:nvSpPr>
-          <p:cNvPr id="21" name="Text 16"/>
-          <p:cNvSpPr/>
-          <p:nvPr/>
-        </p:nvSpPr>
-        <p:spPr>
-          <a:xfrm>
-            <a:off x="4768166" y="3504754"/>
-            <a:ext cx="90020" cy="190500"/>
-          </a:xfrm>
-          <a:prstGeom prst="rect">
-            <a:avLst/>
-          </a:prstGeom>
-          <a:noFill/>
-          <a:ln/>
-        </p:spPr>
-        <p:txBody>
-          <a:bodyPr wrap="square" lIns="0" tIns="0" rIns="0" bIns="0" rtlCol="0" anchor="t"/>
-          <a:lstStyle/>
-          <a:p>
-            <a:pPr algn="ctr" indent="0" marL="0">
-              <a:buNone/>
-            </a:pPr>
-            <a:r>
-              <a:rPr lang="en-US" sz="1250" b="1" dirty="0">
-                <a:solidFill>
-                  <a:srgbClr val="FFFFFF"/>
-                </a:solidFill>
-                <a:latin typeface="Arial" pitchFamily="34" charset="0"/>
-                <a:ea typeface="Arial" pitchFamily="34" charset="-122"/>
-                <a:cs typeface="Arial" pitchFamily="34" charset="-120"/>
-              </a:rPr>
-              <a:t>3</a:t>
-            </a:r>
-            <a:endParaRPr lang="en-US" sz="1250" dirty="0"/>
-          </a:p>
-        </p:txBody>
-      </p:sp>
-      <p:sp>
-        <p:nvSpPr>
-          <p:cNvPr id="22" name="Text 17"/>
-          <p:cNvSpPr/>
-          <p:nvPr/>
-        </p:nvSpPr>
-        <p:spPr>
-          <a:xfrm>
-            <a:off x="5105251" y="3460403"/>
-            <a:ext cx="3601263" cy="222200"/>
-          </a:xfrm>
-          <a:prstGeom prst="rect">
-            <a:avLst/>
-          </a:prstGeom>
-          <a:noFill/>
-          <a:ln/>
-        </p:spPr>
-        <p:txBody>
-          <a:bodyPr wrap="square" lIns="0" tIns="0" rIns="0" bIns="0" rtlCol="0" anchor="t"/>
-          <a:lstStyle/>
-          <a:p>
-            <a:pPr algn="l" indent="0" marL="0">
-              <a:lnSpc>
-                <a:spcPts val="1750"/>
-              </a:lnSpc>
-              <a:buNone/>
-            </a:pPr>
-            <a:r>
-              <a:rPr lang="en-US" sz="1550" b="1" dirty="0">
-                <a:solidFill>
-                  <a:srgbClr val="1F2328"/>
-                </a:solidFill>
-                <a:latin typeface="Arial" pitchFamily="34" charset="0"/>
-                <a:ea typeface="Arial" pitchFamily="34" charset="-122"/>
-                <a:cs typeface="Arial" pitchFamily="34" charset="-120"/>
-              </a:rPr>
-              <a:t>Reload and search again</a:t>
-            </a:r>
-            <a:endParaRPr lang="en-US" sz="1550" dirty="0"/>
-          </a:p>
-        </p:txBody>
-      </p:sp>
-      <p:sp>
-        <p:nvSpPr>
-          <p:cNvPr id="23" name="Text 18"/>
-          <p:cNvSpPr/>
-          <p:nvPr/>
-        </p:nvSpPr>
-        <p:spPr>
-          <a:xfrm>
-            <a:off x="5105251" y="3707904"/>
-            <a:ext cx="3601263" cy="396180"/>
-          </a:xfrm>
-          <a:prstGeom prst="rect">
-            <a:avLst/>
-          </a:prstGeom>
-          <a:noFill/>
-          <a:ln/>
-        </p:spPr>
-        <p:txBody>
-          <a:bodyPr wrap="square" lIns="0" tIns="0" rIns="0" bIns="0" rtlCol="0" anchor="t"/>
-          <a:lstStyle/>
-          <a:p>
-            <a:pPr algn="l" indent="0" marL="0">
-              <a:lnSpc>
-                <a:spcPts val="1560"/>
-              </a:lnSpc>
-              <a:buNone/>
-            </a:pPr>
-            <a:r>
-              <a:rPr lang="en-US" sz="1350" dirty="0">
-                <a:solidFill>
-                  <a:srgbClr val="59636E"/>
-                </a:solidFill>
-                <a:latin typeface="Arial" pitchFamily="34" charset="0"/>
-                <a:ea typeface="Arial" pitchFamily="34" charset="-122"/>
-                <a:cs typeface="Arial" pitchFamily="34" charset="-120"/>
-              </a:rPr>
-              <a:t>Now it suggests a new search, genre, or status.</a:t>
-            </a:r>
-            <a:endParaRPr lang="en-US" sz="1350" dirty="0"/>
-          </a:p>
-        </p:txBody>
-      </p:sp>
     </p:spTree>
   </p:cSld>
   <p:clrMapOvr>
@@ -4390,7 +3971,7 @@
                 <a:ea typeface="Arial" pitchFamily="34" charset="-122"/>
                 <a:cs typeface="Arial" pitchFamily="34" charset="-120"/>
               </a:rPr>
-              <a:t>INSPECT THE SESSION</a:t>
+              <a:t>EXERCISE</a:t>
             </a:r>
             <a:endParaRPr lang="en-US" sz="1250" dirty="0"/>
           </a:p>
@@ -4435,7 +4016,7 @@
                 <a:ea typeface="Arial" pitchFamily="34" charset="-122"/>
                 <a:cs typeface="Arial" pitchFamily="34" charset="-120"/>
               </a:rPr>
-              <a:t>Ask the session what it did</a:t>
+              <a:t>Capture a baseline, then compare</a:t>
             </a:r>
             <a:endParaRPr lang="en-US" sz="2800" dirty="0"/>
           </a:p>
@@ -4449,12 +4030,96 @@
         </p:nvSpPr>
         <p:spPr>
           <a:xfrm>
-            <a:off x="511076" y="1937742"/>
-            <a:ext cx="3956000" cy="1621780"/>
+            <a:off x="507950" y="1104751"/>
+            <a:ext cx="8161020" cy="254050"/>
+          </a:xfrm>
+          <a:prstGeom prst="rect">
+            <a:avLst/>
+          </a:prstGeom>
+          <a:noFill/>
+          <a:ln/>
+        </p:spPr>
+        <p:txBody>
+          <a:bodyPr wrap="square" lIns="0" tIns="0" rIns="0" bIns="0" rtlCol="0" anchor="t"/>
+          <a:lstStyle/>
+          <a:p>
+            <a:pPr algn="l" indent="0" marL="0">
+              <a:lnSpc>
+                <a:spcPts val="2000"/>
+              </a:lnSpc>
+              <a:spcBef>
+                <a:spcPts val="500"/>
+              </a:spcBef>
+              <a:buNone/>
+            </a:pPr>
+            <a:r>
+              <a:rPr lang="en-US" sz="1650" dirty="0">
+                <a:solidFill>
+                  <a:srgbClr val="59636E"/>
+                </a:solidFill>
+                <a:latin typeface="Arial" pitchFamily="34" charset="0"/>
+                <a:ea typeface="Arial" pitchFamily="34" charset="-122"/>
+                <a:cs typeface="Arial" pitchFamily="34" charset="-120"/>
+              </a:rPr>
+              <a:t>Know the current behavior before you change it.</a:t>
+            </a:r>
+            <a:endParaRPr lang="en-US" sz="1650" dirty="0"/>
+          </a:p>
+        </p:txBody>
+      </p:sp>
+      <p:sp>
+        <p:nvSpPr>
+          <p:cNvPr id="9" name="Text 5"/>
+          <p:cNvSpPr/>
+          <p:nvPr/>
+        </p:nvSpPr>
+        <p:spPr>
+          <a:xfrm>
+            <a:off x="507950" y="1603325"/>
+            <a:ext cx="3886200" cy="171450"/>
+          </a:xfrm>
+          <a:prstGeom prst="rect">
+            <a:avLst/>
+          </a:prstGeom>
+          <a:noFill/>
+          <a:ln/>
+        </p:spPr>
+        <p:txBody>
+          <a:bodyPr wrap="square" lIns="0" tIns="0" rIns="0" bIns="0" rtlCol="0" anchor="t"/>
+          <a:lstStyle/>
+          <a:p>
+            <a:pPr algn="l" indent="0" marL="0">
+              <a:buNone/>
+            </a:pPr>
+            <a:r>
+              <a:rPr lang="en-US" sz="1150" b="1" dirty="0">
+                <a:solidFill>
+                  <a:srgbClr val="CF222E"/>
+                </a:solidFill>
+                <a:latin typeface="Arial" pitchFamily="34" charset="0"/>
+                <a:ea typeface="Arial" pitchFamily="34" charset="-122"/>
+                <a:cs typeface="Arial" pitchFamily="34" charset="-120"/>
+              </a:rPr>
+              <a:t>BEFORE: ZZZZ-NO-MATCH</a:t>
+            </a:r>
+            <a:endParaRPr lang="en-US" sz="1150" dirty="0"/>
+          </a:p>
+        </p:txBody>
+      </p:sp>
+      <p:sp>
+        <p:nvSpPr>
+          <p:cNvPr id="10" name="Text 6"/>
+          <p:cNvSpPr/>
+          <p:nvPr/>
+        </p:nvSpPr>
+        <p:spPr>
+          <a:xfrm>
+            <a:off x="511076" y="1885206"/>
+            <a:ext cx="3803600" cy="2649141"/>
           </a:xfrm>
           <a:prstGeom prst="roundRect">
             <a:avLst>
-              <a:gd name="adj" fmla="val 4699"/>
+              <a:gd name="adj" fmla="val 2876"/>
             </a:avLst>
           </a:prstGeom>
           <a:solidFill>
@@ -4486,7 +4151,7 @@
       </p:sp>
       <p:pic>
         <p:nvPicPr>
-          <p:cNvPr id="9" name="Image 2" descr="/Users/danwahlin/.copilot/session-state/56a7a0da-def8-48d4-b5e8-0ac3878cb8dd/files/slides-build/img/02-chronicle-crop.png">    </p:cNvPr>
+          <p:cNvPr id="11" name="Image 2" descr="/Users/danwahlin/.copilot/session-state/56a7a0da-def8-48d4-b5e8-0ac3878cb8dd/files/slides-build/img/02-empty-state-crop.png">    </p:cNvPr>
           <p:cNvPicPr>
             <a:picLocks noChangeAspect="1"/>
           </p:cNvPicPr>
@@ -4500,8 +4165,8 @@
         </p:blipFill>
         <p:spPr>
           <a:xfrm>
-            <a:off x="558701" y="1985367"/>
-            <a:ext cx="3860750" cy="1526530"/>
+            <a:off x="558701" y="1932831"/>
+            <a:ext cx="3708350" cy="2553891"/>
           </a:xfrm>
           <a:prstGeom prst="rect">
             <a:avLst/>
@@ -4510,14 +4175,85 @@
       </p:pic>
       <p:sp>
         <p:nvSpPr>
-          <p:cNvPr id="10" name="Text 5"/>
-          <p:cNvSpPr/>
-          <p:nvPr/>
-        </p:nvSpPr>
-        <p:spPr>
-          <a:xfrm>
-            <a:off x="507950" y="4171057"/>
-            <a:ext cx="4041648" cy="242590"/>
+          <p:cNvPr id="12" name="Text 7"/>
+          <p:cNvSpPr/>
+          <p:nvPr/>
+        </p:nvSpPr>
+        <p:spPr>
+          <a:xfrm>
+            <a:off x="4673501" y="2042368"/>
+            <a:ext cx="279350" cy="279350"/>
+          </a:xfrm>
+          <a:prstGeom prst="roundRect">
+            <a:avLst>
+              <a:gd name="adj" fmla="val 327331"/>
+            </a:avLst>
+          </a:prstGeom>
+          <a:solidFill>
+            <a:srgbClr val="1A7F37"/>
+          </a:solidFill>
+          <a:ln/>
+        </p:spPr>
+        <p:txBody>
+          <a:bodyPr wrap="square" rtlCol="0" anchor="ctr"/>
+          <a:lstStyle/>
+          <a:p>
+            <a:pPr indent="0" marL="0">
+              <a:buNone/>
+            </a:pPr>
+            <a:endParaRPr lang="en-US" dirty="0"/>
+          </a:p>
+        </p:txBody>
+      </p:sp>
+      <p:sp>
+        <p:nvSpPr>
+          <p:cNvPr id="13" name="Text 8"/>
+          <p:cNvSpPr/>
+          <p:nvPr/>
+        </p:nvSpPr>
+        <p:spPr>
+          <a:xfrm>
+            <a:off x="4768166" y="2086719"/>
+            <a:ext cx="90020" cy="190500"/>
+          </a:xfrm>
+          <a:prstGeom prst="rect">
+            <a:avLst/>
+          </a:prstGeom>
+          <a:noFill/>
+          <a:ln/>
+        </p:spPr>
+        <p:txBody>
+          <a:bodyPr wrap="square" lIns="0" tIns="0" rIns="0" bIns="0" rtlCol="0" anchor="t"/>
+          <a:lstStyle/>
+          <a:p>
+            <a:pPr algn="ctr" indent="0" marL="0">
+              <a:buNone/>
+            </a:pPr>
+            <a:r>
+              <a:rPr lang="en-US" sz="1250" b="1" dirty="0">
+                <a:solidFill>
+                  <a:srgbClr val="FFFFFF"/>
+                </a:solidFill>
+                <a:latin typeface="Arial" pitchFamily="34" charset="0"/>
+                <a:ea typeface="Arial" pitchFamily="34" charset="-122"/>
+                <a:cs typeface="Arial" pitchFamily="34" charset="-120"/>
+              </a:rPr>
+              <a:t>1</a:t>
+            </a:r>
+            <a:endParaRPr lang="en-US" sz="1250" dirty="0"/>
+          </a:p>
+        </p:txBody>
+      </p:sp>
+      <p:sp>
+        <p:nvSpPr>
+          <p:cNvPr id="14" name="Text 9"/>
+          <p:cNvSpPr/>
+          <p:nvPr/>
+        </p:nvSpPr>
+        <p:spPr>
+          <a:xfrm>
+            <a:off x="5105251" y="2042368"/>
+            <a:ext cx="2275400" cy="222200"/>
           </a:xfrm>
           <a:prstGeom prst="rect">
             <a:avLst/>
@@ -4531,12 +4267,201 @@
           <a:p>
             <a:pPr algn="l" indent="0" marL="0">
               <a:lnSpc>
-                <a:spcPts val="1760"/>
+                <a:spcPts val="1750"/>
               </a:lnSpc>
               <a:buNone/>
             </a:pPr>
             <a:r>
-              <a:rPr lang="en-US" sz="1450" b="1" dirty="0">
+              <a:rPr lang="en-US" sz="1550" b="1" dirty="0">
+                <a:solidFill>
+                  <a:srgbClr val="1F2328"/>
+                </a:solidFill>
+                <a:latin typeface="Arial" pitchFamily="34" charset="0"/>
+                <a:ea typeface="Arial" pitchFamily="34" charset="-122"/>
+                <a:cs typeface="Arial" pitchFamily="34" charset="-120"/>
+              </a:rPr>
+              <a:t>Run the app and search</a:t>
+            </a:r>
+            <a:endParaRPr lang="en-US" sz="1550" dirty="0"/>
+          </a:p>
+        </p:txBody>
+      </p:sp>
+      <p:sp>
+        <p:nvSpPr>
+          <p:cNvPr id="15" name="Text 10"/>
+          <p:cNvSpPr/>
+          <p:nvPr/>
+        </p:nvSpPr>
+        <p:spPr>
+          <a:xfrm>
+            <a:off x="5105251" y="2289870"/>
+            <a:ext cx="2275400" cy="198090"/>
+          </a:xfrm>
+          <a:prstGeom prst="rect">
+            <a:avLst/>
+          </a:prstGeom>
+          <a:noFill/>
+          <a:ln/>
+        </p:spPr>
+        <p:txBody>
+          <a:bodyPr wrap="square" lIns="0" tIns="0" rIns="0" bIns="0" rtlCol="0" anchor="t"/>
+          <a:lstStyle/>
+          <a:p>
+            <a:pPr algn="l" indent="0" marL="0">
+              <a:lnSpc>
+                <a:spcPts val="1560"/>
+              </a:lnSpc>
+              <a:buNone/>
+            </a:pPr>
+            <a:r>
+              <a:rPr lang="en-US" sz="1350" dirty="0">
+                <a:solidFill>
+                  <a:srgbClr val="59636E"/>
+                </a:solidFill>
+                <a:latin typeface="Arial" pitchFamily="34" charset="0"/>
+                <a:ea typeface="Arial" pitchFamily="34" charset="-122"/>
+                <a:cs typeface="Arial" pitchFamily="34" charset="-120"/>
+              </a:rPr>
+              <a:t>Only </a:t>
+            </a:r>
+            <a:pPr algn="l" indent="0" marL="0">
+              <a:lnSpc>
+                <a:spcPts val="1560"/>
+              </a:lnSpc>
+              <a:buNone/>
+            </a:pPr>
+            <a:r>
+              <a:rPr lang="en-US" sz="1350" b="1" dirty="0">
+                <a:solidFill>
+                  <a:srgbClr val="59636E"/>
+                </a:solidFill>
+                <a:latin typeface="Arial" pitchFamily="34" charset="0"/>
+                <a:ea typeface="Arial" pitchFamily="34" charset="-122"/>
+                <a:cs typeface="Arial" pitchFamily="34" charset="-120"/>
+              </a:rPr>
+              <a:t>No results. Try again.</a:t>
+            </a:r>
+            <a:endParaRPr lang="en-US" sz="1350" dirty="0"/>
+          </a:p>
+        </p:txBody>
+      </p:sp>
+      <p:sp>
+        <p:nvSpPr>
+          <p:cNvPr id="16" name="Text 11"/>
+          <p:cNvSpPr/>
+          <p:nvPr/>
+        </p:nvSpPr>
+        <p:spPr>
+          <a:xfrm>
+            <a:off x="4673501" y="2741861"/>
+            <a:ext cx="279350" cy="279350"/>
+          </a:xfrm>
+          <a:prstGeom prst="roundRect">
+            <a:avLst>
+              <a:gd name="adj" fmla="val 327331"/>
+            </a:avLst>
+          </a:prstGeom>
+          <a:solidFill>
+            <a:srgbClr val="1A7F37"/>
+          </a:solidFill>
+          <a:ln/>
+        </p:spPr>
+        <p:txBody>
+          <a:bodyPr wrap="square" rtlCol="0" anchor="ctr"/>
+          <a:lstStyle/>
+          <a:p>
+            <a:pPr indent="0" marL="0">
+              <a:buNone/>
+            </a:pPr>
+            <a:endParaRPr lang="en-US" dirty="0"/>
+          </a:p>
+        </p:txBody>
+      </p:sp>
+      <p:sp>
+        <p:nvSpPr>
+          <p:cNvPr id="17" name="Text 12"/>
+          <p:cNvSpPr/>
+          <p:nvPr/>
+        </p:nvSpPr>
+        <p:spPr>
+          <a:xfrm>
+            <a:off x="4768166" y="2786211"/>
+            <a:ext cx="90020" cy="190500"/>
+          </a:xfrm>
+          <a:prstGeom prst="rect">
+            <a:avLst/>
+          </a:prstGeom>
+          <a:noFill/>
+          <a:ln/>
+        </p:spPr>
+        <p:txBody>
+          <a:bodyPr wrap="square" lIns="0" tIns="0" rIns="0" bIns="0" rtlCol="0" anchor="t"/>
+          <a:lstStyle/>
+          <a:p>
+            <a:pPr algn="ctr" indent="0" marL="0">
+              <a:buNone/>
+            </a:pPr>
+            <a:r>
+              <a:rPr lang="en-US" sz="1250" b="1" dirty="0">
+                <a:solidFill>
+                  <a:srgbClr val="FFFFFF"/>
+                </a:solidFill>
+                <a:latin typeface="Arial" pitchFamily="34" charset="0"/>
+                <a:ea typeface="Arial" pitchFamily="34" charset="-122"/>
+                <a:cs typeface="Arial" pitchFamily="34" charset="-120"/>
+              </a:rPr>
+              <a:t>2</a:t>
+            </a:r>
+            <a:endParaRPr lang="en-US" sz="1250" dirty="0"/>
+          </a:p>
+        </p:txBody>
+      </p:sp>
+      <p:sp>
+        <p:nvSpPr>
+          <p:cNvPr id="18" name="Text 13"/>
+          <p:cNvSpPr/>
+          <p:nvPr/>
+        </p:nvSpPr>
+        <p:spPr>
+          <a:xfrm>
+            <a:off x="5105251" y="2741861"/>
+            <a:ext cx="2714875" cy="241250"/>
+          </a:xfrm>
+          <a:prstGeom prst="rect">
+            <a:avLst/>
+          </a:prstGeom>
+          <a:noFill/>
+          <a:ln/>
+        </p:spPr>
+        <p:txBody>
+          <a:bodyPr wrap="square" lIns="0" tIns="0" rIns="0" bIns="0" rtlCol="0" anchor="t"/>
+          <a:lstStyle/>
+          <a:p>
+            <a:pPr algn="l" indent="0" marL="0">
+              <a:lnSpc>
+                <a:spcPts val="1750"/>
+              </a:lnSpc>
+              <a:buNone/>
+            </a:pPr>
+            <a:r>
+              <a:rPr lang="en-US" sz="1550" dirty="0">
+                <a:solidFill>
+                  <a:srgbClr val="1F2328"/>
+                </a:solidFill>
+                <a:latin typeface="Arial" pitchFamily="34" charset="0"/>
+                <a:ea typeface="Arial" pitchFamily="34" charset="-122"/>
+                <a:cs typeface="Arial" pitchFamily="34" charset="-120"/>
+              </a:rPr>
+              <a:t>Send </a:t>
+            </a:r>
+            <a:pPr algn="l" indent="0" marL="0">
+              <a:lnSpc>
+                <a:spcPts val="1750"/>
+              </a:lnSpc>
+              <a:buNone/>
+            </a:pPr>
+            <a:r>
+              <a:rPr lang="en-US" sz="1550" b="1" dirty="0">
                 <a:solidFill>
                   <a:srgbClr val="0550AE"/>
                 </a:solidFill>
@@ -4544,16 +4469,41 @@
                 <a:ea typeface="Courier New" pitchFamily="34" charset="-122"/>
                 <a:cs typeface="Courier New" pitchFamily="34" charset="-120"/>
               </a:rPr>
-              <a:t>/chronicle standup</a:t>
-            </a:r>
+              <a:t>Implement the plan</a:t>
+            </a:r>
+            <a:endParaRPr lang="en-US" sz="1550" dirty="0"/>
+          </a:p>
+        </p:txBody>
+      </p:sp>
+      <p:sp>
+        <p:nvSpPr>
+          <p:cNvPr id="19" name="Text 14"/>
+          <p:cNvSpPr/>
+          <p:nvPr/>
+        </p:nvSpPr>
+        <p:spPr>
+          <a:xfrm>
+            <a:off x="5105251" y="3008412"/>
+            <a:ext cx="2714875" cy="198090"/>
+          </a:xfrm>
+          <a:prstGeom prst="rect">
+            <a:avLst/>
+          </a:prstGeom>
+          <a:noFill/>
+          <a:ln/>
+        </p:spPr>
+        <p:txBody>
+          <a:bodyPr wrap="square" lIns="0" tIns="0" rIns="0" bIns="0" rtlCol="0" anchor="t"/>
+          <a:lstStyle/>
+          <a:p>
             <a:pPr algn="l" indent="0" marL="0">
               <a:lnSpc>
-                <a:spcPts val="1760"/>
+                <a:spcPts val="1560"/>
               </a:lnSpc>
               <a:buNone/>
             </a:pPr>
             <a:r>
-              <a:rPr lang="en-US" sz="1450" dirty="0">
+              <a:rPr lang="en-US" sz="1350" dirty="0">
                 <a:solidFill>
                   <a:srgbClr val="59636E"/>
                 </a:solidFill>
@@ -4561,43 +4511,66 @@
                 <a:ea typeface="Arial" pitchFamily="34" charset="-122"/>
                 <a:cs typeface="Arial" pitchFamily="34" charset="-120"/>
               </a:rPr>
-              <a:t> recaps your last day.</a:t>
-            </a:r>
-            <a:endParaRPr lang="en-US" sz="1450" dirty="0"/>
-          </a:p>
-        </p:txBody>
-      </p:sp>
-      <p:sp>
-        <p:nvSpPr>
-          <p:cNvPr id="11" name="Text 6"/>
-          <p:cNvSpPr/>
-          <p:nvPr/>
-        </p:nvSpPr>
-        <p:spPr>
-          <a:xfrm>
-            <a:off x="4776341" y="1481882"/>
-            <a:ext cx="3756571" cy="2533650"/>
+              <a:t>Inspect the </a:t>
+            </a:r>
+            <a:pPr algn="l" indent="0" marL="0">
+              <a:lnSpc>
+                <a:spcPts val="1560"/>
+              </a:lnSpc>
+              <a:buNone/>
+            </a:pPr>
+            <a:r>
+              <a:rPr lang="en-US" sz="1350" b="1" dirty="0">
+                <a:solidFill>
+                  <a:srgbClr val="59636E"/>
+                </a:solidFill>
+                <a:latin typeface="Arial" pitchFamily="34" charset="0"/>
+                <a:ea typeface="Arial" pitchFamily="34" charset="-122"/>
+                <a:cs typeface="Arial" pitchFamily="34" charset="-120"/>
+              </a:rPr>
+              <a:t>Changes</a:t>
+            </a:r>
+            <a:pPr algn="l" indent="0" marL="0">
+              <a:lnSpc>
+                <a:spcPts val="1560"/>
+              </a:lnSpc>
+              <a:buNone/>
+            </a:pPr>
+            <a:r>
+              <a:rPr lang="en-US" sz="1350" dirty="0">
+                <a:solidFill>
+                  <a:srgbClr val="59636E"/>
+                </a:solidFill>
+                <a:latin typeface="Arial" pitchFamily="34" charset="0"/>
+                <a:ea typeface="Arial" pitchFamily="34" charset="-122"/>
+                <a:cs typeface="Arial" pitchFamily="34" charset="-120"/>
+              </a:rPr>
+              <a:t> tab.</a:t>
+            </a:r>
+            <a:endParaRPr lang="en-US" sz="1350" dirty="0"/>
+          </a:p>
+        </p:txBody>
+      </p:sp>
+      <p:sp>
+        <p:nvSpPr>
+          <p:cNvPr id="20" name="Text 15"/>
+          <p:cNvSpPr/>
+          <p:nvPr/>
+        </p:nvSpPr>
+        <p:spPr>
+          <a:xfrm>
+            <a:off x="4673501" y="3460403"/>
+            <a:ext cx="279350" cy="279350"/>
           </a:xfrm>
           <a:prstGeom prst="roundRect">
             <a:avLst>
-              <a:gd name="adj" fmla="val 3008"/>
+              <a:gd name="adj" fmla="val 327331"/>
             </a:avLst>
           </a:prstGeom>
           <a:solidFill>
-            <a:srgbClr val="FFFFFF"/>
+            <a:srgbClr val="1A7F37"/>
           </a:solidFill>
-          <a:ln w="9525">
-            <a:solidFill>
-              <a:srgbClr val="D1D9E0"/>
-            </a:solidFill>
-          </a:ln>
-          <a:effectLst>
-            <a:outerShdw sx="100000" sy="100000" kx="0" ky="0" algn="bl" rotWithShape="0" blurRad="38100" dist="9525" dir="5400000">
-              <a:srgbClr val="1f2328">
-                <a:alpha val="12000"/>
-              </a:srgbClr>
-            </a:outerShdw>
-          </a:effectLst>
+          <a:ln/>
         </p:spPr>
         <p:txBody>
           <a:bodyPr wrap="square" rtlCol="0" anchor="ctr"/>
@@ -4610,40 +4583,55 @@
           </a:p>
         </p:txBody>
       </p:sp>
-      <p:pic>
-        <p:nvPicPr>
-          <p:cNvPr id="12" name="Image 3" descr="/Users/danwahlin/.copilot/session-state/56a7a0da-def8-48d4-b5e8-0ac3878cb8dd/files/slides-build/img/02-context-crop.png">    </p:cNvPr>
-          <p:cNvPicPr>
-            <a:picLocks noChangeAspect="1"/>
-          </p:cNvPicPr>
-          <p:nvPr/>
-        </p:nvPicPr>
-        <p:blipFill>
-          <a:blip r:embed="rId5"/>
-          <a:stretch>
-            <a:fillRect/>
-          </a:stretch>
-        </p:blipFill>
-        <p:spPr>
-          <a:xfrm>
-            <a:off x="4823966" y="1529507"/>
-            <a:ext cx="3661321" cy="2438400"/>
-          </a:xfrm>
-          <a:prstGeom prst="rect">
-            <a:avLst/>
-          </a:prstGeom>
-        </p:spPr>
-      </p:pic>
-      <p:sp>
-        <p:nvSpPr>
-          <p:cNvPr id="13" name="Text 7"/>
-          <p:cNvSpPr/>
-          <p:nvPr/>
-        </p:nvSpPr>
-        <p:spPr>
-          <a:xfrm>
-            <a:off x="4673501" y="4171057"/>
-            <a:ext cx="4041648" cy="242590"/>
+      <p:sp>
+        <p:nvSpPr>
+          <p:cNvPr id="21" name="Text 16"/>
+          <p:cNvSpPr/>
+          <p:nvPr/>
+        </p:nvSpPr>
+        <p:spPr>
+          <a:xfrm>
+            <a:off x="4768166" y="3504754"/>
+            <a:ext cx="90020" cy="190500"/>
+          </a:xfrm>
+          <a:prstGeom prst="rect">
+            <a:avLst/>
+          </a:prstGeom>
+          <a:noFill/>
+          <a:ln/>
+        </p:spPr>
+        <p:txBody>
+          <a:bodyPr wrap="square" lIns="0" tIns="0" rIns="0" bIns="0" rtlCol="0" anchor="t"/>
+          <a:lstStyle/>
+          <a:p>
+            <a:pPr algn="ctr" indent="0" marL="0">
+              <a:buNone/>
+            </a:pPr>
+            <a:r>
+              <a:rPr lang="en-US" sz="1250" b="1" dirty="0">
+                <a:solidFill>
+                  <a:srgbClr val="FFFFFF"/>
+                </a:solidFill>
+                <a:latin typeface="Arial" pitchFamily="34" charset="0"/>
+                <a:ea typeface="Arial" pitchFamily="34" charset="-122"/>
+                <a:cs typeface="Arial" pitchFamily="34" charset="-120"/>
+              </a:rPr>
+              <a:t>3</a:t>
+            </a:r>
+            <a:endParaRPr lang="en-US" sz="1250" dirty="0"/>
+          </a:p>
+        </p:txBody>
+      </p:sp>
+      <p:sp>
+        <p:nvSpPr>
+          <p:cNvPr id="22" name="Text 17"/>
+          <p:cNvSpPr/>
+          <p:nvPr/>
+        </p:nvSpPr>
+        <p:spPr>
+          <a:xfrm>
+            <a:off x="5105251" y="3460403"/>
+            <a:ext cx="3601263" cy="222200"/>
           </a:xfrm>
           <a:prstGeom prst="rect">
             <a:avLst/>
@@ -4657,29 +4645,54 @@
           <a:p>
             <a:pPr algn="l" indent="0" marL="0">
               <a:lnSpc>
-                <a:spcPts val="1760"/>
+                <a:spcPts val="1750"/>
               </a:lnSpc>
               <a:buNone/>
             </a:pPr>
             <a:r>
-              <a:rPr lang="en-US" sz="1450" b="1" dirty="0">
-                <a:solidFill>
-                  <a:srgbClr val="0550AE"/>
-                </a:solidFill>
-                <a:latin typeface="Courier New" pitchFamily="34" charset="0"/>
-                <a:ea typeface="Courier New" pitchFamily="34" charset="-122"/>
-                <a:cs typeface="Courier New" pitchFamily="34" charset="-120"/>
-              </a:rPr>
-              <a:t>/context</a:t>
-            </a:r>
+              <a:rPr lang="en-US" sz="1550" b="1" dirty="0">
+                <a:solidFill>
+                  <a:srgbClr val="1F2328"/>
+                </a:solidFill>
+                <a:latin typeface="Arial" pitchFamily="34" charset="0"/>
+                <a:ea typeface="Arial" pitchFamily="34" charset="-122"/>
+                <a:cs typeface="Arial" pitchFamily="34" charset="-120"/>
+              </a:rPr>
+              <a:t>Reload and search again</a:t>
+            </a:r>
+            <a:endParaRPr lang="en-US" sz="1550" dirty="0"/>
+          </a:p>
+        </p:txBody>
+      </p:sp>
+      <p:sp>
+        <p:nvSpPr>
+          <p:cNvPr id="23" name="Text 18"/>
+          <p:cNvSpPr/>
+          <p:nvPr/>
+        </p:nvSpPr>
+        <p:spPr>
+          <a:xfrm>
+            <a:off x="5105251" y="3707904"/>
+            <a:ext cx="3601263" cy="396180"/>
+          </a:xfrm>
+          <a:prstGeom prst="rect">
+            <a:avLst/>
+          </a:prstGeom>
+          <a:noFill/>
+          <a:ln/>
+        </p:spPr>
+        <p:txBody>
+          <a:bodyPr wrap="square" lIns="0" tIns="0" rIns="0" bIns="0" rtlCol="0" anchor="t"/>
+          <a:lstStyle/>
+          <a:p>
             <a:pPr algn="l" indent="0" marL="0">
               <a:lnSpc>
-                <a:spcPts val="1760"/>
+                <a:spcPts val="1560"/>
               </a:lnSpc>
               <a:buNone/>
             </a:pPr>
             <a:r>
-              <a:rPr lang="en-US" sz="1450" dirty="0">
+              <a:rPr lang="en-US" sz="1350" dirty="0">
                 <a:solidFill>
                   <a:srgbClr val="59636E"/>
                 </a:solidFill>
@@ -4687,9 +4700,9 @@
                 <a:ea typeface="Arial" pitchFamily="34" charset="-122"/>
                 <a:cs typeface="Arial" pitchFamily="34" charset="-120"/>
               </a:rPr>
-              <a:t> shows context use and spend.</a:t>
-            </a:r>
-            <a:endParaRPr lang="en-US" sz="1450" dirty="0"/>
+              <a:t>Now it suggests a new search, genre, or status.</a:t>
+            </a:r>
+            <a:endParaRPr lang="en-US" sz="1350" dirty="0"/>
           </a:p>
         </p:txBody>
       </p:sp>
@@ -4879,7 +4892,7 @@
                 <a:ea typeface="Arial" pitchFamily="34" charset="-122"/>
                 <a:cs typeface="Arial" pitchFamily="34" charset="-120"/>
               </a:rPr>
-              <a:t>YOUR TURN</a:t>
+              <a:t>INSPECT THE SESSION</a:t>
             </a:r>
             <a:endParaRPr lang="en-US" sz="1250" dirty="0"/>
           </a:p>
@@ -4924,7 +4937,7 @@
                 <a:ea typeface="Arial" pitchFamily="34" charset="-122"/>
                 <a:cs typeface="Arial" pitchFamily="34" charset="-120"/>
               </a:rPr>
-              <a:t>Add a light and dark theme</a:t>
+              <a:t>Ask the session what it did</a:t>
             </a:r>
             <a:endParaRPr lang="en-US" sz="2800" dirty="0"/>
           </a:p>
@@ -4938,97 +4951,12 @@
         </p:nvSpPr>
         <p:spPr>
           <a:xfrm>
-            <a:off x="507950" y="1104751"/>
-            <a:ext cx="8161020" cy="273100"/>
-          </a:xfrm>
-          <a:prstGeom prst="rect">
-            <a:avLst/>
-          </a:prstGeom>
-          <a:noFill/>
-          <a:ln/>
-        </p:spPr>
-        <p:txBody>
-          <a:bodyPr wrap="square" lIns="0" tIns="0" rIns="0" bIns="0" rtlCol="0" anchor="t"/>
-          <a:lstStyle/>
-          <a:p>
-            <a:pPr algn="l" indent="0" marL="0">
-              <a:lnSpc>
-                <a:spcPts val="2000"/>
-              </a:lnSpc>
-              <a:spcBef>
-                <a:spcPts val="500"/>
-              </a:spcBef>
-              <a:buNone/>
-            </a:pPr>
-            <a:r>
-              <a:rPr lang="en-US" sz="1650" dirty="0">
-                <a:solidFill>
-                  <a:srgbClr val="59636E"/>
-                </a:solidFill>
-                <a:latin typeface="Arial" pitchFamily="34" charset="0"/>
-                <a:ea typeface="Arial" pitchFamily="34" charset="-122"/>
-                <a:cs typeface="Arial" pitchFamily="34" charset="-120"/>
-              </a:rPr>
-              <a:t>Use </a:t>
-            </a:r>
-            <a:pPr algn="l" indent="0" marL="0">
-              <a:lnSpc>
-                <a:spcPts val="2000"/>
-              </a:lnSpc>
-              <a:spcBef>
-                <a:spcPts val="500"/>
-              </a:spcBef>
-              <a:buNone/>
-            </a:pPr>
-            <a:r>
-              <a:rPr lang="en-US" sz="1650" b="1" dirty="0">
-                <a:solidFill>
-                  <a:srgbClr val="0550AE"/>
-                </a:solidFill>
-                <a:latin typeface="Courier New" pitchFamily="34" charset="0"/>
-                <a:ea typeface="Courier New" pitchFamily="34" charset="-122"/>
-                <a:cs typeface="Courier New" pitchFamily="34" charset="-120"/>
-              </a:rPr>
-              <a:t>@</a:t>
-            </a:r>
-            <a:pPr algn="l" indent="0" marL="0">
-              <a:lnSpc>
-                <a:spcPts val="2000"/>
-              </a:lnSpc>
-              <a:spcBef>
-                <a:spcPts val="500"/>
-              </a:spcBef>
-              <a:buNone/>
-            </a:pPr>
-            <a:r>
-              <a:rPr lang="en-US" sz="1650" dirty="0">
-                <a:solidFill>
-                  <a:srgbClr val="59636E"/>
-                </a:solidFill>
-                <a:latin typeface="Arial" pitchFamily="34" charset="0"/>
-                <a:ea typeface="Arial" pitchFamily="34" charset="-122"/>
-                <a:cs typeface="Arial" pitchFamily="34" charset="-120"/>
-              </a:rPr>
-              <a:t> to attach the code this time. Keep the work in its worktree.</a:t>
-            </a:r>
-            <a:endParaRPr lang="en-US" sz="1650" dirty="0"/>
-          </a:p>
-        </p:txBody>
-      </p:sp>
-      <p:sp>
-        <p:nvSpPr>
-          <p:cNvPr id="9" name="Text 5"/>
-          <p:cNvSpPr/>
-          <p:nvPr/>
-        </p:nvSpPr>
-        <p:spPr>
-          <a:xfrm>
-            <a:off x="507950" y="1766143"/>
-            <a:ext cx="5334000" cy="2690515"/>
+            <a:off x="511076" y="1937742"/>
+            <a:ext cx="3956000" cy="1621780"/>
           </a:xfrm>
           <a:prstGeom prst="roundRect">
             <a:avLst>
-              <a:gd name="adj" fmla="val 4720"/>
+              <a:gd name="adj" fmla="val 4699"/>
             </a:avLst>
           </a:prstGeom>
           <a:solidFill>
@@ -5036,885 +4964,16 @@
           </a:solidFill>
           <a:ln w="9525">
             <a:solidFill>
-              <a:srgbClr val="FFC49B"/>
+              <a:srgbClr val="D1D9E0"/>
             </a:solidFill>
           </a:ln>
-        </p:spPr>
-        <p:txBody>
-          <a:bodyPr wrap="square" rtlCol="0" anchor="ctr"/>
-          <a:lstStyle/>
-          <a:p>
-            <a:pPr indent="0" marL="0">
-              <a:buNone/>
-            </a:pPr>
-            <a:endParaRPr lang="en-US" dirty="0"/>
-          </a:p>
-        </p:txBody>
-      </p:sp>
-      <p:sp>
-        <p:nvSpPr>
-          <p:cNvPr id="10" name="Shape 6"/>
-          <p:cNvSpPr/>
-          <p:nvPr/>
-        </p:nvSpPr>
-        <p:spPr>
-          <a:xfrm>
-            <a:off x="517475" y="2461171"/>
-            <a:ext cx="5314950" cy="0"/>
-          </a:xfrm>
-          <a:prstGeom prst="line">
-            <a:avLst/>
-          </a:prstGeom>
-          <a:noFill/>
-          <a:ln w="9525">
-            <a:solidFill>
-              <a:srgbClr val="D1D9E0"/>
-            </a:solidFill>
-            <a:prstDash val="solid"/>
-          </a:ln>
-        </p:spPr>
-      </p:sp>
-      <p:sp>
-        <p:nvSpPr>
-          <p:cNvPr id="11" name="Text 7"/>
-          <p:cNvSpPr/>
-          <p:nvPr/>
-        </p:nvSpPr>
-        <p:spPr>
-          <a:xfrm>
-            <a:off x="695176" y="1976289"/>
-            <a:ext cx="279350" cy="279350"/>
-          </a:xfrm>
-          <a:prstGeom prst="roundRect">
-            <a:avLst>
-              <a:gd name="adj" fmla="val 327331"/>
-            </a:avLst>
-          </a:prstGeom>
-          <a:solidFill>
-            <a:srgbClr val="BC4C00"/>
-          </a:solidFill>
-          <a:ln/>
-        </p:spPr>
-        <p:txBody>
-          <a:bodyPr wrap="square" rtlCol="0" anchor="ctr"/>
-          <a:lstStyle/>
-          <a:p>
-            <a:pPr indent="0" marL="0">
-              <a:buNone/>
-            </a:pPr>
-            <a:endParaRPr lang="en-US" dirty="0"/>
-          </a:p>
-        </p:txBody>
-      </p:sp>
-      <p:sp>
-        <p:nvSpPr>
-          <p:cNvPr id="12" name="Text 8"/>
-          <p:cNvSpPr/>
-          <p:nvPr/>
-        </p:nvSpPr>
-        <p:spPr>
-          <a:xfrm>
-            <a:off x="789841" y="2020639"/>
-            <a:ext cx="90020" cy="190500"/>
-          </a:xfrm>
-          <a:prstGeom prst="rect">
-            <a:avLst/>
-          </a:prstGeom>
-          <a:noFill/>
-          <a:ln/>
-        </p:spPr>
-        <p:txBody>
-          <a:bodyPr wrap="square" lIns="0" tIns="0" rIns="0" bIns="0" rtlCol="0" anchor="t"/>
-          <a:lstStyle/>
-          <a:p>
-            <a:pPr algn="ctr" indent="0" marL="0">
-              <a:buNone/>
-            </a:pPr>
-            <a:r>
-              <a:rPr lang="en-US" sz="1250" b="1" dirty="0">
-                <a:solidFill>
-                  <a:srgbClr val="FFFFFF"/>
-                </a:solidFill>
-                <a:latin typeface="Arial" pitchFamily="34" charset="0"/>
-                <a:ea typeface="Arial" pitchFamily="34" charset="-122"/>
-                <a:cs typeface="Arial" pitchFamily="34" charset="-120"/>
-              </a:rPr>
-              <a:t>1</a:t>
-            </a:r>
-            <a:endParaRPr lang="en-US" sz="1250" dirty="0"/>
-          </a:p>
-        </p:txBody>
-      </p:sp>
-      <p:sp>
-        <p:nvSpPr>
-          <p:cNvPr id="13" name="Text 9"/>
-          <p:cNvSpPr/>
-          <p:nvPr/>
-        </p:nvSpPr>
-        <p:spPr>
-          <a:xfrm>
-            <a:off x="1152227" y="2008733"/>
-            <a:ext cx="1943100" cy="214610"/>
-          </a:xfrm>
-          <a:prstGeom prst="rect">
-            <a:avLst/>
-          </a:prstGeom>
-          <a:noFill/>
-          <a:ln/>
-        </p:spPr>
-        <p:txBody>
-          <a:bodyPr wrap="square" lIns="0" tIns="0" rIns="0" bIns="0" rtlCol="0" anchor="t"/>
-          <a:lstStyle/>
-          <a:p>
-            <a:pPr algn="l" indent="0" marL="0">
-              <a:lnSpc>
-                <a:spcPts val="1690"/>
-              </a:lnSpc>
-              <a:buNone/>
-            </a:pPr>
-            <a:r>
-              <a:rPr lang="en-US" sz="1500" b="1" dirty="0">
-                <a:solidFill>
-                  <a:srgbClr val="1F2328"/>
-                </a:solidFill>
-                <a:latin typeface="Arial" pitchFamily="34" charset="0"/>
-                <a:ea typeface="Arial" pitchFamily="34" charset="-122"/>
-                <a:cs typeface="Arial" pitchFamily="34" charset="-120"/>
-              </a:rPr>
-              <a:t>Start from main</a:t>
-            </a:r>
-            <a:endParaRPr lang="en-US" sz="1500" dirty="0"/>
-          </a:p>
-        </p:txBody>
-      </p:sp>
-      <p:sp>
-        <p:nvSpPr>
-          <p:cNvPr id="14" name="Text 10"/>
-          <p:cNvSpPr/>
-          <p:nvPr/>
-        </p:nvSpPr>
-        <p:spPr>
-          <a:xfrm>
-            <a:off x="3234928" y="1889968"/>
-            <a:ext cx="2468192" cy="452140"/>
-          </a:xfrm>
-          <a:prstGeom prst="rect">
-            <a:avLst/>
-          </a:prstGeom>
-          <a:noFill/>
-          <a:ln/>
-        </p:spPr>
-        <p:txBody>
-          <a:bodyPr wrap="square" lIns="0" tIns="0" rIns="0" bIns="0" rtlCol="0" anchor="t"/>
-          <a:lstStyle/>
-          <a:p>
-            <a:pPr algn="l" indent="0" marL="0">
-              <a:lnSpc>
-                <a:spcPts val="1630"/>
-              </a:lnSpc>
-              <a:buNone/>
-            </a:pPr>
-            <a:r>
-              <a:rPr lang="en-US" sz="1400" b="1" dirty="0">
-                <a:solidFill>
-                  <a:srgbClr val="59636E"/>
-                </a:solidFill>
-                <a:latin typeface="Arial" pitchFamily="34" charset="0"/>
-                <a:ea typeface="Arial" pitchFamily="34" charset="-122"/>
-                <a:cs typeface="Arial" pitchFamily="34" charset="-120"/>
-              </a:rPr>
-              <a:t>Create from</a:t>
-            </a:r>
-            <a:pPr algn="l" indent="0" marL="0">
-              <a:lnSpc>
-                <a:spcPts val="1630"/>
-              </a:lnSpc>
-              <a:buNone/>
-            </a:pPr>
-            <a:r>
-              <a:rPr lang="en-US" sz="1400" dirty="0">
-                <a:solidFill>
-                  <a:srgbClr val="59636E"/>
-                </a:solidFill>
-                <a:latin typeface="Arial" pitchFamily="34" charset="0"/>
-                <a:ea typeface="Arial" pitchFamily="34" charset="-122"/>
-                <a:cs typeface="Arial" pitchFamily="34" charset="-120"/>
-              </a:rPr>
-              <a:t> </a:t>
-            </a:r>
-            <a:pPr algn="l" indent="0" marL="0">
-              <a:lnSpc>
-                <a:spcPts val="1630"/>
-              </a:lnSpc>
-              <a:buNone/>
-            </a:pPr>
-            <a:r>
-              <a:rPr lang="en-US" sz="1400" b="1" dirty="0">
-                <a:solidFill>
-                  <a:srgbClr val="0550AE"/>
-                </a:solidFill>
-                <a:latin typeface="Courier New" pitchFamily="34" charset="0"/>
-                <a:ea typeface="Courier New" pitchFamily="34" charset="-122"/>
-                <a:cs typeface="Courier New" pitchFamily="34" charset="-120"/>
-              </a:rPr>
-              <a:t>main</a:t>
-            </a:r>
-            <a:pPr algn="l" indent="0" marL="0">
-              <a:lnSpc>
-                <a:spcPts val="1630"/>
-              </a:lnSpc>
-              <a:buNone/>
-            </a:pPr>
-            <a:r>
-              <a:rPr lang="en-US" sz="1400" dirty="0">
-                <a:solidFill>
-                  <a:srgbClr val="59636E"/>
-                </a:solidFill>
-                <a:latin typeface="Arial" pitchFamily="34" charset="0"/>
-                <a:ea typeface="Arial" pitchFamily="34" charset="-122"/>
-                <a:cs typeface="Arial" pitchFamily="34" charset="-120"/>
-              </a:rPr>
-              <a:t>. Check </a:t>
-            </a:r>
-            <a:pPr algn="l" indent="0" marL="0">
-              <a:lnSpc>
-                <a:spcPts val="1630"/>
-              </a:lnSpc>
-              <a:buNone/>
-            </a:pPr>
-            <a:r>
-              <a:rPr lang="en-US" sz="1400" b="1" dirty="0">
-                <a:solidFill>
-                  <a:srgbClr val="0550AE"/>
-                </a:solidFill>
-                <a:latin typeface="Courier New" pitchFamily="34" charset="0"/>
-                <a:ea typeface="Courier New" pitchFamily="34" charset="-122"/>
-                <a:cs typeface="Courier New" pitchFamily="34" charset="-120"/>
-              </a:rPr>
-              <a:t>/context</a:t>
-            </a:r>
-            <a:pPr algn="l" indent="0" marL="0">
-              <a:lnSpc>
-                <a:spcPts val="1630"/>
-              </a:lnSpc>
-              <a:buNone/>
-            </a:pPr>
-            <a:r>
-              <a:rPr lang="en-US" sz="1400" dirty="0">
-                <a:solidFill>
-                  <a:srgbClr val="59636E"/>
-                </a:solidFill>
-                <a:latin typeface="Arial" pitchFamily="34" charset="0"/>
-                <a:ea typeface="Arial" pitchFamily="34" charset="-122"/>
-                <a:cs typeface="Arial" pitchFamily="34" charset="-120"/>
-              </a:rPr>
-              <a:t>.</a:t>
-            </a:r>
-            <a:endParaRPr lang="en-US" sz="1400" dirty="0"/>
-          </a:p>
-        </p:txBody>
-      </p:sp>
-      <p:sp>
-        <p:nvSpPr>
-          <p:cNvPr id="15" name="Shape 11"/>
-          <p:cNvSpPr/>
-          <p:nvPr/>
-        </p:nvSpPr>
-        <p:spPr>
-          <a:xfrm>
-            <a:off x="517475" y="3113336"/>
-            <a:ext cx="5314950" cy="0"/>
-          </a:xfrm>
-          <a:prstGeom prst="line">
-            <a:avLst/>
-          </a:prstGeom>
-          <a:noFill/>
-          <a:ln w="9525">
-            <a:solidFill>
-              <a:srgbClr val="D1D9E0"/>
-            </a:solidFill>
-            <a:prstDash val="solid"/>
-          </a:ln>
-        </p:spPr>
-      </p:sp>
-      <p:sp>
-        <p:nvSpPr>
-          <p:cNvPr id="16" name="Text 12"/>
-          <p:cNvSpPr/>
-          <p:nvPr/>
-        </p:nvSpPr>
-        <p:spPr>
-          <a:xfrm>
-            <a:off x="695176" y="2647504"/>
-            <a:ext cx="279350" cy="279350"/>
-          </a:xfrm>
-          <a:prstGeom prst="roundRect">
-            <a:avLst>
-              <a:gd name="adj" fmla="val 327331"/>
-            </a:avLst>
-          </a:prstGeom>
-          <a:solidFill>
-            <a:srgbClr val="BC4C00"/>
-          </a:solidFill>
-          <a:ln/>
-        </p:spPr>
-        <p:txBody>
-          <a:bodyPr wrap="square" rtlCol="0" anchor="ctr"/>
-          <a:lstStyle/>
-          <a:p>
-            <a:pPr indent="0" marL="0">
-              <a:buNone/>
-            </a:pPr>
-            <a:endParaRPr lang="en-US" dirty="0"/>
-          </a:p>
-        </p:txBody>
-      </p:sp>
-      <p:sp>
-        <p:nvSpPr>
-          <p:cNvPr id="17" name="Text 13"/>
-          <p:cNvSpPr/>
-          <p:nvPr/>
-        </p:nvSpPr>
-        <p:spPr>
-          <a:xfrm>
-            <a:off x="789841" y="2691854"/>
-            <a:ext cx="90020" cy="190500"/>
-          </a:xfrm>
-          <a:prstGeom prst="rect">
-            <a:avLst/>
-          </a:prstGeom>
-          <a:noFill/>
-          <a:ln/>
-        </p:spPr>
-        <p:txBody>
-          <a:bodyPr wrap="square" lIns="0" tIns="0" rIns="0" bIns="0" rtlCol="0" anchor="t"/>
-          <a:lstStyle/>
-          <a:p>
-            <a:pPr algn="ctr" indent="0" marL="0">
-              <a:buNone/>
-            </a:pPr>
-            <a:r>
-              <a:rPr lang="en-US" sz="1250" b="1" dirty="0">
-                <a:solidFill>
-                  <a:srgbClr val="FFFFFF"/>
-                </a:solidFill>
-                <a:latin typeface="Arial" pitchFamily="34" charset="0"/>
-                <a:ea typeface="Arial" pitchFamily="34" charset="-122"/>
-                <a:cs typeface="Arial" pitchFamily="34" charset="-120"/>
-              </a:rPr>
-              <a:t>2</a:t>
-            </a:r>
-            <a:endParaRPr lang="en-US" sz="1250" dirty="0"/>
-          </a:p>
-        </p:txBody>
-      </p:sp>
-      <p:sp>
-        <p:nvSpPr>
-          <p:cNvPr id="18" name="Text 14"/>
-          <p:cNvSpPr/>
-          <p:nvPr/>
-        </p:nvSpPr>
-        <p:spPr>
-          <a:xfrm>
-            <a:off x="1152227" y="2679948"/>
-            <a:ext cx="1943100" cy="214610"/>
-          </a:xfrm>
-          <a:prstGeom prst="rect">
-            <a:avLst/>
-          </a:prstGeom>
-          <a:noFill/>
-          <a:ln/>
-        </p:spPr>
-        <p:txBody>
-          <a:bodyPr wrap="square" lIns="0" tIns="0" rIns="0" bIns="0" rtlCol="0" anchor="t"/>
-          <a:lstStyle/>
-          <a:p>
-            <a:pPr algn="l" indent="0" marL="0">
-              <a:lnSpc>
-                <a:spcPts val="1690"/>
-              </a:lnSpc>
-              <a:buNone/>
-            </a:pPr>
-            <a:r>
-              <a:rPr lang="en-US" sz="1500" b="1" dirty="0">
-                <a:solidFill>
-                  <a:srgbClr val="1F2328"/>
-                </a:solidFill>
-                <a:latin typeface="Arial" pitchFamily="34" charset="0"/>
-                <a:ea typeface="Arial" pitchFamily="34" charset="-122"/>
-                <a:cs typeface="Arial" pitchFamily="34" charset="-120"/>
-              </a:rPr>
-              <a:t>Plan with @src</a:t>
-            </a:r>
-            <a:endParaRPr lang="en-US" sz="1500" dirty="0"/>
-          </a:p>
-        </p:txBody>
-      </p:sp>
-      <p:sp>
-        <p:nvSpPr>
-          <p:cNvPr id="19" name="Text 15"/>
-          <p:cNvSpPr/>
-          <p:nvPr/>
-        </p:nvSpPr>
-        <p:spPr>
-          <a:xfrm>
-            <a:off x="3234928" y="2580233"/>
-            <a:ext cx="2468192" cy="414040"/>
-          </a:xfrm>
-          <a:prstGeom prst="rect">
-            <a:avLst/>
-          </a:prstGeom>
-          <a:noFill/>
-          <a:ln/>
-        </p:spPr>
-        <p:txBody>
-          <a:bodyPr wrap="square" lIns="0" tIns="0" rIns="0" bIns="0" rtlCol="0" anchor="t"/>
-          <a:lstStyle/>
-          <a:p>
-            <a:pPr algn="l" indent="0" marL="0">
-              <a:lnSpc>
-                <a:spcPts val="1630"/>
-              </a:lnSpc>
-              <a:buNone/>
-            </a:pPr>
-            <a:r>
-              <a:rPr lang="en-US" sz="1400" dirty="0">
-                <a:solidFill>
-                  <a:srgbClr val="59636E"/>
-                </a:solidFill>
-                <a:latin typeface="Arial" pitchFamily="34" charset="0"/>
-                <a:ea typeface="Arial" pitchFamily="34" charset="-122"/>
-                <a:cs typeface="Arial" pitchFamily="34" charset="-120"/>
-              </a:rPr>
-              <a:t>Accessible toggle, readable in both themes.</a:t>
-            </a:r>
-            <a:endParaRPr lang="en-US" sz="1400" dirty="0"/>
-          </a:p>
-        </p:txBody>
-      </p:sp>
-      <p:sp>
-        <p:nvSpPr>
-          <p:cNvPr id="20" name="Shape 16"/>
-          <p:cNvSpPr/>
-          <p:nvPr/>
-        </p:nvSpPr>
-        <p:spPr>
-          <a:xfrm>
-            <a:off x="517475" y="3780681"/>
-            <a:ext cx="5314950" cy="0"/>
-          </a:xfrm>
-          <a:prstGeom prst="line">
-            <a:avLst/>
-          </a:prstGeom>
-          <a:noFill/>
-          <a:ln w="9525">
-            <a:solidFill>
-              <a:srgbClr val="D1D9E0"/>
-            </a:solidFill>
-            <a:prstDash val="solid"/>
-          </a:ln>
-        </p:spPr>
-      </p:sp>
-      <p:sp>
-        <p:nvSpPr>
-          <p:cNvPr id="21" name="Text 17"/>
-          <p:cNvSpPr/>
-          <p:nvPr/>
-        </p:nvSpPr>
-        <p:spPr>
-          <a:xfrm>
-            <a:off x="695176" y="3307259"/>
-            <a:ext cx="279350" cy="279350"/>
-          </a:xfrm>
-          <a:prstGeom prst="roundRect">
-            <a:avLst>
-              <a:gd name="adj" fmla="val 327331"/>
-            </a:avLst>
-          </a:prstGeom>
-          <a:solidFill>
-            <a:srgbClr val="BC4C00"/>
-          </a:solidFill>
-          <a:ln/>
-        </p:spPr>
-        <p:txBody>
-          <a:bodyPr wrap="square" rtlCol="0" anchor="ctr"/>
-          <a:lstStyle/>
-          <a:p>
-            <a:pPr indent="0" marL="0">
-              <a:buNone/>
-            </a:pPr>
-            <a:endParaRPr lang="en-US" dirty="0"/>
-          </a:p>
-        </p:txBody>
-      </p:sp>
-      <p:sp>
-        <p:nvSpPr>
-          <p:cNvPr id="22" name="Text 18"/>
-          <p:cNvSpPr/>
-          <p:nvPr/>
-        </p:nvSpPr>
-        <p:spPr>
-          <a:xfrm>
-            <a:off x="789841" y="3351609"/>
-            <a:ext cx="90020" cy="190500"/>
-          </a:xfrm>
-          <a:prstGeom prst="rect">
-            <a:avLst/>
-          </a:prstGeom>
-          <a:noFill/>
-          <a:ln/>
-        </p:spPr>
-        <p:txBody>
-          <a:bodyPr wrap="square" lIns="0" tIns="0" rIns="0" bIns="0" rtlCol="0" anchor="t"/>
-          <a:lstStyle/>
-          <a:p>
-            <a:pPr algn="ctr" indent="0" marL="0">
-              <a:buNone/>
-            </a:pPr>
-            <a:r>
-              <a:rPr lang="en-US" sz="1250" b="1" dirty="0">
-                <a:solidFill>
-                  <a:srgbClr val="FFFFFF"/>
-                </a:solidFill>
-                <a:latin typeface="Arial" pitchFamily="34" charset="0"/>
-                <a:ea typeface="Arial" pitchFamily="34" charset="-122"/>
-                <a:cs typeface="Arial" pitchFamily="34" charset="-120"/>
-              </a:rPr>
-              <a:t>3</a:t>
-            </a:r>
-            <a:endParaRPr lang="en-US" sz="1250" dirty="0"/>
-          </a:p>
-        </p:txBody>
-      </p:sp>
-      <p:sp>
-        <p:nvSpPr>
-          <p:cNvPr id="23" name="Text 19"/>
-          <p:cNvSpPr/>
-          <p:nvPr/>
-        </p:nvSpPr>
-        <p:spPr>
-          <a:xfrm>
-            <a:off x="1152227" y="3232398"/>
-            <a:ext cx="1943100" cy="429220"/>
-          </a:xfrm>
-          <a:prstGeom prst="rect">
-            <a:avLst/>
-          </a:prstGeom>
-          <a:noFill/>
-          <a:ln/>
-        </p:spPr>
-        <p:txBody>
-          <a:bodyPr wrap="square" lIns="0" tIns="0" rIns="0" bIns="0" rtlCol="0" anchor="t"/>
-          <a:lstStyle/>
-          <a:p>
-            <a:pPr algn="l" indent="0" marL="0">
-              <a:lnSpc>
-                <a:spcPts val="1690"/>
-              </a:lnSpc>
-              <a:buNone/>
-            </a:pPr>
-            <a:r>
-              <a:rPr lang="en-US" sz="1500" b="1" dirty="0">
-                <a:solidFill>
-                  <a:srgbClr val="1F2328"/>
-                </a:solidFill>
-                <a:latin typeface="Arial" pitchFamily="34" charset="0"/>
-                <a:ea typeface="Arial" pitchFamily="34" charset="-122"/>
-                <a:cs typeface="Arial" pitchFamily="34" charset="-120"/>
-              </a:rPr>
-              <a:t>Implement and inspect</a:t>
-            </a:r>
-            <a:endParaRPr lang="en-US" sz="1500" dirty="0"/>
-          </a:p>
-        </p:txBody>
-      </p:sp>
-      <p:sp>
-        <p:nvSpPr>
-          <p:cNvPr id="24" name="Text 20"/>
-          <p:cNvSpPr/>
-          <p:nvPr/>
-        </p:nvSpPr>
-        <p:spPr>
-          <a:xfrm>
-            <a:off x="3234928" y="3239988"/>
-            <a:ext cx="2468192" cy="414040"/>
-          </a:xfrm>
-          <a:prstGeom prst="rect">
-            <a:avLst/>
-          </a:prstGeom>
-          <a:noFill/>
-          <a:ln/>
-        </p:spPr>
-        <p:txBody>
-          <a:bodyPr wrap="square" lIns="0" tIns="0" rIns="0" bIns="0" rtlCol="0" anchor="t"/>
-          <a:lstStyle/>
-          <a:p>
-            <a:pPr algn="l" indent="0" marL="0">
-              <a:lnSpc>
-                <a:spcPts val="1630"/>
-              </a:lnSpc>
-              <a:buNone/>
-            </a:pPr>
-            <a:r>
-              <a:rPr lang="en-US" sz="1400" dirty="0">
-                <a:solidFill>
-                  <a:srgbClr val="59636E"/>
-                </a:solidFill>
-                <a:latin typeface="Arial" pitchFamily="34" charset="0"/>
-                <a:ea typeface="Arial" pitchFamily="34" charset="-122"/>
-                <a:cs typeface="Arial" pitchFamily="34" charset="-120"/>
-              </a:rPr>
-              <a:t>Check the diff and both themes.</a:t>
-            </a:r>
-            <a:endParaRPr lang="en-US" sz="1400" dirty="0"/>
-          </a:p>
-        </p:txBody>
-      </p:sp>
-      <p:sp>
-        <p:nvSpPr>
-          <p:cNvPr id="25" name="Text 21"/>
-          <p:cNvSpPr/>
-          <p:nvPr/>
-        </p:nvSpPr>
-        <p:spPr>
-          <a:xfrm>
-            <a:off x="695176" y="3976539"/>
-            <a:ext cx="279350" cy="279350"/>
-          </a:xfrm>
-          <a:prstGeom prst="roundRect">
-            <a:avLst>
-              <a:gd name="adj" fmla="val 327331"/>
-            </a:avLst>
-          </a:prstGeom>
-          <a:solidFill>
-            <a:srgbClr val="BC4C00"/>
-          </a:solidFill>
-          <a:ln/>
-        </p:spPr>
-        <p:txBody>
-          <a:bodyPr wrap="square" rtlCol="0" anchor="ctr"/>
-          <a:lstStyle/>
-          <a:p>
-            <a:pPr indent="0" marL="0">
-              <a:buNone/>
-            </a:pPr>
-            <a:endParaRPr lang="en-US" dirty="0"/>
-          </a:p>
-        </p:txBody>
-      </p:sp>
-      <p:sp>
-        <p:nvSpPr>
-          <p:cNvPr id="26" name="Text 22"/>
-          <p:cNvSpPr/>
-          <p:nvPr/>
-        </p:nvSpPr>
-        <p:spPr>
-          <a:xfrm>
-            <a:off x="789841" y="4020889"/>
-            <a:ext cx="90020" cy="190500"/>
-          </a:xfrm>
-          <a:prstGeom prst="rect">
-            <a:avLst/>
-          </a:prstGeom>
-          <a:noFill/>
-          <a:ln/>
-        </p:spPr>
-        <p:txBody>
-          <a:bodyPr wrap="square" lIns="0" tIns="0" rIns="0" bIns="0" rtlCol="0" anchor="t"/>
-          <a:lstStyle/>
-          <a:p>
-            <a:pPr algn="ctr" indent="0" marL="0">
-              <a:buNone/>
-            </a:pPr>
-            <a:r>
-              <a:rPr lang="en-US" sz="1250" b="1" dirty="0">
-                <a:solidFill>
-                  <a:srgbClr val="FFFFFF"/>
-                </a:solidFill>
-                <a:latin typeface="Arial" pitchFamily="34" charset="0"/>
-                <a:ea typeface="Arial" pitchFamily="34" charset="-122"/>
-                <a:cs typeface="Arial" pitchFamily="34" charset="-120"/>
-              </a:rPr>
-              <a:t>4</a:t>
-            </a:r>
-            <a:endParaRPr lang="en-US" sz="1250" dirty="0"/>
-          </a:p>
-        </p:txBody>
-      </p:sp>
-      <p:sp>
-        <p:nvSpPr>
-          <p:cNvPr id="27" name="Text 23"/>
-          <p:cNvSpPr/>
-          <p:nvPr/>
-        </p:nvSpPr>
-        <p:spPr>
-          <a:xfrm>
-            <a:off x="1152227" y="4008983"/>
-            <a:ext cx="1943100" cy="214610"/>
-          </a:xfrm>
-          <a:prstGeom prst="rect">
-            <a:avLst/>
-          </a:prstGeom>
-          <a:noFill/>
-          <a:ln/>
-        </p:spPr>
-        <p:txBody>
-          <a:bodyPr wrap="square" lIns="0" tIns="0" rIns="0" bIns="0" rtlCol="0" anchor="t"/>
-          <a:lstStyle/>
-          <a:p>
-            <a:pPr algn="l" indent="0" marL="0">
-              <a:lnSpc>
-                <a:spcPts val="1690"/>
-              </a:lnSpc>
-              <a:buNone/>
-            </a:pPr>
-            <a:r>
-              <a:rPr lang="en-US" sz="1500" b="1" dirty="0">
-                <a:solidFill>
-                  <a:srgbClr val="1F2328"/>
-                </a:solidFill>
-                <a:latin typeface="Arial" pitchFamily="34" charset="0"/>
-                <a:ea typeface="Arial" pitchFamily="34" charset="-122"/>
-                <a:cs typeface="Arial" pitchFamily="34" charset="-120"/>
-              </a:rPr>
-              <a:t>Validate and recap</a:t>
-            </a:r>
-            <a:endParaRPr lang="en-US" sz="1500" dirty="0"/>
-          </a:p>
-        </p:txBody>
-      </p:sp>
-      <p:sp>
-        <p:nvSpPr>
-          <p:cNvPr id="28" name="Text 24"/>
-          <p:cNvSpPr/>
-          <p:nvPr/>
-        </p:nvSpPr>
-        <p:spPr>
-          <a:xfrm>
-            <a:off x="3234928" y="3899743"/>
-            <a:ext cx="2468192" cy="433090"/>
-          </a:xfrm>
-          <a:prstGeom prst="rect">
-            <a:avLst/>
-          </a:prstGeom>
-          <a:noFill/>
-          <a:ln/>
-        </p:spPr>
-        <p:txBody>
-          <a:bodyPr wrap="square" lIns="0" tIns="0" rIns="0" bIns="0" rtlCol="0" anchor="t"/>
-          <a:lstStyle/>
-          <a:p>
-            <a:pPr algn="l" indent="0" marL="0">
-              <a:lnSpc>
-                <a:spcPts val="1630"/>
-              </a:lnSpc>
-              <a:buNone/>
-            </a:pPr>
-            <a:r>
-              <a:rPr lang="en-US" sz="1400" dirty="0">
-                <a:solidFill>
-                  <a:srgbClr val="59636E"/>
-                </a:solidFill>
-                <a:latin typeface="Arial" pitchFamily="34" charset="0"/>
-                <a:ea typeface="Arial" pitchFamily="34" charset="-122"/>
-                <a:cs typeface="Arial" pitchFamily="34" charset="-120"/>
-              </a:rPr>
-              <a:t>Tests, build, then </a:t>
-            </a:r>
-            <a:pPr algn="l" indent="0" marL="0">
-              <a:lnSpc>
-                <a:spcPts val="1630"/>
-              </a:lnSpc>
-              <a:buNone/>
-            </a:pPr>
-            <a:r>
-              <a:rPr lang="en-US" sz="1400" b="1" dirty="0">
-                <a:solidFill>
-                  <a:srgbClr val="0550AE"/>
-                </a:solidFill>
-                <a:latin typeface="Courier New" pitchFamily="34" charset="0"/>
-                <a:ea typeface="Courier New" pitchFamily="34" charset="-122"/>
-                <a:cs typeface="Courier New" pitchFamily="34" charset="-120"/>
-              </a:rPr>
-              <a:t>/chronicle standup</a:t>
-            </a:r>
-            <a:pPr algn="l" indent="0" marL="0">
-              <a:lnSpc>
-                <a:spcPts val="1630"/>
-              </a:lnSpc>
-              <a:buNone/>
-            </a:pPr>
-            <a:r>
-              <a:rPr lang="en-US" sz="1400" dirty="0">
-                <a:solidFill>
-                  <a:srgbClr val="59636E"/>
-                </a:solidFill>
-                <a:latin typeface="Arial" pitchFamily="34" charset="0"/>
-                <a:ea typeface="Arial" pitchFamily="34" charset="-122"/>
-                <a:cs typeface="Arial" pitchFamily="34" charset="-120"/>
-              </a:rPr>
-              <a:t>.</a:t>
-            </a:r>
-            <a:endParaRPr lang="en-US" sz="1400" dirty="0"/>
-          </a:p>
-        </p:txBody>
-      </p:sp>
-      <p:sp>
-        <p:nvSpPr>
-          <p:cNvPr id="29" name="Text 25"/>
-          <p:cNvSpPr/>
-          <p:nvPr/>
-        </p:nvSpPr>
-        <p:spPr>
-          <a:xfrm>
-            <a:off x="6045101" y="1766143"/>
-            <a:ext cx="2590800" cy="2690515"/>
-          </a:xfrm>
-          <a:prstGeom prst="roundRect">
-            <a:avLst>
-              <a:gd name="adj" fmla="val 4902"/>
-            </a:avLst>
-          </a:prstGeom>
-          <a:solidFill>
-            <a:srgbClr val="FFFFFF"/>
-          </a:solidFill>
-          <a:ln w="9525">
-            <a:solidFill>
-              <a:srgbClr val="FFC49B"/>
-            </a:solidFill>
-          </a:ln>
-        </p:spPr>
-        <p:txBody>
-          <a:bodyPr wrap="square" rtlCol="0" anchor="ctr"/>
-          <a:lstStyle/>
-          <a:p>
-            <a:pPr indent="0" marL="0">
-              <a:buNone/>
-            </a:pPr>
-            <a:endParaRPr lang="en-US" dirty="0"/>
-          </a:p>
-        </p:txBody>
-      </p:sp>
-      <p:sp>
-        <p:nvSpPr>
-          <p:cNvPr id="30" name="Text 26"/>
-          <p:cNvSpPr/>
-          <p:nvPr/>
-        </p:nvSpPr>
-        <p:spPr>
-          <a:xfrm>
-            <a:off x="6232327" y="1953369"/>
-            <a:ext cx="381000" cy="381000"/>
-          </a:xfrm>
-          <a:prstGeom prst="roundRect">
-            <a:avLst>
-              <a:gd name="adj" fmla="val 23333"/>
-            </a:avLst>
-          </a:prstGeom>
-          <a:solidFill>
-            <a:srgbClr val="FFF1E5"/>
-          </a:solidFill>
-          <a:ln/>
+          <a:effectLst>
+            <a:outerShdw sx="100000" sy="100000" kx="0" ky="0" algn="bl" rotWithShape="0" blurRad="38100" dist="9525" dir="5400000">
+              <a:srgbClr val="1f2328">
+                <a:alpha val="12000"/>
+              </a:srgbClr>
+            </a:outerShdw>
+          </a:effectLst>
         </p:spPr>
         <p:txBody>
           <a:bodyPr wrap="square" rtlCol="0" anchor="ctr"/>
@@ -5929,7 +4988,7 @@
       </p:sp>
       <p:pic>
         <p:nvPicPr>
-          <p:cNvPr id="31" name="Image 2" descr="/Users/danwahlin/.copilot/session-state/56a7a0da-def8-48d4-b5e8-0ac3878cb8dd/files/slides-build/icons/GoGoal-BC4C00.png">    </p:cNvPr>
+          <p:cNvPr id="9" name="Image 2" descr="/Users/danwahlin/.copilot/session-state/56a7a0da-def8-48d4-b5e8-0ac3878cb8dd/files/slides-build/img/02-chronicle-crop.png">    </p:cNvPr>
           <p:cNvPicPr>
             <a:picLocks noChangeAspect="1"/>
           </p:cNvPicPr>
@@ -5943,8 +5002,8 @@
         </p:blipFill>
         <p:spPr>
           <a:xfrm>
-            <a:off x="6314926" y="2035969"/>
-            <a:ext cx="215801" cy="215801"/>
+            <a:off x="558701" y="1985367"/>
+            <a:ext cx="3860750" cy="1526530"/>
           </a:xfrm>
           <a:prstGeom prst="rect">
             <a:avLst/>
@@ -5953,14 +5012,14 @@
       </p:pic>
       <p:sp>
         <p:nvSpPr>
-          <p:cNvPr id="32" name="Text 27"/>
-          <p:cNvSpPr/>
-          <p:nvPr/>
-        </p:nvSpPr>
-        <p:spPr>
-          <a:xfrm>
-            <a:off x="6727627" y="2029569"/>
-            <a:ext cx="867564" cy="228600"/>
+          <p:cNvPr id="10" name="Text 5"/>
+          <p:cNvSpPr/>
+          <p:nvPr/>
+        </p:nvSpPr>
+        <p:spPr>
+          <a:xfrm>
+            <a:off x="507950" y="4171057"/>
+            <a:ext cx="4041648" cy="242590"/>
           </a:xfrm>
           <a:prstGeom prst="rect">
             <a:avLst/>
@@ -5974,71 +5033,12 @@
           <a:p>
             <a:pPr algn="l" indent="0" marL="0">
               <a:lnSpc>
-                <a:spcPts val="1800"/>
+                <a:spcPts val="1760"/>
               </a:lnSpc>
               <a:buNone/>
             </a:pPr>
             <a:r>
-              <a:rPr lang="en-US" sz="1650" b="1" dirty="0">
-                <a:solidFill>
-                  <a:srgbClr val="1F2328"/>
-                </a:solidFill>
-                <a:latin typeface="Arial" pitchFamily="34" charset="0"/>
-                <a:ea typeface="Arial" pitchFamily="34" charset="-122"/>
-                <a:cs typeface="Arial" pitchFamily="34" charset="-120"/>
-              </a:rPr>
-              <a:t>Success</a:t>
-            </a:r>
-            <a:endParaRPr lang="en-US" sz="1650" dirty="0"/>
-          </a:p>
-        </p:txBody>
-      </p:sp>
-      <p:sp>
-        <p:nvSpPr>
-          <p:cNvPr id="33" name="Text 28"/>
-          <p:cNvSpPr/>
-          <p:nvPr/>
-        </p:nvSpPr>
-        <p:spPr>
-          <a:xfrm>
-            <a:off x="6232327" y="2410569"/>
-            <a:ext cx="2260675" cy="867966"/>
-          </a:xfrm>
-          <a:prstGeom prst="rect">
-            <a:avLst/>
-          </a:prstGeom>
-          <a:noFill/>
-          <a:ln/>
-        </p:spPr>
-        <p:txBody>
-          <a:bodyPr wrap="square" lIns="0" tIns="0" rIns="0" bIns="0" rtlCol="0" anchor="t"/>
-          <a:lstStyle/>
-          <a:p>
-            <a:pPr algn="l" indent="0" marL="0">
-              <a:lnSpc>
-                <a:spcPts val="1690"/>
-              </a:lnSpc>
-              <a:buNone/>
-            </a:pPr>
-            <a:r>
-              <a:rPr lang="en-US" sz="1400" dirty="0">
-                <a:solidFill>
-                  <a:srgbClr val="59636E"/>
-                </a:solidFill>
-                <a:latin typeface="Arial" pitchFamily="34" charset="0"/>
-                <a:ea typeface="Arial" pitchFamily="34" charset="-122"/>
-                <a:cs typeface="Arial" pitchFamily="34" charset="-120"/>
-              </a:rPr>
-              <a:t>You can name the branch, the context you attached, and your evidence. </a:t>
-            </a:r>
-            <a:pPr algn="l" indent="0" marL="0">
-              <a:lnSpc>
-                <a:spcPts val="1690"/>
-              </a:lnSpc>
-              <a:buNone/>
-            </a:pPr>
-            <a:r>
-              <a:rPr lang="en-US" sz="1400" b="1" dirty="0">
+              <a:rPr lang="en-US" sz="1450" b="1" dirty="0">
                 <a:solidFill>
                   <a:srgbClr val="0550AE"/>
                 </a:solidFill>
@@ -6046,16 +5046,16 @@
                 <a:ea typeface="Courier New" pitchFamily="34" charset="-122"/>
                 <a:cs typeface="Courier New" pitchFamily="34" charset="-120"/>
               </a:rPr>
-              <a:t>main</a:t>
+              <a:t>/chronicle standup</a:t>
             </a:r>
             <a:pPr algn="l" indent="0" marL="0">
               <a:lnSpc>
-                <a:spcPts val="1690"/>
+                <a:spcPts val="1760"/>
               </a:lnSpc>
               <a:buNone/>
             </a:pPr>
             <a:r>
-              <a:rPr lang="en-US" sz="1400" b="1" dirty="0">
+              <a:rPr lang="en-US" sz="1450" dirty="0">
                 <a:solidFill>
                   <a:srgbClr val="59636E"/>
                 </a:solidFill>
@@ -6063,9 +5063,135 @@
                 <a:ea typeface="Arial" pitchFamily="34" charset="-122"/>
                 <a:cs typeface="Arial" pitchFamily="34" charset="-120"/>
               </a:rPr>
-              <a:t> does not change.</a:t>
-            </a:r>
-            <a:endParaRPr lang="en-US" sz="1400" dirty="0"/>
+              <a:t> recaps your last day.</a:t>
+            </a:r>
+            <a:endParaRPr lang="en-US" sz="1450" dirty="0"/>
+          </a:p>
+        </p:txBody>
+      </p:sp>
+      <p:sp>
+        <p:nvSpPr>
+          <p:cNvPr id="11" name="Text 6"/>
+          <p:cNvSpPr/>
+          <p:nvPr/>
+        </p:nvSpPr>
+        <p:spPr>
+          <a:xfrm>
+            <a:off x="4776341" y="1481882"/>
+            <a:ext cx="3756571" cy="2533650"/>
+          </a:xfrm>
+          <a:prstGeom prst="roundRect">
+            <a:avLst>
+              <a:gd name="adj" fmla="val 3008"/>
+            </a:avLst>
+          </a:prstGeom>
+          <a:solidFill>
+            <a:srgbClr val="FFFFFF"/>
+          </a:solidFill>
+          <a:ln w="9525">
+            <a:solidFill>
+              <a:srgbClr val="D1D9E0"/>
+            </a:solidFill>
+          </a:ln>
+          <a:effectLst>
+            <a:outerShdw sx="100000" sy="100000" kx="0" ky="0" algn="bl" rotWithShape="0" blurRad="38100" dist="9525" dir="5400000">
+              <a:srgbClr val="1f2328">
+                <a:alpha val="12000"/>
+              </a:srgbClr>
+            </a:outerShdw>
+          </a:effectLst>
+        </p:spPr>
+        <p:txBody>
+          <a:bodyPr wrap="square" rtlCol="0" anchor="ctr"/>
+          <a:lstStyle/>
+          <a:p>
+            <a:pPr indent="0" marL="0">
+              <a:buNone/>
+            </a:pPr>
+            <a:endParaRPr lang="en-US" dirty="0"/>
+          </a:p>
+        </p:txBody>
+      </p:sp>
+      <p:pic>
+        <p:nvPicPr>
+          <p:cNvPr id="12" name="Image 3" descr="/Users/danwahlin/.copilot/session-state/56a7a0da-def8-48d4-b5e8-0ac3878cb8dd/files/slides-build/img/02-context-crop.png">    </p:cNvPr>
+          <p:cNvPicPr>
+            <a:picLocks noChangeAspect="1"/>
+          </p:cNvPicPr>
+          <p:nvPr/>
+        </p:nvPicPr>
+        <p:blipFill>
+          <a:blip r:embed="rId5"/>
+          <a:stretch>
+            <a:fillRect/>
+          </a:stretch>
+        </p:blipFill>
+        <p:spPr>
+          <a:xfrm>
+            <a:off x="4823966" y="1529507"/>
+            <a:ext cx="3661321" cy="2438400"/>
+          </a:xfrm>
+          <a:prstGeom prst="rect">
+            <a:avLst/>
+          </a:prstGeom>
+        </p:spPr>
+      </p:pic>
+      <p:sp>
+        <p:nvSpPr>
+          <p:cNvPr id="13" name="Text 7"/>
+          <p:cNvSpPr/>
+          <p:nvPr/>
+        </p:nvSpPr>
+        <p:spPr>
+          <a:xfrm>
+            <a:off x="4673501" y="4171057"/>
+            <a:ext cx="4041648" cy="242590"/>
+          </a:xfrm>
+          <a:prstGeom prst="rect">
+            <a:avLst/>
+          </a:prstGeom>
+          <a:noFill/>
+          <a:ln/>
+        </p:spPr>
+        <p:txBody>
+          <a:bodyPr wrap="square" lIns="0" tIns="0" rIns="0" bIns="0" rtlCol="0" anchor="t"/>
+          <a:lstStyle/>
+          <a:p>
+            <a:pPr algn="l" indent="0" marL="0">
+              <a:lnSpc>
+                <a:spcPts val="1760"/>
+              </a:lnSpc>
+              <a:buNone/>
+            </a:pPr>
+            <a:r>
+              <a:rPr lang="en-US" sz="1450" b="1" dirty="0">
+                <a:solidFill>
+                  <a:srgbClr val="0550AE"/>
+                </a:solidFill>
+                <a:latin typeface="Courier New" pitchFamily="34" charset="0"/>
+                <a:ea typeface="Courier New" pitchFamily="34" charset="-122"/>
+                <a:cs typeface="Courier New" pitchFamily="34" charset="-120"/>
+              </a:rPr>
+              <a:t>/context</a:t>
+            </a:r>
+            <a:pPr algn="l" indent="0" marL="0">
+              <a:lnSpc>
+                <a:spcPts val="1760"/>
+              </a:lnSpc>
+              <a:buNone/>
+            </a:pPr>
+            <a:r>
+              <a:rPr lang="en-US" sz="1450" dirty="0">
+                <a:solidFill>
+                  <a:srgbClr val="59636E"/>
+                </a:solidFill>
+                <a:latin typeface="Arial" pitchFamily="34" charset="0"/>
+                <a:ea typeface="Arial" pitchFamily="34" charset="-122"/>
+                <a:cs typeface="Arial" pitchFamily="34" charset="-120"/>
+              </a:rPr>
+              <a:t> shows context use and spend.</a:t>
+            </a:r>
+            <a:endParaRPr lang="en-US" sz="1450" dirty="0"/>
           </a:p>
         </p:txBody>
       </p:sp>
@@ -6255,6 +5381,1382 @@
                 <a:ea typeface="Arial" pitchFamily="34" charset="-122"/>
                 <a:cs typeface="Arial" pitchFamily="34" charset="-120"/>
               </a:rPr>
+              <a:t>YOUR TURN</a:t>
+            </a:r>
+            <a:endParaRPr lang="en-US" sz="1250" dirty="0"/>
+          </a:p>
+        </p:txBody>
+      </p:sp>
+      <p:sp>
+        <p:nvSpPr>
+          <p:cNvPr id="7" name="Text 3"/>
+          <p:cNvSpPr/>
+          <p:nvPr/>
+        </p:nvSpPr>
+        <p:spPr>
+          <a:xfrm>
+            <a:off x="507950" y="622250"/>
+            <a:ext cx="8161020" cy="419100"/>
+          </a:xfrm>
+          <a:prstGeom prst="rect">
+            <a:avLst/>
+          </a:prstGeom>
+          <a:noFill/>
+          <a:ln/>
+        </p:spPr>
+        <p:txBody>
+          <a:bodyPr wrap="square" lIns="0" tIns="0" rIns="0" bIns="0" rtlCol="0" anchor="t"/>
+          <a:lstStyle/>
+          <a:p>
+            <a:pPr algn="l" indent="0" marL="0">
+              <a:lnSpc>
+                <a:spcPts val="3300"/>
+              </a:lnSpc>
+              <a:spcBef>
+                <a:spcPts val="400"/>
+              </a:spcBef>
+              <a:buNone/>
+            </a:pPr>
+            <a:r>
+              <a:rPr lang="en-US" sz="2800" b="1" dirty="0">
+                <a:solidFill>
+                  <a:srgbClr val="1F2328"/>
+                </a:solidFill>
+                <a:latin typeface="Arial" pitchFamily="34" charset="0"/>
+                <a:ea typeface="Arial" pitchFamily="34" charset="-122"/>
+                <a:cs typeface="Arial" pitchFamily="34" charset="-120"/>
+              </a:rPr>
+              <a:t>Add a light and dark theme</a:t>
+            </a:r>
+            <a:endParaRPr lang="en-US" sz="2800" dirty="0"/>
+          </a:p>
+        </p:txBody>
+      </p:sp>
+      <p:sp>
+        <p:nvSpPr>
+          <p:cNvPr id="8" name="Text 4"/>
+          <p:cNvSpPr/>
+          <p:nvPr/>
+        </p:nvSpPr>
+        <p:spPr>
+          <a:xfrm>
+            <a:off x="507950" y="1104751"/>
+            <a:ext cx="8161020" cy="273100"/>
+          </a:xfrm>
+          <a:prstGeom prst="rect">
+            <a:avLst/>
+          </a:prstGeom>
+          <a:noFill/>
+          <a:ln/>
+        </p:spPr>
+        <p:txBody>
+          <a:bodyPr wrap="square" lIns="0" tIns="0" rIns="0" bIns="0" rtlCol="0" anchor="t"/>
+          <a:lstStyle/>
+          <a:p>
+            <a:pPr algn="l" indent="0" marL="0">
+              <a:lnSpc>
+                <a:spcPts val="2000"/>
+              </a:lnSpc>
+              <a:spcBef>
+                <a:spcPts val="500"/>
+              </a:spcBef>
+              <a:buNone/>
+            </a:pPr>
+            <a:r>
+              <a:rPr lang="en-US" sz="1650" dirty="0">
+                <a:solidFill>
+                  <a:srgbClr val="59636E"/>
+                </a:solidFill>
+                <a:latin typeface="Arial" pitchFamily="34" charset="0"/>
+                <a:ea typeface="Arial" pitchFamily="34" charset="-122"/>
+                <a:cs typeface="Arial" pitchFamily="34" charset="-120"/>
+              </a:rPr>
+              <a:t>Use </a:t>
+            </a:r>
+            <a:pPr algn="l" indent="0" marL="0">
+              <a:lnSpc>
+                <a:spcPts val="2000"/>
+              </a:lnSpc>
+              <a:spcBef>
+                <a:spcPts val="500"/>
+              </a:spcBef>
+              <a:buNone/>
+            </a:pPr>
+            <a:r>
+              <a:rPr lang="en-US" sz="1650" b="1" dirty="0">
+                <a:solidFill>
+                  <a:srgbClr val="0550AE"/>
+                </a:solidFill>
+                <a:latin typeface="Courier New" pitchFamily="34" charset="0"/>
+                <a:ea typeface="Courier New" pitchFamily="34" charset="-122"/>
+                <a:cs typeface="Courier New" pitchFamily="34" charset="-120"/>
+              </a:rPr>
+              <a:t>@</a:t>
+            </a:r>
+            <a:pPr algn="l" indent="0" marL="0">
+              <a:lnSpc>
+                <a:spcPts val="2000"/>
+              </a:lnSpc>
+              <a:spcBef>
+                <a:spcPts val="500"/>
+              </a:spcBef>
+              <a:buNone/>
+            </a:pPr>
+            <a:r>
+              <a:rPr lang="en-US" sz="1650" dirty="0">
+                <a:solidFill>
+                  <a:srgbClr val="59636E"/>
+                </a:solidFill>
+                <a:latin typeface="Arial" pitchFamily="34" charset="0"/>
+                <a:ea typeface="Arial" pitchFamily="34" charset="-122"/>
+                <a:cs typeface="Arial" pitchFamily="34" charset="-120"/>
+              </a:rPr>
+              <a:t> to attach the code this time. Keep the work in its worktree.</a:t>
+            </a:r>
+            <a:endParaRPr lang="en-US" sz="1650" dirty="0"/>
+          </a:p>
+        </p:txBody>
+      </p:sp>
+      <p:sp>
+        <p:nvSpPr>
+          <p:cNvPr id="9" name="Text 5"/>
+          <p:cNvSpPr/>
+          <p:nvPr/>
+        </p:nvSpPr>
+        <p:spPr>
+          <a:xfrm>
+            <a:off x="507950" y="1766143"/>
+            <a:ext cx="5334000" cy="2690515"/>
+          </a:xfrm>
+          <a:prstGeom prst="roundRect">
+            <a:avLst>
+              <a:gd name="adj" fmla="val 4720"/>
+            </a:avLst>
+          </a:prstGeom>
+          <a:solidFill>
+            <a:srgbClr val="FFFFFF"/>
+          </a:solidFill>
+          <a:ln w="9525">
+            <a:solidFill>
+              <a:srgbClr val="FFC49B"/>
+            </a:solidFill>
+          </a:ln>
+        </p:spPr>
+        <p:txBody>
+          <a:bodyPr wrap="square" rtlCol="0" anchor="ctr"/>
+          <a:lstStyle/>
+          <a:p>
+            <a:pPr indent="0" marL="0">
+              <a:buNone/>
+            </a:pPr>
+            <a:endParaRPr lang="en-US" dirty="0"/>
+          </a:p>
+        </p:txBody>
+      </p:sp>
+      <p:sp>
+        <p:nvSpPr>
+          <p:cNvPr id="10" name="Shape 6"/>
+          <p:cNvSpPr/>
+          <p:nvPr/>
+        </p:nvSpPr>
+        <p:spPr>
+          <a:xfrm>
+            <a:off x="517475" y="2461171"/>
+            <a:ext cx="5314950" cy="0"/>
+          </a:xfrm>
+          <a:prstGeom prst="line">
+            <a:avLst/>
+          </a:prstGeom>
+          <a:noFill/>
+          <a:ln w="9525">
+            <a:solidFill>
+              <a:srgbClr val="D1D9E0"/>
+            </a:solidFill>
+            <a:prstDash val="solid"/>
+          </a:ln>
+        </p:spPr>
+      </p:sp>
+      <p:sp>
+        <p:nvSpPr>
+          <p:cNvPr id="11" name="Text 7"/>
+          <p:cNvSpPr/>
+          <p:nvPr/>
+        </p:nvSpPr>
+        <p:spPr>
+          <a:xfrm>
+            <a:off x="695176" y="1976289"/>
+            <a:ext cx="279350" cy="279350"/>
+          </a:xfrm>
+          <a:prstGeom prst="roundRect">
+            <a:avLst>
+              <a:gd name="adj" fmla="val 327331"/>
+            </a:avLst>
+          </a:prstGeom>
+          <a:solidFill>
+            <a:srgbClr val="BC4C00"/>
+          </a:solidFill>
+          <a:ln/>
+        </p:spPr>
+        <p:txBody>
+          <a:bodyPr wrap="square" rtlCol="0" anchor="ctr"/>
+          <a:lstStyle/>
+          <a:p>
+            <a:pPr indent="0" marL="0">
+              <a:buNone/>
+            </a:pPr>
+            <a:endParaRPr lang="en-US" dirty="0"/>
+          </a:p>
+        </p:txBody>
+      </p:sp>
+      <p:sp>
+        <p:nvSpPr>
+          <p:cNvPr id="12" name="Text 8"/>
+          <p:cNvSpPr/>
+          <p:nvPr/>
+        </p:nvSpPr>
+        <p:spPr>
+          <a:xfrm>
+            <a:off x="789841" y="2020639"/>
+            <a:ext cx="90020" cy="190500"/>
+          </a:xfrm>
+          <a:prstGeom prst="rect">
+            <a:avLst/>
+          </a:prstGeom>
+          <a:noFill/>
+          <a:ln/>
+        </p:spPr>
+        <p:txBody>
+          <a:bodyPr wrap="square" lIns="0" tIns="0" rIns="0" bIns="0" rtlCol="0" anchor="t"/>
+          <a:lstStyle/>
+          <a:p>
+            <a:pPr algn="ctr" indent="0" marL="0">
+              <a:buNone/>
+            </a:pPr>
+            <a:r>
+              <a:rPr lang="en-US" sz="1250" b="1" dirty="0">
+                <a:solidFill>
+                  <a:srgbClr val="FFFFFF"/>
+                </a:solidFill>
+                <a:latin typeface="Arial" pitchFamily="34" charset="0"/>
+                <a:ea typeface="Arial" pitchFamily="34" charset="-122"/>
+                <a:cs typeface="Arial" pitchFamily="34" charset="-120"/>
+              </a:rPr>
+              <a:t>1</a:t>
+            </a:r>
+            <a:endParaRPr lang="en-US" sz="1250" dirty="0"/>
+          </a:p>
+        </p:txBody>
+      </p:sp>
+      <p:sp>
+        <p:nvSpPr>
+          <p:cNvPr id="13" name="Text 9"/>
+          <p:cNvSpPr/>
+          <p:nvPr/>
+        </p:nvSpPr>
+        <p:spPr>
+          <a:xfrm>
+            <a:off x="1152227" y="2008733"/>
+            <a:ext cx="1943100" cy="214610"/>
+          </a:xfrm>
+          <a:prstGeom prst="rect">
+            <a:avLst/>
+          </a:prstGeom>
+          <a:noFill/>
+          <a:ln/>
+        </p:spPr>
+        <p:txBody>
+          <a:bodyPr wrap="square" lIns="0" tIns="0" rIns="0" bIns="0" rtlCol="0" anchor="t"/>
+          <a:lstStyle/>
+          <a:p>
+            <a:pPr algn="l" indent="0" marL="0">
+              <a:lnSpc>
+                <a:spcPts val="1690"/>
+              </a:lnSpc>
+              <a:buNone/>
+            </a:pPr>
+            <a:r>
+              <a:rPr lang="en-US" sz="1500" b="1" dirty="0">
+                <a:solidFill>
+                  <a:srgbClr val="1F2328"/>
+                </a:solidFill>
+                <a:latin typeface="Arial" pitchFamily="34" charset="0"/>
+                <a:ea typeface="Arial" pitchFamily="34" charset="-122"/>
+                <a:cs typeface="Arial" pitchFamily="34" charset="-120"/>
+              </a:rPr>
+              <a:t>Start from main</a:t>
+            </a:r>
+            <a:endParaRPr lang="en-US" sz="1500" dirty="0"/>
+          </a:p>
+        </p:txBody>
+      </p:sp>
+      <p:sp>
+        <p:nvSpPr>
+          <p:cNvPr id="14" name="Text 10"/>
+          <p:cNvSpPr/>
+          <p:nvPr/>
+        </p:nvSpPr>
+        <p:spPr>
+          <a:xfrm>
+            <a:off x="3234928" y="1889968"/>
+            <a:ext cx="2468192" cy="452140"/>
+          </a:xfrm>
+          <a:prstGeom prst="rect">
+            <a:avLst/>
+          </a:prstGeom>
+          <a:noFill/>
+          <a:ln/>
+        </p:spPr>
+        <p:txBody>
+          <a:bodyPr wrap="square" lIns="0" tIns="0" rIns="0" bIns="0" rtlCol="0" anchor="t"/>
+          <a:lstStyle/>
+          <a:p>
+            <a:pPr algn="l" indent="0" marL="0">
+              <a:lnSpc>
+                <a:spcPts val="1630"/>
+              </a:lnSpc>
+              <a:buNone/>
+            </a:pPr>
+            <a:r>
+              <a:rPr lang="en-US" sz="1400" b="1" dirty="0">
+                <a:solidFill>
+                  <a:srgbClr val="59636E"/>
+                </a:solidFill>
+                <a:latin typeface="Arial" pitchFamily="34" charset="0"/>
+                <a:ea typeface="Arial" pitchFamily="34" charset="-122"/>
+                <a:cs typeface="Arial" pitchFamily="34" charset="-120"/>
+              </a:rPr>
+              <a:t>Create from</a:t>
+            </a:r>
+            <a:pPr algn="l" indent="0" marL="0">
+              <a:lnSpc>
+                <a:spcPts val="1630"/>
+              </a:lnSpc>
+              <a:buNone/>
+            </a:pPr>
+            <a:r>
+              <a:rPr lang="en-US" sz="1400" dirty="0">
+                <a:solidFill>
+                  <a:srgbClr val="59636E"/>
+                </a:solidFill>
+                <a:latin typeface="Arial" pitchFamily="34" charset="0"/>
+                <a:ea typeface="Arial" pitchFamily="34" charset="-122"/>
+                <a:cs typeface="Arial" pitchFamily="34" charset="-120"/>
+              </a:rPr>
+              <a:t> </a:t>
+            </a:r>
+            <a:pPr algn="l" indent="0" marL="0">
+              <a:lnSpc>
+                <a:spcPts val="1630"/>
+              </a:lnSpc>
+              <a:buNone/>
+            </a:pPr>
+            <a:r>
+              <a:rPr lang="en-US" sz="1400" b="1" dirty="0">
+                <a:solidFill>
+                  <a:srgbClr val="0550AE"/>
+                </a:solidFill>
+                <a:latin typeface="Courier New" pitchFamily="34" charset="0"/>
+                <a:ea typeface="Courier New" pitchFamily="34" charset="-122"/>
+                <a:cs typeface="Courier New" pitchFamily="34" charset="-120"/>
+              </a:rPr>
+              <a:t>main</a:t>
+            </a:r>
+            <a:pPr algn="l" indent="0" marL="0">
+              <a:lnSpc>
+                <a:spcPts val="1630"/>
+              </a:lnSpc>
+              <a:buNone/>
+            </a:pPr>
+            <a:r>
+              <a:rPr lang="en-US" sz="1400" dirty="0">
+                <a:solidFill>
+                  <a:srgbClr val="59636E"/>
+                </a:solidFill>
+                <a:latin typeface="Arial" pitchFamily="34" charset="0"/>
+                <a:ea typeface="Arial" pitchFamily="34" charset="-122"/>
+                <a:cs typeface="Arial" pitchFamily="34" charset="-120"/>
+              </a:rPr>
+              <a:t>. Check </a:t>
+            </a:r>
+            <a:pPr algn="l" indent="0" marL="0">
+              <a:lnSpc>
+                <a:spcPts val="1630"/>
+              </a:lnSpc>
+              <a:buNone/>
+            </a:pPr>
+            <a:r>
+              <a:rPr lang="en-US" sz="1400" b="1" dirty="0">
+                <a:solidFill>
+                  <a:srgbClr val="0550AE"/>
+                </a:solidFill>
+                <a:latin typeface="Courier New" pitchFamily="34" charset="0"/>
+                <a:ea typeface="Courier New" pitchFamily="34" charset="-122"/>
+                <a:cs typeface="Courier New" pitchFamily="34" charset="-120"/>
+              </a:rPr>
+              <a:t>/context</a:t>
+            </a:r>
+            <a:pPr algn="l" indent="0" marL="0">
+              <a:lnSpc>
+                <a:spcPts val="1630"/>
+              </a:lnSpc>
+              <a:buNone/>
+            </a:pPr>
+            <a:r>
+              <a:rPr lang="en-US" sz="1400" dirty="0">
+                <a:solidFill>
+                  <a:srgbClr val="59636E"/>
+                </a:solidFill>
+                <a:latin typeface="Arial" pitchFamily="34" charset="0"/>
+                <a:ea typeface="Arial" pitchFamily="34" charset="-122"/>
+                <a:cs typeface="Arial" pitchFamily="34" charset="-120"/>
+              </a:rPr>
+              <a:t>.</a:t>
+            </a:r>
+            <a:endParaRPr lang="en-US" sz="1400" dirty="0"/>
+          </a:p>
+        </p:txBody>
+      </p:sp>
+      <p:sp>
+        <p:nvSpPr>
+          <p:cNvPr id="15" name="Shape 11"/>
+          <p:cNvSpPr/>
+          <p:nvPr/>
+        </p:nvSpPr>
+        <p:spPr>
+          <a:xfrm>
+            <a:off x="517475" y="3113336"/>
+            <a:ext cx="5314950" cy="0"/>
+          </a:xfrm>
+          <a:prstGeom prst="line">
+            <a:avLst/>
+          </a:prstGeom>
+          <a:noFill/>
+          <a:ln w="9525">
+            <a:solidFill>
+              <a:srgbClr val="D1D9E0"/>
+            </a:solidFill>
+            <a:prstDash val="solid"/>
+          </a:ln>
+        </p:spPr>
+      </p:sp>
+      <p:sp>
+        <p:nvSpPr>
+          <p:cNvPr id="16" name="Text 12"/>
+          <p:cNvSpPr/>
+          <p:nvPr/>
+        </p:nvSpPr>
+        <p:spPr>
+          <a:xfrm>
+            <a:off x="695176" y="2647504"/>
+            <a:ext cx="279350" cy="279350"/>
+          </a:xfrm>
+          <a:prstGeom prst="roundRect">
+            <a:avLst>
+              <a:gd name="adj" fmla="val 327331"/>
+            </a:avLst>
+          </a:prstGeom>
+          <a:solidFill>
+            <a:srgbClr val="BC4C00"/>
+          </a:solidFill>
+          <a:ln/>
+        </p:spPr>
+        <p:txBody>
+          <a:bodyPr wrap="square" rtlCol="0" anchor="ctr"/>
+          <a:lstStyle/>
+          <a:p>
+            <a:pPr indent="0" marL="0">
+              <a:buNone/>
+            </a:pPr>
+            <a:endParaRPr lang="en-US" dirty="0"/>
+          </a:p>
+        </p:txBody>
+      </p:sp>
+      <p:sp>
+        <p:nvSpPr>
+          <p:cNvPr id="17" name="Text 13"/>
+          <p:cNvSpPr/>
+          <p:nvPr/>
+        </p:nvSpPr>
+        <p:spPr>
+          <a:xfrm>
+            <a:off x="789841" y="2691854"/>
+            <a:ext cx="90020" cy="190500"/>
+          </a:xfrm>
+          <a:prstGeom prst="rect">
+            <a:avLst/>
+          </a:prstGeom>
+          <a:noFill/>
+          <a:ln/>
+        </p:spPr>
+        <p:txBody>
+          <a:bodyPr wrap="square" lIns="0" tIns="0" rIns="0" bIns="0" rtlCol="0" anchor="t"/>
+          <a:lstStyle/>
+          <a:p>
+            <a:pPr algn="ctr" indent="0" marL="0">
+              <a:buNone/>
+            </a:pPr>
+            <a:r>
+              <a:rPr lang="en-US" sz="1250" b="1" dirty="0">
+                <a:solidFill>
+                  <a:srgbClr val="FFFFFF"/>
+                </a:solidFill>
+                <a:latin typeface="Arial" pitchFamily="34" charset="0"/>
+                <a:ea typeface="Arial" pitchFamily="34" charset="-122"/>
+                <a:cs typeface="Arial" pitchFamily="34" charset="-120"/>
+              </a:rPr>
+              <a:t>2</a:t>
+            </a:r>
+            <a:endParaRPr lang="en-US" sz="1250" dirty="0"/>
+          </a:p>
+        </p:txBody>
+      </p:sp>
+      <p:sp>
+        <p:nvSpPr>
+          <p:cNvPr id="18" name="Text 14"/>
+          <p:cNvSpPr/>
+          <p:nvPr/>
+        </p:nvSpPr>
+        <p:spPr>
+          <a:xfrm>
+            <a:off x="1152227" y="2679948"/>
+            <a:ext cx="1943100" cy="214610"/>
+          </a:xfrm>
+          <a:prstGeom prst="rect">
+            <a:avLst/>
+          </a:prstGeom>
+          <a:noFill/>
+          <a:ln/>
+        </p:spPr>
+        <p:txBody>
+          <a:bodyPr wrap="square" lIns="0" tIns="0" rIns="0" bIns="0" rtlCol="0" anchor="t"/>
+          <a:lstStyle/>
+          <a:p>
+            <a:pPr algn="l" indent="0" marL="0">
+              <a:lnSpc>
+                <a:spcPts val="1690"/>
+              </a:lnSpc>
+              <a:buNone/>
+            </a:pPr>
+            <a:r>
+              <a:rPr lang="en-US" sz="1500" b="1" dirty="0">
+                <a:solidFill>
+                  <a:srgbClr val="1F2328"/>
+                </a:solidFill>
+                <a:latin typeface="Arial" pitchFamily="34" charset="0"/>
+                <a:ea typeface="Arial" pitchFamily="34" charset="-122"/>
+                <a:cs typeface="Arial" pitchFamily="34" charset="-120"/>
+              </a:rPr>
+              <a:t>Plan with @src</a:t>
+            </a:r>
+            <a:endParaRPr lang="en-US" sz="1500" dirty="0"/>
+          </a:p>
+        </p:txBody>
+      </p:sp>
+      <p:sp>
+        <p:nvSpPr>
+          <p:cNvPr id="19" name="Text 15"/>
+          <p:cNvSpPr/>
+          <p:nvPr/>
+        </p:nvSpPr>
+        <p:spPr>
+          <a:xfrm>
+            <a:off x="3234928" y="2580233"/>
+            <a:ext cx="2468192" cy="414040"/>
+          </a:xfrm>
+          <a:prstGeom prst="rect">
+            <a:avLst/>
+          </a:prstGeom>
+          <a:noFill/>
+          <a:ln/>
+        </p:spPr>
+        <p:txBody>
+          <a:bodyPr wrap="square" lIns="0" tIns="0" rIns="0" bIns="0" rtlCol="0" anchor="t"/>
+          <a:lstStyle/>
+          <a:p>
+            <a:pPr algn="l" indent="0" marL="0">
+              <a:lnSpc>
+                <a:spcPts val="1630"/>
+              </a:lnSpc>
+              <a:buNone/>
+            </a:pPr>
+            <a:r>
+              <a:rPr lang="en-US" sz="1400" dirty="0">
+                <a:solidFill>
+                  <a:srgbClr val="59636E"/>
+                </a:solidFill>
+                <a:latin typeface="Arial" pitchFamily="34" charset="0"/>
+                <a:ea typeface="Arial" pitchFamily="34" charset="-122"/>
+                <a:cs typeface="Arial" pitchFamily="34" charset="-120"/>
+              </a:rPr>
+              <a:t>Accessible toggle, readable in both themes.</a:t>
+            </a:r>
+            <a:endParaRPr lang="en-US" sz="1400" dirty="0"/>
+          </a:p>
+        </p:txBody>
+      </p:sp>
+      <p:sp>
+        <p:nvSpPr>
+          <p:cNvPr id="20" name="Shape 16"/>
+          <p:cNvSpPr/>
+          <p:nvPr/>
+        </p:nvSpPr>
+        <p:spPr>
+          <a:xfrm>
+            <a:off x="517475" y="3780681"/>
+            <a:ext cx="5314950" cy="0"/>
+          </a:xfrm>
+          <a:prstGeom prst="line">
+            <a:avLst/>
+          </a:prstGeom>
+          <a:noFill/>
+          <a:ln w="9525">
+            <a:solidFill>
+              <a:srgbClr val="D1D9E0"/>
+            </a:solidFill>
+            <a:prstDash val="solid"/>
+          </a:ln>
+        </p:spPr>
+      </p:sp>
+      <p:sp>
+        <p:nvSpPr>
+          <p:cNvPr id="21" name="Text 17"/>
+          <p:cNvSpPr/>
+          <p:nvPr/>
+        </p:nvSpPr>
+        <p:spPr>
+          <a:xfrm>
+            <a:off x="695176" y="3307259"/>
+            <a:ext cx="279350" cy="279350"/>
+          </a:xfrm>
+          <a:prstGeom prst="roundRect">
+            <a:avLst>
+              <a:gd name="adj" fmla="val 327331"/>
+            </a:avLst>
+          </a:prstGeom>
+          <a:solidFill>
+            <a:srgbClr val="BC4C00"/>
+          </a:solidFill>
+          <a:ln/>
+        </p:spPr>
+        <p:txBody>
+          <a:bodyPr wrap="square" rtlCol="0" anchor="ctr"/>
+          <a:lstStyle/>
+          <a:p>
+            <a:pPr indent="0" marL="0">
+              <a:buNone/>
+            </a:pPr>
+            <a:endParaRPr lang="en-US" dirty="0"/>
+          </a:p>
+        </p:txBody>
+      </p:sp>
+      <p:sp>
+        <p:nvSpPr>
+          <p:cNvPr id="22" name="Text 18"/>
+          <p:cNvSpPr/>
+          <p:nvPr/>
+        </p:nvSpPr>
+        <p:spPr>
+          <a:xfrm>
+            <a:off x="789841" y="3351609"/>
+            <a:ext cx="90020" cy="190500"/>
+          </a:xfrm>
+          <a:prstGeom prst="rect">
+            <a:avLst/>
+          </a:prstGeom>
+          <a:noFill/>
+          <a:ln/>
+        </p:spPr>
+        <p:txBody>
+          <a:bodyPr wrap="square" lIns="0" tIns="0" rIns="0" bIns="0" rtlCol="0" anchor="t"/>
+          <a:lstStyle/>
+          <a:p>
+            <a:pPr algn="ctr" indent="0" marL="0">
+              <a:buNone/>
+            </a:pPr>
+            <a:r>
+              <a:rPr lang="en-US" sz="1250" b="1" dirty="0">
+                <a:solidFill>
+                  <a:srgbClr val="FFFFFF"/>
+                </a:solidFill>
+                <a:latin typeface="Arial" pitchFamily="34" charset="0"/>
+                <a:ea typeface="Arial" pitchFamily="34" charset="-122"/>
+                <a:cs typeface="Arial" pitchFamily="34" charset="-120"/>
+              </a:rPr>
+              <a:t>3</a:t>
+            </a:r>
+            <a:endParaRPr lang="en-US" sz="1250" dirty="0"/>
+          </a:p>
+        </p:txBody>
+      </p:sp>
+      <p:sp>
+        <p:nvSpPr>
+          <p:cNvPr id="23" name="Text 19"/>
+          <p:cNvSpPr/>
+          <p:nvPr/>
+        </p:nvSpPr>
+        <p:spPr>
+          <a:xfrm>
+            <a:off x="1152227" y="3232398"/>
+            <a:ext cx="1943100" cy="429220"/>
+          </a:xfrm>
+          <a:prstGeom prst="rect">
+            <a:avLst/>
+          </a:prstGeom>
+          <a:noFill/>
+          <a:ln/>
+        </p:spPr>
+        <p:txBody>
+          <a:bodyPr wrap="square" lIns="0" tIns="0" rIns="0" bIns="0" rtlCol="0" anchor="t"/>
+          <a:lstStyle/>
+          <a:p>
+            <a:pPr algn="l" indent="0" marL="0">
+              <a:lnSpc>
+                <a:spcPts val="1690"/>
+              </a:lnSpc>
+              <a:buNone/>
+            </a:pPr>
+            <a:r>
+              <a:rPr lang="en-US" sz="1500" b="1" dirty="0">
+                <a:solidFill>
+                  <a:srgbClr val="1F2328"/>
+                </a:solidFill>
+                <a:latin typeface="Arial" pitchFamily="34" charset="0"/>
+                <a:ea typeface="Arial" pitchFamily="34" charset="-122"/>
+                <a:cs typeface="Arial" pitchFamily="34" charset="-120"/>
+              </a:rPr>
+              <a:t>Implement and inspect</a:t>
+            </a:r>
+            <a:endParaRPr lang="en-US" sz="1500" dirty="0"/>
+          </a:p>
+        </p:txBody>
+      </p:sp>
+      <p:sp>
+        <p:nvSpPr>
+          <p:cNvPr id="24" name="Text 20"/>
+          <p:cNvSpPr/>
+          <p:nvPr/>
+        </p:nvSpPr>
+        <p:spPr>
+          <a:xfrm>
+            <a:off x="3234928" y="3239988"/>
+            <a:ext cx="2468192" cy="414040"/>
+          </a:xfrm>
+          <a:prstGeom prst="rect">
+            <a:avLst/>
+          </a:prstGeom>
+          <a:noFill/>
+          <a:ln/>
+        </p:spPr>
+        <p:txBody>
+          <a:bodyPr wrap="square" lIns="0" tIns="0" rIns="0" bIns="0" rtlCol="0" anchor="t"/>
+          <a:lstStyle/>
+          <a:p>
+            <a:pPr algn="l" indent="0" marL="0">
+              <a:lnSpc>
+                <a:spcPts val="1630"/>
+              </a:lnSpc>
+              <a:buNone/>
+            </a:pPr>
+            <a:r>
+              <a:rPr lang="en-US" sz="1400" dirty="0">
+                <a:solidFill>
+                  <a:srgbClr val="59636E"/>
+                </a:solidFill>
+                <a:latin typeface="Arial" pitchFamily="34" charset="0"/>
+                <a:ea typeface="Arial" pitchFamily="34" charset="-122"/>
+                <a:cs typeface="Arial" pitchFamily="34" charset="-120"/>
+              </a:rPr>
+              <a:t>Check the diff and both themes.</a:t>
+            </a:r>
+            <a:endParaRPr lang="en-US" sz="1400" dirty="0"/>
+          </a:p>
+        </p:txBody>
+      </p:sp>
+      <p:sp>
+        <p:nvSpPr>
+          <p:cNvPr id="25" name="Text 21"/>
+          <p:cNvSpPr/>
+          <p:nvPr/>
+        </p:nvSpPr>
+        <p:spPr>
+          <a:xfrm>
+            <a:off x="695176" y="3976539"/>
+            <a:ext cx="279350" cy="279350"/>
+          </a:xfrm>
+          <a:prstGeom prst="roundRect">
+            <a:avLst>
+              <a:gd name="adj" fmla="val 327331"/>
+            </a:avLst>
+          </a:prstGeom>
+          <a:solidFill>
+            <a:srgbClr val="BC4C00"/>
+          </a:solidFill>
+          <a:ln/>
+        </p:spPr>
+        <p:txBody>
+          <a:bodyPr wrap="square" rtlCol="0" anchor="ctr"/>
+          <a:lstStyle/>
+          <a:p>
+            <a:pPr indent="0" marL="0">
+              <a:buNone/>
+            </a:pPr>
+            <a:endParaRPr lang="en-US" dirty="0"/>
+          </a:p>
+        </p:txBody>
+      </p:sp>
+      <p:sp>
+        <p:nvSpPr>
+          <p:cNvPr id="26" name="Text 22"/>
+          <p:cNvSpPr/>
+          <p:nvPr/>
+        </p:nvSpPr>
+        <p:spPr>
+          <a:xfrm>
+            <a:off x="789841" y="4020889"/>
+            <a:ext cx="90020" cy="190500"/>
+          </a:xfrm>
+          <a:prstGeom prst="rect">
+            <a:avLst/>
+          </a:prstGeom>
+          <a:noFill/>
+          <a:ln/>
+        </p:spPr>
+        <p:txBody>
+          <a:bodyPr wrap="square" lIns="0" tIns="0" rIns="0" bIns="0" rtlCol="0" anchor="t"/>
+          <a:lstStyle/>
+          <a:p>
+            <a:pPr algn="ctr" indent="0" marL="0">
+              <a:buNone/>
+            </a:pPr>
+            <a:r>
+              <a:rPr lang="en-US" sz="1250" b="1" dirty="0">
+                <a:solidFill>
+                  <a:srgbClr val="FFFFFF"/>
+                </a:solidFill>
+                <a:latin typeface="Arial" pitchFamily="34" charset="0"/>
+                <a:ea typeface="Arial" pitchFamily="34" charset="-122"/>
+                <a:cs typeface="Arial" pitchFamily="34" charset="-120"/>
+              </a:rPr>
+              <a:t>4</a:t>
+            </a:r>
+            <a:endParaRPr lang="en-US" sz="1250" dirty="0"/>
+          </a:p>
+        </p:txBody>
+      </p:sp>
+      <p:sp>
+        <p:nvSpPr>
+          <p:cNvPr id="27" name="Text 23"/>
+          <p:cNvSpPr/>
+          <p:nvPr/>
+        </p:nvSpPr>
+        <p:spPr>
+          <a:xfrm>
+            <a:off x="1152227" y="4008983"/>
+            <a:ext cx="1943100" cy="214610"/>
+          </a:xfrm>
+          <a:prstGeom prst="rect">
+            <a:avLst/>
+          </a:prstGeom>
+          <a:noFill/>
+          <a:ln/>
+        </p:spPr>
+        <p:txBody>
+          <a:bodyPr wrap="square" lIns="0" tIns="0" rIns="0" bIns="0" rtlCol="0" anchor="t"/>
+          <a:lstStyle/>
+          <a:p>
+            <a:pPr algn="l" indent="0" marL="0">
+              <a:lnSpc>
+                <a:spcPts val="1690"/>
+              </a:lnSpc>
+              <a:buNone/>
+            </a:pPr>
+            <a:r>
+              <a:rPr lang="en-US" sz="1500" b="1" dirty="0">
+                <a:solidFill>
+                  <a:srgbClr val="1F2328"/>
+                </a:solidFill>
+                <a:latin typeface="Arial" pitchFamily="34" charset="0"/>
+                <a:ea typeface="Arial" pitchFamily="34" charset="-122"/>
+                <a:cs typeface="Arial" pitchFamily="34" charset="-120"/>
+              </a:rPr>
+              <a:t>Validate and recap</a:t>
+            </a:r>
+            <a:endParaRPr lang="en-US" sz="1500" dirty="0"/>
+          </a:p>
+        </p:txBody>
+      </p:sp>
+      <p:sp>
+        <p:nvSpPr>
+          <p:cNvPr id="28" name="Text 24"/>
+          <p:cNvSpPr/>
+          <p:nvPr/>
+        </p:nvSpPr>
+        <p:spPr>
+          <a:xfrm>
+            <a:off x="3234928" y="3899743"/>
+            <a:ext cx="2468192" cy="433090"/>
+          </a:xfrm>
+          <a:prstGeom prst="rect">
+            <a:avLst/>
+          </a:prstGeom>
+          <a:noFill/>
+          <a:ln/>
+        </p:spPr>
+        <p:txBody>
+          <a:bodyPr wrap="square" lIns="0" tIns="0" rIns="0" bIns="0" rtlCol="0" anchor="t"/>
+          <a:lstStyle/>
+          <a:p>
+            <a:pPr algn="l" indent="0" marL="0">
+              <a:lnSpc>
+                <a:spcPts val="1630"/>
+              </a:lnSpc>
+              <a:buNone/>
+            </a:pPr>
+            <a:r>
+              <a:rPr lang="en-US" sz="1400" dirty="0">
+                <a:solidFill>
+                  <a:srgbClr val="59636E"/>
+                </a:solidFill>
+                <a:latin typeface="Arial" pitchFamily="34" charset="0"/>
+                <a:ea typeface="Arial" pitchFamily="34" charset="-122"/>
+                <a:cs typeface="Arial" pitchFamily="34" charset="-120"/>
+              </a:rPr>
+              <a:t>Tests, build, then </a:t>
+            </a:r>
+            <a:pPr algn="l" indent="0" marL="0">
+              <a:lnSpc>
+                <a:spcPts val="1630"/>
+              </a:lnSpc>
+              <a:buNone/>
+            </a:pPr>
+            <a:r>
+              <a:rPr lang="en-US" sz="1400" b="1" dirty="0">
+                <a:solidFill>
+                  <a:srgbClr val="0550AE"/>
+                </a:solidFill>
+                <a:latin typeface="Courier New" pitchFamily="34" charset="0"/>
+                <a:ea typeface="Courier New" pitchFamily="34" charset="-122"/>
+                <a:cs typeface="Courier New" pitchFamily="34" charset="-120"/>
+              </a:rPr>
+              <a:t>/chronicle standup</a:t>
+            </a:r>
+            <a:pPr algn="l" indent="0" marL="0">
+              <a:lnSpc>
+                <a:spcPts val="1630"/>
+              </a:lnSpc>
+              <a:buNone/>
+            </a:pPr>
+            <a:r>
+              <a:rPr lang="en-US" sz="1400" dirty="0">
+                <a:solidFill>
+                  <a:srgbClr val="59636E"/>
+                </a:solidFill>
+                <a:latin typeface="Arial" pitchFamily="34" charset="0"/>
+                <a:ea typeface="Arial" pitchFamily="34" charset="-122"/>
+                <a:cs typeface="Arial" pitchFamily="34" charset="-120"/>
+              </a:rPr>
+              <a:t>.</a:t>
+            </a:r>
+            <a:endParaRPr lang="en-US" sz="1400" dirty="0"/>
+          </a:p>
+        </p:txBody>
+      </p:sp>
+      <p:sp>
+        <p:nvSpPr>
+          <p:cNvPr id="29" name="Text 25"/>
+          <p:cNvSpPr/>
+          <p:nvPr/>
+        </p:nvSpPr>
+        <p:spPr>
+          <a:xfrm>
+            <a:off x="6045101" y="1766143"/>
+            <a:ext cx="2590800" cy="2690515"/>
+          </a:xfrm>
+          <a:prstGeom prst="roundRect">
+            <a:avLst>
+              <a:gd name="adj" fmla="val 4902"/>
+            </a:avLst>
+          </a:prstGeom>
+          <a:solidFill>
+            <a:srgbClr val="FFFFFF"/>
+          </a:solidFill>
+          <a:ln w="9525">
+            <a:solidFill>
+              <a:srgbClr val="FFC49B"/>
+            </a:solidFill>
+          </a:ln>
+        </p:spPr>
+        <p:txBody>
+          <a:bodyPr wrap="square" rtlCol="0" anchor="ctr"/>
+          <a:lstStyle/>
+          <a:p>
+            <a:pPr indent="0" marL="0">
+              <a:buNone/>
+            </a:pPr>
+            <a:endParaRPr lang="en-US" dirty="0"/>
+          </a:p>
+        </p:txBody>
+      </p:sp>
+      <p:sp>
+        <p:nvSpPr>
+          <p:cNvPr id="30" name="Text 26"/>
+          <p:cNvSpPr/>
+          <p:nvPr/>
+        </p:nvSpPr>
+        <p:spPr>
+          <a:xfrm>
+            <a:off x="6232327" y="1953369"/>
+            <a:ext cx="381000" cy="381000"/>
+          </a:xfrm>
+          <a:prstGeom prst="roundRect">
+            <a:avLst>
+              <a:gd name="adj" fmla="val 23333"/>
+            </a:avLst>
+          </a:prstGeom>
+          <a:solidFill>
+            <a:srgbClr val="FFF1E5"/>
+          </a:solidFill>
+          <a:ln/>
+        </p:spPr>
+        <p:txBody>
+          <a:bodyPr wrap="square" rtlCol="0" anchor="ctr"/>
+          <a:lstStyle/>
+          <a:p>
+            <a:pPr indent="0" marL="0">
+              <a:buNone/>
+            </a:pPr>
+            <a:endParaRPr lang="en-US" dirty="0"/>
+          </a:p>
+        </p:txBody>
+      </p:sp>
+      <p:pic>
+        <p:nvPicPr>
+          <p:cNvPr id="31" name="Image 2" descr="/Users/danwahlin/.copilot/session-state/56a7a0da-def8-48d4-b5e8-0ac3878cb8dd/files/slides-build/icons/GoGoal-BC4C00.png">    </p:cNvPr>
+          <p:cNvPicPr>
+            <a:picLocks noChangeAspect="1"/>
+          </p:cNvPicPr>
+          <p:nvPr/>
+        </p:nvPicPr>
+        <p:blipFill>
+          <a:blip r:embed="rId4"/>
+          <a:stretch>
+            <a:fillRect/>
+          </a:stretch>
+        </p:blipFill>
+        <p:spPr>
+          <a:xfrm>
+            <a:off x="6314926" y="2035969"/>
+            <a:ext cx="215801" cy="215801"/>
+          </a:xfrm>
+          <a:prstGeom prst="rect">
+            <a:avLst/>
+          </a:prstGeom>
+        </p:spPr>
+      </p:pic>
+      <p:sp>
+        <p:nvSpPr>
+          <p:cNvPr id="32" name="Text 27"/>
+          <p:cNvSpPr/>
+          <p:nvPr/>
+        </p:nvSpPr>
+        <p:spPr>
+          <a:xfrm>
+            <a:off x="6727627" y="2029569"/>
+            <a:ext cx="867564" cy="228600"/>
+          </a:xfrm>
+          <a:prstGeom prst="rect">
+            <a:avLst/>
+          </a:prstGeom>
+          <a:noFill/>
+          <a:ln/>
+        </p:spPr>
+        <p:txBody>
+          <a:bodyPr wrap="square" lIns="0" tIns="0" rIns="0" bIns="0" rtlCol="0" anchor="t"/>
+          <a:lstStyle/>
+          <a:p>
+            <a:pPr algn="l" indent="0" marL="0">
+              <a:lnSpc>
+                <a:spcPts val="1800"/>
+              </a:lnSpc>
+              <a:buNone/>
+            </a:pPr>
+            <a:r>
+              <a:rPr lang="en-US" sz="1650" b="1" dirty="0">
+                <a:solidFill>
+                  <a:srgbClr val="1F2328"/>
+                </a:solidFill>
+                <a:latin typeface="Arial" pitchFamily="34" charset="0"/>
+                <a:ea typeface="Arial" pitchFamily="34" charset="-122"/>
+                <a:cs typeface="Arial" pitchFamily="34" charset="-120"/>
+              </a:rPr>
+              <a:t>Success</a:t>
+            </a:r>
+            <a:endParaRPr lang="en-US" sz="1650" dirty="0"/>
+          </a:p>
+        </p:txBody>
+      </p:sp>
+      <p:sp>
+        <p:nvSpPr>
+          <p:cNvPr id="33" name="Text 28"/>
+          <p:cNvSpPr/>
+          <p:nvPr/>
+        </p:nvSpPr>
+        <p:spPr>
+          <a:xfrm>
+            <a:off x="6232327" y="2410569"/>
+            <a:ext cx="2260675" cy="867966"/>
+          </a:xfrm>
+          <a:prstGeom prst="rect">
+            <a:avLst/>
+          </a:prstGeom>
+          <a:noFill/>
+          <a:ln/>
+        </p:spPr>
+        <p:txBody>
+          <a:bodyPr wrap="square" lIns="0" tIns="0" rIns="0" bIns="0" rtlCol="0" anchor="t"/>
+          <a:lstStyle/>
+          <a:p>
+            <a:pPr algn="l" indent="0" marL="0">
+              <a:lnSpc>
+                <a:spcPts val="1690"/>
+              </a:lnSpc>
+              <a:buNone/>
+            </a:pPr>
+            <a:r>
+              <a:rPr lang="en-US" sz="1400" dirty="0">
+                <a:solidFill>
+                  <a:srgbClr val="59636E"/>
+                </a:solidFill>
+                <a:latin typeface="Arial" pitchFamily="34" charset="0"/>
+                <a:ea typeface="Arial" pitchFamily="34" charset="-122"/>
+                <a:cs typeface="Arial" pitchFamily="34" charset="-120"/>
+              </a:rPr>
+              <a:t>You can name the branch, the context you attached, and your evidence. </a:t>
+            </a:r>
+            <a:pPr algn="l" indent="0" marL="0">
+              <a:lnSpc>
+                <a:spcPts val="1690"/>
+              </a:lnSpc>
+              <a:buNone/>
+            </a:pPr>
+            <a:r>
+              <a:rPr lang="en-US" sz="1400" b="1" dirty="0">
+                <a:solidFill>
+                  <a:srgbClr val="0550AE"/>
+                </a:solidFill>
+                <a:latin typeface="Courier New" pitchFamily="34" charset="0"/>
+                <a:ea typeface="Courier New" pitchFamily="34" charset="-122"/>
+                <a:cs typeface="Courier New" pitchFamily="34" charset="-120"/>
+              </a:rPr>
+              <a:t>main</a:t>
+            </a:r>
+            <a:pPr algn="l" indent="0" marL="0">
+              <a:lnSpc>
+                <a:spcPts val="1690"/>
+              </a:lnSpc>
+              <a:buNone/>
+            </a:pPr>
+            <a:r>
+              <a:rPr lang="en-US" sz="1400" b="1" dirty="0">
+                <a:solidFill>
+                  <a:srgbClr val="59636E"/>
+                </a:solidFill>
+                <a:latin typeface="Arial" pitchFamily="34" charset="0"/>
+                <a:ea typeface="Arial" pitchFamily="34" charset="-122"/>
+                <a:cs typeface="Arial" pitchFamily="34" charset="-120"/>
+              </a:rPr>
+              <a:t> does not change.</a:t>
+            </a:r>
+            <a:endParaRPr lang="en-US" sz="1400" dirty="0"/>
+          </a:p>
+        </p:txBody>
+      </p:sp>
+    </p:spTree>
+  </p:cSld>
+  <p:clrMapOvr>
+    <a:masterClrMapping/>
+  </p:clrMapOvr>
+</p:sld>
+</file>
+
+<file path=ppt/slides/slide15.xml><?xml version="1.0" encoding="utf-8"?>
+<p:sld xmlns:a="http://schemas.openxmlformats.org/drawingml/2006/main" xmlns:r="http://schemas.openxmlformats.org/officeDocument/2006/relationships" xmlns:p="http://schemas.openxmlformats.org/presentationml/2006/main">
+  <p:cSld name="Slide 15">
+    <p:bg>
+      <p:bgPr>
+        <a:solidFill>
+          <a:srgbClr val="FFFFFF"/>
+        </a:solidFill>
+      </p:bgPr>
+    </p:bg>
+    <p:spTree>
+      <p:nvGrpSpPr>
+        <p:cNvPr id="1" name=""/>
+        <p:cNvGrpSpPr/>
+        <p:nvPr/>
+      </p:nvGrpSpPr>
+      <p:grpSpPr>
+        <a:xfrm>
+          <a:off x="0" y="0"/>
+          <a:ext cx="0" cy="0"/>
+          <a:chOff x="0" y="0"/>
+          <a:chExt cx="0" cy="0"/>
+        </a:xfrm>
+      </p:grpSpPr>
+      <p:pic>
+        <p:nvPicPr>
+          <p:cNvPr id="2" name="Image 0" descr="/Users/danwahlin/.copilot/session-state/56a7a0da-def8-48d4-b5e8-0ac3878cb8dd/files/slides-build/img/grad-corner-pattern.png">    </p:cNvPr>
+          <p:cNvPicPr>
+            <a:picLocks noChangeAspect="1"/>
+          </p:cNvPicPr>
+          <p:nvPr/>
+        </p:nvPicPr>
+        <p:blipFill>
+          <a:blip r:embed="rId1"/>
+          <a:stretch>
+            <a:fillRect/>
+          </a:stretch>
+        </p:blipFill>
+        <p:spPr>
+          <a:xfrm>
+            <a:off x="6349901" y="0"/>
+            <a:ext cx="2793950" cy="1308050"/>
+          </a:xfrm>
+          <a:prstGeom prst="rect">
+            <a:avLst/>
+          </a:prstGeom>
+        </p:spPr>
+      </p:pic>
+      <p:sp>
+        <p:nvSpPr>
+          <p:cNvPr id="3" name="Text 0"/>
+          <p:cNvSpPr/>
+          <p:nvPr/>
+        </p:nvSpPr>
+        <p:spPr>
+          <a:xfrm>
+            <a:off x="7340501" y="177701"/>
+            <a:ext cx="1168301" cy="279350"/>
+          </a:xfrm>
+          <a:prstGeom prst="roundRect">
+            <a:avLst>
+              <a:gd name="adj" fmla="val 22731"/>
+            </a:avLst>
+          </a:prstGeom>
+          <a:solidFill>
+            <a:srgbClr val="1A7F37"/>
+          </a:solidFill>
+          <a:ln/>
+        </p:spPr>
+        <p:txBody>
+          <a:bodyPr wrap="square" rtlCol="0" anchor="ctr"/>
+          <a:lstStyle/>
+          <a:p>
+            <a:pPr indent="0" marL="0">
+              <a:buNone/>
+            </a:pPr>
+            <a:endParaRPr lang="en-US" dirty="0"/>
+          </a:p>
+        </p:txBody>
+      </p:sp>
+      <p:sp>
+        <p:nvSpPr>
+          <p:cNvPr id="4" name="Text 1"/>
+          <p:cNvSpPr/>
+          <p:nvPr/>
+        </p:nvSpPr>
+        <p:spPr>
+          <a:xfrm>
+            <a:off x="7461041" y="231577"/>
+            <a:ext cx="927071" cy="171450"/>
+          </a:xfrm>
+          <a:prstGeom prst="rect">
+            <a:avLst/>
+          </a:prstGeom>
+          <a:noFill/>
+          <a:ln/>
+        </p:spPr>
+        <p:txBody>
+          <a:bodyPr wrap="square" lIns="0" tIns="0" rIns="0" bIns="0" rtlCol="0" anchor="t"/>
+          <a:lstStyle/>
+          <a:p>
+            <a:pPr algn="ctr" indent="0" marL="0">
+              <a:buNone/>
+            </a:pPr>
+            <a:r>
+              <a:rPr lang="en-US" sz="1150" b="1" dirty="0">
+                <a:solidFill>
+                  <a:srgbClr val="FFFFFF"/>
+                </a:solidFill>
+                <a:latin typeface="Arial" pitchFamily="34" charset="0"/>
+                <a:ea typeface="Arial" pitchFamily="34" charset="-122"/>
+                <a:cs typeface="Arial" pitchFamily="34" charset="-120"/>
+              </a:rPr>
+              <a:t>CHAPTER 02</a:t>
+            </a:r>
+            <a:endParaRPr lang="en-US" sz="1150" dirty="0"/>
+          </a:p>
+        </p:txBody>
+      </p:sp>
+      <p:pic>
+        <p:nvPicPr>
+          <p:cNvPr id="5" name="Image 1" descr="/Users/danwahlin/.copilot/session-state/56a7a0da-def8-48d4-b5e8-0ac3878cb8dd/files/slides-build/icons/FaGithub-1F2328.png">
+            <a:hlinkClick r:id="rId3" tooltip="https://github.com/github/copilot-app-for-beginners/tree/main/02-sessions-worktrees-context"/>
+          </p:cNvPr>
+          <p:cNvPicPr>
+            <a:picLocks noChangeAspect="1"/>
+          </p:cNvPicPr>
+          <p:nvPr/>
+        </p:nvPicPr>
+        <p:blipFill>
+          <a:blip r:embed="rId2"/>
+          <a:stretch>
+            <a:fillRect/>
+          </a:stretch>
+        </p:blipFill>
+        <p:spPr>
+          <a:xfrm>
+            <a:off x="8610600" y="165050"/>
+            <a:ext cx="304800" cy="304800"/>
+          </a:xfrm>
+          <a:prstGeom prst="rect">
+            <a:avLst/>
+          </a:prstGeom>
+        </p:spPr>
+      </p:pic>
+      <p:sp>
+        <p:nvSpPr>
+          <p:cNvPr id="6" name="Text 2"/>
+          <p:cNvSpPr/>
+          <p:nvPr/>
+        </p:nvSpPr>
+        <p:spPr>
+          <a:xfrm>
+            <a:off x="507950" y="381000"/>
+            <a:ext cx="8161020" cy="190500"/>
+          </a:xfrm>
+          <a:prstGeom prst="rect">
+            <a:avLst/>
+          </a:prstGeom>
+          <a:noFill/>
+          <a:ln/>
+        </p:spPr>
+        <p:txBody>
+          <a:bodyPr wrap="square" lIns="0" tIns="0" rIns="0" bIns="0" rtlCol="0" anchor="t"/>
+          <a:lstStyle/>
+          <a:p>
+            <a:pPr algn="l" indent="0" marL="0">
+              <a:buNone/>
+            </a:pPr>
+            <a:r>
+              <a:rPr lang="en-US" sz="1250" b="1" dirty="0">
+                <a:solidFill>
+                  <a:srgbClr val="1A7F37"/>
+                </a:solidFill>
+                <a:latin typeface="Arial" pitchFamily="34" charset="0"/>
+                <a:ea typeface="Arial" pitchFamily="34" charset="-122"/>
+                <a:cs typeface="Arial" pitchFamily="34" charset="-120"/>
+              </a:rPr>
               <a:t>KEY TAKEAWAYS</a:t>
             </a:r>
             <a:endParaRPr lang="en-US" sz="1250" dirty="0"/>
@@ -11828,7 +12330,7 @@
         <p:spPr>
           <a:xfrm>
             <a:off x="507950" y="1574750"/>
-            <a:ext cx="1910655" cy="2362200"/>
+            <a:ext cx="1910655" cy="2158901"/>
           </a:xfrm>
           <a:prstGeom prst="roundRect">
             <a:avLst>
@@ -11973,7 +12475,7 @@
         </p:nvSpPr>
         <p:spPr>
           <a:xfrm>
-            <a:off x="695176" y="3209925"/>
+            <a:off x="695176" y="3006626"/>
             <a:ext cx="1536204" cy="514350"/>
           </a:xfrm>
           <a:prstGeom prst="roundRect">
@@ -12005,7 +12507,7 @@
         </p:nvSpPr>
         <p:spPr>
           <a:xfrm>
-            <a:off x="796677" y="3286125"/>
+            <a:off x="796677" y="3082826"/>
             <a:ext cx="1359866" cy="361950"/>
           </a:xfrm>
           <a:prstGeom prst="rect">
@@ -12045,7 +12547,7 @@
         <p:spPr>
           <a:xfrm>
             <a:off x="2596307" y="1574750"/>
-            <a:ext cx="1894731" cy="2362200"/>
+            <a:ext cx="1894731" cy="2158901"/>
           </a:xfrm>
           <a:prstGeom prst="roundRect">
             <a:avLst>
@@ -12190,7 +12692,7 @@
         </p:nvSpPr>
         <p:spPr>
           <a:xfrm>
-            <a:off x="2783532" y="3390900"/>
+            <a:off x="2783532" y="3187601"/>
             <a:ext cx="1520279" cy="333375"/>
           </a:xfrm>
           <a:prstGeom prst="roundRect">
@@ -12222,7 +12724,7 @@
         </p:nvSpPr>
         <p:spPr>
           <a:xfrm>
-            <a:off x="2885033" y="3467100"/>
+            <a:off x="2885033" y="3263801"/>
             <a:ext cx="1343623" cy="180975"/>
           </a:xfrm>
           <a:prstGeom prst="rect">
@@ -12262,7 +12764,7 @@
         <p:spPr>
           <a:xfrm>
             <a:off x="4668738" y="1574750"/>
-            <a:ext cx="1894731" cy="2362200"/>
+            <a:ext cx="1894731" cy="2158901"/>
           </a:xfrm>
           <a:prstGeom prst="roundRect">
             <a:avLst>
@@ -12298,11 +12800,11 @@
         <p:spPr>
           <a:xfrm>
             <a:off x="4855964" y="1787426"/>
-            <a:ext cx="584150" cy="584150"/>
+            <a:ext cx="584150" cy="469999"/>
           </a:xfrm>
           <a:prstGeom prst="roundRect">
             <a:avLst>
-              <a:gd name="adj" fmla="val 21741"/>
+              <a:gd name="adj" fmla="val 27021"/>
             </a:avLst>
           </a:prstGeom>
           <a:solidFill>
@@ -12329,7 +12831,7 @@
         </p:nvSpPr>
         <p:spPr>
           <a:xfrm>
-            <a:off x="5039121" y="1879402"/>
+            <a:off x="5039121" y="1822400"/>
             <a:ext cx="217688" cy="400050"/>
           </a:xfrm>
           <a:prstGeom prst="rect">
@@ -12368,7 +12870,7 @@
         </p:nvSpPr>
         <p:spPr>
           <a:xfrm>
-            <a:off x="4855964" y="2498527"/>
+            <a:off x="4855964" y="2384375"/>
             <a:ext cx="1550685" cy="495300"/>
           </a:xfrm>
           <a:prstGeom prst="rect">
@@ -12407,7 +12909,7 @@
         </p:nvSpPr>
         <p:spPr>
           <a:xfrm>
-            <a:off x="4855964" y="3209925"/>
+            <a:off x="4855964" y="3006626"/>
             <a:ext cx="1520279" cy="514350"/>
           </a:xfrm>
           <a:prstGeom prst="roundRect">
@@ -12439,7 +12941,7 @@
         </p:nvSpPr>
         <p:spPr>
           <a:xfrm>
-            <a:off x="4957465" y="3286125"/>
+            <a:off x="4957465" y="3082826"/>
             <a:ext cx="1343623" cy="361950"/>
           </a:xfrm>
           <a:prstGeom prst="rect">
@@ -12479,7 +12981,7 @@
         <p:spPr>
           <a:xfrm>
             <a:off x="6741170" y="1574750"/>
-            <a:ext cx="1894731" cy="2362200"/>
+            <a:ext cx="1894731" cy="2158901"/>
           </a:xfrm>
           <a:prstGeom prst="roundRect">
             <a:avLst>
@@ -12624,7 +13126,7 @@
         </p:nvSpPr>
         <p:spPr>
           <a:xfrm>
-            <a:off x="6928396" y="3209925"/>
+            <a:off x="6928396" y="3006626"/>
             <a:ext cx="1520279" cy="514350"/>
           </a:xfrm>
           <a:prstGeom prst="roundRect">
@@ -12656,7 +13158,7 @@
         </p:nvSpPr>
         <p:spPr>
           <a:xfrm>
-            <a:off x="7029896" y="3286125"/>
+            <a:off x="7029896" y="3082826"/>
             <a:ext cx="1343623" cy="361950"/>
           </a:xfrm>
           <a:prstGeom prst="rect">
@@ -12684,6 +13186,142 @@
               <a:t>&amp; then pick one</a:t>
             </a:r>
             <a:endParaRPr lang="en-US" sz="1250" dirty="0"/>
+          </a:p>
+        </p:txBody>
+      </p:sp>
+      <p:sp>
+        <p:nvSpPr>
+          <p:cNvPr id="33" name="Text 29"/>
+          <p:cNvSpPr/>
+          <p:nvPr/>
+        </p:nvSpPr>
+        <p:spPr>
+          <a:xfrm>
+            <a:off x="507950" y="3911352"/>
+            <a:ext cx="8127950" cy="496491"/>
+          </a:xfrm>
+          <a:prstGeom prst="roundRect">
+            <a:avLst>
+              <a:gd name="adj" fmla="val 20464"/>
+            </a:avLst>
+          </a:prstGeom>
+          <a:solidFill>
+            <a:srgbClr val="DDF4FF"/>
+          </a:solidFill>
+          <a:ln w="9525">
+            <a:solidFill>
+              <a:srgbClr val="9CD7FF"/>
+            </a:solidFill>
+          </a:ln>
+        </p:spPr>
+        <p:txBody>
+          <a:bodyPr wrap="square" rtlCol="0" anchor="ctr"/>
+          <a:lstStyle/>
+          <a:p>
+            <a:pPr indent="0" marL="0">
+              <a:buNone/>
+            </a:pPr>
+            <a:endParaRPr lang="en-US" dirty="0"/>
+          </a:p>
+        </p:txBody>
+      </p:sp>
+      <p:pic>
+        <p:nvPicPr>
+          <p:cNvPr id="34" name="Image 2" descr="/Users/danwahlin/.copilot/session-state/56a7a0da-def8-48d4-b5e8-0ac3878cb8dd/files/slides-build/icons/GoUpload-0969DA.png">    </p:cNvPr>
+          <p:cNvPicPr>
+            <a:picLocks noChangeAspect="1"/>
+          </p:cNvPicPr>
+          <p:nvPr/>
+        </p:nvPicPr>
+        <p:blipFill>
+          <a:blip r:embed="rId4"/>
+          <a:stretch>
+            <a:fillRect/>
+          </a:stretch>
+        </p:blipFill>
+        <p:spPr>
+          <a:xfrm>
+            <a:off x="695176" y="4057948"/>
+            <a:ext cx="203150" cy="203150"/>
+          </a:xfrm>
+          <a:prstGeom prst="rect">
+            <a:avLst/>
+          </a:prstGeom>
+        </p:spPr>
+      </p:pic>
+      <p:sp>
+        <p:nvSpPr>
+          <p:cNvPr id="35" name="Text 30"/>
+          <p:cNvSpPr/>
+          <p:nvPr/>
+        </p:nvSpPr>
+        <p:spPr>
+          <a:xfrm>
+            <a:off x="1025277" y="4047827"/>
+            <a:ext cx="7373457" cy="223540"/>
+          </a:xfrm>
+          <a:prstGeom prst="rect">
+            <a:avLst/>
+          </a:prstGeom>
+          <a:noFill/>
+          <a:ln/>
+        </p:spPr>
+        <p:txBody>
+          <a:bodyPr wrap="square" lIns="0" tIns="0" rIns="0" bIns="0" rtlCol="0" anchor="t"/>
+          <a:lstStyle/>
+          <a:p>
+            <a:pPr algn="l" indent="0" marL="0">
+              <a:lnSpc>
+                <a:spcPts val="1760"/>
+              </a:lnSpc>
+              <a:buNone/>
+            </a:pPr>
+            <a:r>
+              <a:rPr lang="en-US" sz="1450" dirty="0">
+                <a:solidFill>
+                  <a:srgbClr val="1F2328"/>
+                </a:solidFill>
+                <a:latin typeface="Arial" pitchFamily="34" charset="0"/>
+                <a:ea typeface="Arial" pitchFamily="34" charset="-122"/>
+                <a:cs typeface="Arial" pitchFamily="34" charset="-120"/>
+              </a:rPr>
+              <a:t>You can also </a:t>
+            </a:r>
+            <a:pPr algn="l" indent="0" marL="0">
+              <a:lnSpc>
+                <a:spcPts val="1760"/>
+              </a:lnSpc>
+              <a:buNone/>
+            </a:pPr>
+            <a:r>
+              <a:rPr lang="en-US" sz="1450" b="1" dirty="0">
+                <a:solidFill>
+                  <a:srgbClr val="1F2328"/>
+                </a:solidFill>
+                <a:latin typeface="Arial" pitchFamily="34" charset="0"/>
+                <a:ea typeface="Arial" pitchFamily="34" charset="-122"/>
+                <a:cs typeface="Arial" pitchFamily="34" charset="-120"/>
+              </a:rPr>
+              <a:t>drag files</a:t>
+            </a:r>
+            <a:pPr algn="l" indent="0" marL="0">
+              <a:lnSpc>
+                <a:spcPts val="1760"/>
+              </a:lnSpc>
+              <a:buNone/>
+            </a:pPr>
+            <a:r>
+              <a:rPr lang="en-US" sz="1450" dirty="0">
+                <a:solidFill>
+                  <a:srgbClr val="1F2328"/>
+                </a:solidFill>
+                <a:latin typeface="Arial" pitchFamily="34" charset="0"/>
+                <a:ea typeface="Arial" pitchFamily="34" charset="-122"/>
+                <a:cs typeface="Arial" pitchFamily="34" charset="-120"/>
+              </a:rPr>
+              <a:t> from your computer onto a session in the sidebar to attach them.</a:t>
+            </a:r>
+            <a:endParaRPr lang="en-US" sz="1450" dirty="0"/>
           </a:p>
         </p:txBody>
       </p:sp>
@@ -12719,111 +13357,9 @@
           <a:chExt cx="0" cy="0"/>
         </a:xfrm>
       </p:grpSpPr>
-      <p:sp>
-        <p:nvSpPr>
-          <p:cNvPr id="2" name="Text 0"/>
-          <p:cNvSpPr/>
-          <p:nvPr/>
-        </p:nvSpPr>
-        <p:spPr>
-          <a:xfrm>
-            <a:off x="0" y="0"/>
-            <a:ext cx="9144000" cy="5143500"/>
-          </a:xfrm>
-          <a:prstGeom prst="rect">
-            <a:avLst/>
-          </a:prstGeom>
-          <a:solidFill>
-            <a:srgbClr val="F0FBF3"/>
-          </a:solidFill>
-          <a:ln/>
-        </p:spPr>
-        <p:txBody>
-          <a:bodyPr wrap="square" rtlCol="0" anchor="ctr"/>
-          <a:lstStyle/>
-          <a:p>
-            <a:pPr indent="0" marL="0">
-              <a:buNone/>
-            </a:pPr>
-            <a:endParaRPr lang="en-US" dirty="0"/>
-          </a:p>
-        </p:txBody>
-      </p:sp>
-      <p:sp>
-        <p:nvSpPr>
-          <p:cNvPr id="3" name="Text 1"/>
-          <p:cNvSpPr/>
-          <p:nvPr/>
-        </p:nvSpPr>
-        <p:spPr>
-          <a:xfrm>
-            <a:off x="0" y="0"/>
-            <a:ext cx="152400" cy="5143500"/>
-          </a:xfrm>
-          <a:prstGeom prst="rect">
-            <a:avLst/>
-          </a:prstGeom>
-          <a:solidFill>
-            <a:srgbClr val="1A7F37"/>
-          </a:solidFill>
-          <a:ln/>
-        </p:spPr>
-        <p:txBody>
-          <a:bodyPr wrap="square" rtlCol="0" anchor="ctr"/>
-          <a:lstStyle/>
-          <a:p>
-            <a:pPr indent="0" marL="0">
-              <a:buNone/>
-            </a:pPr>
-            <a:endParaRPr lang="en-US" dirty="0"/>
-          </a:p>
-        </p:txBody>
-      </p:sp>
-      <p:sp>
-        <p:nvSpPr>
-          <p:cNvPr id="4" name="Text 2"/>
-          <p:cNvSpPr/>
-          <p:nvPr/>
-        </p:nvSpPr>
-        <p:spPr>
-          <a:xfrm>
-            <a:off x="6040121" y="2412950"/>
-            <a:ext cx="2849829" cy="2159050"/>
-          </a:xfrm>
-          <a:prstGeom prst="rect">
-            <a:avLst/>
-          </a:prstGeom>
-          <a:noFill/>
-          <a:ln/>
-        </p:spPr>
-        <p:txBody>
-          <a:bodyPr wrap="square" lIns="0" tIns="0" rIns="0" bIns="0" rtlCol="0" anchor="t"/>
-          <a:lstStyle/>
-          <a:p>
-            <a:pPr algn="r" indent="0" marL="0">
-              <a:lnSpc>
-                <a:spcPts val="17000"/>
-              </a:lnSpc>
-              <a:buNone/>
-            </a:pPr>
-            <a:r>
-              <a:rPr lang="en-US" sz="15000" b="1" dirty="0">
-                <a:solidFill>
-                  <a:srgbClr val="8CE7A5"/>
-                </a:solidFill>
-                <a:latin typeface="Arial" pitchFamily="34" charset="0"/>
-                <a:ea typeface="Arial" pitchFamily="34" charset="-122"/>
-                <a:cs typeface="Arial" pitchFamily="34" charset="-120"/>
-              </a:rPr>
-              <a:t>03</a:t>
-            </a:r>
-            <a:endParaRPr lang="en-US" sz="15000" dirty="0"/>
-          </a:p>
-        </p:txBody>
-      </p:sp>
       <p:pic>
         <p:nvPicPr>
-          <p:cNvPr id="5" name="Image 0" descr="/Users/danwahlin/.copilot/session-state/56a7a0da-def8-48d4-b5e8-0ac3878cb8dd/files/slides-build/img/grad-corner-pattern.png">    </p:cNvPr>
+          <p:cNvPr id="2" name="Image 0" descr="/Users/danwahlin/.copilot/session-state/56a7a0da-def8-48d4-b5e8-0ac3878cb8dd/files/slides-build/img/grad-corner-pattern.png">    </p:cNvPr>
           <p:cNvPicPr>
             <a:picLocks noChangeAspect="1"/>
           </p:cNvPicPr>
@@ -12847,7 +13383,7 @@
       </p:pic>
       <p:sp>
         <p:nvSpPr>
-          <p:cNvPr id="6" name="Text 3"/>
+          <p:cNvPr id="3" name="Text 0"/>
           <p:cNvSpPr/>
           <p:nvPr/>
         </p:nvSpPr>
@@ -12879,7 +13415,7 @@
       </p:sp>
       <p:sp>
         <p:nvSpPr>
-          <p:cNvPr id="7" name="Text 4"/>
+          <p:cNvPr id="4" name="Text 1"/>
           <p:cNvSpPr/>
           <p:nvPr/>
         </p:nvSpPr>
@@ -12918,7 +13454,7 @@
       </p:sp>
       <p:pic>
         <p:nvPicPr>
-          <p:cNvPr id="8" name="Image 1" descr="/Users/danwahlin/.copilot/session-state/56a7a0da-def8-48d4-b5e8-0ac3878cb8dd/files/slides-build/icons/FaGithub-1F2328.png">
+          <p:cNvPr id="5" name="Image 1" descr="/Users/danwahlin/.copilot/session-state/56a7a0da-def8-48d4-b5e8-0ac3878cb8dd/files/slides-build/icons/FaGithub-1F2328.png">
             <a:hlinkClick r:id="rId3" tooltip="https://github.com/github/copilot-app-for-beginners/tree/main/02-sessions-worktrees-context"/>
           </p:cNvPr>
           <p:cNvPicPr>
@@ -12944,53 +13480,53 @@
       </p:pic>
       <p:sp>
         <p:nvSpPr>
-          <p:cNvPr id="9" name="Text 5"/>
-          <p:cNvSpPr/>
-          <p:nvPr/>
-        </p:nvSpPr>
-        <p:spPr>
-          <a:xfrm>
-            <a:off x="711101" y="1279773"/>
-            <a:ext cx="5570169" cy="209550"/>
-          </a:xfrm>
-          <a:prstGeom prst="rect">
-            <a:avLst/>
-          </a:prstGeom>
-          <a:noFill/>
-          <a:ln/>
-        </p:spPr>
-        <p:txBody>
-          <a:bodyPr wrap="square" lIns="0" tIns="0" rIns="0" bIns="0" rtlCol="0" anchor="t"/>
-          <a:lstStyle/>
-          <a:p>
-            <a:pPr algn="l" indent="0" marL="0">
-              <a:buNone/>
-            </a:pPr>
-            <a:r>
-              <a:rPr lang="en-US" sz="1450" b="1" dirty="0">
-                <a:solidFill>
-                  <a:srgbClr val="1A7F37"/>
-                </a:solidFill>
-                <a:latin typeface="Arial" pitchFamily="34" charset="0"/>
-                <a:ea typeface="Arial" pitchFamily="34" charset="-122"/>
-                <a:cs typeface="Arial" pitchFamily="34" charset="-120"/>
-              </a:rPr>
-              <a:t>SECTION 3 OF 3</a:t>
-            </a:r>
-            <a:endParaRPr lang="en-US" sz="1450" dirty="0"/>
-          </a:p>
-        </p:txBody>
-      </p:sp>
-      <p:sp>
-        <p:nvSpPr>
-          <p:cNvPr id="10" name="Text 6"/>
-          <p:cNvSpPr/>
-          <p:nvPr/>
-        </p:nvSpPr>
-        <p:spPr>
-          <a:xfrm>
-            <a:off x="711101" y="1590824"/>
-            <a:ext cx="5570169" cy="1168301"/>
+          <p:cNvPr id="6" name="Text 2"/>
+          <p:cNvSpPr/>
+          <p:nvPr/>
+        </p:nvSpPr>
+        <p:spPr>
+          <a:xfrm>
+            <a:off x="507950" y="381000"/>
+            <a:ext cx="8161020" cy="190500"/>
+          </a:xfrm>
+          <a:prstGeom prst="rect">
+            <a:avLst/>
+          </a:prstGeom>
+          <a:noFill/>
+          <a:ln/>
+        </p:spPr>
+        <p:txBody>
+          <a:bodyPr wrap="square" lIns="0" tIns="0" rIns="0" bIns="0" rtlCol="0" anchor="t"/>
+          <a:lstStyle/>
+          <a:p>
+            <a:pPr algn="l" indent="0" marL="0">
+              <a:buNone/>
+            </a:pPr>
+            <a:r>
+              <a:rPr lang="en-US" sz="1250" b="1" dirty="0">
+                <a:solidFill>
+                  <a:srgbClr val="8250DF"/>
+                </a:solidFill>
+                <a:latin typeface="Arial" pitchFamily="34" charset="0"/>
+                <a:ea typeface="Arial" pitchFamily="34" charset="-122"/>
+                <a:cs typeface="Arial" pitchFamily="34" charset="-120"/>
+              </a:rPr>
+              <a:t>SLASH COMMANDS</a:t>
+            </a:r>
+            <a:endParaRPr lang="en-US" sz="1250" dirty="0"/>
+          </a:p>
+        </p:txBody>
+      </p:sp>
+      <p:sp>
+        <p:nvSpPr>
+          <p:cNvPr id="7" name="Text 3"/>
+          <p:cNvSpPr/>
+          <p:nvPr/>
+        </p:nvSpPr>
+        <p:spPr>
+          <a:xfrm>
+            <a:off x="507950" y="622250"/>
+            <a:ext cx="8161020" cy="419100"/>
           </a:xfrm>
           <a:prstGeom prst="rect">
             <a:avLst/>
@@ -13004,15 +13540,15 @@
           <a:p>
             <a:pPr algn="l" indent="0" marL="0">
               <a:lnSpc>
-                <a:spcPts val="4600"/>
+                <a:spcPts val="3300"/>
               </a:lnSpc>
               <a:spcBef>
-                <a:spcPts val="800"/>
+                <a:spcPts val="400"/>
               </a:spcBef>
               <a:buNone/>
             </a:pPr>
             <a:r>
-              <a:rPr lang="en-US" sz="4000" b="1" dirty="0">
+              <a:rPr lang="en-US" sz="2800" b="1" dirty="0">
                 <a:solidFill>
                   <a:srgbClr val="1F2328"/>
                 </a:solidFill>
@@ -13020,32 +13556,81 @@
                 <a:ea typeface="Arial" pitchFamily="34" charset="-122"/>
                 <a:cs typeface="Arial" pitchFamily="34" charset="-120"/>
               </a:rPr>
-              <a:t>From issue to verified fix</a:t>
-            </a:r>
-            <a:endParaRPr lang="en-US" sz="4000" dirty="0"/>
-          </a:p>
-        </p:txBody>
-      </p:sp>
-      <p:sp>
-        <p:nvSpPr>
-          <p:cNvPr id="11" name="Text 7"/>
-          <p:cNvSpPr/>
-          <p:nvPr/>
-        </p:nvSpPr>
-        <p:spPr>
-          <a:xfrm>
-            <a:off x="711101" y="2962275"/>
-            <a:ext cx="609600" cy="63401"/>
+              <a:t>Type / to discover more</a:t>
+            </a:r>
+            <a:endParaRPr lang="en-US" sz="2800" dirty="0"/>
+          </a:p>
+        </p:txBody>
+      </p:sp>
+      <p:sp>
+        <p:nvSpPr>
+          <p:cNvPr id="8" name="Text 4"/>
+          <p:cNvSpPr/>
+          <p:nvPr/>
+        </p:nvSpPr>
+        <p:spPr>
+          <a:xfrm>
+            <a:off x="507950" y="1104751"/>
+            <a:ext cx="8161020" cy="254050"/>
+          </a:xfrm>
+          <a:prstGeom prst="rect">
+            <a:avLst/>
+          </a:prstGeom>
+          <a:noFill/>
+          <a:ln/>
+        </p:spPr>
+        <p:txBody>
+          <a:bodyPr wrap="square" lIns="0" tIns="0" rIns="0" bIns="0" rtlCol="0" anchor="t"/>
+          <a:lstStyle/>
+          <a:p>
+            <a:pPr algn="l" indent="0" marL="0">
+              <a:lnSpc>
+                <a:spcPts val="2000"/>
+              </a:lnSpc>
+              <a:spcBef>
+                <a:spcPts val="500"/>
+              </a:spcBef>
+              <a:buNone/>
+            </a:pPr>
+            <a:r>
+              <a:rPr lang="en-US" sz="1650" dirty="0">
+                <a:solidFill>
+                  <a:srgbClr val="59636E"/>
+                </a:solidFill>
+                <a:latin typeface="Arial" pitchFamily="34" charset="0"/>
+                <a:ea typeface="Arial" pitchFamily="34" charset="-122"/>
+                <a:cs typeface="Arial" pitchFamily="34" charset="-120"/>
+              </a:rPr>
+              <a:t>Commands vary by app version, plugins, skills, and policy.</a:t>
+            </a:r>
+            <a:endParaRPr lang="en-US" sz="1650" dirty="0"/>
+          </a:p>
+        </p:txBody>
+      </p:sp>
+      <p:sp>
+        <p:nvSpPr>
+          <p:cNvPr id="9" name="Text 5"/>
+          <p:cNvSpPr/>
+          <p:nvPr/>
+        </p:nvSpPr>
+        <p:spPr>
+          <a:xfrm>
+            <a:off x="507950" y="2041475"/>
+            <a:ext cx="3936950" cy="2139851"/>
           </a:xfrm>
           <a:prstGeom prst="roundRect">
             <a:avLst>
-              <a:gd name="adj" fmla="val 40063"/>
+              <a:gd name="adj" fmla="val 4748"/>
             </a:avLst>
           </a:prstGeom>
           <a:solidFill>
-            <a:srgbClr val="1A7F37"/>
+            <a:srgbClr val="FFFFFF"/>
           </a:solidFill>
-          <a:ln/>
+          <a:ln w="9525">
+            <a:solidFill>
+              <a:srgbClr val="D1D9E0"/>
+            </a:solidFill>
+          </a:ln>
         </p:spPr>
         <p:txBody>
           <a:bodyPr wrap="square" rtlCol="0" anchor="ctr"/>
@@ -13060,14 +13645,79 @@
       </p:sp>
       <p:sp>
         <p:nvSpPr>
+          <p:cNvPr id="10" name="Shape 6"/>
+          <p:cNvSpPr/>
+          <p:nvPr/>
+        </p:nvSpPr>
+        <p:spPr>
+          <a:xfrm>
+            <a:off x="517475" y="2672804"/>
+            <a:ext cx="3917900" cy="0"/>
+          </a:xfrm>
+          <a:prstGeom prst="line">
+            <a:avLst/>
+          </a:prstGeom>
+          <a:noFill/>
+          <a:ln w="9525">
+            <a:solidFill>
+              <a:srgbClr val="D1D9E0"/>
+            </a:solidFill>
+            <a:prstDash val="solid"/>
+          </a:ln>
+        </p:spPr>
+      </p:sp>
+      <p:sp>
+        <p:nvSpPr>
+          <p:cNvPr id="11" name="Text 7"/>
+          <p:cNvSpPr/>
+          <p:nvPr/>
+        </p:nvSpPr>
+        <p:spPr>
+          <a:xfrm>
+            <a:off x="669875" y="2246412"/>
+            <a:ext cx="1632204" cy="226070"/>
+          </a:xfrm>
+          <a:prstGeom prst="rect">
+            <a:avLst/>
+          </a:prstGeom>
+          <a:noFill/>
+          <a:ln/>
+        </p:spPr>
+        <p:txBody>
+          <a:bodyPr wrap="square" lIns="0" tIns="0" rIns="0" bIns="0" rtlCol="0" anchor="t"/>
+          <a:lstStyle/>
+          <a:p>
+            <a:pPr algn="l" indent="0" marL="0">
+              <a:lnSpc>
+                <a:spcPts val="1630"/>
+              </a:lnSpc>
+              <a:buNone/>
+            </a:pPr>
+            <a:r>
+              <a:rPr lang="en-US" sz="1400" b="1" dirty="0">
+                <a:solidFill>
+                  <a:srgbClr val="0550AE"/>
+                </a:solidFill>
+                <a:latin typeface="Courier New" pitchFamily="34" charset="0"/>
+                <a:ea typeface="Courier New" pitchFamily="34" charset="-122"/>
+                <a:cs typeface="Courier New" pitchFamily="34" charset="-120"/>
+              </a:rPr>
+              <a:t>/chronicle</a:t>
+            </a:r>
+            <a:endParaRPr lang="en-US" sz="1400" dirty="0"/>
+          </a:p>
+        </p:txBody>
+      </p:sp>
+      <p:sp>
+        <p:nvSpPr>
           <p:cNvPr id="12" name="Text 8"/>
           <p:cNvSpPr/>
           <p:nvPr/>
         </p:nvSpPr>
         <p:spPr>
           <a:xfrm>
-            <a:off x="711101" y="3228826"/>
-            <a:ext cx="5570169" cy="634901"/>
+            <a:off x="2574875" y="2152501"/>
+            <a:ext cx="1761693" cy="414040"/>
           </a:xfrm>
           <a:prstGeom prst="rect">
             <a:avLst/>
@@ -13081,12 +13731,12 @@
           <a:p>
             <a:pPr algn="l" indent="0" marL="0">
               <a:lnSpc>
-                <a:spcPts val="2500"/>
+                <a:spcPts val="1630"/>
               </a:lnSpc>
               <a:buNone/>
             </a:pPr>
             <a:r>
-              <a:rPr lang="en-US" sz="1900" dirty="0">
+              <a:rPr lang="en-US" sz="1400" dirty="0">
                 <a:solidFill>
                   <a:srgbClr val="59636E"/>
                 </a:solidFill>
@@ -13094,9 +13744,748 @@
                 <a:ea typeface="Arial" pitchFamily="34" charset="-122"/>
                 <a:cs typeface="Arial" pitchFamily="34" charset="-120"/>
               </a:rPr>
-              <a:t>Start from a practice branch, attach the issue, plan, then verify the fix.</a:t>
-            </a:r>
-            <a:endParaRPr lang="en-US" sz="1900" dirty="0"/>
+              <a:t>Recap your recent work</a:t>
+            </a:r>
+            <a:endParaRPr lang="en-US" sz="1400" dirty="0"/>
+          </a:p>
+        </p:txBody>
+      </p:sp>
+      <p:sp>
+        <p:nvSpPr>
+          <p:cNvPr id="13" name="Shape 9"/>
+          <p:cNvSpPr/>
+          <p:nvPr/>
+        </p:nvSpPr>
+        <p:spPr>
+          <a:xfrm>
+            <a:off x="517475" y="3299371"/>
+            <a:ext cx="3917900" cy="0"/>
+          </a:xfrm>
+          <a:prstGeom prst="line">
+            <a:avLst/>
+          </a:prstGeom>
+          <a:noFill/>
+          <a:ln w="9525">
+            <a:solidFill>
+              <a:srgbClr val="D1D9E0"/>
+            </a:solidFill>
+            <a:prstDash val="solid"/>
+          </a:ln>
+        </p:spPr>
+      </p:sp>
+      <p:sp>
+        <p:nvSpPr>
+          <p:cNvPr id="14" name="Text 10"/>
+          <p:cNvSpPr/>
+          <p:nvPr/>
+        </p:nvSpPr>
+        <p:spPr>
+          <a:xfrm>
+            <a:off x="669875" y="2872978"/>
+            <a:ext cx="1632204" cy="226070"/>
+          </a:xfrm>
+          <a:prstGeom prst="rect">
+            <a:avLst/>
+          </a:prstGeom>
+          <a:noFill/>
+          <a:ln/>
+        </p:spPr>
+        <p:txBody>
+          <a:bodyPr wrap="square" lIns="0" tIns="0" rIns="0" bIns="0" rtlCol="0" anchor="t"/>
+          <a:lstStyle/>
+          <a:p>
+            <a:pPr algn="l" indent="0" marL="0">
+              <a:lnSpc>
+                <a:spcPts val="1630"/>
+              </a:lnSpc>
+              <a:buNone/>
+            </a:pPr>
+            <a:r>
+              <a:rPr lang="en-US" sz="1400" b="1" dirty="0">
+                <a:solidFill>
+                  <a:srgbClr val="0550AE"/>
+                </a:solidFill>
+                <a:latin typeface="Courier New" pitchFamily="34" charset="0"/>
+                <a:ea typeface="Courier New" pitchFamily="34" charset="-122"/>
+                <a:cs typeface="Courier New" pitchFamily="34" charset="-120"/>
+              </a:rPr>
+              <a:t>/context</a:t>
+            </a:r>
+            <a:endParaRPr lang="en-US" sz="1400" dirty="0"/>
+          </a:p>
+        </p:txBody>
+      </p:sp>
+      <p:sp>
+        <p:nvSpPr>
+          <p:cNvPr id="15" name="Text 11"/>
+          <p:cNvSpPr/>
+          <p:nvPr/>
+        </p:nvSpPr>
+        <p:spPr>
+          <a:xfrm>
+            <a:off x="2574875" y="2779068"/>
+            <a:ext cx="1761693" cy="414040"/>
+          </a:xfrm>
+          <a:prstGeom prst="rect">
+            <a:avLst/>
+          </a:prstGeom>
+          <a:noFill/>
+          <a:ln/>
+        </p:spPr>
+        <p:txBody>
+          <a:bodyPr wrap="square" lIns="0" tIns="0" rIns="0" bIns="0" rtlCol="0" anchor="t"/>
+          <a:lstStyle/>
+          <a:p>
+            <a:pPr algn="l" indent="0" marL="0">
+              <a:lnSpc>
+                <a:spcPts val="1630"/>
+              </a:lnSpc>
+              <a:buNone/>
+            </a:pPr>
+            <a:r>
+              <a:rPr lang="en-US" sz="1400" dirty="0">
+                <a:solidFill>
+                  <a:srgbClr val="59636E"/>
+                </a:solidFill>
+                <a:latin typeface="Arial" pitchFamily="34" charset="0"/>
+                <a:ea typeface="Arial" pitchFamily="34" charset="-122"/>
+                <a:cs typeface="Arial" pitchFamily="34" charset="-120"/>
+              </a:rPr>
+              <a:t>Tokens, context, spend</a:t>
+            </a:r>
+            <a:endParaRPr lang="en-US" sz="1400" dirty="0"/>
+          </a:p>
+        </p:txBody>
+      </p:sp>
+      <p:sp>
+        <p:nvSpPr>
+          <p:cNvPr id="16" name="Shape 12"/>
+          <p:cNvSpPr/>
+          <p:nvPr/>
+        </p:nvSpPr>
+        <p:spPr>
+          <a:xfrm>
+            <a:off x="517475" y="3737967"/>
+            <a:ext cx="3917900" cy="0"/>
+          </a:xfrm>
+          <a:prstGeom prst="line">
+            <a:avLst/>
+          </a:prstGeom>
+          <a:noFill/>
+          <a:ln w="9525">
+            <a:solidFill>
+              <a:srgbClr val="D1D9E0"/>
+            </a:solidFill>
+            <a:prstDash val="solid"/>
+          </a:ln>
+        </p:spPr>
+      </p:sp>
+      <p:sp>
+        <p:nvSpPr>
+          <p:cNvPr id="17" name="Text 13"/>
+          <p:cNvSpPr/>
+          <p:nvPr/>
+        </p:nvSpPr>
+        <p:spPr>
+          <a:xfrm>
+            <a:off x="669875" y="3405634"/>
+            <a:ext cx="1632204" cy="226070"/>
+          </a:xfrm>
+          <a:prstGeom prst="rect">
+            <a:avLst/>
+          </a:prstGeom>
+          <a:noFill/>
+          <a:ln/>
+        </p:spPr>
+        <p:txBody>
+          <a:bodyPr wrap="square" lIns="0" tIns="0" rIns="0" bIns="0" rtlCol="0" anchor="t"/>
+          <a:lstStyle/>
+          <a:p>
+            <a:pPr algn="l" indent="0" marL="0">
+              <a:lnSpc>
+                <a:spcPts val="1630"/>
+              </a:lnSpc>
+              <a:buNone/>
+            </a:pPr>
+            <a:r>
+              <a:rPr lang="en-US" sz="1400" b="1" dirty="0">
+                <a:solidFill>
+                  <a:srgbClr val="0550AE"/>
+                </a:solidFill>
+                <a:latin typeface="Courier New" pitchFamily="34" charset="0"/>
+                <a:ea typeface="Courier New" pitchFamily="34" charset="-122"/>
+                <a:cs typeface="Courier New" pitchFamily="34" charset="-120"/>
+              </a:rPr>
+              <a:t>/review</a:t>
+            </a:r>
+            <a:endParaRPr lang="en-US" sz="1400" dirty="0"/>
+          </a:p>
+        </p:txBody>
+      </p:sp>
+      <p:sp>
+        <p:nvSpPr>
+          <p:cNvPr id="18" name="Text 14"/>
+          <p:cNvSpPr/>
+          <p:nvPr/>
+        </p:nvSpPr>
+        <p:spPr>
+          <a:xfrm>
+            <a:off x="2574875" y="3415159"/>
+            <a:ext cx="1761693" cy="207020"/>
+          </a:xfrm>
+          <a:prstGeom prst="rect">
+            <a:avLst/>
+          </a:prstGeom>
+          <a:noFill/>
+          <a:ln/>
+        </p:spPr>
+        <p:txBody>
+          <a:bodyPr wrap="square" lIns="0" tIns="0" rIns="0" bIns="0" rtlCol="0" anchor="t"/>
+          <a:lstStyle/>
+          <a:p>
+            <a:pPr algn="l" indent="0" marL="0">
+              <a:lnSpc>
+                <a:spcPts val="1630"/>
+              </a:lnSpc>
+              <a:buNone/>
+            </a:pPr>
+            <a:r>
+              <a:rPr lang="en-US" sz="1400" dirty="0">
+                <a:solidFill>
+                  <a:srgbClr val="59636E"/>
+                </a:solidFill>
+                <a:latin typeface="Arial" pitchFamily="34" charset="0"/>
+                <a:ea typeface="Arial" pitchFamily="34" charset="-122"/>
+                <a:cs typeface="Arial" pitchFamily="34" charset="-120"/>
+              </a:rPr>
+              <a:t>Review this session</a:t>
+            </a:r>
+            <a:endParaRPr lang="en-US" sz="1400" dirty="0"/>
+          </a:p>
+        </p:txBody>
+      </p:sp>
+      <p:sp>
+        <p:nvSpPr>
+          <p:cNvPr id="19" name="Text 15"/>
+          <p:cNvSpPr/>
+          <p:nvPr/>
+        </p:nvSpPr>
+        <p:spPr>
+          <a:xfrm>
+            <a:off x="669875" y="3844230"/>
+            <a:ext cx="1632204" cy="226070"/>
+          </a:xfrm>
+          <a:prstGeom prst="rect">
+            <a:avLst/>
+          </a:prstGeom>
+          <a:noFill/>
+          <a:ln/>
+        </p:spPr>
+        <p:txBody>
+          <a:bodyPr wrap="square" lIns="0" tIns="0" rIns="0" bIns="0" rtlCol="0" anchor="t"/>
+          <a:lstStyle/>
+          <a:p>
+            <a:pPr algn="l" indent="0" marL="0">
+              <a:lnSpc>
+                <a:spcPts val="1630"/>
+              </a:lnSpc>
+              <a:buNone/>
+            </a:pPr>
+            <a:r>
+              <a:rPr lang="en-US" sz="1400" b="1" dirty="0">
+                <a:solidFill>
+                  <a:srgbClr val="0550AE"/>
+                </a:solidFill>
+                <a:latin typeface="Courier New" pitchFamily="34" charset="0"/>
+                <a:ea typeface="Courier New" pitchFamily="34" charset="-122"/>
+                <a:cs typeface="Courier New" pitchFamily="34" charset="-120"/>
+              </a:rPr>
+              <a:t>/research</a:t>
+            </a:r>
+            <a:endParaRPr lang="en-US" sz="1400" dirty="0"/>
+          </a:p>
+        </p:txBody>
+      </p:sp>
+      <p:sp>
+        <p:nvSpPr>
+          <p:cNvPr id="20" name="Text 16"/>
+          <p:cNvSpPr/>
+          <p:nvPr/>
+        </p:nvSpPr>
+        <p:spPr>
+          <a:xfrm>
+            <a:off x="2574875" y="3853755"/>
+            <a:ext cx="1761693" cy="207020"/>
+          </a:xfrm>
+          <a:prstGeom prst="rect">
+            <a:avLst/>
+          </a:prstGeom>
+          <a:noFill/>
+          <a:ln/>
+        </p:spPr>
+        <p:txBody>
+          <a:bodyPr wrap="square" lIns="0" tIns="0" rIns="0" bIns="0" rtlCol="0" anchor="t"/>
+          <a:lstStyle/>
+          <a:p>
+            <a:pPr algn="l" indent="0" marL="0">
+              <a:lnSpc>
+                <a:spcPts val="1630"/>
+              </a:lnSpc>
+              <a:buNone/>
+            </a:pPr>
+            <a:r>
+              <a:rPr lang="en-US" sz="1400" dirty="0">
+                <a:solidFill>
+                  <a:srgbClr val="59636E"/>
+                </a:solidFill>
+                <a:latin typeface="Arial" pitchFamily="34" charset="0"/>
+                <a:ea typeface="Arial" pitchFamily="34" charset="-122"/>
+                <a:cs typeface="Arial" pitchFamily="34" charset="-120"/>
+              </a:rPr>
+              <a:t>Write a cited report</a:t>
+            </a:r>
+            <a:endParaRPr lang="en-US" sz="1400" dirty="0"/>
+          </a:p>
+        </p:txBody>
+      </p:sp>
+      <p:sp>
+        <p:nvSpPr>
+          <p:cNvPr id="21" name="Text 17"/>
+          <p:cNvSpPr/>
+          <p:nvPr/>
+        </p:nvSpPr>
+        <p:spPr>
+          <a:xfrm>
+            <a:off x="4648051" y="2041475"/>
+            <a:ext cx="3987701" cy="2139851"/>
+          </a:xfrm>
+          <a:prstGeom prst="roundRect">
+            <a:avLst>
+              <a:gd name="adj" fmla="val 4748"/>
+            </a:avLst>
+          </a:prstGeom>
+          <a:solidFill>
+            <a:srgbClr val="FFFFFF"/>
+          </a:solidFill>
+          <a:ln w="9525">
+            <a:solidFill>
+              <a:srgbClr val="D1D9E0"/>
+            </a:solidFill>
+          </a:ln>
+        </p:spPr>
+        <p:txBody>
+          <a:bodyPr wrap="square" rtlCol="0" anchor="ctr"/>
+          <a:lstStyle/>
+          <a:p>
+            <a:pPr indent="0" marL="0">
+              <a:buNone/>
+            </a:pPr>
+            <a:endParaRPr lang="en-US" dirty="0"/>
+          </a:p>
+        </p:txBody>
+      </p:sp>
+      <p:sp>
+        <p:nvSpPr>
+          <p:cNvPr id="22" name="Shape 18"/>
+          <p:cNvSpPr/>
+          <p:nvPr/>
+        </p:nvSpPr>
+        <p:spPr>
+          <a:xfrm>
+            <a:off x="4657576" y="2484834"/>
+            <a:ext cx="3968651" cy="0"/>
+          </a:xfrm>
+          <a:prstGeom prst="line">
+            <a:avLst/>
+          </a:prstGeom>
+          <a:noFill/>
+          <a:ln w="9525">
+            <a:solidFill>
+              <a:srgbClr val="D1D9E0"/>
+            </a:solidFill>
+            <a:prstDash val="solid"/>
+          </a:ln>
+        </p:spPr>
+      </p:sp>
+      <p:sp>
+        <p:nvSpPr>
+          <p:cNvPr id="23" name="Text 19"/>
+          <p:cNvSpPr/>
+          <p:nvPr/>
+        </p:nvSpPr>
+        <p:spPr>
+          <a:xfrm>
+            <a:off x="4809976" y="2152501"/>
+            <a:ext cx="1761693" cy="226070"/>
+          </a:xfrm>
+          <a:prstGeom prst="rect">
+            <a:avLst/>
+          </a:prstGeom>
+          <a:noFill/>
+          <a:ln/>
+        </p:spPr>
+        <p:txBody>
+          <a:bodyPr wrap="square" lIns="0" tIns="0" rIns="0" bIns="0" rtlCol="0" anchor="t"/>
+          <a:lstStyle/>
+          <a:p>
+            <a:pPr algn="l" indent="0" marL="0">
+              <a:lnSpc>
+                <a:spcPts val="1630"/>
+              </a:lnSpc>
+              <a:buNone/>
+            </a:pPr>
+            <a:r>
+              <a:rPr lang="en-US" sz="1400" b="1" dirty="0">
+                <a:solidFill>
+                  <a:srgbClr val="0550AE"/>
+                </a:solidFill>
+                <a:latin typeface="Courier New" pitchFamily="34" charset="0"/>
+                <a:ea typeface="Courier New" pitchFamily="34" charset="-122"/>
+                <a:cs typeface="Courier New" pitchFamily="34" charset="-120"/>
+              </a:rPr>
+              <a:t>/rubber-duck</a:t>
+            </a:r>
+            <a:endParaRPr lang="en-US" sz="1400" dirty="0"/>
+          </a:p>
+        </p:txBody>
+      </p:sp>
+      <p:sp>
+        <p:nvSpPr>
+          <p:cNvPr id="24" name="Text 20"/>
+          <p:cNvSpPr/>
+          <p:nvPr/>
+        </p:nvSpPr>
+        <p:spPr>
+          <a:xfrm>
+            <a:off x="6841927" y="2162026"/>
+            <a:ext cx="1683969" cy="207020"/>
+          </a:xfrm>
+          <a:prstGeom prst="rect">
+            <a:avLst/>
+          </a:prstGeom>
+          <a:noFill/>
+          <a:ln/>
+        </p:spPr>
+        <p:txBody>
+          <a:bodyPr wrap="square" lIns="0" tIns="0" rIns="0" bIns="0" rtlCol="0" anchor="t"/>
+          <a:lstStyle/>
+          <a:p>
+            <a:pPr algn="l" indent="0" marL="0">
+              <a:lnSpc>
+                <a:spcPts val="1630"/>
+              </a:lnSpc>
+              <a:buNone/>
+            </a:pPr>
+            <a:r>
+              <a:rPr lang="en-US" sz="1400" dirty="0">
+                <a:solidFill>
+                  <a:srgbClr val="59636E"/>
+                </a:solidFill>
+                <a:latin typeface="Arial" pitchFamily="34" charset="0"/>
+                <a:ea typeface="Arial" pitchFamily="34" charset="-122"/>
+                <a:cs typeface="Arial" pitchFamily="34" charset="-120"/>
+              </a:rPr>
+              <a:t>Critique a plan or diff</a:t>
+            </a:r>
+            <a:endParaRPr lang="en-US" sz="1400" dirty="0"/>
+          </a:p>
+        </p:txBody>
+      </p:sp>
+      <p:sp>
+        <p:nvSpPr>
+          <p:cNvPr id="25" name="Shape 21"/>
+          <p:cNvSpPr/>
+          <p:nvPr/>
+        </p:nvSpPr>
+        <p:spPr>
+          <a:xfrm>
+            <a:off x="4657576" y="3111401"/>
+            <a:ext cx="3968651" cy="0"/>
+          </a:xfrm>
+          <a:prstGeom prst="line">
+            <a:avLst/>
+          </a:prstGeom>
+          <a:noFill/>
+          <a:ln w="9525">
+            <a:solidFill>
+              <a:srgbClr val="D1D9E0"/>
+            </a:solidFill>
+            <a:prstDash val="solid"/>
+          </a:ln>
+        </p:spPr>
+      </p:sp>
+      <p:sp>
+        <p:nvSpPr>
+          <p:cNvPr id="26" name="Text 22"/>
+          <p:cNvSpPr/>
+          <p:nvPr/>
+        </p:nvSpPr>
+        <p:spPr>
+          <a:xfrm>
+            <a:off x="4809976" y="2685008"/>
+            <a:ext cx="1761693" cy="226070"/>
+          </a:xfrm>
+          <a:prstGeom prst="rect">
+            <a:avLst/>
+          </a:prstGeom>
+          <a:noFill/>
+          <a:ln/>
+        </p:spPr>
+        <p:txBody>
+          <a:bodyPr wrap="square" lIns="0" tIns="0" rIns="0" bIns="0" rtlCol="0" anchor="t"/>
+          <a:lstStyle/>
+          <a:p>
+            <a:pPr algn="l" indent="0" marL="0">
+              <a:lnSpc>
+                <a:spcPts val="1630"/>
+              </a:lnSpc>
+              <a:buNone/>
+            </a:pPr>
+            <a:r>
+              <a:rPr lang="en-US" sz="1400" b="1" dirty="0">
+                <a:solidFill>
+                  <a:srgbClr val="0550AE"/>
+                </a:solidFill>
+                <a:latin typeface="Courier New" pitchFamily="34" charset="0"/>
+                <a:ea typeface="Courier New" pitchFamily="34" charset="-122"/>
+                <a:cs typeface="Courier New" pitchFamily="34" charset="-120"/>
+              </a:rPr>
+              <a:t>/orchestrate</a:t>
+            </a:r>
+            <a:endParaRPr lang="en-US" sz="1400" dirty="0"/>
+          </a:p>
+        </p:txBody>
+      </p:sp>
+      <p:sp>
+        <p:nvSpPr>
+          <p:cNvPr id="27" name="Text 23"/>
+          <p:cNvSpPr/>
+          <p:nvPr/>
+        </p:nvSpPr>
+        <p:spPr>
+          <a:xfrm>
+            <a:off x="6841927" y="2591098"/>
+            <a:ext cx="1683969" cy="414040"/>
+          </a:xfrm>
+          <a:prstGeom prst="rect">
+            <a:avLst/>
+          </a:prstGeom>
+          <a:noFill/>
+          <a:ln/>
+        </p:spPr>
+        <p:txBody>
+          <a:bodyPr wrap="square" lIns="0" tIns="0" rIns="0" bIns="0" rtlCol="0" anchor="t"/>
+          <a:lstStyle/>
+          <a:p>
+            <a:pPr algn="l" indent="0" marL="0">
+              <a:lnSpc>
+                <a:spcPts val="1630"/>
+              </a:lnSpc>
+              <a:buNone/>
+            </a:pPr>
+            <a:r>
+              <a:rPr lang="en-US" sz="1400" dirty="0">
+                <a:solidFill>
+                  <a:srgbClr val="59636E"/>
+                </a:solidFill>
+                <a:latin typeface="Arial" pitchFamily="34" charset="0"/>
+                <a:ea typeface="Arial" pitchFamily="34" charset="-122"/>
+                <a:cs typeface="Arial" pitchFamily="34" charset="-120"/>
+              </a:rPr>
+              <a:t>Delegate to child sessions</a:t>
+            </a:r>
+            <a:endParaRPr lang="en-US" sz="1400" dirty="0"/>
+          </a:p>
+        </p:txBody>
+      </p:sp>
+      <p:sp>
+        <p:nvSpPr>
+          <p:cNvPr id="28" name="Shape 24"/>
+          <p:cNvSpPr/>
+          <p:nvPr/>
+        </p:nvSpPr>
+        <p:spPr>
+          <a:xfrm>
+            <a:off x="4657576" y="3737967"/>
+            <a:ext cx="3968651" cy="0"/>
+          </a:xfrm>
+          <a:prstGeom prst="line">
+            <a:avLst/>
+          </a:prstGeom>
+          <a:noFill/>
+          <a:ln w="9525">
+            <a:solidFill>
+              <a:srgbClr val="D1D9E0"/>
+            </a:solidFill>
+            <a:prstDash val="solid"/>
+          </a:ln>
+        </p:spPr>
+      </p:sp>
+      <p:sp>
+        <p:nvSpPr>
+          <p:cNvPr id="29" name="Text 25"/>
+          <p:cNvSpPr/>
+          <p:nvPr/>
+        </p:nvSpPr>
+        <p:spPr>
+          <a:xfrm>
+            <a:off x="4809976" y="3311575"/>
+            <a:ext cx="1761693" cy="226070"/>
+          </a:xfrm>
+          <a:prstGeom prst="rect">
+            <a:avLst/>
+          </a:prstGeom>
+          <a:noFill/>
+          <a:ln/>
+        </p:spPr>
+        <p:txBody>
+          <a:bodyPr wrap="square" lIns="0" tIns="0" rIns="0" bIns="0" rtlCol="0" anchor="t"/>
+          <a:lstStyle/>
+          <a:p>
+            <a:pPr algn="l" indent="0" marL="0">
+              <a:lnSpc>
+                <a:spcPts val="1630"/>
+              </a:lnSpc>
+              <a:buNone/>
+            </a:pPr>
+            <a:r>
+              <a:rPr lang="en-US" sz="1400" b="1" dirty="0">
+                <a:solidFill>
+                  <a:srgbClr val="0550AE"/>
+                </a:solidFill>
+                <a:latin typeface="Courier New" pitchFamily="34" charset="0"/>
+                <a:ea typeface="Courier New" pitchFamily="34" charset="-122"/>
+                <a:cs typeface="Courier New" pitchFamily="34" charset="-120"/>
+              </a:rPr>
+              <a:t>/agent</a:t>
+            </a:r>
+            <a:endParaRPr lang="en-US" sz="1400" dirty="0"/>
+          </a:p>
+        </p:txBody>
+      </p:sp>
+      <p:sp>
+        <p:nvSpPr>
+          <p:cNvPr id="30" name="Text 26"/>
+          <p:cNvSpPr/>
+          <p:nvPr/>
+        </p:nvSpPr>
+        <p:spPr>
+          <a:xfrm>
+            <a:off x="6841927" y="3217664"/>
+            <a:ext cx="1683969" cy="414040"/>
+          </a:xfrm>
+          <a:prstGeom prst="rect">
+            <a:avLst/>
+          </a:prstGeom>
+          <a:noFill/>
+          <a:ln/>
+        </p:spPr>
+        <p:txBody>
+          <a:bodyPr wrap="square" lIns="0" tIns="0" rIns="0" bIns="0" rtlCol="0" anchor="t"/>
+          <a:lstStyle/>
+          <a:p>
+            <a:pPr algn="l" indent="0" marL="0">
+              <a:lnSpc>
+                <a:spcPts val="1630"/>
+              </a:lnSpc>
+              <a:buNone/>
+            </a:pPr>
+            <a:r>
+              <a:rPr lang="en-US" sz="1400" dirty="0">
+                <a:solidFill>
+                  <a:srgbClr val="59636E"/>
+                </a:solidFill>
+                <a:latin typeface="Arial" pitchFamily="34" charset="0"/>
+                <a:ea typeface="Arial" pitchFamily="34" charset="-122"/>
+                <a:cs typeface="Arial" pitchFamily="34" charset="-120"/>
+              </a:rPr>
+              <a:t>Switch custom agents</a:t>
+            </a:r>
+            <a:endParaRPr lang="en-US" sz="1400" dirty="0"/>
+          </a:p>
+        </p:txBody>
+      </p:sp>
+      <p:sp>
+        <p:nvSpPr>
+          <p:cNvPr id="31" name="Text 27"/>
+          <p:cNvSpPr/>
+          <p:nvPr/>
+        </p:nvSpPr>
+        <p:spPr>
+          <a:xfrm>
+            <a:off x="4809976" y="3844230"/>
+            <a:ext cx="1761693" cy="226070"/>
+          </a:xfrm>
+          <a:prstGeom prst="rect">
+            <a:avLst/>
+          </a:prstGeom>
+          <a:noFill/>
+          <a:ln/>
+        </p:spPr>
+        <p:txBody>
+          <a:bodyPr wrap="square" lIns="0" tIns="0" rIns="0" bIns="0" rtlCol="0" anchor="t"/>
+          <a:lstStyle/>
+          <a:p>
+            <a:pPr algn="l" indent="0" marL="0">
+              <a:lnSpc>
+                <a:spcPts val="1630"/>
+              </a:lnSpc>
+              <a:buNone/>
+            </a:pPr>
+            <a:r>
+              <a:rPr lang="en-US" sz="1400" b="1" dirty="0">
+                <a:solidFill>
+                  <a:srgbClr val="0550AE"/>
+                </a:solidFill>
+                <a:latin typeface="Courier New" pitchFamily="34" charset="0"/>
+                <a:ea typeface="Courier New" pitchFamily="34" charset="-122"/>
+                <a:cs typeface="Courier New" pitchFamily="34" charset="-120"/>
+              </a:rPr>
+              <a:t>/create-canvas</a:t>
+            </a:r>
+            <a:endParaRPr lang="en-US" sz="1400" dirty="0"/>
+          </a:p>
+        </p:txBody>
+      </p:sp>
+      <p:sp>
+        <p:nvSpPr>
+          <p:cNvPr id="32" name="Text 28"/>
+          <p:cNvSpPr/>
+          <p:nvPr/>
+        </p:nvSpPr>
+        <p:spPr>
+          <a:xfrm>
+            <a:off x="6841927" y="3853755"/>
+            <a:ext cx="1683969" cy="207020"/>
+          </a:xfrm>
+          <a:prstGeom prst="rect">
+            <a:avLst/>
+          </a:prstGeom>
+          <a:noFill/>
+          <a:ln/>
+        </p:spPr>
+        <p:txBody>
+          <a:bodyPr wrap="square" lIns="0" tIns="0" rIns="0" bIns="0" rtlCol="0" anchor="t"/>
+          <a:lstStyle/>
+          <a:p>
+            <a:pPr algn="l" indent="0" marL="0">
+              <a:lnSpc>
+                <a:spcPts val="1630"/>
+              </a:lnSpc>
+              <a:buNone/>
+            </a:pPr>
+            <a:r>
+              <a:rPr lang="en-US" sz="1400" dirty="0">
+                <a:solidFill>
+                  <a:srgbClr val="59636E"/>
+                </a:solidFill>
+                <a:latin typeface="Arial" pitchFamily="34" charset="0"/>
+                <a:ea typeface="Arial" pitchFamily="34" charset="-122"/>
+                <a:cs typeface="Arial" pitchFamily="34" charset="-120"/>
+              </a:rPr>
+              <a:t>Build a shared board</a:t>
+            </a:r>
+            <a:endParaRPr lang="en-US" sz="1400" dirty="0"/>
           </a:p>
         </p:txBody>
       </p:sp>

--- a/slides/02-sessions-worktrees-context.pptx
+++ b/slides/02-sessions-worktrees-context.pptx
@@ -2123,7 +2123,13 @@
       </p:grpSpPr>
       <p:pic>
         <p:nvPicPr>
-          <p:cNvPr id="2" name="Image 0" descr="/Users/danwahlin/.copilot/session-state/56a7a0da-def8-48d4-b5e8-0ac3878cb8dd/files/slides-build/img/grad-title-pattern.jpg">    </p:cNvPr>
+          <p:cNvPr id="2" name="Image 0" descr="">
+            <a:extLst>
+              <a:ext uri="{C183D7F6-B498-43B3-948B-1728B52AA6E4}">
+                <adec:decorative xmlns:adec="http://schemas.microsoft.com/office/drawing/2017/decorative" val="1"/>
+              </a:ext>
+            </a:extLst>
+          </p:cNvPr>
           <p:cNvPicPr>
             <a:picLocks noChangeAspect="1"/>
           </p:cNvPicPr>
@@ -2147,7 +2153,7 @@
       </p:pic>
       <p:pic>
         <p:nvPicPr>
-          <p:cNvPr id="3" name="Image 1" descr="/Users/danwahlin/.copilot/session-state/56a7a0da-def8-48d4-b5e8-0ac3878cb8dd/files/slides-build/icons/FaGithub-1F2328.png">
+          <p:cNvPr id="3" name="Image 1" descr="Open this chapter on GitHub">
             <a:hlinkClick r:id="rId3" tooltip="https://github.com/github/copilot-app-for-beginners/tree/main/02-sessions-worktrees-context"/>
           </p:cNvPr>
           <p:cNvPicPr>
@@ -2331,7 +2337,13 @@
       </p:sp>
       <p:pic>
         <p:nvPicPr>
-          <p:cNvPr id="8" name="Image 2" descr="/Users/danwahlin/.copilot/session-state/56a7a0da-def8-48d4-b5e8-0ac3878cb8dd/files/slides-build/icons/FaGithub-0969DA.png">    </p:cNvPr>
+          <p:cNvPr id="8" name="Image 2" descr="">
+            <a:extLst>
+              <a:ext uri="{C183D7F6-B498-43B3-948B-1728B52AA6E4}">
+                <adec:decorative xmlns:adec="http://schemas.microsoft.com/office/drawing/2017/decorative" val="1"/>
+              </a:ext>
+            </a:extLst>
+          </p:cNvPr>
           <p:cNvPicPr>
             <a:picLocks noChangeAspect="1"/>
           </p:cNvPicPr>
@@ -2535,7 +2547,13 @@
       </p:sp>
       <p:pic>
         <p:nvPicPr>
-          <p:cNvPr id="5" name="Image 0" descr="/Users/danwahlin/.copilot/session-state/56a7a0da-def8-48d4-b5e8-0ac3878cb8dd/files/slides-build/img/grad-corner-pattern.png">    </p:cNvPr>
+          <p:cNvPr id="5" name="Image 0" descr="">
+            <a:extLst>
+              <a:ext uri="{C183D7F6-B498-43B3-948B-1728B52AA6E4}">
+                <adec:decorative xmlns:adec="http://schemas.microsoft.com/office/drawing/2017/decorative" val="1"/>
+              </a:ext>
+            </a:extLst>
+          </p:cNvPr>
           <p:cNvPicPr>
             <a:picLocks noChangeAspect="1"/>
           </p:cNvPicPr>
@@ -2630,7 +2648,7 @@
       </p:sp>
       <p:pic>
         <p:nvPicPr>
-          <p:cNvPr id="8" name="Image 1" descr="/Users/danwahlin/.copilot/session-state/56a7a0da-def8-48d4-b5e8-0ac3878cb8dd/files/slides-build/icons/FaGithub-1F2328.png">
+          <p:cNvPr id="8" name="Image 1" descr="Open this chapter on GitHub">
             <a:hlinkClick r:id="rId3" tooltip="https://github.com/github/copilot-app-for-beginners/tree/main/02-sessions-worktrees-context"/>
           </p:cNvPr>
           <p:cNvPicPr>
@@ -2846,7 +2864,13 @@
       </p:grpSpPr>
       <p:pic>
         <p:nvPicPr>
-          <p:cNvPr id="2" name="Image 0" descr="/Users/danwahlin/.copilot/session-state/56a7a0da-def8-48d4-b5e8-0ac3878cb8dd/files/slides-build/img/grad-corner-pattern.png">    </p:cNvPr>
+          <p:cNvPr id="2" name="Image 0" descr="">
+            <a:extLst>
+              <a:ext uri="{C183D7F6-B498-43B3-948B-1728B52AA6E4}">
+                <adec:decorative xmlns:adec="http://schemas.microsoft.com/office/drawing/2017/decorative" val="1"/>
+              </a:ext>
+            </a:extLst>
+          </p:cNvPr>
           <p:cNvPicPr>
             <a:picLocks noChangeAspect="1"/>
           </p:cNvPicPr>
@@ -2941,7 +2965,7 @@
       </p:sp>
       <p:pic>
         <p:nvPicPr>
-          <p:cNvPr id="5" name="Image 1" descr="/Users/danwahlin/.copilot/session-state/56a7a0da-def8-48d4-b5e8-0ac3878cb8dd/files/slides-build/icons/FaGithub-1F2328.png">
+          <p:cNvPr id="5" name="Image 1" descr="Open this chapter on GitHub">
             <a:hlinkClick r:id="rId3" tooltip="https://github.com/github/copilot-app-for-beginners/tree/main/02-sessions-worktrees-context"/>
           </p:cNvPr>
           <p:cNvPicPr>
@@ -3763,7 +3787,7 @@
       </p:sp>
       <p:pic>
         <p:nvPicPr>
-          <p:cNvPr id="22" name="Image 2" descr="/Users/danwahlin/.copilot/session-state/56a7a0da-def8-48d4-b5e8-0ac3878cb8dd/files/slides-build/img/02-review-plan-crop.png">    </p:cNvPr>
+          <p:cNvPr id="22" name="Image 2" descr="Review plan box with the options Approve and implement this plan, Exit plan mode and I will prompt myself, and Suggest changes to the plan, next to the plan in the Plan tab">    </p:cNvPr>
           <p:cNvPicPr>
             <a:picLocks noChangeAspect="1"/>
           </p:cNvPicPr>
@@ -3819,7 +3843,13 @@
       </p:grpSpPr>
       <p:pic>
         <p:nvPicPr>
-          <p:cNvPr id="2" name="Image 0" descr="/Users/danwahlin/.copilot/session-state/56a7a0da-def8-48d4-b5e8-0ac3878cb8dd/files/slides-build/img/grad-corner-pattern.png">    </p:cNvPr>
+          <p:cNvPr id="2" name="Image 0" descr="">
+            <a:extLst>
+              <a:ext uri="{C183D7F6-B498-43B3-948B-1728B52AA6E4}">
+                <adec:decorative xmlns:adec="http://schemas.microsoft.com/office/drawing/2017/decorative" val="1"/>
+              </a:ext>
+            </a:extLst>
+          </p:cNvPr>
           <p:cNvPicPr>
             <a:picLocks noChangeAspect="1"/>
           </p:cNvPicPr>
@@ -3914,7 +3944,7 @@
       </p:sp>
       <p:pic>
         <p:nvPicPr>
-          <p:cNvPr id="5" name="Image 1" descr="/Users/danwahlin/.copilot/session-state/56a7a0da-def8-48d4-b5e8-0ac3878cb8dd/files/slides-build/icons/FaGithub-1F2328.png">
+          <p:cNvPr id="5" name="Image 1" descr="Open this chapter on GitHub">
             <a:hlinkClick r:id="rId3" tooltip="https://github.com/github/copilot-app-for-beginners/tree/main/02-sessions-worktrees-context"/>
           </p:cNvPr>
           <p:cNvPicPr>
@@ -4151,7 +4181,7 @@
       </p:sp>
       <p:pic>
         <p:nvPicPr>
-          <p:cNvPr id="11" name="Image 2" descr="/Users/danwahlin/.copilot/session-state/56a7a0da-def8-48d4-b5e8-0ac3878cb8dd/files/slides-build/img/02-empty-state-crop.png">    </p:cNvPr>
+          <p:cNvPr id="11" name="Image 2" descr="Book App preview in the browser tab with the search zzzz-no-match, 0 books shown, and the empty state No results, Try again">    </p:cNvPr>
           <p:cNvPicPr>
             <a:picLocks noChangeAspect="1"/>
           </p:cNvPicPr>
@@ -4740,7 +4770,13 @@
       </p:grpSpPr>
       <p:pic>
         <p:nvPicPr>
-          <p:cNvPr id="2" name="Image 0" descr="/Users/danwahlin/.copilot/session-state/56a7a0da-def8-48d4-b5e8-0ac3878cb8dd/files/slides-build/img/grad-corner-pattern.png">    </p:cNvPr>
+          <p:cNvPr id="2" name="Image 0" descr="">
+            <a:extLst>
+              <a:ext uri="{C183D7F6-B498-43B3-948B-1728B52AA6E4}">
+                <adec:decorative xmlns:adec="http://schemas.microsoft.com/office/drawing/2017/decorative" val="1"/>
+              </a:ext>
+            </a:extLst>
+          </p:cNvPr>
           <p:cNvPicPr>
             <a:picLocks noChangeAspect="1"/>
           </p:cNvPicPr>
@@ -4835,7 +4871,7 @@
       </p:sp>
       <p:pic>
         <p:nvPicPr>
-          <p:cNvPr id="5" name="Image 1" descr="/Users/danwahlin/.copilot/session-state/56a7a0da-def8-48d4-b5e8-0ac3878cb8dd/files/slides-build/icons/FaGithub-1F2328.png">
+          <p:cNvPr id="5" name="Image 1" descr="Open this chapter on GitHub">
             <a:hlinkClick r:id="rId3" tooltip="https://github.com/github/copilot-app-for-beginners/tree/main/02-sessions-worktrees-context"/>
           </p:cNvPr>
           <p:cNvPicPr>
@@ -4988,7 +5024,7 @@
       </p:sp>
       <p:pic>
         <p:nvPicPr>
-          <p:cNvPr id="9" name="Image 2" descr="/Users/danwahlin/.copilot/session-state/56a7a0da-def8-48d4-b5e8-0ac3878cb8dd/files/slides-build/img/02-chronicle-crop.png">    </p:cNvPr>
+          <p:cNvPr id="9" name="Image 2" descr="Chronicle standup report that lists this session's empty-state copy work under Done">    </p:cNvPr>
           <p:cNvPicPr>
             <a:picLocks noChangeAspect="1"/>
           </p:cNvPicPr>
@@ -5114,7 +5150,7 @@
       </p:sp>
       <p:pic>
         <p:nvPicPr>
-          <p:cNvPr id="12" name="Image 3" descr="/Users/danwahlin/.copilot/session-state/56a7a0da-def8-48d4-b5e8-0ac3878cb8dd/files/slides-build/img/02-context-crop.png">    </p:cNvPr>
+          <p:cNvPr id="12" name="Image 3" descr="Session menu with the session details, token totals, the expanded Context breakdown, and session spend">    </p:cNvPr>
           <p:cNvPicPr>
             <a:picLocks noChangeAspect="1"/>
           </p:cNvPicPr>
@@ -5229,7 +5265,13 @@
       </p:grpSpPr>
       <p:pic>
         <p:nvPicPr>
-          <p:cNvPr id="2" name="Image 0" descr="/Users/danwahlin/.copilot/session-state/56a7a0da-def8-48d4-b5e8-0ac3878cb8dd/files/slides-build/img/grad-corner-pattern.png">    </p:cNvPr>
+          <p:cNvPr id="2" name="Image 0" descr="">
+            <a:extLst>
+              <a:ext uri="{C183D7F6-B498-43B3-948B-1728B52AA6E4}">
+                <adec:decorative xmlns:adec="http://schemas.microsoft.com/office/drawing/2017/decorative" val="1"/>
+              </a:ext>
+            </a:extLst>
+          </p:cNvPr>
           <p:cNvPicPr>
             <a:picLocks noChangeAspect="1"/>
           </p:cNvPicPr>
@@ -5324,7 +5366,7 @@
       </p:sp>
       <p:pic>
         <p:nvPicPr>
-          <p:cNvPr id="5" name="Image 1" descr="/Users/danwahlin/.copilot/session-state/56a7a0da-def8-48d4-b5e8-0ac3878cb8dd/files/slides-build/icons/FaGithub-1F2328.png">
+          <p:cNvPr id="5" name="Image 1" descr="Open this chapter on GitHub">
             <a:hlinkClick r:id="rId3" tooltip="https://github.com/github/copilot-app-for-beginners/tree/main/02-sessions-worktrees-context"/>
           </p:cNvPr>
           <p:cNvPicPr>
@@ -6431,7 +6473,13 @@
       </p:sp>
       <p:pic>
         <p:nvPicPr>
-          <p:cNvPr id="31" name="Image 2" descr="/Users/danwahlin/.copilot/session-state/56a7a0da-def8-48d4-b5e8-0ac3878cb8dd/files/slides-build/icons/GoGoal-BC4C00.png">    </p:cNvPr>
+          <p:cNvPr id="31" name="Image 2" descr="">
+            <a:extLst>
+              <a:ext uri="{C183D7F6-B498-43B3-948B-1728B52AA6E4}">
+                <adec:decorative xmlns:adec="http://schemas.microsoft.com/office/drawing/2017/decorative" val="1"/>
+              </a:ext>
+            </a:extLst>
+          </p:cNvPr>
           <p:cNvPicPr>
             <a:picLocks noChangeAspect="1"/>
           </p:cNvPicPr>
@@ -6605,7 +6653,13 @@
       </p:grpSpPr>
       <p:pic>
         <p:nvPicPr>
-          <p:cNvPr id="2" name="Image 0" descr="/Users/danwahlin/.copilot/session-state/56a7a0da-def8-48d4-b5e8-0ac3878cb8dd/files/slides-build/img/grad-corner-pattern.png">    </p:cNvPr>
+          <p:cNvPr id="2" name="Image 0" descr="">
+            <a:extLst>
+              <a:ext uri="{C183D7F6-B498-43B3-948B-1728B52AA6E4}">
+                <adec:decorative xmlns:adec="http://schemas.microsoft.com/office/drawing/2017/decorative" val="1"/>
+              </a:ext>
+            </a:extLst>
+          </p:cNvPr>
           <p:cNvPicPr>
             <a:picLocks noChangeAspect="1"/>
           </p:cNvPicPr>
@@ -6700,7 +6754,7 @@
       </p:sp>
       <p:pic>
         <p:nvPicPr>
-          <p:cNvPr id="5" name="Image 1" descr="/Users/danwahlin/.copilot/session-state/56a7a0da-def8-48d4-b5e8-0ac3878cb8dd/files/slides-build/icons/FaGithub-1F2328.png">
+          <p:cNvPr id="5" name="Image 1" descr="Open this chapter on GitHub">
             <a:hlinkClick r:id="rId3" tooltip="https://github.com/github/copilot-app-for-beginners/tree/main/02-sessions-worktrees-context"/>
           </p:cNvPr>
           <p:cNvPicPr>
@@ -7576,7 +7630,13 @@
       </p:sp>
       <p:pic>
         <p:nvPicPr>
-          <p:cNvPr id="26" name="Image 2" descr="/Users/danwahlin/.copilot/session-state/56a7a0da-def8-48d4-b5e8-0ac3878cb8dd/files/slides-build/icons/FaGithub-0969DA.png">    </p:cNvPr>
+          <p:cNvPr id="26" name="Image 2" descr="">
+            <a:extLst>
+              <a:ext uri="{C183D7F6-B498-43B3-948B-1728B52AA6E4}">
+                <adec:decorative xmlns:adec="http://schemas.microsoft.com/office/drawing/2017/decorative" val="1"/>
+              </a:ext>
+            </a:extLst>
+          </p:cNvPr>
           <p:cNvPicPr>
             <a:picLocks noChangeAspect="1"/>
           </p:cNvPicPr>
@@ -7802,7 +7862,13 @@
       </p:grpSpPr>
       <p:pic>
         <p:nvPicPr>
-          <p:cNvPr id="2" name="Image 0" descr="/Users/danwahlin/.copilot/session-state/56a7a0da-def8-48d4-b5e8-0ac3878cb8dd/files/slides-build/img/grad-corner-pattern.png">    </p:cNvPr>
+          <p:cNvPr id="2" name="Image 0" descr="">
+            <a:extLst>
+              <a:ext uri="{C183D7F6-B498-43B3-948B-1728B52AA6E4}">
+                <adec:decorative xmlns:adec="http://schemas.microsoft.com/office/drawing/2017/decorative" val="1"/>
+              </a:ext>
+            </a:extLst>
+          </p:cNvPr>
           <p:cNvPicPr>
             <a:picLocks noChangeAspect="1"/>
           </p:cNvPicPr>
@@ -7897,7 +7963,7 @@
       </p:sp>
       <p:pic>
         <p:nvPicPr>
-          <p:cNvPr id="5" name="Image 1" descr="/Users/danwahlin/.copilot/session-state/56a7a0da-def8-48d4-b5e8-0ac3878cb8dd/files/slides-build/icons/FaGithub-1F2328.png">
+          <p:cNvPr id="5" name="Image 1" descr="Open this chapter on GitHub">
             <a:hlinkClick r:id="rId3" tooltip="https://github.com/github/copilot-app-for-beginners/tree/main/02-sessions-worktrees-context"/>
           </p:cNvPr>
           <p:cNvPicPr>
@@ -8873,7 +8939,13 @@
       </p:sp>
       <p:pic>
         <p:nvPicPr>
-          <p:cNvPr id="5" name="Image 0" descr="/Users/danwahlin/.copilot/session-state/56a7a0da-def8-48d4-b5e8-0ac3878cb8dd/files/slides-build/img/grad-corner-pattern.png">    </p:cNvPr>
+          <p:cNvPr id="5" name="Image 0" descr="">
+            <a:extLst>
+              <a:ext uri="{C183D7F6-B498-43B3-948B-1728B52AA6E4}">
+                <adec:decorative xmlns:adec="http://schemas.microsoft.com/office/drawing/2017/decorative" val="1"/>
+              </a:ext>
+            </a:extLst>
+          </p:cNvPr>
           <p:cNvPicPr>
             <a:picLocks noChangeAspect="1"/>
           </p:cNvPicPr>
@@ -8968,7 +9040,7 @@
       </p:sp>
       <p:pic>
         <p:nvPicPr>
-          <p:cNvPr id="8" name="Image 1" descr="/Users/danwahlin/.copilot/session-state/56a7a0da-def8-48d4-b5e8-0ac3878cb8dd/files/slides-build/icons/FaGithub-1F2328.png">
+          <p:cNvPr id="8" name="Image 1" descr="Open this chapter on GitHub">
             <a:hlinkClick r:id="rId3" tooltip="https://github.com/github/copilot-app-for-beginners/tree/main/02-sessions-worktrees-context"/>
           </p:cNvPr>
           <p:cNvPicPr>
@@ -9184,7 +9256,13 @@
       </p:grpSpPr>
       <p:pic>
         <p:nvPicPr>
-          <p:cNvPr id="2" name="Image 0" descr="/Users/danwahlin/.copilot/session-state/56a7a0da-def8-48d4-b5e8-0ac3878cb8dd/files/slides-build/img/grad-corner-pattern.png">    </p:cNvPr>
+          <p:cNvPr id="2" name="Image 0" descr="">
+            <a:extLst>
+              <a:ext uri="{C183D7F6-B498-43B3-948B-1728B52AA6E4}">
+                <adec:decorative xmlns:adec="http://schemas.microsoft.com/office/drawing/2017/decorative" val="1"/>
+              </a:ext>
+            </a:extLst>
+          </p:cNvPr>
           <p:cNvPicPr>
             <a:picLocks noChangeAspect="1"/>
           </p:cNvPicPr>
@@ -9279,7 +9357,7 @@
       </p:sp>
       <p:pic>
         <p:nvPicPr>
-          <p:cNvPr id="5" name="Image 1" descr="/Users/danwahlin/.copilot/session-state/56a7a0da-def8-48d4-b5e8-0ac3878cb8dd/files/slides-build/icons/FaGithub-1F2328.png">
+          <p:cNvPr id="5" name="Image 1" descr="Open this chapter on GitHub">
             <a:hlinkClick r:id="rId3" tooltip="https://github.com/github/copilot-app-for-beginners/tree/main/02-sessions-worktrees-context"/>
           </p:cNvPr>
           <p:cNvPicPr>
@@ -9477,7 +9555,7 @@
       </p:sp>
       <p:pic>
         <p:nvPicPr>
-          <p:cNvPr id="10" name="Image 2" descr="/Users/danwahlin/.copilot/session-state/56a7a0da-def8-48d4-b5e8-0ac3878cb8dd/files/slides-build/img/02-recording-booths-worktrees.jpg">    </p:cNvPr>
+          <p:cNvPr id="10" name="Image 2" descr="Recording studio booths analogy for worktrees and focused context">    </p:cNvPr>
           <p:cNvPicPr>
             <a:picLocks noChangeAspect="1"/>
           </p:cNvPicPr>
@@ -9533,7 +9611,13 @@
       </p:sp>
       <p:pic>
         <p:nvPicPr>
-          <p:cNvPr id="12" name="Image 3" descr="/Users/danwahlin/.copilot/session-state/56a7a0da-def8-48d4-b5e8-0ac3878cb8dd/files/slides-build/icons/GoRepo-0969DA.png">    </p:cNvPr>
+          <p:cNvPr id="12" name="Image 3" descr="">
+            <a:extLst>
+              <a:ext uri="{C183D7F6-B498-43B3-948B-1728B52AA6E4}">
+                <adec:decorative xmlns:adec="http://schemas.microsoft.com/office/drawing/2017/decorative" val="1"/>
+              </a:ext>
+            </a:extLst>
+          </p:cNvPr>
           <p:cNvPicPr>
             <a:picLocks noChangeAspect="1"/>
           </p:cNvPicPr>
@@ -9670,7 +9754,13 @@
       </p:sp>
       <p:pic>
         <p:nvPicPr>
-          <p:cNvPr id="16" name="Image 4" descr="/Users/danwahlin/.copilot/session-state/56a7a0da-def8-48d4-b5e8-0ac3878cb8dd/files/slides-build/icons/GoGitBranch-8250DF.png">    </p:cNvPr>
+          <p:cNvPr id="16" name="Image 4" descr="">
+            <a:extLst>
+              <a:ext uri="{C183D7F6-B498-43B3-948B-1728B52AA6E4}">
+                <adec:decorative xmlns:adec="http://schemas.microsoft.com/office/drawing/2017/decorative" val="1"/>
+              </a:ext>
+            </a:extLst>
+          </p:cNvPr>
           <p:cNvPicPr>
             <a:picLocks noChangeAspect="1"/>
           </p:cNvPicPr>
@@ -9807,7 +9897,13 @@
       </p:sp>
       <p:pic>
         <p:nvPicPr>
-          <p:cNvPr id="20" name="Image 5" descr="/Users/danwahlin/.copilot/session-state/56a7a0da-def8-48d4-b5e8-0ac3878cb8dd/files/slides-build/icons/GoGitMerge-1A7F37.png">    </p:cNvPr>
+          <p:cNvPr id="20" name="Image 5" descr="">
+            <a:extLst>
+              <a:ext uri="{C183D7F6-B498-43B3-948B-1728B52AA6E4}">
+                <adec:decorative xmlns:adec="http://schemas.microsoft.com/office/drawing/2017/decorative" val="1"/>
+              </a:ext>
+            </a:extLst>
+          </p:cNvPr>
           <p:cNvPicPr>
             <a:picLocks noChangeAspect="1"/>
           </p:cNvPicPr>
@@ -9944,7 +10040,13 @@
       </p:grpSpPr>
       <p:pic>
         <p:nvPicPr>
-          <p:cNvPr id="2" name="Image 0" descr="/Users/danwahlin/.copilot/session-state/56a7a0da-def8-48d4-b5e8-0ac3878cb8dd/files/slides-build/img/grad-corner-pattern.png">    </p:cNvPr>
+          <p:cNvPr id="2" name="Image 0" descr="">
+            <a:extLst>
+              <a:ext uri="{C183D7F6-B498-43B3-948B-1728B52AA6E4}">
+                <adec:decorative xmlns:adec="http://schemas.microsoft.com/office/drawing/2017/decorative" val="1"/>
+              </a:ext>
+            </a:extLst>
+          </p:cNvPr>
           <p:cNvPicPr>
             <a:picLocks noChangeAspect="1"/>
           </p:cNvPicPr>
@@ -10039,7 +10141,7 @@
       </p:sp>
       <p:pic>
         <p:nvPicPr>
-          <p:cNvPr id="5" name="Image 1" descr="/Users/danwahlin/.copilot/session-state/56a7a0da-def8-48d4-b5e8-0ac3878cb8dd/files/slides-build/icons/FaGithub-1F2328.png">
+          <p:cNvPr id="5" name="Image 1" descr="Open this chapter on GitHub">
             <a:hlinkClick r:id="rId3" tooltip="https://github.com/github/copilot-app-for-beginners/tree/main/02-sessions-worktrees-context"/>
           </p:cNvPr>
           <p:cNvPicPr>
@@ -10237,7 +10339,7 @@
       </p:sp>
       <p:pic>
         <p:nvPicPr>
-          <p:cNvPr id="10" name="Image 2" descr="/Users/danwahlin/.copilot/session-state/56a7a0da-def8-48d4-b5e8-0ac3878cb8dd/files/slides-build/img/02-one-repo-many-worktrees.jpg">    </p:cNvPr>
+          <p:cNvPr id="10" name="Image 2" descr="One repository with many safe worktrees">    </p:cNvPr>
           <p:cNvPicPr>
             <a:picLocks noChangeAspect="1"/>
           </p:cNvPicPr>
@@ -10764,7 +10866,13 @@
       </p:grpSpPr>
       <p:pic>
         <p:nvPicPr>
-          <p:cNvPr id="2" name="Image 0" descr="/Users/danwahlin/.copilot/session-state/56a7a0da-def8-48d4-b5e8-0ac3878cb8dd/files/slides-build/img/grad-corner-pattern.png">    </p:cNvPr>
+          <p:cNvPr id="2" name="Image 0" descr="">
+            <a:extLst>
+              <a:ext uri="{C183D7F6-B498-43B3-948B-1728B52AA6E4}">
+                <adec:decorative xmlns:adec="http://schemas.microsoft.com/office/drawing/2017/decorative" val="1"/>
+              </a:ext>
+            </a:extLst>
+          </p:cNvPr>
           <p:cNvPicPr>
             <a:picLocks noChangeAspect="1"/>
           </p:cNvPicPr>
@@ -10859,7 +10967,7 @@
       </p:sp>
       <p:pic>
         <p:nvPicPr>
-          <p:cNvPr id="5" name="Image 1" descr="/Users/danwahlin/.copilot/session-state/56a7a0da-def8-48d4-b5e8-0ac3878cb8dd/files/slides-build/icons/FaGithub-1F2328.png">
+          <p:cNvPr id="5" name="Image 1" descr="Open this chapter on GitHub">
             <a:hlinkClick r:id="rId3" tooltip="https://github.com/github/copilot-app-for-beginners/tree/main/02-sessions-worktrees-context"/>
           </p:cNvPr>
           <p:cNvPicPr>
@@ -11057,7 +11165,7 @@
       </p:sp>
       <p:pic>
         <p:nvPicPr>
-          <p:cNvPr id="10" name="Image 2" descr="/Users/danwahlin/.copilot/session-state/56a7a0da-def8-48d4-b5e8-0ac3878cb8dd/files/slides-build/img/02-where-crop.png">    </p:cNvPr>
+          <p:cNvPr id="10" name="Image 2" descr="Where to work menu in the GitHub Copilot app showing New worktree, Current checkout, Cloud, and Base branch">    </p:cNvPr>
           <p:cNvPicPr>
             <a:picLocks noChangeAspect="1"/>
           </p:cNvPicPr>
@@ -11113,7 +11221,13 @@
       </p:sp>
       <p:pic>
         <p:nvPicPr>
-          <p:cNvPr id="12" name="Image 3" descr="/Users/danwahlin/.copilot/session-state/56a7a0da-def8-48d4-b5e8-0ac3878cb8dd/files/slides-build/icons/GoGitBranch-1A7F37.png">    </p:cNvPr>
+          <p:cNvPr id="12" name="Image 3" descr="">
+            <a:extLst>
+              <a:ext uri="{C183D7F6-B498-43B3-948B-1728B52AA6E4}">
+                <adec:decorative xmlns:adec="http://schemas.microsoft.com/office/drawing/2017/decorative" val="1"/>
+              </a:ext>
+            </a:extLst>
+          </p:cNvPr>
           <p:cNvPicPr>
             <a:picLocks noChangeAspect="1"/>
           </p:cNvPicPr>
@@ -11250,7 +11364,13 @@
       </p:sp>
       <p:pic>
         <p:nvPicPr>
-          <p:cNvPr id="16" name="Image 4" descr="/Users/danwahlin/.copilot/session-state/56a7a0da-def8-48d4-b5e8-0ac3878cb8dd/files/slides-build/icons/GoFileDirectory-BC4C00.png">    </p:cNvPr>
+          <p:cNvPr id="16" name="Image 4" descr="">
+            <a:extLst>
+              <a:ext uri="{C183D7F6-B498-43B3-948B-1728B52AA6E4}">
+                <adec:decorative xmlns:adec="http://schemas.microsoft.com/office/drawing/2017/decorative" val="1"/>
+              </a:ext>
+            </a:extLst>
+          </p:cNvPr>
           <p:cNvPicPr>
             <a:picLocks noChangeAspect="1"/>
           </p:cNvPicPr>
@@ -11387,7 +11507,13 @@
       </p:sp>
       <p:pic>
         <p:nvPicPr>
-          <p:cNvPr id="20" name="Image 5" descr="/Users/danwahlin/.copilot/session-state/56a7a0da-def8-48d4-b5e8-0ac3878cb8dd/files/slides-build/icons/GoCloud-0969DA.png">    </p:cNvPr>
+          <p:cNvPr id="20" name="Image 5" descr="">
+            <a:extLst>
+              <a:ext uri="{C183D7F6-B498-43B3-948B-1728B52AA6E4}">
+                <adec:decorative xmlns:adec="http://schemas.microsoft.com/office/drawing/2017/decorative" val="1"/>
+              </a:ext>
+            </a:extLst>
+          </p:cNvPr>
           <p:cNvPicPr>
             <a:picLocks noChangeAspect="1"/>
           </p:cNvPicPr>
@@ -11528,7 +11654,13 @@
       </p:sp>
       <p:pic>
         <p:nvPicPr>
-          <p:cNvPr id="24" name="Image 6" descr="/Users/danwahlin/.copilot/session-state/56a7a0da-def8-48d4-b5e8-0ac3878cb8dd/files/slides-build/icons/GoAlert-9A6700.png">    </p:cNvPr>
+          <p:cNvPr id="24" name="Image 6" descr="">
+            <a:extLst>
+              <a:ext uri="{C183D7F6-B498-43B3-948B-1728B52AA6E4}">
+                <adec:decorative xmlns:adec="http://schemas.microsoft.com/office/drawing/2017/decorative" val="1"/>
+              </a:ext>
+            </a:extLst>
+          </p:cNvPr>
           <p:cNvPicPr>
             <a:picLocks noChangeAspect="1"/>
           </p:cNvPicPr>
@@ -11762,7 +11894,13 @@
       </p:sp>
       <p:pic>
         <p:nvPicPr>
-          <p:cNvPr id="5" name="Image 0" descr="/Users/danwahlin/.copilot/session-state/56a7a0da-def8-48d4-b5e8-0ac3878cb8dd/files/slides-build/img/grad-corner-pattern.png">    </p:cNvPr>
+          <p:cNvPr id="5" name="Image 0" descr="">
+            <a:extLst>
+              <a:ext uri="{C183D7F6-B498-43B3-948B-1728B52AA6E4}">
+                <adec:decorative xmlns:adec="http://schemas.microsoft.com/office/drawing/2017/decorative" val="1"/>
+              </a:ext>
+            </a:extLst>
+          </p:cNvPr>
           <p:cNvPicPr>
             <a:picLocks noChangeAspect="1"/>
           </p:cNvPicPr>
@@ -11857,7 +11995,7 @@
       </p:sp>
       <p:pic>
         <p:nvPicPr>
-          <p:cNvPr id="8" name="Image 1" descr="/Users/danwahlin/.copilot/session-state/56a7a0da-def8-48d4-b5e8-0ac3878cb8dd/files/slides-build/icons/FaGithub-1F2328.png">
+          <p:cNvPr id="8" name="Image 1" descr="Open this chapter on GitHub">
             <a:hlinkClick r:id="rId3" tooltip="https://github.com/github/copilot-app-for-beginners/tree/main/02-sessions-worktrees-context"/>
           </p:cNvPr>
           <p:cNvPicPr>
@@ -12073,7 +12211,13 @@
       </p:grpSpPr>
       <p:pic>
         <p:nvPicPr>
-          <p:cNvPr id="2" name="Image 0" descr="/Users/danwahlin/.copilot/session-state/56a7a0da-def8-48d4-b5e8-0ac3878cb8dd/files/slides-build/img/grad-corner-pattern.png">    </p:cNvPr>
+          <p:cNvPr id="2" name="Image 0" descr="">
+            <a:extLst>
+              <a:ext uri="{C183D7F6-B498-43B3-948B-1728B52AA6E4}">
+                <adec:decorative xmlns:adec="http://schemas.microsoft.com/office/drawing/2017/decorative" val="1"/>
+              </a:ext>
+            </a:extLst>
+          </p:cNvPr>
           <p:cNvPicPr>
             <a:picLocks noChangeAspect="1"/>
           </p:cNvPicPr>
@@ -12168,7 +12312,7 @@
       </p:sp>
       <p:pic>
         <p:nvPicPr>
-          <p:cNvPr id="5" name="Image 1" descr="/Users/danwahlin/.copilot/session-state/56a7a0da-def8-48d4-b5e8-0ac3878cb8dd/files/slides-build/icons/FaGithub-1F2328.png">
+          <p:cNvPr id="5" name="Image 1" descr="Open this chapter on GitHub">
             <a:hlinkClick r:id="rId3" tooltip="https://github.com/github/copilot-app-for-beginners/tree/main/02-sessions-worktrees-context"/>
           </p:cNvPr>
           <p:cNvPicPr>
@@ -13227,7 +13371,13 @@
       </p:sp>
       <p:pic>
         <p:nvPicPr>
-          <p:cNvPr id="34" name="Image 2" descr="/Users/danwahlin/.copilot/session-state/56a7a0da-def8-48d4-b5e8-0ac3878cb8dd/files/slides-build/icons/GoUpload-0969DA.png">    </p:cNvPr>
+          <p:cNvPr id="34" name="Image 2" descr="">
+            <a:extLst>
+              <a:ext uri="{C183D7F6-B498-43B3-948B-1728B52AA6E4}">
+                <adec:decorative xmlns:adec="http://schemas.microsoft.com/office/drawing/2017/decorative" val="1"/>
+              </a:ext>
+            </a:extLst>
+          </p:cNvPr>
           <p:cNvPicPr>
             <a:picLocks noChangeAspect="1"/>
           </p:cNvPicPr>
@@ -13359,7 +13509,13 @@
       </p:grpSpPr>
       <p:pic>
         <p:nvPicPr>
-          <p:cNvPr id="2" name="Image 0" descr="/Users/danwahlin/.copilot/session-state/56a7a0da-def8-48d4-b5e8-0ac3878cb8dd/files/slides-build/img/grad-corner-pattern.png">    </p:cNvPr>
+          <p:cNvPr id="2" name="Image 0" descr="">
+            <a:extLst>
+              <a:ext uri="{C183D7F6-B498-43B3-948B-1728B52AA6E4}">
+                <adec:decorative xmlns:adec="http://schemas.microsoft.com/office/drawing/2017/decorative" val="1"/>
+              </a:ext>
+            </a:extLst>
+          </p:cNvPr>
           <p:cNvPicPr>
             <a:picLocks noChangeAspect="1"/>
           </p:cNvPicPr>
@@ -13454,7 +13610,7 @@
       </p:sp>
       <p:pic>
         <p:nvPicPr>
-          <p:cNvPr id="5" name="Image 1" descr="/Users/danwahlin/.copilot/session-state/56a7a0da-def8-48d4-b5e8-0ac3878cb8dd/files/slides-build/icons/FaGithub-1F2328.png">
+          <p:cNvPr id="5" name="Image 1" descr="Open this chapter on GitHub">
             <a:hlinkClick r:id="rId3" tooltip="https://github.com/github/copilot-app-for-beginners/tree/main/02-sessions-worktrees-context"/>
           </p:cNvPr>
           <p:cNvPicPr>
